--- a/Introduccion a la Ingenieria/Clases/Clase 13 - Evaluacion de impacto social y ambiental/Presentacion.pptx
+++ b/Introduccion a la Ingenieria/Clases/Clase 13 - Evaluacion de impacto social y ambiental/Presentacion.pptx
@@ -19,6 +19,16 @@
     <p:sldId id="267" r:id="rId18"/>
     <p:sldId id="268" r:id="rId19"/>
     <p:sldId id="269" r:id="rId20"/>
+    <p:sldId id="270" r:id="rId21"/>
+    <p:sldId id="271" r:id="rId22"/>
+    <p:sldId id="272" r:id="rId23"/>
+    <p:sldId id="273" r:id="rId24"/>
+    <p:sldId id="274" r:id="rId25"/>
+    <p:sldId id="275" r:id="rId26"/>
+    <p:sldId id="276" r:id="rId27"/>
+    <p:sldId id="277" r:id="rId28"/>
+    <p:sldId id="278" r:id="rId29"/>
+    <p:sldId id="279" r:id="rId30"/>
   </p:sldIdLst>
   <p:sldSz cx="12191695" cy="6858000" type="screen4x3"/>
   <p:notesSz cx="6858000" cy="9144000"/>
@@ -4162,7 +4172,7 @@
         <p:spPr>
           <a:xfrm>
             <a:off x="0" y="0"/>
-            <a:ext cx="12191695" cy="1170432"/>
+            <a:ext cx="12191695" cy="960120"/>
           </a:xfrm>
           <a:prstGeom prst="rect">
             <a:avLst/>
@@ -4204,7 +4214,7 @@
         </p:nvSpPr>
         <p:spPr>
           <a:xfrm>
-            <a:off x="0" y="1170432"/>
+            <a:off x="0" y="960120"/>
             <a:ext cx="12191695" cy="41148"/>
           </a:xfrm>
           <a:prstGeom prst="rect">
@@ -4248,7 +4258,7 @@
         <p:spPr>
           <a:xfrm>
             <a:off x="457200" y="164592"/>
-            <a:ext cx="11277295" cy="384048"/>
+            <a:ext cx="11277295" cy="502920"/>
           </a:xfrm>
           <a:prstGeom prst="rect">
             <a:avLst/>
@@ -4268,7 +4278,7 @@
                 </a:solidFill>
                 <a:latin typeface="Calibri"/>
               </a:rPr>
-              <a:t>Taller de hoy: Matriz de impacto social y ambiental</a:t>
+              <a:t>La pregunta de entrada: ¿quién queda peor? (1/2)</a:t>
             </a:r>
           </a:p>
         </p:txBody>
@@ -4281,8 +4291,8 @@
         </p:nvSpPr>
         <p:spPr>
           <a:xfrm>
-            <a:off x="457200" y="566928"/>
-            <a:ext cx="11277295" cy="411480"/>
+            <a:off x="457200" y="1170432"/>
+            <a:ext cx="11277295" cy="5230368"/>
           </a:xfrm>
           <a:prstGeom prst="rect">
             <a:avLst/>
@@ -4295,981 +4305,140 @@
           </a:bodyPr>
           <a:lstStyle/>
           <a:p>
-            <a:r>
-              <a:rPr sz="1400" b="0" i="0">
-                <a:solidFill>
-                  <a:srgbClr val="B8D8EE"/>
-                </a:solidFill>
-                <a:latin typeface="Calibri"/>
-              </a:rPr>
-              <a:t>17 min en equipos · 17 min: afectados, positivos con indicador, negativos, matriz y mitigación · matriz de impacto con indicadores, negativos declarados y mitigaciones</a:t>
-            </a:r>
-          </a:p>
-        </p:txBody>
-      </p:sp>
-      <p:sp>
-        <p:nvSpPr>
-          <p:cNvPr id="6" name="Rounded Rectangle 5"/>
-          <p:cNvSpPr/>
-          <p:nvPr/>
-        </p:nvSpPr>
-        <p:spPr>
-          <a:xfrm>
-            <a:off x="457200" y="1472184"/>
-            <a:ext cx="11277295" cy="566928"/>
-          </a:xfrm>
-          <a:prstGeom prst="roundRect">
-            <a:avLst>
-              <a:gd name="adj" fmla="val 12000"/>
-            </a:avLst>
-          </a:prstGeom>
-          <a:solidFill>
-            <a:srgbClr val="F2F2F2"/>
-          </a:solidFill>
-          <a:ln>
-            <a:noFill/>
-          </a:ln>
-        </p:spPr>
-        <p:style>
-          <a:lnRef idx="1">
-            <a:schemeClr val="accent1"/>
-          </a:lnRef>
-          <a:fillRef idx="3">
-            <a:schemeClr val="accent1"/>
-          </a:fillRef>
-          <a:effectRef idx="2">
-            <a:schemeClr val="accent1"/>
-          </a:effectRef>
-          <a:fontRef idx="minor">
-            <a:schemeClr val="lt1"/>
-          </a:fontRef>
-        </p:style>
-        <p:txBody>
-          <a:bodyPr rtlCol="0" anchor="ctr"/>
-          <a:lstStyle/>
-          <a:p>
-            <a:pPr algn="ctr"/>
-          </a:p>
-        </p:txBody>
-      </p:sp>
-      <p:sp>
-        <p:nvSpPr>
-          <p:cNvPr id="7" name="Rectangle 6"/>
-          <p:cNvSpPr/>
-          <p:nvPr/>
-        </p:nvSpPr>
-        <p:spPr>
-          <a:xfrm>
-            <a:off x="640080" y="1618487"/>
-            <a:ext cx="274320" cy="274320"/>
-          </a:xfrm>
-          <a:prstGeom prst="rect">
-            <a:avLst/>
-          </a:prstGeom>
-          <a:solidFill>
-            <a:srgbClr val="FFFFFF"/>
-          </a:solidFill>
-          <a:ln>
-            <a:solidFill>
-              <a:srgbClr val="333333"/>
-            </a:solidFill>
-          </a:ln>
-        </p:spPr>
-        <p:style>
-          <a:lnRef idx="1">
-            <a:schemeClr val="accent1"/>
-          </a:lnRef>
-          <a:fillRef idx="3">
-            <a:schemeClr val="accent1"/>
-          </a:fillRef>
-          <a:effectRef idx="2">
-            <a:schemeClr val="accent1"/>
-          </a:effectRef>
-          <a:fontRef idx="minor">
-            <a:schemeClr val="lt1"/>
-          </a:fontRef>
-        </p:style>
-        <p:txBody>
-          <a:bodyPr rtlCol="0" anchor="ctr"/>
-          <a:lstStyle/>
-          <a:p>
-            <a:pPr algn="ctr"/>
-          </a:p>
-        </p:txBody>
-      </p:sp>
-      <p:sp>
-        <p:nvSpPr>
-          <p:cNvPr id="8" name="Rectangle 7"/>
-          <p:cNvSpPr/>
-          <p:nvPr/>
-        </p:nvSpPr>
-        <p:spPr>
-          <a:xfrm>
-            <a:off x="640080" y="1618487"/>
-            <a:ext cx="73152" cy="274320"/>
-          </a:xfrm>
-          <a:prstGeom prst="rect">
-            <a:avLst/>
-          </a:prstGeom>
-          <a:solidFill>
-            <a:srgbClr val="269CCB"/>
-          </a:solidFill>
-          <a:ln>
-            <a:noFill/>
-          </a:ln>
-        </p:spPr>
-        <p:style>
-          <a:lnRef idx="1">
-            <a:schemeClr val="accent1"/>
-          </a:lnRef>
-          <a:fillRef idx="3">
-            <a:schemeClr val="accent1"/>
-          </a:fillRef>
-          <a:effectRef idx="2">
-            <a:schemeClr val="accent1"/>
-          </a:effectRef>
-          <a:fontRef idx="minor">
-            <a:schemeClr val="lt1"/>
-          </a:fontRef>
-        </p:style>
-        <p:txBody>
-          <a:bodyPr rtlCol="0" anchor="ctr"/>
-          <a:lstStyle/>
-          <a:p>
-            <a:pPr algn="ctr"/>
-          </a:p>
-        </p:txBody>
-      </p:sp>
-      <p:sp>
-        <p:nvSpPr>
-          <p:cNvPr id="9" name="TextBox 8"/>
-          <p:cNvSpPr txBox="1"/>
-          <p:nvPr/>
-        </p:nvSpPr>
-        <p:spPr>
-          <a:xfrm>
-            <a:off x="1097280" y="1563624"/>
-            <a:ext cx="10362895" cy="402336"/>
-          </a:xfrm>
-          <a:prstGeom prst="rect">
-            <a:avLst/>
-          </a:prstGeom>
-          <a:noFill/>
-        </p:spPr>
-        <p:txBody>
-          <a:bodyPr wrap="square" anchor="ctr"/>
-          <a:lstStyle/>
-          <a:p>
-            <a:r>
-              <a:rPr sz="1500" b="1" i="0">
-                <a:solidFill>
-                  <a:srgbClr val="333333"/>
-                </a:solidFill>
-                <a:latin typeface="Calibri"/>
-              </a:rPr>
-              <a:t>LOS AFECTADOS QUE NO SON USUARIOS</a:t>
-            </a:r>
-            <a:r>
-              <a:rPr sz="1500" b="0" i="0">
-                <a:solidFill>
-                  <a:srgbClr val="333333"/>
-                </a:solidFill>
-                <a:latin typeface="Calibri"/>
-              </a:rPr>
-              <a:t> — La lista de quienes reciben un efecto sin usar la solución: a quién le llega más trabajo, quién </a:t>
-            </a:r>
-            <a:r>
-              <a:rPr sz="1500" b="1" i="0">
-                <a:solidFill>
-                  <a:srgbClr val="333333"/>
-                </a:solidFill>
-                <a:latin typeface="Calibri"/>
-              </a:rPr>
-              <a:t>no puede</a:t>
-            </a:r>
-            <a:r>
-              <a:rPr sz="1500" b="0" i="0">
-                <a:solidFill>
-                  <a:srgbClr val="333333"/>
-                </a:solidFill>
-                <a:latin typeface="Calibri"/>
-              </a:rPr>
-              <a:t> usarla, y a quién desplaza.</a:t>
-            </a:r>
-          </a:p>
-        </p:txBody>
-      </p:sp>
-      <p:sp>
-        <p:nvSpPr>
-          <p:cNvPr id="10" name="Rounded Rectangle 9"/>
-          <p:cNvSpPr/>
-          <p:nvPr/>
-        </p:nvSpPr>
-        <p:spPr>
-          <a:xfrm>
-            <a:off x="457200" y="2148839"/>
-            <a:ext cx="11277295" cy="566928"/>
-          </a:xfrm>
-          <a:prstGeom prst="roundRect">
-            <a:avLst>
-              <a:gd name="adj" fmla="val 12000"/>
-            </a:avLst>
-          </a:prstGeom>
-          <a:solidFill>
-            <a:srgbClr val="F2F2F2"/>
-          </a:solidFill>
-          <a:ln>
-            <a:noFill/>
-          </a:ln>
-        </p:spPr>
-        <p:style>
-          <a:lnRef idx="1">
-            <a:schemeClr val="accent1"/>
-          </a:lnRef>
-          <a:fillRef idx="3">
-            <a:schemeClr val="accent1"/>
-          </a:fillRef>
-          <a:effectRef idx="2">
-            <a:schemeClr val="accent1"/>
-          </a:effectRef>
-          <a:fontRef idx="minor">
-            <a:schemeClr val="lt1"/>
-          </a:fontRef>
-        </p:style>
-        <p:txBody>
-          <a:bodyPr rtlCol="0" anchor="ctr"/>
-          <a:lstStyle/>
-          <a:p>
-            <a:pPr algn="ctr"/>
-          </a:p>
-        </p:txBody>
-      </p:sp>
-      <p:sp>
-        <p:nvSpPr>
-          <p:cNvPr id="11" name="Rectangle 10"/>
-          <p:cNvSpPr/>
-          <p:nvPr/>
-        </p:nvSpPr>
-        <p:spPr>
-          <a:xfrm>
-            <a:off x="640080" y="2295144"/>
-            <a:ext cx="274320" cy="274320"/>
-          </a:xfrm>
-          <a:prstGeom prst="rect">
-            <a:avLst/>
-          </a:prstGeom>
-          <a:solidFill>
-            <a:srgbClr val="FFFFFF"/>
-          </a:solidFill>
-          <a:ln>
-            <a:solidFill>
-              <a:srgbClr val="333333"/>
-            </a:solidFill>
-          </a:ln>
-        </p:spPr>
-        <p:style>
-          <a:lnRef idx="1">
-            <a:schemeClr val="accent1"/>
-          </a:lnRef>
-          <a:fillRef idx="3">
-            <a:schemeClr val="accent1"/>
-          </a:fillRef>
-          <a:effectRef idx="2">
-            <a:schemeClr val="accent1"/>
-          </a:effectRef>
-          <a:fontRef idx="minor">
-            <a:schemeClr val="lt1"/>
-          </a:fontRef>
-        </p:style>
-        <p:txBody>
-          <a:bodyPr rtlCol="0" anchor="ctr"/>
-          <a:lstStyle/>
-          <a:p>
-            <a:pPr algn="ctr"/>
-          </a:p>
-        </p:txBody>
-      </p:sp>
-      <p:sp>
-        <p:nvSpPr>
-          <p:cNvPr id="12" name="Rectangle 11"/>
-          <p:cNvSpPr/>
-          <p:nvPr/>
-        </p:nvSpPr>
-        <p:spPr>
-          <a:xfrm>
-            <a:off x="640080" y="2295144"/>
-            <a:ext cx="73152" cy="274320"/>
-          </a:xfrm>
-          <a:prstGeom prst="rect">
-            <a:avLst/>
-          </a:prstGeom>
-          <a:solidFill>
-            <a:srgbClr val="269CCB"/>
-          </a:solidFill>
-          <a:ln>
-            <a:noFill/>
-          </a:ln>
-        </p:spPr>
-        <p:style>
-          <a:lnRef idx="1">
-            <a:schemeClr val="accent1"/>
-          </a:lnRef>
-          <a:fillRef idx="3">
-            <a:schemeClr val="accent1"/>
-          </a:fillRef>
-          <a:effectRef idx="2">
-            <a:schemeClr val="accent1"/>
-          </a:effectRef>
-          <a:fontRef idx="minor">
-            <a:schemeClr val="lt1"/>
-          </a:fontRef>
-        </p:style>
-        <p:txBody>
-          <a:bodyPr rtlCol="0" anchor="ctr"/>
-          <a:lstStyle/>
-          <a:p>
-            <a:pPr algn="ctr"/>
-          </a:p>
-        </p:txBody>
-      </p:sp>
-      <p:sp>
-        <p:nvSpPr>
-          <p:cNvPr id="13" name="TextBox 12"/>
-          <p:cNvSpPr txBox="1"/>
-          <p:nvPr/>
-        </p:nvSpPr>
-        <p:spPr>
-          <a:xfrm>
-            <a:off x="1097280" y="2240279"/>
-            <a:ext cx="10362895" cy="402336"/>
-          </a:xfrm>
-          <a:prstGeom prst="rect">
-            <a:avLst/>
-          </a:prstGeom>
-          <a:noFill/>
-        </p:spPr>
-        <p:txBody>
-          <a:bodyPr wrap="square" anchor="ctr"/>
-          <a:lstStyle/>
-          <a:p>
-            <a:r>
-              <a:rPr sz="1500" b="1" i="0">
-                <a:solidFill>
-                  <a:srgbClr val="333333"/>
-                </a:solidFill>
-                <a:latin typeface="Calibri"/>
-              </a:rPr>
-              <a:t>TRES IMPACTOS POSITIVOS CON SU INDICADOR</a:t>
-            </a:r>
-            <a:r>
-              <a:rPr sz="1500" b="0" i="0">
-                <a:solidFill>
-                  <a:srgbClr val="333333"/>
-                </a:solidFill>
-                <a:latin typeface="Calibri"/>
-              </a:rPr>
-              <a:t> — Tres efectos buenos, cada uno con </a:t>
-            </a:r>
-            <a:r>
-              <a:rPr sz="1500" b="1" i="0">
-                <a:solidFill>
-                  <a:srgbClr val="333333"/>
-                </a:solidFill>
-                <a:latin typeface="Calibri"/>
-              </a:rPr>
-              <a:t>un número y una unidad</a:t>
-            </a:r>
-            <a:r>
-              <a:rPr sz="1500" b="0" i="0">
-                <a:solidFill>
-                  <a:srgbClr val="333333"/>
-                </a:solidFill>
-                <a:latin typeface="Calibri"/>
-              </a:rPr>
-              <a:t>: cuántas personas, cuántas veces, cuántos minutos, cuántos pesos.</a:t>
-            </a:r>
-          </a:p>
-        </p:txBody>
-      </p:sp>
-      <p:sp>
-        <p:nvSpPr>
-          <p:cNvPr id="14" name="Rounded Rectangle 13"/>
-          <p:cNvSpPr/>
-          <p:nvPr/>
-        </p:nvSpPr>
-        <p:spPr>
-          <a:xfrm>
-            <a:off x="457200" y="2825496"/>
-            <a:ext cx="11277295" cy="566928"/>
-          </a:xfrm>
-          <a:prstGeom prst="roundRect">
-            <a:avLst>
-              <a:gd name="adj" fmla="val 12000"/>
-            </a:avLst>
-          </a:prstGeom>
-          <a:solidFill>
-            <a:srgbClr val="F2F2F2"/>
-          </a:solidFill>
-          <a:ln>
-            <a:noFill/>
-          </a:ln>
-        </p:spPr>
-        <p:style>
-          <a:lnRef idx="1">
-            <a:schemeClr val="accent1"/>
-          </a:lnRef>
-          <a:fillRef idx="3">
-            <a:schemeClr val="accent1"/>
-          </a:fillRef>
-          <a:effectRef idx="2">
-            <a:schemeClr val="accent1"/>
-          </a:effectRef>
-          <a:fontRef idx="minor">
-            <a:schemeClr val="lt1"/>
-          </a:fontRef>
-        </p:style>
-        <p:txBody>
-          <a:bodyPr rtlCol="0" anchor="ctr"/>
-          <a:lstStyle/>
-          <a:p>
-            <a:pPr algn="ctr"/>
-          </a:p>
-        </p:txBody>
-      </p:sp>
-      <p:sp>
-        <p:nvSpPr>
-          <p:cNvPr id="15" name="Rectangle 14"/>
-          <p:cNvSpPr/>
-          <p:nvPr/>
-        </p:nvSpPr>
-        <p:spPr>
-          <a:xfrm>
-            <a:off x="640080" y="2971800"/>
-            <a:ext cx="274320" cy="274320"/>
-          </a:xfrm>
-          <a:prstGeom prst="rect">
-            <a:avLst/>
-          </a:prstGeom>
-          <a:solidFill>
-            <a:srgbClr val="FFFFFF"/>
-          </a:solidFill>
-          <a:ln>
-            <a:solidFill>
-              <a:srgbClr val="333333"/>
-            </a:solidFill>
-          </a:ln>
-        </p:spPr>
-        <p:style>
-          <a:lnRef idx="1">
-            <a:schemeClr val="accent1"/>
-          </a:lnRef>
-          <a:fillRef idx="3">
-            <a:schemeClr val="accent1"/>
-          </a:fillRef>
-          <a:effectRef idx="2">
-            <a:schemeClr val="accent1"/>
-          </a:effectRef>
-          <a:fontRef idx="minor">
-            <a:schemeClr val="lt1"/>
-          </a:fontRef>
-        </p:style>
-        <p:txBody>
-          <a:bodyPr rtlCol="0" anchor="ctr"/>
-          <a:lstStyle/>
-          <a:p>
-            <a:pPr algn="ctr"/>
-          </a:p>
-        </p:txBody>
-      </p:sp>
-      <p:sp>
-        <p:nvSpPr>
-          <p:cNvPr id="16" name="Rectangle 15"/>
-          <p:cNvSpPr/>
-          <p:nvPr/>
-        </p:nvSpPr>
-        <p:spPr>
-          <a:xfrm>
-            <a:off x="640080" y="2971800"/>
-            <a:ext cx="73152" cy="274320"/>
-          </a:xfrm>
-          <a:prstGeom prst="rect">
-            <a:avLst/>
-          </a:prstGeom>
-          <a:solidFill>
-            <a:srgbClr val="269CCB"/>
-          </a:solidFill>
-          <a:ln>
-            <a:noFill/>
-          </a:ln>
-        </p:spPr>
-        <p:style>
-          <a:lnRef idx="1">
-            <a:schemeClr val="accent1"/>
-          </a:lnRef>
-          <a:fillRef idx="3">
-            <a:schemeClr val="accent1"/>
-          </a:fillRef>
-          <a:effectRef idx="2">
-            <a:schemeClr val="accent1"/>
-          </a:effectRef>
-          <a:fontRef idx="minor">
-            <a:schemeClr val="lt1"/>
-          </a:fontRef>
-        </p:style>
-        <p:txBody>
-          <a:bodyPr rtlCol="0" anchor="ctr"/>
-          <a:lstStyle/>
-          <a:p>
-            <a:pPr algn="ctr"/>
-          </a:p>
-        </p:txBody>
-      </p:sp>
-      <p:sp>
-        <p:nvSpPr>
-          <p:cNvPr id="17" name="TextBox 16"/>
-          <p:cNvSpPr txBox="1"/>
-          <p:nvPr/>
-        </p:nvSpPr>
-        <p:spPr>
-          <a:xfrm>
-            <a:off x="1097280" y="2916936"/>
-            <a:ext cx="10362895" cy="402336"/>
-          </a:xfrm>
-          <a:prstGeom prst="rect">
-            <a:avLst/>
-          </a:prstGeom>
-          <a:noFill/>
-        </p:spPr>
-        <p:txBody>
-          <a:bodyPr wrap="square" anchor="ctr"/>
-          <a:lstStyle/>
-          <a:p>
-            <a:r>
-              <a:rPr sz="1500" b="1" i="0">
-                <a:solidFill>
-                  <a:srgbClr val="333333"/>
-                </a:solidFill>
-                <a:latin typeface="Calibri"/>
-              </a:rPr>
-              <a:t>DOS IMPACTOS NEGATIVOS O RIESGOS</a:t>
-            </a:r>
-            <a:r>
-              <a:rPr sz="1500" b="0" i="0">
-                <a:solidFill>
-                  <a:srgbClr val="333333"/>
-                </a:solidFill>
-                <a:latin typeface="Calibri"/>
-              </a:rPr>
-              <a:t> — Dos efectos malos, con </a:t>
-            </a:r>
-            <a:r>
-              <a:rPr sz="1500" b="1" i="0">
-                <a:solidFill>
-                  <a:srgbClr val="333333"/>
-                </a:solidFill>
-                <a:latin typeface="Calibri"/>
-              </a:rPr>
-              <a:t>quién los recibe</a:t>
-            </a:r>
-            <a:r>
-              <a:rPr sz="1500" b="0" i="0">
-                <a:solidFill>
-                  <a:srgbClr val="333333"/>
-                </a:solidFill>
-                <a:latin typeface="Calibri"/>
-              </a:rPr>
-              <a:t> exactamente. Si no encuentran ninguno, pregúntense quién trabaja más por su solución.</a:t>
-            </a:r>
-          </a:p>
-        </p:txBody>
-      </p:sp>
-      <p:sp>
-        <p:nvSpPr>
-          <p:cNvPr id="18" name="Rounded Rectangle 17"/>
-          <p:cNvSpPr/>
-          <p:nvPr/>
-        </p:nvSpPr>
-        <p:spPr>
-          <a:xfrm>
-            <a:off x="457200" y="3502152"/>
-            <a:ext cx="11277295" cy="566928"/>
-          </a:xfrm>
-          <a:prstGeom prst="roundRect">
-            <a:avLst>
-              <a:gd name="adj" fmla="val 12000"/>
-            </a:avLst>
-          </a:prstGeom>
-          <a:solidFill>
-            <a:srgbClr val="F2F2F2"/>
-          </a:solidFill>
-          <a:ln>
-            <a:noFill/>
-          </a:ln>
-        </p:spPr>
-        <p:style>
-          <a:lnRef idx="1">
-            <a:schemeClr val="accent1"/>
-          </a:lnRef>
-          <a:fillRef idx="3">
-            <a:schemeClr val="accent1"/>
-          </a:fillRef>
-          <a:effectRef idx="2">
-            <a:schemeClr val="accent1"/>
-          </a:effectRef>
-          <a:fontRef idx="minor">
-            <a:schemeClr val="lt1"/>
-          </a:fontRef>
-        </p:style>
-        <p:txBody>
-          <a:bodyPr rtlCol="0" anchor="ctr"/>
-          <a:lstStyle/>
-          <a:p>
-            <a:pPr algn="ctr"/>
-          </a:p>
-        </p:txBody>
-      </p:sp>
-      <p:sp>
-        <p:nvSpPr>
-          <p:cNvPr id="19" name="Rectangle 18"/>
-          <p:cNvSpPr/>
-          <p:nvPr/>
-        </p:nvSpPr>
-        <p:spPr>
-          <a:xfrm>
-            <a:off x="640080" y="3648456"/>
-            <a:ext cx="274320" cy="274320"/>
-          </a:xfrm>
-          <a:prstGeom prst="rect">
-            <a:avLst/>
-          </a:prstGeom>
-          <a:solidFill>
-            <a:srgbClr val="FFFFFF"/>
-          </a:solidFill>
-          <a:ln>
-            <a:solidFill>
-              <a:srgbClr val="333333"/>
-            </a:solidFill>
-          </a:ln>
-        </p:spPr>
-        <p:style>
-          <a:lnRef idx="1">
-            <a:schemeClr val="accent1"/>
-          </a:lnRef>
-          <a:fillRef idx="3">
-            <a:schemeClr val="accent1"/>
-          </a:fillRef>
-          <a:effectRef idx="2">
-            <a:schemeClr val="accent1"/>
-          </a:effectRef>
-          <a:fontRef idx="minor">
-            <a:schemeClr val="lt1"/>
-          </a:fontRef>
-        </p:style>
-        <p:txBody>
-          <a:bodyPr rtlCol="0" anchor="ctr"/>
-          <a:lstStyle/>
-          <a:p>
-            <a:pPr algn="ctr"/>
-          </a:p>
-        </p:txBody>
-      </p:sp>
-      <p:sp>
-        <p:nvSpPr>
-          <p:cNvPr id="20" name="Rectangle 19"/>
-          <p:cNvSpPr/>
-          <p:nvPr/>
-        </p:nvSpPr>
-        <p:spPr>
-          <a:xfrm>
-            <a:off x="640080" y="3648456"/>
-            <a:ext cx="73152" cy="274320"/>
-          </a:xfrm>
-          <a:prstGeom prst="rect">
-            <a:avLst/>
-          </a:prstGeom>
-          <a:solidFill>
-            <a:srgbClr val="269CCB"/>
-          </a:solidFill>
-          <a:ln>
-            <a:noFill/>
-          </a:ln>
-        </p:spPr>
-        <p:style>
-          <a:lnRef idx="1">
-            <a:schemeClr val="accent1"/>
-          </a:lnRef>
-          <a:fillRef idx="3">
-            <a:schemeClr val="accent1"/>
-          </a:fillRef>
-          <a:effectRef idx="2">
-            <a:schemeClr val="accent1"/>
-          </a:effectRef>
-          <a:fontRef idx="minor">
-            <a:schemeClr val="lt1"/>
-          </a:fontRef>
-        </p:style>
-        <p:txBody>
-          <a:bodyPr rtlCol="0" anchor="ctr"/>
-          <a:lstStyle/>
-          <a:p>
-            <a:pPr algn="ctr"/>
-          </a:p>
-        </p:txBody>
-      </p:sp>
-      <p:sp>
-        <p:nvSpPr>
-          <p:cNvPr id="21" name="TextBox 20"/>
-          <p:cNvSpPr txBox="1"/>
-          <p:nvPr/>
-        </p:nvSpPr>
-        <p:spPr>
-          <a:xfrm>
-            <a:off x="1097280" y="3593592"/>
-            <a:ext cx="10362895" cy="402336"/>
-          </a:xfrm>
-          <a:prstGeom prst="rect">
-            <a:avLst/>
-          </a:prstGeom>
-          <a:noFill/>
-        </p:spPr>
-        <p:txBody>
-          <a:bodyPr wrap="square" anchor="ctr"/>
-          <a:lstStyle/>
-          <a:p>
-            <a:r>
-              <a:rPr sz="1500" b="1" i="0">
-                <a:solidFill>
-                  <a:srgbClr val="333333"/>
-                </a:solidFill>
-                <a:latin typeface="Calibri"/>
-              </a:rPr>
-              <a:t>LA MATRIZ CALIFICADA</a:t>
-            </a:r>
-            <a:r>
-              <a:rPr sz="1500" b="0" i="0">
-                <a:solidFill>
-                  <a:srgbClr val="333333"/>
-                </a:solidFill>
-                <a:latin typeface="Calibri"/>
-              </a:rPr>
-              <a:t> — Cada impacto con su carácter, magnitud, extensión, duración y reversibilidad — y </a:t>
-            </a:r>
-            <a:r>
-              <a:rPr sz="1500" b="1" i="0">
-                <a:solidFill>
-                  <a:srgbClr val="333333"/>
-                </a:solidFill>
-                <a:latin typeface="Calibri"/>
-              </a:rPr>
-              <a:t>una línea de justificación</a:t>
-            </a:r>
-            <a:r>
-              <a:rPr sz="1500" b="0" i="0">
-                <a:solidFill>
-                  <a:srgbClr val="333333"/>
-                </a:solidFill>
-                <a:latin typeface="Calibri"/>
-              </a:rPr>
-              <a:t> por calificación.</a:t>
-            </a:r>
-          </a:p>
-        </p:txBody>
-      </p:sp>
-      <p:sp>
-        <p:nvSpPr>
-          <p:cNvPr id="22" name="Rounded Rectangle 21"/>
-          <p:cNvSpPr/>
-          <p:nvPr/>
-        </p:nvSpPr>
-        <p:spPr>
-          <a:xfrm>
-            <a:off x="457200" y="4178808"/>
-            <a:ext cx="11277295" cy="566928"/>
-          </a:xfrm>
-          <a:prstGeom prst="roundRect">
-            <a:avLst>
-              <a:gd name="adj" fmla="val 12000"/>
-            </a:avLst>
-          </a:prstGeom>
-          <a:solidFill>
-            <a:srgbClr val="F2F2F2"/>
-          </a:solidFill>
-          <a:ln>
-            <a:noFill/>
-          </a:ln>
-        </p:spPr>
-        <p:style>
-          <a:lnRef idx="1">
-            <a:schemeClr val="accent1"/>
-          </a:lnRef>
-          <a:fillRef idx="3">
-            <a:schemeClr val="accent1"/>
-          </a:fillRef>
-          <a:effectRef idx="2">
-            <a:schemeClr val="accent1"/>
-          </a:effectRef>
-          <a:fontRef idx="minor">
-            <a:schemeClr val="lt1"/>
-          </a:fontRef>
-        </p:style>
-        <p:txBody>
-          <a:bodyPr rtlCol="0" anchor="ctr"/>
-          <a:lstStyle/>
-          <a:p>
-            <a:pPr algn="ctr"/>
-          </a:p>
-        </p:txBody>
-      </p:sp>
-      <p:sp>
-        <p:nvSpPr>
-          <p:cNvPr id="23" name="Rectangle 22"/>
-          <p:cNvSpPr/>
-          <p:nvPr/>
-        </p:nvSpPr>
-        <p:spPr>
-          <a:xfrm>
-            <a:off x="640080" y="4325112"/>
-            <a:ext cx="274320" cy="274320"/>
-          </a:xfrm>
-          <a:prstGeom prst="rect">
-            <a:avLst/>
-          </a:prstGeom>
-          <a:solidFill>
-            <a:srgbClr val="FFFFFF"/>
-          </a:solidFill>
-          <a:ln>
-            <a:solidFill>
-              <a:srgbClr val="333333"/>
-            </a:solidFill>
-          </a:ln>
-        </p:spPr>
-        <p:style>
-          <a:lnRef idx="1">
-            <a:schemeClr val="accent1"/>
-          </a:lnRef>
-          <a:fillRef idx="3">
-            <a:schemeClr val="accent1"/>
-          </a:fillRef>
-          <a:effectRef idx="2">
-            <a:schemeClr val="accent1"/>
-          </a:effectRef>
-          <a:fontRef idx="minor">
-            <a:schemeClr val="lt1"/>
-          </a:fontRef>
-        </p:style>
-        <p:txBody>
-          <a:bodyPr rtlCol="0" anchor="ctr"/>
-          <a:lstStyle/>
-          <a:p>
-            <a:pPr algn="ctr"/>
-          </a:p>
-        </p:txBody>
-      </p:sp>
-      <p:sp>
-        <p:nvSpPr>
-          <p:cNvPr id="24" name="Rectangle 23"/>
-          <p:cNvSpPr/>
-          <p:nvPr/>
-        </p:nvSpPr>
-        <p:spPr>
-          <a:xfrm>
-            <a:off x="640080" y="4325112"/>
-            <a:ext cx="73152" cy="274320"/>
-          </a:xfrm>
-          <a:prstGeom prst="rect">
-            <a:avLst/>
-          </a:prstGeom>
-          <a:solidFill>
-            <a:srgbClr val="269CCB"/>
-          </a:solidFill>
-          <a:ln>
-            <a:noFill/>
-          </a:ln>
-        </p:spPr>
-        <p:style>
-          <a:lnRef idx="1">
-            <a:schemeClr val="accent1"/>
-          </a:lnRef>
-          <a:fillRef idx="3">
-            <a:schemeClr val="accent1"/>
-          </a:fillRef>
-          <a:effectRef idx="2">
-            <a:schemeClr val="accent1"/>
-          </a:effectRef>
-          <a:fontRef idx="minor">
-            <a:schemeClr val="lt1"/>
-          </a:fontRef>
-        </p:style>
-        <p:txBody>
-          <a:bodyPr rtlCol="0" anchor="ctr"/>
-          <a:lstStyle/>
-          <a:p>
-            <a:pPr algn="ctr"/>
-          </a:p>
-        </p:txBody>
-      </p:sp>
-      <p:sp>
-        <p:nvSpPr>
-          <p:cNvPr id="25" name="TextBox 24"/>
-          <p:cNvSpPr txBox="1"/>
-          <p:nvPr/>
-        </p:nvSpPr>
-        <p:spPr>
-          <a:xfrm>
-            <a:off x="1097280" y="4270248"/>
-            <a:ext cx="10362895" cy="402336"/>
-          </a:xfrm>
-          <a:prstGeom prst="rect">
-            <a:avLst/>
-          </a:prstGeom>
-          <a:noFill/>
-        </p:spPr>
-        <p:txBody>
-          <a:bodyPr wrap="square" anchor="ctr"/>
-          <a:lstStyle/>
-          <a:p>
-            <a:r>
-              <a:rPr sz="1500" b="1" i="0">
-                <a:solidFill>
-                  <a:srgbClr val="333333"/>
-                </a:solidFill>
-                <a:latin typeface="Calibri"/>
-              </a:rPr>
-              <a:t>LAS MEDIDAS DE MITIGACIÓN</a:t>
-            </a:r>
-            <a:r>
-              <a:rPr sz="1500" b="0" i="0">
-                <a:solidFill>
-                  <a:srgbClr val="333333"/>
-                </a:solidFill>
-                <a:latin typeface="Calibri"/>
-              </a:rPr>
-              <a:t> — Qué van a hacer para reducir cada impacto negativo. Puede ser </a:t>
-            </a:r>
-            <a:r>
-              <a:rPr sz="1500" b="1" i="0">
-                <a:solidFill>
-                  <a:srgbClr val="333333"/>
-                </a:solidFill>
-                <a:latin typeface="Calibri"/>
-              </a:rPr>
-              <a:t>una medida no digital</a:t>
-            </a:r>
-            <a:r>
-              <a:rPr sz="1500" b="0" i="0">
-                <a:solidFill>
-                  <a:srgbClr val="333333"/>
-                </a:solidFill>
-                <a:latin typeface="Calibri"/>
-              </a:rPr>
-              <a:t>, y muchas veces es la mejor.</a:t>
-            </a:r>
-          </a:p>
-        </p:txBody>
-      </p:sp>
-      <p:sp>
-        <p:nvSpPr>
-          <p:cNvPr id="26" name="TextBox 25"/>
+            <a:pPr>
+              <a:spcAft>
+                <a:spcPts val="800"/>
+              </a:spcAft>
+            </a:pPr>
+            <a:r>
+              <a:rPr sz="2000" b="0" i="0">
+                <a:solidFill>
+                  <a:srgbClr val="333333"/>
+                </a:solidFill>
+                <a:latin typeface="Calibri"/>
+              </a:rPr>
+              <a:t>–   El gancho de hoy está construido para incomodar, y hay que dejarlo incomodar unos segundos antes de explicarlo: **si su solución funciona perfectamente y la usa todo el mundo</a:t>
+            </a:r>
+          </a:p>
+          <a:p>
+            <a:pPr>
+              <a:spcAft>
+                <a:spcPts val="800"/>
+              </a:spcAft>
+            </a:pPr>
+            <a:r>
+              <a:rPr sz="2000" b="0" i="0">
+                <a:solidFill>
+                  <a:srgbClr val="333333"/>
+                </a:solidFill>
+                <a:latin typeface="Calibri"/>
+              </a:rPr>
+              <a:t>–   ¿quién queda peor que antes?** La reacción típica es «nadie», y esa respuesta es el punto de partida de la sesión.</a:t>
+            </a:r>
+          </a:p>
+          <a:p>
+            <a:pPr>
+              <a:spcAft>
+                <a:spcPts val="800"/>
+              </a:spcAft>
+            </a:pPr>
+            <a:r>
+              <a:rPr sz="2000" b="0" i="0">
+                <a:solidFill>
+                  <a:srgbClr val="333333"/>
+                </a:solidFill>
+                <a:latin typeface="Calibri"/>
+              </a:rPr>
+              <a:t>–   Siempre hay alguien, y casi nunca es un usuario.</a:t>
+            </a:r>
+          </a:p>
+          <a:p>
+            <a:pPr>
+              <a:spcAft>
+                <a:spcPts val="800"/>
+              </a:spcAft>
+            </a:pPr>
+            <a:r>
+              <a:rPr sz="2000" b="0" i="0">
+                <a:solidFill>
+                  <a:srgbClr val="333333"/>
+                </a:solidFill>
+                <a:latin typeface="Calibri"/>
+              </a:rPr>
+              <a:t>–   En el caso de la biblioteca: la voluntaria del cierre, que ahora dedica diez minutos más a actualizar la lista; y el vecino sin datos móviles</a:t>
+            </a:r>
+          </a:p>
+          <a:p>
+            <a:pPr>
+              <a:spcAft>
+                <a:spcPts val="800"/>
+              </a:spcAft>
+            </a:pPr>
+            <a:r>
+              <a:rPr sz="2000" b="0" i="0">
+                <a:solidFill>
+                  <a:srgbClr val="333333"/>
+                </a:solidFill>
+                <a:latin typeface="Calibri"/>
+              </a:rPr>
+              <a:t>–   Que antes llegaba al mostrador en igualdad de condiciones y ahora llega detrás de tres personas que ya sabían qué pedir.</a:t>
+            </a:r>
+          </a:p>
+          <a:p>
+            <a:pPr>
+              <a:spcAft>
+                <a:spcPts val="800"/>
+              </a:spcAft>
+            </a:pPr>
+            <a:r>
+              <a:rPr sz="2000" b="0" i="0">
+                <a:solidFill>
+                  <a:srgbClr val="333333"/>
+                </a:solidFill>
+                <a:latin typeface="Calibri"/>
+              </a:rPr>
+              <a:t>–   Ninguno de los dos usa el sistema para consultar, y a los dos les cambió la vida por él.</a:t>
+            </a:r>
+          </a:p>
+          <a:p>
+            <a:pPr>
+              <a:spcAft>
+                <a:spcPts val="800"/>
+              </a:spcAft>
+            </a:pPr>
+            <a:r>
+              <a:rPr sz="2000" b="0" i="0">
+                <a:solidFill>
+                  <a:srgbClr val="333333"/>
+                </a:solidFill>
+                <a:latin typeface="Calibri"/>
+              </a:rPr>
+              <a:t>–   El encuadre que justifica la sesión completa, y que conviene decir sin solemnidad: </a:t>
+            </a:r>
+            <a:r>
+              <a:rPr sz="2000" b="1" i="0">
+                <a:solidFill>
+                  <a:srgbClr val="333333"/>
+                </a:solidFill>
+                <a:latin typeface="Calibri"/>
+              </a:rPr>
+              <a:t>un ingeniero que no puede responder esa pregunta no terminó el diseño.</a:t>
+            </a:r>
+            <a:r>
+              <a:rPr sz="2000" b="0" i="0">
+                <a:solidFill>
+                  <a:srgbClr val="333333"/>
+                </a:solidFill>
+                <a:latin typeface="Calibri"/>
+              </a:rPr>
+              <a:t> No es un asunto de ética añadida al final ni un requisito de acreditación: es parte del análisis técnico, igual que estimar el consumo o el costo.</a:t>
+            </a:r>
+          </a:p>
+        </p:txBody>
+      </p:sp>
+      <p:sp>
+        <p:nvSpPr>
+          <p:cNvPr id="6" name="TextBox 5"/>
           <p:cNvSpPr txBox="1"/>
           <p:nvPr/>
         </p:nvSpPr>
@@ -5337,7 +4506,7 @@
         <p:spPr>
           <a:xfrm>
             <a:off x="0" y="0"/>
-            <a:ext cx="12191695" cy="1170432"/>
+            <a:ext cx="12191695" cy="960120"/>
           </a:xfrm>
           <a:prstGeom prst="rect">
             <a:avLst/>
@@ -5379,7 +4548,7 @@
         </p:nvSpPr>
         <p:spPr>
           <a:xfrm>
-            <a:off x="0" y="1170432"/>
+            <a:off x="0" y="960120"/>
             <a:ext cx="12191695" cy="41148"/>
           </a:xfrm>
           <a:prstGeom prst="rect">
@@ -5423,7 +4592,7 @@
         <p:spPr>
           <a:xfrm>
             <a:off x="457200" y="164592"/>
-            <a:ext cx="11277295" cy="384048"/>
+            <a:ext cx="11277295" cy="502920"/>
           </a:xfrm>
           <a:prstGeom prst="rect">
             <a:avLst/>
@@ -5443,7 +4612,7 @@
                 </a:solidFill>
                 <a:latin typeface="Calibri"/>
               </a:rPr>
-              <a:t>Cómo se expone en 3 minutos</a:t>
+              <a:t>La pregunta de entrada: ¿quién queda peor? (2/2)</a:t>
             </a:r>
           </a:p>
         </p:txBody>
@@ -5456,8 +4625,8 @@
         </p:nvSpPr>
         <p:spPr>
           <a:xfrm>
-            <a:off x="457200" y="566928"/>
-            <a:ext cx="11277295" cy="411480"/>
+            <a:off x="457200" y="1170432"/>
+            <a:ext cx="11277295" cy="5230368"/>
           </a:xfrm>
           <a:prstGeom prst="rect">
             <a:avLst/>
@@ -5470,885 +4639,92 @@
           </a:bodyPr>
           <a:lstStyle/>
           <a:p>
-            <a:r>
-              <a:rPr sz="1400" b="0" i="0">
-                <a:solidFill>
-                  <a:srgbClr val="B8D8EE"/>
-                </a:solidFill>
-                <a:latin typeface="Calibri"/>
-              </a:rPr>
-              <a:t>Habla el vocero con la pantalla ya compartida · cronómetro en pantalla · se corta al llegar a cero</a:t>
-            </a:r>
-          </a:p>
-        </p:txBody>
-      </p:sp>
-      <p:sp>
-        <p:nvSpPr>
-          <p:cNvPr id="6" name="Rounded Rectangle 5"/>
-          <p:cNvSpPr/>
-          <p:nvPr/>
-        </p:nvSpPr>
-        <p:spPr>
-          <a:xfrm>
-            <a:off x="457200" y="1444752"/>
-            <a:ext cx="11277295" cy="908913"/>
-          </a:xfrm>
-          <a:prstGeom prst="roundRect">
-            <a:avLst>
-              <a:gd name="adj" fmla="val 12000"/>
-            </a:avLst>
-          </a:prstGeom>
-          <a:solidFill>
-            <a:srgbClr val="F2F2F2"/>
-          </a:solidFill>
-          <a:ln>
-            <a:noFill/>
-          </a:ln>
-        </p:spPr>
-        <p:style>
-          <a:lnRef idx="1">
-            <a:schemeClr val="accent1"/>
-          </a:lnRef>
-          <a:fillRef idx="3">
-            <a:schemeClr val="accent1"/>
-          </a:fillRef>
-          <a:effectRef idx="2">
-            <a:schemeClr val="accent1"/>
-          </a:effectRef>
-          <a:fontRef idx="minor">
-            <a:schemeClr val="lt1"/>
-          </a:fontRef>
-        </p:style>
-        <p:txBody>
-          <a:bodyPr rtlCol="0" anchor="ctr"/>
-          <a:lstStyle/>
-          <a:p>
-            <a:pPr algn="ctr"/>
-          </a:p>
-        </p:txBody>
-      </p:sp>
-      <p:sp>
-        <p:nvSpPr>
-          <p:cNvPr id="7" name="Rounded Rectangle 6"/>
-          <p:cNvSpPr/>
-          <p:nvPr/>
-        </p:nvSpPr>
-        <p:spPr>
-          <a:xfrm>
-            <a:off x="594360" y="1679752"/>
-            <a:ext cx="438912" cy="438912"/>
-          </a:xfrm>
-          <a:prstGeom prst="roundRect">
-            <a:avLst>
-              <a:gd name="adj" fmla="val 12000"/>
-            </a:avLst>
-          </a:prstGeom>
-          <a:solidFill>
-            <a:srgbClr val="095292"/>
-          </a:solidFill>
-          <a:ln>
-            <a:noFill/>
-          </a:ln>
-        </p:spPr>
-        <p:style>
-          <a:lnRef idx="1">
-            <a:schemeClr val="accent1"/>
-          </a:lnRef>
-          <a:fillRef idx="3">
-            <a:schemeClr val="accent1"/>
-          </a:fillRef>
-          <a:effectRef idx="2">
-            <a:schemeClr val="accent1"/>
-          </a:effectRef>
-          <a:fontRef idx="minor">
-            <a:schemeClr val="lt1"/>
-          </a:fontRef>
-        </p:style>
-        <p:txBody>
-          <a:bodyPr rtlCol="0" anchor="ctr"/>
-          <a:lstStyle/>
-          <a:p>
-            <a:pPr algn="ctr"/>
-          </a:p>
-        </p:txBody>
-      </p:sp>
-      <p:sp>
-        <p:nvSpPr>
-          <p:cNvPr id="8" name="TextBox 7"/>
-          <p:cNvSpPr txBox="1"/>
-          <p:nvPr/>
-        </p:nvSpPr>
-        <p:spPr>
-          <a:xfrm>
-            <a:off x="594360" y="1679752"/>
-            <a:ext cx="438912" cy="438912"/>
-          </a:xfrm>
-          <a:prstGeom prst="rect">
-            <a:avLst/>
-          </a:prstGeom>
-          <a:noFill/>
-        </p:spPr>
-        <p:txBody>
-          <a:bodyPr wrap="square" anchor="ctr"/>
-          <a:lstStyle/>
-          <a:p>
-            <a:pPr algn="ctr"/>
-            <a:r>
-              <a:rPr sz="1600" b="1" i="0">
-                <a:solidFill>
-                  <a:srgbClr val="FFFFFF"/>
-                </a:solidFill>
-                <a:latin typeface="Calibri"/>
-              </a:rPr>
-              <a:t>1</a:t>
-            </a:r>
-          </a:p>
-        </p:txBody>
-      </p:sp>
-      <p:sp>
-        <p:nvSpPr>
-          <p:cNvPr id="9" name="TextBox 8"/>
-          <p:cNvSpPr txBox="1"/>
-          <p:nvPr/>
-        </p:nvSpPr>
-        <p:spPr>
-          <a:xfrm>
-            <a:off x="1188720" y="1536192"/>
-            <a:ext cx="10271455" cy="744321"/>
-          </a:xfrm>
-          <a:prstGeom prst="rect">
-            <a:avLst/>
-          </a:prstGeom>
-          <a:noFill/>
-        </p:spPr>
-        <p:txBody>
-          <a:bodyPr wrap="square" anchor="ctr"/>
-          <a:lstStyle/>
-          <a:p>
-            <a:r>
-              <a:rPr sz="1500" b="1" i="0">
-                <a:solidFill>
-                  <a:srgbClr val="095292"/>
-                </a:solidFill>
-                <a:latin typeface="Calibri"/>
-              </a:rPr>
-              <a:t>30 s · Los afectados que no son usuarios</a:t>
-            </a:r>
-          </a:p>
-          <a:p>
             <a:pPr>
-              <a:spcBef>
-                <a:spcPts val="200"/>
-              </a:spcBef>
+              <a:spcAft>
+                <a:spcPts val="800"/>
+              </a:spcAft>
             </a:pPr>
             <a:r>
-              <a:rPr sz="1300" b="0" i="0">
-                <a:solidFill>
-                  <a:srgbClr val="333333"/>
-                </a:solidFill>
-                <a:latin typeface="Calibri"/>
-              </a:rPr>
-              <a:t>Nómbrelos. Sin «la comunidad».</a:t>
-            </a:r>
-          </a:p>
-        </p:txBody>
-      </p:sp>
-      <p:sp>
-        <p:nvSpPr>
-          <p:cNvPr id="10" name="Rounded Rectangle 9"/>
-          <p:cNvSpPr/>
-          <p:nvPr/>
-        </p:nvSpPr>
-        <p:spPr>
-          <a:xfrm>
-            <a:off x="457200" y="2445105"/>
-            <a:ext cx="11277295" cy="908913"/>
-          </a:xfrm>
-          <a:prstGeom prst="roundRect">
-            <a:avLst>
-              <a:gd name="adj" fmla="val 12000"/>
-            </a:avLst>
-          </a:prstGeom>
-          <a:solidFill>
-            <a:srgbClr val="E8F4FA"/>
-          </a:solidFill>
-          <a:ln>
-            <a:noFill/>
-          </a:ln>
-        </p:spPr>
-        <p:style>
-          <a:lnRef idx="1">
-            <a:schemeClr val="accent1"/>
-          </a:lnRef>
-          <a:fillRef idx="3">
-            <a:schemeClr val="accent1"/>
-          </a:fillRef>
-          <a:effectRef idx="2">
-            <a:schemeClr val="accent1"/>
-          </a:effectRef>
-          <a:fontRef idx="minor">
-            <a:schemeClr val="lt1"/>
-          </a:fontRef>
-        </p:style>
-        <p:txBody>
-          <a:bodyPr rtlCol="0" anchor="ctr"/>
-          <a:lstStyle/>
-          <a:p>
-            <a:pPr algn="ctr"/>
-          </a:p>
-        </p:txBody>
-      </p:sp>
-      <p:sp>
-        <p:nvSpPr>
-          <p:cNvPr id="11" name="Rounded Rectangle 10"/>
-          <p:cNvSpPr/>
-          <p:nvPr/>
-        </p:nvSpPr>
-        <p:spPr>
-          <a:xfrm>
-            <a:off x="594360" y="2680106"/>
-            <a:ext cx="438912" cy="438912"/>
-          </a:xfrm>
-          <a:prstGeom prst="roundRect">
-            <a:avLst>
-              <a:gd name="adj" fmla="val 12000"/>
-            </a:avLst>
-          </a:prstGeom>
-          <a:solidFill>
-            <a:srgbClr val="095292"/>
-          </a:solidFill>
-          <a:ln>
-            <a:noFill/>
-          </a:ln>
-        </p:spPr>
-        <p:style>
-          <a:lnRef idx="1">
-            <a:schemeClr val="accent1"/>
-          </a:lnRef>
-          <a:fillRef idx="3">
-            <a:schemeClr val="accent1"/>
-          </a:fillRef>
-          <a:effectRef idx="2">
-            <a:schemeClr val="accent1"/>
-          </a:effectRef>
-          <a:fontRef idx="minor">
-            <a:schemeClr val="lt1"/>
-          </a:fontRef>
-        </p:style>
-        <p:txBody>
-          <a:bodyPr rtlCol="0" anchor="ctr"/>
-          <a:lstStyle/>
-          <a:p>
-            <a:pPr algn="ctr"/>
-          </a:p>
-        </p:txBody>
-      </p:sp>
-      <p:sp>
-        <p:nvSpPr>
-          <p:cNvPr id="12" name="TextBox 11"/>
-          <p:cNvSpPr txBox="1"/>
-          <p:nvPr/>
-        </p:nvSpPr>
-        <p:spPr>
-          <a:xfrm>
-            <a:off x="594360" y="2680106"/>
-            <a:ext cx="438912" cy="438912"/>
-          </a:xfrm>
-          <a:prstGeom prst="rect">
-            <a:avLst/>
-          </a:prstGeom>
-          <a:noFill/>
-        </p:spPr>
-        <p:txBody>
-          <a:bodyPr wrap="square" anchor="ctr"/>
-          <a:lstStyle/>
-          <a:p>
-            <a:pPr algn="ctr"/>
-            <a:r>
-              <a:rPr sz="1600" b="1" i="0">
-                <a:solidFill>
-                  <a:srgbClr val="FFFFFF"/>
-                </a:solidFill>
-                <a:latin typeface="Calibri"/>
-              </a:rPr>
-              <a:t>2</a:t>
-            </a:r>
-          </a:p>
-        </p:txBody>
-      </p:sp>
-      <p:sp>
-        <p:nvSpPr>
-          <p:cNvPr id="13" name="TextBox 12"/>
-          <p:cNvSpPr txBox="1"/>
-          <p:nvPr/>
-        </p:nvSpPr>
-        <p:spPr>
-          <a:xfrm>
-            <a:off x="1188720" y="2536545"/>
-            <a:ext cx="10271455" cy="744321"/>
-          </a:xfrm>
-          <a:prstGeom prst="rect">
-            <a:avLst/>
-          </a:prstGeom>
-          <a:noFill/>
-        </p:spPr>
-        <p:txBody>
-          <a:bodyPr wrap="square" anchor="ctr"/>
-          <a:lstStyle/>
-          <a:p>
-            <a:r>
-              <a:rPr sz="1500" b="1" i="0">
-                <a:solidFill>
-                  <a:srgbClr val="095292"/>
-                </a:solidFill>
-                <a:latin typeface="Calibri"/>
-              </a:rPr>
-              <a:t>40 s · Un impacto positivo con su número</a:t>
+              <a:rPr sz="2000" b="0" i="0">
+                <a:solidFill>
+                  <a:srgbClr val="333333"/>
+                </a:solidFill>
+                <a:latin typeface="Calibri"/>
+              </a:rPr>
+              <a:t>–   Los proyectos que fallan socialmente casi nunca fallan por el código; fallan porque nadie preguntó a quién más le pasaba algo.</a:t>
             </a:r>
           </a:p>
           <a:p>
             <a:pPr>
-              <a:spcBef>
-                <a:spcPts val="200"/>
-              </a:spcBef>
+              <a:spcAft>
+                <a:spcPts val="800"/>
+              </a:spcAft>
             </a:pPr>
             <a:r>
-              <a:rPr sz="1300" b="0" i="0">
-                <a:solidFill>
-                  <a:srgbClr val="333333"/>
-                </a:solidFill>
-                <a:latin typeface="Calibri"/>
-              </a:rPr>
-              <a:t>El más fuerte, con indicador.</a:t>
-            </a:r>
-          </a:p>
-        </p:txBody>
-      </p:sp>
-      <p:sp>
-        <p:nvSpPr>
-          <p:cNvPr id="14" name="Rounded Rectangle 13"/>
-          <p:cNvSpPr/>
-          <p:nvPr/>
-        </p:nvSpPr>
-        <p:spPr>
-          <a:xfrm>
-            <a:off x="457200" y="3445459"/>
-            <a:ext cx="11277295" cy="908913"/>
-          </a:xfrm>
-          <a:prstGeom prst="roundRect">
-            <a:avLst>
-              <a:gd name="adj" fmla="val 12000"/>
-            </a:avLst>
-          </a:prstGeom>
-          <a:solidFill>
-            <a:srgbClr val="F2F2F2"/>
-          </a:solidFill>
-          <a:ln>
-            <a:noFill/>
-          </a:ln>
-        </p:spPr>
-        <p:style>
-          <a:lnRef idx="1">
-            <a:schemeClr val="accent1"/>
-          </a:lnRef>
-          <a:fillRef idx="3">
-            <a:schemeClr val="accent1"/>
-          </a:fillRef>
-          <a:effectRef idx="2">
-            <a:schemeClr val="accent1"/>
-          </a:effectRef>
-          <a:fontRef idx="minor">
-            <a:schemeClr val="lt1"/>
-          </a:fontRef>
-        </p:style>
-        <p:txBody>
-          <a:bodyPr rtlCol="0" anchor="ctr"/>
-          <a:lstStyle/>
-          <a:p>
-            <a:pPr algn="ctr"/>
-          </a:p>
-        </p:txBody>
-      </p:sp>
-      <p:sp>
-        <p:nvSpPr>
-          <p:cNvPr id="15" name="Rounded Rectangle 14"/>
-          <p:cNvSpPr/>
-          <p:nvPr/>
-        </p:nvSpPr>
-        <p:spPr>
-          <a:xfrm>
-            <a:off x="594360" y="3680460"/>
-            <a:ext cx="438912" cy="438912"/>
-          </a:xfrm>
-          <a:prstGeom prst="roundRect">
-            <a:avLst>
-              <a:gd name="adj" fmla="val 12000"/>
-            </a:avLst>
-          </a:prstGeom>
-          <a:solidFill>
-            <a:srgbClr val="095292"/>
-          </a:solidFill>
-          <a:ln>
-            <a:noFill/>
-          </a:ln>
-        </p:spPr>
-        <p:style>
-          <a:lnRef idx="1">
-            <a:schemeClr val="accent1"/>
-          </a:lnRef>
-          <a:fillRef idx="3">
-            <a:schemeClr val="accent1"/>
-          </a:fillRef>
-          <a:effectRef idx="2">
-            <a:schemeClr val="accent1"/>
-          </a:effectRef>
-          <a:fontRef idx="minor">
-            <a:schemeClr val="lt1"/>
-          </a:fontRef>
-        </p:style>
-        <p:txBody>
-          <a:bodyPr rtlCol="0" anchor="ctr"/>
-          <a:lstStyle/>
-          <a:p>
-            <a:pPr algn="ctr"/>
-          </a:p>
-        </p:txBody>
-      </p:sp>
-      <p:sp>
-        <p:nvSpPr>
-          <p:cNvPr id="16" name="TextBox 15"/>
-          <p:cNvSpPr txBox="1"/>
-          <p:nvPr/>
-        </p:nvSpPr>
-        <p:spPr>
-          <a:xfrm>
-            <a:off x="594360" y="3680460"/>
-            <a:ext cx="438912" cy="438912"/>
-          </a:xfrm>
-          <a:prstGeom prst="rect">
-            <a:avLst/>
-          </a:prstGeom>
-          <a:noFill/>
-        </p:spPr>
-        <p:txBody>
-          <a:bodyPr wrap="square" anchor="ctr"/>
-          <a:lstStyle/>
-          <a:p>
-            <a:pPr algn="ctr"/>
-            <a:r>
-              <a:rPr sz="1600" b="1" i="0">
-                <a:solidFill>
-                  <a:srgbClr val="FFFFFF"/>
-                </a:solidFill>
-                <a:latin typeface="Calibri"/>
-              </a:rPr>
-              <a:t>3</a:t>
-            </a:r>
-          </a:p>
-        </p:txBody>
-      </p:sp>
-      <p:sp>
-        <p:nvSpPr>
-          <p:cNvPr id="17" name="TextBox 16"/>
-          <p:cNvSpPr txBox="1"/>
-          <p:nvPr/>
-        </p:nvSpPr>
-        <p:spPr>
-          <a:xfrm>
-            <a:off x="1188720" y="3536899"/>
-            <a:ext cx="10271455" cy="744321"/>
-          </a:xfrm>
-          <a:prstGeom prst="rect">
-            <a:avLst/>
-          </a:prstGeom>
-          <a:noFill/>
-        </p:spPr>
-        <p:txBody>
-          <a:bodyPr wrap="square" anchor="ctr"/>
-          <a:lstStyle/>
-          <a:p>
-            <a:r>
-              <a:rPr sz="1500" b="1" i="0">
-                <a:solidFill>
-                  <a:srgbClr val="095292"/>
-                </a:solidFill>
-                <a:latin typeface="Calibri"/>
-              </a:rPr>
-              <a:t>70 s · El impacto negativo y su mitigación</a:t>
+              <a:rPr sz="2000" b="0" i="0">
+                <a:solidFill>
+                  <a:srgbClr val="333333"/>
+                </a:solidFill>
+                <a:latin typeface="Calibri"/>
+              </a:rPr>
+              <a:t>–   Operativamente, use la apertura para verificar el insumo: pida que cada equipo escriba en el muro </a:t>
+            </a:r>
+            <a:r>
+              <a:rPr sz="2000" b="1" i="0">
+                <a:solidFill>
+                  <a:srgbClr val="333333"/>
+                </a:solidFill>
+                <a:latin typeface="Calibri"/>
+              </a:rPr>
+              <a:t>un afectado que no sea usuario</a:t>
+            </a:r>
+            <a:r>
+              <a:rPr sz="2000" b="0" i="0">
+                <a:solidFill>
+                  <a:srgbClr val="333333"/>
+                </a:solidFill>
+                <a:latin typeface="Calibri"/>
+              </a:rPr>
+              <a:t>.</a:t>
             </a:r>
           </a:p>
           <a:p>
             <a:pPr>
-              <a:spcBef>
-                <a:spcPts val="200"/>
-              </a:spcBef>
+              <a:spcAft>
+                <a:spcPts val="800"/>
+              </a:spcAft>
             </a:pPr>
             <a:r>
-              <a:rPr sz="1300" b="1" i="0">
-                <a:solidFill>
-                  <a:srgbClr val="333333"/>
-                </a:solidFill>
-                <a:latin typeface="Calibri"/>
-              </a:rPr>
-              <a:t>El minuto obligatorio.</a:t>
-            </a:r>
-            <a:r>
-              <a:rPr sz="1300" b="0" i="0">
-                <a:solidFill>
-                  <a:srgbClr val="333333"/>
-                </a:solidFill>
-                <a:latin typeface="Calibri"/>
-              </a:rPr>
-              <a:t> El más incómodo que hayan encontrado.</a:t>
-            </a:r>
-          </a:p>
-        </p:txBody>
-      </p:sp>
-      <p:sp>
-        <p:nvSpPr>
-          <p:cNvPr id="18" name="Rounded Rectangle 17"/>
-          <p:cNvSpPr/>
-          <p:nvPr/>
-        </p:nvSpPr>
-        <p:spPr>
-          <a:xfrm>
-            <a:off x="457200" y="4445812"/>
-            <a:ext cx="11277295" cy="908913"/>
-          </a:xfrm>
-          <a:prstGeom prst="roundRect">
-            <a:avLst>
-              <a:gd name="adj" fmla="val 12000"/>
-            </a:avLst>
-          </a:prstGeom>
-          <a:solidFill>
-            <a:srgbClr val="E8F4FA"/>
-          </a:solidFill>
-          <a:ln>
-            <a:noFill/>
-          </a:ln>
-        </p:spPr>
-        <p:style>
-          <a:lnRef idx="1">
-            <a:schemeClr val="accent1"/>
-          </a:lnRef>
-          <a:fillRef idx="3">
-            <a:schemeClr val="accent1"/>
-          </a:fillRef>
-          <a:effectRef idx="2">
-            <a:schemeClr val="accent1"/>
-          </a:effectRef>
-          <a:fontRef idx="minor">
-            <a:schemeClr val="lt1"/>
-          </a:fontRef>
-        </p:style>
-        <p:txBody>
-          <a:bodyPr rtlCol="0" anchor="ctr"/>
-          <a:lstStyle/>
-          <a:p>
-            <a:pPr algn="ctr"/>
-          </a:p>
-        </p:txBody>
-      </p:sp>
-      <p:sp>
-        <p:nvSpPr>
-          <p:cNvPr id="19" name="Rounded Rectangle 18"/>
-          <p:cNvSpPr/>
-          <p:nvPr/>
-        </p:nvSpPr>
-        <p:spPr>
-          <a:xfrm>
-            <a:off x="594360" y="4680813"/>
-            <a:ext cx="438912" cy="438912"/>
-          </a:xfrm>
-          <a:prstGeom prst="roundRect">
-            <a:avLst>
-              <a:gd name="adj" fmla="val 12000"/>
-            </a:avLst>
-          </a:prstGeom>
-          <a:solidFill>
-            <a:srgbClr val="095292"/>
-          </a:solidFill>
-          <a:ln>
-            <a:noFill/>
-          </a:ln>
-        </p:spPr>
-        <p:style>
-          <a:lnRef idx="1">
-            <a:schemeClr val="accent1"/>
-          </a:lnRef>
-          <a:fillRef idx="3">
-            <a:schemeClr val="accent1"/>
-          </a:fillRef>
-          <a:effectRef idx="2">
-            <a:schemeClr val="accent1"/>
-          </a:effectRef>
-          <a:fontRef idx="minor">
-            <a:schemeClr val="lt1"/>
-          </a:fontRef>
-        </p:style>
-        <p:txBody>
-          <a:bodyPr rtlCol="0" anchor="ctr"/>
-          <a:lstStyle/>
-          <a:p>
-            <a:pPr algn="ctr"/>
-          </a:p>
-        </p:txBody>
-      </p:sp>
-      <p:sp>
-        <p:nvSpPr>
-          <p:cNvPr id="20" name="TextBox 19"/>
-          <p:cNvSpPr txBox="1"/>
-          <p:nvPr/>
-        </p:nvSpPr>
-        <p:spPr>
-          <a:xfrm>
-            <a:off x="594360" y="4680813"/>
-            <a:ext cx="438912" cy="438912"/>
-          </a:xfrm>
-          <a:prstGeom prst="rect">
-            <a:avLst/>
-          </a:prstGeom>
-          <a:noFill/>
-        </p:spPr>
-        <p:txBody>
-          <a:bodyPr wrap="square" anchor="ctr"/>
-          <a:lstStyle/>
-          <a:p>
-            <a:pPr algn="ctr"/>
-            <a:r>
-              <a:rPr sz="1600" b="1" i="0">
-                <a:solidFill>
-                  <a:srgbClr val="FFFFFF"/>
-                </a:solidFill>
-                <a:latin typeface="Calibri"/>
-              </a:rPr>
-              <a:t>4</a:t>
-            </a:r>
-          </a:p>
-        </p:txBody>
-      </p:sp>
-      <p:sp>
-        <p:nvSpPr>
-          <p:cNvPr id="21" name="TextBox 20"/>
-          <p:cNvSpPr txBox="1"/>
-          <p:nvPr/>
-        </p:nvSpPr>
-        <p:spPr>
-          <a:xfrm>
-            <a:off x="1188720" y="4537252"/>
-            <a:ext cx="10271455" cy="744321"/>
-          </a:xfrm>
-          <a:prstGeom prst="rect">
-            <a:avLst/>
-          </a:prstGeom>
-          <a:noFill/>
-        </p:spPr>
-        <p:txBody>
-          <a:bodyPr wrap="square" anchor="ctr"/>
-          <a:lstStyle/>
-          <a:p>
-            <a:r>
-              <a:rPr sz="1500" b="1" i="0">
-                <a:solidFill>
-                  <a:srgbClr val="095292"/>
-                </a:solidFill>
-                <a:latin typeface="Calibri"/>
-              </a:rPr>
-              <a:t>30 s · La calificación</a:t>
+              <a:rPr sz="2000" b="0" i="0">
+                <a:solidFill>
+                  <a:srgbClr val="333333"/>
+                </a:solidFill>
+                <a:latin typeface="Calibri"/>
+              </a:rPr>
+              <a:t>–   Los equipos que traigan el listado de la sesión 3 lo van a hacer en treinta segundos; los que no, van a escribir «los usuarios».</a:t>
             </a:r>
           </a:p>
           <a:p>
             <a:pPr>
-              <a:spcBef>
-                <a:spcPts val="200"/>
-              </a:spcBef>
+              <a:spcAft>
+                <a:spcPts val="800"/>
+              </a:spcAft>
             </a:pPr>
             <a:r>
-              <a:rPr sz="1300" b="0" i="0">
-                <a:solidFill>
-                  <a:srgbClr val="333333"/>
-                </a:solidFill>
-                <a:latin typeface="Calibri"/>
-              </a:rPr>
-              <a:t>Cuál es el impacto más grave y por qué lo calificaron así.</a:t>
-            </a:r>
-          </a:p>
-        </p:txBody>
-      </p:sp>
-      <p:sp>
-        <p:nvSpPr>
-          <p:cNvPr id="22" name="Rounded Rectangle 21"/>
-          <p:cNvSpPr/>
-          <p:nvPr/>
-        </p:nvSpPr>
-        <p:spPr>
-          <a:xfrm>
-            <a:off x="457200" y="5446166"/>
-            <a:ext cx="11277295" cy="908913"/>
-          </a:xfrm>
-          <a:prstGeom prst="roundRect">
-            <a:avLst>
-              <a:gd name="adj" fmla="val 12000"/>
-            </a:avLst>
-          </a:prstGeom>
-          <a:solidFill>
-            <a:srgbClr val="F2F2F2"/>
-          </a:solidFill>
-          <a:ln>
-            <a:noFill/>
-          </a:ln>
-        </p:spPr>
-        <p:style>
-          <a:lnRef idx="1">
-            <a:schemeClr val="accent1"/>
-          </a:lnRef>
-          <a:fillRef idx="3">
-            <a:schemeClr val="accent1"/>
-          </a:fillRef>
-          <a:effectRef idx="2">
-            <a:schemeClr val="accent1"/>
-          </a:effectRef>
-          <a:fontRef idx="minor">
-            <a:schemeClr val="lt1"/>
-          </a:fontRef>
-        </p:style>
-        <p:txBody>
-          <a:bodyPr rtlCol="0" anchor="ctr"/>
-          <a:lstStyle/>
-          <a:p>
-            <a:pPr algn="ctr"/>
-          </a:p>
-        </p:txBody>
-      </p:sp>
-      <p:sp>
-        <p:nvSpPr>
-          <p:cNvPr id="23" name="Rounded Rectangle 22"/>
-          <p:cNvSpPr/>
-          <p:nvPr/>
-        </p:nvSpPr>
-        <p:spPr>
-          <a:xfrm>
-            <a:off x="594360" y="5681167"/>
-            <a:ext cx="438912" cy="438912"/>
-          </a:xfrm>
-          <a:prstGeom prst="roundRect">
-            <a:avLst>
-              <a:gd name="adj" fmla="val 12000"/>
-            </a:avLst>
-          </a:prstGeom>
-          <a:solidFill>
-            <a:srgbClr val="095292"/>
-          </a:solidFill>
-          <a:ln>
-            <a:noFill/>
-          </a:ln>
-        </p:spPr>
-        <p:style>
-          <a:lnRef idx="1">
-            <a:schemeClr val="accent1"/>
-          </a:lnRef>
-          <a:fillRef idx="3">
-            <a:schemeClr val="accent1"/>
-          </a:fillRef>
-          <a:effectRef idx="2">
-            <a:schemeClr val="accent1"/>
-          </a:effectRef>
-          <a:fontRef idx="minor">
-            <a:schemeClr val="lt1"/>
-          </a:fontRef>
-        </p:style>
-        <p:txBody>
-          <a:bodyPr rtlCol="0" anchor="ctr"/>
-          <a:lstStyle/>
-          <a:p>
-            <a:pPr algn="ctr"/>
-          </a:p>
-        </p:txBody>
-      </p:sp>
-      <p:sp>
-        <p:nvSpPr>
-          <p:cNvPr id="24" name="TextBox 23"/>
-          <p:cNvSpPr txBox="1"/>
-          <p:nvPr/>
-        </p:nvSpPr>
-        <p:spPr>
-          <a:xfrm>
-            <a:off x="594360" y="5681167"/>
-            <a:ext cx="438912" cy="438912"/>
-          </a:xfrm>
-          <a:prstGeom prst="rect">
-            <a:avLst/>
-          </a:prstGeom>
-          <a:noFill/>
-        </p:spPr>
-        <p:txBody>
-          <a:bodyPr wrap="square" anchor="ctr"/>
-          <a:lstStyle/>
-          <a:p>
-            <a:pPr algn="ctr"/>
-            <a:r>
-              <a:rPr sz="1600" b="1" i="0">
-                <a:solidFill>
-                  <a:srgbClr val="FFFFFF"/>
-                </a:solidFill>
-                <a:latin typeface="Calibri"/>
-              </a:rPr>
-              <a:t>5</a:t>
-            </a:r>
-          </a:p>
-        </p:txBody>
-      </p:sp>
-      <p:sp>
-        <p:nvSpPr>
-          <p:cNvPr id="25" name="TextBox 24"/>
-          <p:cNvSpPr txBox="1"/>
-          <p:nvPr/>
-        </p:nvSpPr>
-        <p:spPr>
-          <a:xfrm>
-            <a:off x="1188720" y="5537606"/>
-            <a:ext cx="10271455" cy="744321"/>
-          </a:xfrm>
-          <a:prstGeom prst="rect">
-            <a:avLst/>
-          </a:prstGeom>
-          <a:noFill/>
-        </p:spPr>
-        <p:txBody>
-          <a:bodyPr wrap="square" anchor="ctr"/>
-          <a:lstStyle/>
-          <a:p>
-            <a:r>
-              <a:rPr sz="1500" b="1" i="0">
-                <a:solidFill>
-                  <a:srgbClr val="095292"/>
-                </a:solidFill>
-                <a:latin typeface="Calibri"/>
-              </a:rPr>
-              <a:t>10 s · Cierre</a:t>
-            </a:r>
-          </a:p>
-          <a:p>
-            <a:pPr>
-              <a:spcBef>
-                <a:spcPts val="200"/>
-              </a:spcBef>
-            </a:pPr>
-            <a:r>
-              <a:rPr sz="1300" b="0" i="0">
-                <a:solidFill>
-                  <a:srgbClr val="333333"/>
-                </a:solidFill>
-                <a:latin typeface="Calibri"/>
-              </a:rPr>
-              <a:t>Qué dimensión no aplica en su proyecto, y por qué.</a:t>
-            </a:r>
-          </a:p>
-        </p:txBody>
-      </p:sp>
-      <p:sp>
-        <p:nvSpPr>
-          <p:cNvPr id="26" name="TextBox 25"/>
+              <a:rPr sz="2000" b="0" i="0">
+                <a:solidFill>
+                  <a:srgbClr val="333333"/>
+                </a:solidFill>
+                <a:latin typeface="Calibri"/>
+              </a:rPr>
+              <a:t>–   Ahí ya sabe con quién tiene que sentarse en las salas de grupo.</a:t>
+            </a:r>
+          </a:p>
+        </p:txBody>
+      </p:sp>
+      <p:sp>
+        <p:nvSpPr>
+          <p:cNvPr id="6" name="TextBox 5"/>
           <p:cNvSpPr txBox="1"/>
           <p:nvPr/>
         </p:nvSpPr>
@@ -6522,7 +4898,7 @@
                 </a:solidFill>
                 <a:latin typeface="Calibri"/>
               </a:rPr>
-              <a:t>Para la Clase 14</a:t>
+              <a:t>Impacto no es intención, y el indirecto es el que muerde (1/2)</a:t>
             </a:r>
           </a:p>
         </p:txBody>
@@ -6570,7 +4946,7 @@
                 </a:solidFill>
                 <a:latin typeface="Calibri"/>
               </a:rPr>
-              <a:t>Trabajo dirigido:</a:t>
+              <a:t>Impacto no es intención.</a:t>
             </a:r>
             <a:r>
               <a:rPr sz="2000" b="0" i="0">
@@ -6579,7 +4955,7 @@
                 </a:solidFill>
                 <a:latin typeface="Calibri"/>
               </a:rPr>
-              <a:t> Aplicación de matrices de evaluación — dejar la matriz de impacto completa en el documento del equipo, con indicadores, negativos y mitigaciones.</a:t>
+              <a:t> Es la distinción más importante del día y la que más cuesta.</a:t>
             </a:r>
           </a:p>
           <a:p>
@@ -6595,43 +4971,7 @@
                 </a:solidFill>
                 <a:latin typeface="Calibri"/>
               </a:rPr>
-              <a:t>–   </a:t>
-            </a:r>
-            <a:r>
-              <a:rPr sz="2000" b="1" i="0">
-                <a:solidFill>
-                  <a:srgbClr val="333333"/>
-                </a:solidFill>
-                <a:latin typeface="Calibri"/>
-              </a:rPr>
-              <a:t>Trabajo independiente:</a:t>
-            </a:r>
-            <a:r>
-              <a:rPr sz="2000" b="0" i="0">
-                <a:solidFill>
-                  <a:srgbClr val="333333"/>
-                </a:solidFill>
-                <a:latin typeface="Calibri"/>
-              </a:rPr>
-              <a:t> Informe de evaluación del impacto: media página que resuma </a:t>
-            </a:r>
-            <a:r>
-              <a:rPr sz="2000" b="1" i="0">
-                <a:solidFill>
-                  <a:srgbClr val="333333"/>
-                </a:solidFill>
-                <a:latin typeface="Calibri"/>
-              </a:rPr>
-              <a:t>el impacto positivo más fuerte con su número y el negativo más importante con su mitigación</a:t>
-            </a:r>
-            <a:r>
-              <a:rPr sz="2000" b="0" i="0">
-                <a:solidFill>
-                  <a:srgbClr val="333333"/>
-                </a:solidFill>
-                <a:latin typeface="Calibri"/>
-              </a:rPr>
-              <a:t>. Es el borrador de dos diapositivas de la presentación final.</a:t>
+              <a:t>–   «Queremos ayudar a la comunidad» es una intención, y no informa nada: no se puede verificar, no se puede medir y nadie puede estar en contra.</a:t>
             </a:r>
           </a:p>
           <a:p>
@@ -6647,7 +4987,7 @@
                 </a:solidFill>
                 <a:latin typeface="Calibri"/>
               </a:rPr>
-              <a:t>–   </a:t>
+              <a:t>–   El impacto es lo que </a:t>
             </a:r>
             <a:r>
               <a:rPr sz="2000" b="1" i="0">
@@ -6656,7 +4996,7 @@
                 </a:solidFill>
                 <a:latin typeface="Calibri"/>
               </a:rPr>
-              <a:t>Clase 14 · Preparación de la presentación final</a:t>
+              <a:t>de hecho</a:t>
             </a:r>
             <a:r>
               <a:rPr sz="2000" b="0" i="0">
@@ -6665,43 +5005,7 @@
                 </a:solidFill>
                 <a:latin typeface="Calibri"/>
               </a:rPr>
-              <a:t> — preparamos la </a:t>
-            </a:r>
-            <a:r>
-              <a:rPr sz="2000" b="1" i="0">
-                <a:solidFill>
-                  <a:srgbClr val="333333"/>
-                </a:solidFill>
-                <a:latin typeface="Calibri"/>
-              </a:rPr>
-              <a:t>presentación final</a:t>
-            </a:r>
-            <a:r>
-              <a:rPr sz="2000" b="0" i="0">
-                <a:solidFill>
-                  <a:srgbClr val="333333"/>
-                </a:solidFill>
-                <a:latin typeface="Calibri"/>
-              </a:rPr>
-              <a:t>: la estructura de 8 minutos, las diapositivas, el reparto entre integrantes y el </a:t>
-            </a:r>
-            <a:r>
-              <a:rPr sz="2000" b="1" i="0">
-                <a:solidFill>
-                  <a:srgbClr val="333333"/>
-                </a:solidFill>
-                <a:latin typeface="Calibri"/>
-              </a:rPr>
-              <a:t>ensayo general cronometrado</a:t>
-            </a:r>
-            <a:r>
-              <a:rPr sz="2000" b="0" i="0">
-                <a:solidFill>
-                  <a:srgbClr val="333333"/>
-                </a:solidFill>
-                <a:latin typeface="Calibri"/>
-              </a:rPr>
-              <a:t>.</a:t>
+              <a:t> cambia en la vida de alguien, ocurra o no lo que queríamos.</a:t>
             </a:r>
           </a:p>
           <a:p>
@@ -6717,61 +5021,7 @@
                 </a:solidFill>
                 <a:latin typeface="Calibri"/>
               </a:rPr>
-              <a:t>–   </a:t>
-            </a:r>
-            <a:r>
-              <a:rPr sz="2000" b="1" i="0">
-                <a:solidFill>
-                  <a:srgbClr val="333333"/>
-                </a:solidFill>
-                <a:latin typeface="Calibri"/>
-              </a:rPr>
-              <a:t>Aviso:</a:t>
-            </a:r>
-            <a:r>
-              <a:rPr sz="2000" b="0" i="0">
-                <a:solidFill>
-                  <a:srgbClr val="333333"/>
-                </a:solidFill>
-                <a:latin typeface="Calibri"/>
-              </a:rPr>
-              <a:t> Para la Clase 14 el </a:t>
-            </a:r>
-            <a:r>
-              <a:rPr sz="2000" b="1" i="0">
-                <a:solidFill>
-                  <a:srgbClr val="333333"/>
-                </a:solidFill>
-                <a:latin typeface="Calibri"/>
-              </a:rPr>
-              <a:t>prototipo tiene que estar ya ajustado</a:t>
-            </a:r>
-            <a:r>
-              <a:rPr sz="2000" b="0" i="0">
-                <a:solidFill>
-                  <a:srgbClr val="333333"/>
-                </a:solidFill>
-                <a:latin typeface="Calibri"/>
-              </a:rPr>
-              <a:t> con lo que salió de la Clase 12: si ensayan con la versión vieja, el ensayo no sirve. Traigan también la cuenta de Canva o Google Slides lista y </a:t>
-            </a:r>
-            <a:r>
-              <a:rPr sz="2000" b="1" i="0">
-                <a:solidFill>
-                  <a:srgbClr val="333333"/>
-                </a:solidFill>
-                <a:latin typeface="Calibri"/>
-              </a:rPr>
-              <a:t>quién va a hablar de qué</a:t>
-            </a:r>
-            <a:r>
-              <a:rPr sz="2000" b="0" i="0">
-                <a:solidFill>
-                  <a:srgbClr val="333333"/>
-                </a:solidFill>
-                <a:latin typeface="Calibri"/>
-              </a:rPr>
-              <a:t>.</a:t>
+              <a:t>–   El indirecto es el que se olvida y el que trae los problemas: la voluntaria del cierre dedica diez minutos más cada día.</a:t>
             </a:r>
           </a:p>
           <a:p>
@@ -6787,7 +5037,7 @@
                 </a:solidFill>
                 <a:latin typeface="Calibri"/>
               </a:rPr>
-              <a:t>–   </a:t>
+              <a:t>–   Un dato importante para su formación profesional: </a:t>
             </a:r>
             <a:r>
               <a:rPr sz="2000" b="1" i="0">
@@ -6796,7 +5046,7 @@
                 </a:solidFill>
                 <a:latin typeface="Calibri"/>
               </a:rPr>
-              <a:t>Antes de salir:</a:t>
+              <a:t>la resistencia a una solución nueva casi siempre viene de un impacto indirecto que nadie consideró.</a:t>
             </a:r>
             <a:r>
               <a:rPr sz="2000" b="0" i="0">
@@ -6805,7 +5055,41 @@
                 </a:solidFill>
                 <a:latin typeface="Calibri"/>
               </a:rPr>
-              <a:t> el enlace del documento del equipo en el chat, con permiso de lectura para el docente, y el nombre del vocero de hoy.</a:t>
+              <a:t> Cuando en una empresa un sistema «no lo quieren usar»</a:t>
+            </a:r>
+          </a:p>
+          <a:p>
+            <a:pPr>
+              <a:spcAft>
+                <a:spcPts val="800"/>
+              </a:spcAft>
+            </a:pPr>
+            <a:r>
+              <a:rPr sz="2000" b="0" i="0">
+                <a:solidFill>
+                  <a:srgbClr val="333333"/>
+                </a:solidFill>
+                <a:latin typeface="Calibri"/>
+              </a:rPr>
+              <a:t>–   Nueve de diez veces es porque a alguien le llegó trabajo extra que nunca se contó. </a:t>
+            </a:r>
+            <a:r>
+              <a:rPr sz="2000" b="1" i="0">
+                <a:solidFill>
+                  <a:srgbClr val="333333"/>
+                </a:solidFill>
+                <a:latin typeface="Calibri"/>
+              </a:rPr>
+              <a:t>Positivo y negativo.</a:t>
+            </a:r>
+            <a:r>
+              <a:rPr sz="2000" b="0" i="0">
+                <a:solidFill>
+                  <a:srgbClr val="333333"/>
+                </a:solidFill>
+                <a:latin typeface="Calibri"/>
+              </a:rPr>
+              <a:t> Hay que anticipar y desactivar la creencia de que declarar un impacto negativo baja la nota.</a:t>
             </a:r>
           </a:p>
         </p:txBody>
@@ -6880,13 +5164,13 @@
         <p:spPr>
           <a:xfrm>
             <a:off x="0" y="0"/>
-            <a:ext cx="12191695" cy="164592"/>
+            <a:ext cx="12191695" cy="960120"/>
           </a:xfrm>
           <a:prstGeom prst="rect">
             <a:avLst/>
           </a:prstGeom>
           <a:solidFill>
-            <a:srgbClr val="269CCB"/>
+            <a:srgbClr val="095292"/>
           </a:solidFill>
           <a:ln>
             <a:noFill/>
@@ -6914,30 +5198,49 @@
           </a:p>
         </p:txBody>
       </p:sp>
-      <p:pic>
-        <p:nvPicPr>
-          <p:cNvPr id="3" name="Picture 2" descr="logo_uniajc_color.png"/>
-          <p:cNvPicPr>
-            <a:picLocks noChangeAspect="1"/>
-          </p:cNvPicPr>
-          <p:nvPr/>
-        </p:nvPicPr>
-        <p:blipFill>
-          <a:blip r:embed="rId2"/>
-          <a:stretch>
-            <a:fillRect/>
-          </a:stretch>
-        </p:blipFill>
-        <p:spPr>
-          <a:xfrm>
-            <a:off x="10271455" y="5998464"/>
-            <a:ext cx="1463040" cy="643233"/>
-          </a:xfrm>
-          <a:prstGeom prst="rect">
-            <a:avLst/>
-          </a:prstGeom>
-        </p:spPr>
-      </p:pic>
+      <p:sp>
+        <p:nvSpPr>
+          <p:cNvPr id="3" name="Rectangle 2"/>
+          <p:cNvSpPr/>
+          <p:nvPr/>
+        </p:nvSpPr>
+        <p:spPr>
+          <a:xfrm>
+            <a:off x="0" y="960120"/>
+            <a:ext cx="12191695" cy="41148"/>
+          </a:xfrm>
+          <a:prstGeom prst="rect">
+            <a:avLst/>
+          </a:prstGeom>
+          <a:solidFill>
+            <a:srgbClr val="FFD000"/>
+          </a:solidFill>
+          <a:ln>
+            <a:noFill/>
+          </a:ln>
+        </p:spPr>
+        <p:style>
+          <a:lnRef idx="1">
+            <a:schemeClr val="accent1"/>
+          </a:lnRef>
+          <a:fillRef idx="3">
+            <a:schemeClr val="accent1"/>
+          </a:fillRef>
+          <a:effectRef idx="2">
+            <a:schemeClr val="accent1"/>
+          </a:effectRef>
+          <a:fontRef idx="minor">
+            <a:schemeClr val="lt1"/>
+          </a:fontRef>
+        </p:style>
+        <p:txBody>
+          <a:bodyPr rtlCol="0" anchor="ctr"/>
+          <a:lstStyle/>
+          <a:p>
+            <a:pPr algn="ctr"/>
+          </a:p>
+        </p:txBody>
+      </p:sp>
       <p:sp>
         <p:nvSpPr>
           <p:cNvPr id="4" name="TextBox 3"/>
@@ -6946,41 +5249,8 @@
         </p:nvSpPr>
         <p:spPr>
           <a:xfrm>
-            <a:off x="457200" y="1737360"/>
-            <a:ext cx="11277295" cy="1097280"/>
-          </a:xfrm>
-          <a:prstGeom prst="rect">
-            <a:avLst/>
-          </a:prstGeom>
-          <a:noFill/>
-        </p:spPr>
-        <p:txBody>
-          <a:bodyPr wrap="square" anchor="ctr"/>
-          <a:lstStyle/>
-          <a:p>
-            <a:pPr algn="ctr"/>
-            <a:r>
-              <a:rPr sz="3400" b="1" i="0">
-                <a:solidFill>
-                  <a:srgbClr val="095292"/>
-                </a:solidFill>
-                <a:latin typeface="Calibri"/>
-              </a:rPr>
-              <a:t>Nos vemos en la Clase 14</a:t>
-            </a:r>
-          </a:p>
-        </p:txBody>
-      </p:sp>
-      <p:sp>
-        <p:nvSpPr>
-          <p:cNvPr id="5" name="TextBox 4"/>
-          <p:cNvSpPr txBox="1"/>
-          <p:nvPr/>
-        </p:nvSpPr>
-        <p:spPr>
-          <a:xfrm>
-            <a:off x="457200" y="3017520"/>
-            <a:ext cx="11277295" cy="1645920"/>
+            <a:off x="457200" y="164592"/>
+            <a:ext cx="11277295" cy="502920"/>
           </a:xfrm>
           <a:prstGeom prst="rect">
             <a:avLst/>
@@ -6993,49 +5263,28 @@
           </a:bodyPr>
           <a:lstStyle/>
           <a:p>
-            <a:pPr algn="ctr">
-              <a:spcAft>
-                <a:spcPts val="600"/>
-              </a:spcAft>
-            </a:pPr>
-            <a:r>
-              <a:rPr sz="1600" b="0" i="0">
-                <a:solidFill>
-                  <a:srgbClr val="333333"/>
-                </a:solidFill>
-                <a:latin typeface="Calibri"/>
-              </a:rPr>
-              <a:t>Evaluación de impacto social y ambiental · Clase 13</a:t>
-            </a:r>
-          </a:p>
-          <a:p>
-            <a:pPr algn="ctr">
-              <a:spcAft>
-                <a:spcPts val="600"/>
-              </a:spcAft>
-            </a:pPr>
-            <a:r>
-              <a:rPr sz="1600" b="0" i="0">
-                <a:solidFill>
-                  <a:srgbClr val="333333"/>
-                </a:solidFill>
-                <a:latin typeface="Calibri"/>
-              </a:rPr>
-              <a:t>FI300101 · UNIAJC · Ingeniería de Sistemas</a:t>
-            </a:r>
-          </a:p>
-        </p:txBody>
-      </p:sp>
-      <p:sp>
-        <p:nvSpPr>
-          <p:cNvPr id="6" name="TextBox 5"/>
+            <a:r>
+              <a:rPr sz="2600" b="1" i="0">
+                <a:solidFill>
+                  <a:srgbClr val="FFFFFF"/>
+                </a:solidFill>
+                <a:latin typeface="Calibri"/>
+              </a:rPr>
+              <a:t>Impacto no es intención, y el indirecto es el que muerde (2/2)</a:t>
+            </a:r>
+          </a:p>
+        </p:txBody>
+      </p:sp>
+      <p:sp>
+        <p:nvSpPr>
+          <p:cNvPr id="5" name="TextBox 4"/>
           <p:cNvSpPr txBox="1"/>
           <p:nvPr/>
         </p:nvSpPr>
         <p:spPr>
           <a:xfrm>
-            <a:off x="457200" y="4754880"/>
-            <a:ext cx="11277295" cy="640080"/>
+            <a:off x="457200" y="1170432"/>
+            <a:ext cx="11277295" cy="5230368"/>
           </a:xfrm>
           <a:prstGeom prst="rect">
             <a:avLst/>
@@ -7048,15 +5297,2010 @@
           </a:bodyPr>
           <a:lstStyle/>
           <a:p>
+            <a:pPr>
+              <a:spcAft>
+                <a:spcPts val="800"/>
+              </a:spcAft>
+            </a:pPr>
+            <a:r>
+              <a:rPr sz="2000" b="0" i="0">
+                <a:solidFill>
+                  <a:srgbClr val="333333"/>
+                </a:solidFill>
+                <a:latin typeface="Calibri"/>
+              </a:rPr>
+              <a:t>–   Es lo contrario, y hay que decirlo explícitamente porque van a dudar: </a:t>
+            </a:r>
+            <a:r>
+              <a:rPr sz="2000" b="1" i="0">
+                <a:solidFill>
+                  <a:srgbClr val="333333"/>
+                </a:solidFill>
+                <a:latin typeface="Calibri"/>
+              </a:rPr>
+              <a:t>un informe con solo impactos positivos no es optimista, es incompleto</a:t>
+            </a:r>
+            <a:r>
+              <a:rPr sz="2000" b="0" i="0">
+                <a:solidFill>
+                  <a:srgbClr val="333333"/>
+                </a:solidFill>
+                <a:latin typeface="Calibri"/>
+              </a:rPr>
+              <a:t>, y quien lo lea va a desconfiar de todo lo demás.</a:t>
+            </a:r>
+          </a:p>
+          <a:p>
+            <a:pPr>
+              <a:spcAft>
+                <a:spcPts val="800"/>
+              </a:spcAft>
+            </a:pPr>
+            <a:r>
+              <a:rPr sz="2000" b="0" i="0">
+                <a:solidFill>
+                  <a:srgbClr val="333333"/>
+                </a:solidFill>
+                <a:latin typeface="Calibri"/>
+              </a:rPr>
+              <a:t>–   En este curso declarar un negativo con su mitigación </a:t>
+            </a:r>
+            <a:r>
+              <a:rPr sz="2000" b="1" i="0">
+                <a:solidFill>
+                  <a:srgbClr val="333333"/>
+                </a:solidFill>
+                <a:latin typeface="Calibri"/>
+              </a:rPr>
+              <a:t>sube</a:t>
+            </a:r>
+            <a:r>
+              <a:rPr sz="2000" b="0" i="0">
+                <a:solidFill>
+                  <a:srgbClr val="333333"/>
+                </a:solidFill>
+                <a:latin typeface="Calibri"/>
+              </a:rPr>
+              <a:t> la nota. </a:t>
+            </a:r>
+            <a:r>
+              <a:rPr sz="2000" b="1" i="0">
+                <a:solidFill>
+                  <a:srgbClr val="333333"/>
+                </a:solidFill>
+                <a:latin typeface="Calibri"/>
+              </a:rPr>
+              <a:t>Corto y largo plazo.</a:t>
+            </a:r>
+            <a:r>
+              <a:rPr sz="2000" b="0" i="0">
+                <a:solidFill>
+                  <a:srgbClr val="333333"/>
+                </a:solidFill>
+                <a:latin typeface="Calibri"/>
+              </a:rPr>
+              <a:t> Algunos efectos solo aparecen con el uso sostenido: la lista que crece y se vuelve inmanejable, la dependencia de una sola voluntaria que sabe actualizarla.</a:t>
+            </a:r>
+          </a:p>
+          <a:p>
+            <a:pPr>
+              <a:spcAft>
+                <a:spcPts val="800"/>
+              </a:spcAft>
+            </a:pPr>
+            <a:r>
+              <a:rPr sz="2000" b="0" i="0">
+                <a:solidFill>
+                  <a:srgbClr val="333333"/>
+                </a:solidFill>
+                <a:latin typeface="Calibri"/>
+              </a:rPr>
+              <a:t>–   Nombrarlos sin poder medirlos ya es hacer ingeniería, y es material directo para la sección de trabajo futuro del informe final.</a:t>
+            </a:r>
+          </a:p>
+        </p:txBody>
+      </p:sp>
+      <p:sp>
+        <p:nvSpPr>
+          <p:cNvPr id="6" name="TextBox 5"/>
+          <p:cNvSpPr txBox="1"/>
+          <p:nvPr/>
+        </p:nvSpPr>
+        <p:spPr>
+          <a:xfrm>
+            <a:off x="11185855" y="6473952"/>
+            <a:ext cx="640080" cy="274320"/>
+          </a:xfrm>
+          <a:prstGeom prst="rect">
+            <a:avLst/>
+          </a:prstGeom>
+          <a:noFill/>
+        </p:spPr>
+        <p:txBody>
+          <a:bodyPr wrap="square">
+            <a:spAutoFit/>
+          </a:bodyPr>
+          <a:lstStyle/>
+          <a:p>
+            <a:pPr algn="r"/>
+            <a:r>
+              <a:rPr sz="1100" b="0" i="0">
+                <a:solidFill>
+                  <a:srgbClr val="666666"/>
+                </a:solidFill>
+                <a:latin typeface="Calibri"/>
+              </a:rPr>
+              <a:t>14</a:t>
+            </a:r>
+          </a:p>
+        </p:txBody>
+      </p:sp>
+    </p:spTree>
+  </p:cSld>
+  <p:clrMapOvr>
+    <a:masterClrMapping/>
+  </p:clrMapOvr>
+</p:sld>
+</file>
+
+<file path=ppt/slides/slide15.xml><?xml version="1.0" encoding="utf-8"?>
+<p:sld xmlns:a="http://schemas.openxmlformats.org/drawingml/2006/main" xmlns:p="http://schemas.openxmlformats.org/presentationml/2006/main" xmlns:r="http://schemas.openxmlformats.org/officeDocument/2006/relationships">
+  <p:cSld>
+    <p:bg>
+      <p:bgPr>
+        <a:solidFill>
+          <a:srgbClr val="FFFFFF"/>
+        </a:solidFill>
+        <a:effectLst/>
+      </p:bgPr>
+    </p:bg>
+    <p:spTree>
+      <p:nvGrpSpPr>
+        <p:cNvPr id="1" name=""/>
+        <p:cNvGrpSpPr/>
+        <p:nvPr/>
+      </p:nvGrpSpPr>
+      <p:grpSpPr/>
+      <p:sp>
+        <p:nvSpPr>
+          <p:cNvPr id="2" name="Rectangle 1"/>
+          <p:cNvSpPr/>
+          <p:nvPr/>
+        </p:nvSpPr>
+        <p:spPr>
+          <a:xfrm>
+            <a:off x="0" y="0"/>
+            <a:ext cx="12191695" cy="960120"/>
+          </a:xfrm>
+          <a:prstGeom prst="rect">
+            <a:avLst/>
+          </a:prstGeom>
+          <a:solidFill>
+            <a:srgbClr val="095292"/>
+          </a:solidFill>
+          <a:ln>
+            <a:noFill/>
+          </a:ln>
+        </p:spPr>
+        <p:style>
+          <a:lnRef idx="1">
+            <a:schemeClr val="accent1"/>
+          </a:lnRef>
+          <a:fillRef idx="3">
+            <a:schemeClr val="accent1"/>
+          </a:fillRef>
+          <a:effectRef idx="2">
+            <a:schemeClr val="accent1"/>
+          </a:effectRef>
+          <a:fontRef idx="minor">
+            <a:schemeClr val="lt1"/>
+          </a:fontRef>
+        </p:style>
+        <p:txBody>
+          <a:bodyPr rtlCol="0" anchor="ctr"/>
+          <a:lstStyle/>
+          <a:p>
             <a:pPr algn="ctr"/>
+          </a:p>
+        </p:txBody>
+      </p:sp>
+      <p:sp>
+        <p:nvSpPr>
+          <p:cNvPr id="3" name="Rectangle 2"/>
+          <p:cNvSpPr/>
+          <p:nvPr/>
+        </p:nvSpPr>
+        <p:spPr>
+          <a:xfrm>
+            <a:off x="0" y="960120"/>
+            <a:ext cx="12191695" cy="41148"/>
+          </a:xfrm>
+          <a:prstGeom prst="rect">
+            <a:avLst/>
+          </a:prstGeom>
+          <a:solidFill>
+            <a:srgbClr val="FFD000"/>
+          </a:solidFill>
+          <a:ln>
+            <a:noFill/>
+          </a:ln>
+        </p:spPr>
+        <p:style>
+          <a:lnRef idx="1">
+            <a:schemeClr val="accent1"/>
+          </a:lnRef>
+          <a:fillRef idx="3">
+            <a:schemeClr val="accent1"/>
+          </a:fillRef>
+          <a:effectRef idx="2">
+            <a:schemeClr val="accent1"/>
+          </a:effectRef>
+          <a:fontRef idx="minor">
+            <a:schemeClr val="lt1"/>
+          </a:fontRef>
+        </p:style>
+        <p:txBody>
+          <a:bodyPr rtlCol="0" anchor="ctr"/>
+          <a:lstStyle/>
+          <a:p>
+            <a:pPr algn="ctr"/>
+          </a:p>
+        </p:txBody>
+      </p:sp>
+      <p:sp>
+        <p:nvSpPr>
+          <p:cNvPr id="4" name="TextBox 3"/>
+          <p:cNvSpPr txBox="1"/>
+          <p:nvPr/>
+        </p:nvSpPr>
+        <p:spPr>
+          <a:xfrm>
+            <a:off x="457200" y="164592"/>
+            <a:ext cx="11277295" cy="502920"/>
+          </a:xfrm>
+          <a:prstGeom prst="rect">
+            <a:avLst/>
+          </a:prstGeom>
+          <a:noFill/>
+        </p:spPr>
+        <p:txBody>
+          <a:bodyPr wrap="square">
+            <a:spAutoFit/>
+          </a:bodyPr>
+          <a:lstStyle/>
+          <a:p>
+            <a:r>
+              <a:rPr sz="2600" b="1" i="0">
+                <a:solidFill>
+                  <a:srgbClr val="FFFFFF"/>
+                </a:solidFill>
+                <a:latin typeface="Calibri"/>
+              </a:rPr>
+              <a:t>Los afectados que no eligieron nada (1/2)</a:t>
+            </a:r>
+          </a:p>
+        </p:txBody>
+      </p:sp>
+      <p:sp>
+        <p:nvSpPr>
+          <p:cNvPr id="5" name="TextBox 4"/>
+          <p:cNvSpPr txBox="1"/>
+          <p:nvPr/>
+        </p:nvSpPr>
+        <p:spPr>
+          <a:xfrm>
+            <a:off x="457200" y="1170432"/>
+            <a:ext cx="11277295" cy="5230368"/>
+          </a:xfrm>
+          <a:prstGeom prst="rect">
+            <a:avLst/>
+          </a:prstGeom>
+          <a:noFill/>
+        </p:spPr>
+        <p:txBody>
+          <a:bodyPr wrap="square">
+            <a:spAutoFit/>
+          </a:bodyPr>
+          <a:lstStyle/>
+          <a:p>
+            <a:pPr>
+              <a:spcAft>
+                <a:spcPts val="800"/>
+              </a:spcAft>
+            </a:pPr>
+            <a:r>
+              <a:rPr sz="2000" b="0" i="0">
+                <a:solidFill>
+                  <a:srgbClr val="333333"/>
+                </a:solidFill>
+                <a:latin typeface="Calibri"/>
+              </a:rPr>
+              <a:t>–   La frase que ordena este bloque: **los usuarios son la parte fácil, porque por definición eligieron usarla</a:t>
+            </a:r>
+          </a:p>
+          <a:p>
+            <a:pPr>
+              <a:spcAft>
+                <a:spcPts val="800"/>
+              </a:spcAft>
+            </a:pPr>
+            <a:r>
+              <a:rPr sz="2000" b="0" i="0">
+                <a:solidFill>
+                  <a:srgbClr val="333333"/>
+                </a:solidFill>
+                <a:latin typeface="Calibri"/>
+              </a:rPr>
+              <a:t>–   Los afectados no eligieron nada.</a:t>
+            </a:r>
             <a:r>
               <a:rPr sz="2000" b="1" i="0">
                 <a:solidFill>
-                  <a:srgbClr val="269CCB"/>
-                </a:solidFill>
-                <a:latin typeface="Calibri"/>
-              </a:rPr>
-              <a:t>Los usuarios eligieron usarla; los afectados no eligieron nada</a:t>
+                  <a:srgbClr val="333333"/>
+                </a:solidFill>
+                <a:latin typeface="Calibri"/>
+              </a:rPr>
+              <a:t> De ahí la obligación de buscarlos activamente. </a:t>
+            </a:r>
+            <a:r>
+              <a:rPr sz="2000" b="0" i="0">
+                <a:solidFill>
+                  <a:srgbClr val="333333"/>
+                </a:solidFill>
+                <a:latin typeface="Calibri"/>
+              </a:rPr>
+              <a:t>Paso 1: empezar por la propia lista.** En la sesión 3 hicieron un listado de actores no usuarios.</a:t>
+            </a:r>
+          </a:p>
+          <a:p>
+            <a:pPr>
+              <a:spcAft>
+                <a:spcPts val="800"/>
+              </a:spcAft>
+            </a:pPr>
+            <a:r>
+              <a:rPr sz="2000" b="0" i="0">
+                <a:solidFill>
+                  <a:srgbClr val="333333"/>
+                </a:solidFill>
+                <a:latin typeface="Calibri"/>
+              </a:rPr>
+              <a:t>–   Casi todos lo olvidaron, y ahí está la mitad del trabajo de hoy.</a:t>
+            </a:r>
+          </a:p>
+          <a:p>
+            <a:pPr>
+              <a:spcAft>
+                <a:spcPts val="800"/>
+              </a:spcAft>
+            </a:pPr>
+            <a:r>
+              <a:rPr sz="2000" b="0" i="0">
+                <a:solidFill>
+                  <a:srgbClr val="333333"/>
+                </a:solidFill>
+                <a:latin typeface="Calibri"/>
+              </a:rPr>
+              <a:t>–   Vale la pena señalar la lección de método —es la tercera vez en el curso que un material viejo resuelve un problema nuevo—: </a:t>
+            </a:r>
+            <a:r>
+              <a:rPr sz="2000" b="1" i="0">
+                <a:solidFill>
+                  <a:srgbClr val="333333"/>
+                </a:solidFill>
+                <a:latin typeface="Calibri"/>
+              </a:rPr>
+              <a:t>documentar es una inversión, no un trámite.</a:t>
+            </a:r>
+            <a:r>
+              <a:rPr sz="2000" b="0" i="0">
+                <a:solidFill>
+                  <a:srgbClr val="333333"/>
+                </a:solidFill>
+                <a:latin typeface="Calibri"/>
+              </a:rPr>
+              <a:t> </a:t>
+            </a:r>
+            <a:r>
+              <a:rPr sz="2000" b="1" i="0">
+                <a:solidFill>
+                  <a:srgbClr val="333333"/>
+                </a:solidFill>
+                <a:latin typeface="Calibri"/>
+              </a:rPr>
+              <a:t>Paso 2: seguir la cadena de trabajo.</a:t>
+            </a:r>
+            <a:r>
+              <a:rPr sz="2000" b="0" i="0">
+                <a:solidFill>
+                  <a:srgbClr val="333333"/>
+                </a:solidFill>
+                <a:latin typeface="Calibri"/>
+              </a:rPr>
+              <a:t> ¿A quién le llega más trabajo y a quién menos?</a:t>
+            </a:r>
+          </a:p>
+          <a:p>
+            <a:pPr>
+              <a:spcAft>
+                <a:spcPts val="800"/>
+              </a:spcAft>
+            </a:pPr>
+            <a:r>
+              <a:rPr sz="2000" b="0" i="0">
+                <a:solidFill>
+                  <a:srgbClr val="333333"/>
+                </a:solidFill>
+                <a:latin typeface="Calibri"/>
+              </a:rPr>
+              <a:t>–   Es el impacto indirecto más frecuente.</a:t>
+            </a:r>
+          </a:p>
+          <a:p>
+            <a:pPr>
+              <a:spcAft>
+                <a:spcPts val="800"/>
+              </a:spcAft>
+            </a:pPr>
+            <a:r>
+              <a:rPr sz="2000" b="0" i="0">
+                <a:solidFill>
+                  <a:srgbClr val="333333"/>
+                </a:solidFill>
+                <a:latin typeface="Calibri"/>
+              </a:rPr>
+              <a:t>–   En el caso modelo, la voluntaria del cierre; en un proyecto de gestión, la persona que ahora tiene que llenar el formato. </a:t>
+            </a:r>
+            <a:r>
+              <a:rPr sz="2000" b="1" i="0">
+                <a:solidFill>
+                  <a:srgbClr val="333333"/>
+                </a:solidFill>
+                <a:latin typeface="Calibri"/>
+              </a:rPr>
+              <a:t>Paso 3: preguntar quién NO puede usarla.</a:t>
+            </a:r>
+            <a:r>
+              <a:rPr sz="2000" b="0" i="0">
+                <a:solidFill>
+                  <a:srgbClr val="333333"/>
+                </a:solidFill>
+                <a:latin typeface="Calibri"/>
+              </a:rPr>
+              <a:t> Este paso es el corazón ético de la sesión y hay que darle tiempo.</a:t>
+            </a:r>
+          </a:p>
+          <a:p>
+            <a:pPr>
+              <a:spcAft>
+                <a:spcPts val="800"/>
+              </a:spcAft>
+            </a:pPr>
+            <a:r>
+              <a:rPr sz="2000" b="0" i="0">
+                <a:solidFill>
+                  <a:srgbClr val="333333"/>
+                </a:solidFill>
+                <a:latin typeface="Calibri"/>
+              </a:rPr>
+              <a:t>–   Quien no tiene celular, datos, lectura fluida, buena vista, o el idioma.</a:t>
+            </a:r>
+          </a:p>
+        </p:txBody>
+      </p:sp>
+      <p:sp>
+        <p:nvSpPr>
+          <p:cNvPr id="6" name="TextBox 5"/>
+          <p:cNvSpPr txBox="1"/>
+          <p:nvPr/>
+        </p:nvSpPr>
+        <p:spPr>
+          <a:xfrm>
+            <a:off x="11185855" y="6473952"/>
+            <a:ext cx="640080" cy="274320"/>
+          </a:xfrm>
+          <a:prstGeom prst="rect">
+            <a:avLst/>
+          </a:prstGeom>
+          <a:noFill/>
+        </p:spPr>
+        <p:txBody>
+          <a:bodyPr wrap="square">
+            <a:spAutoFit/>
+          </a:bodyPr>
+          <a:lstStyle/>
+          <a:p>
+            <a:pPr algn="r"/>
+            <a:r>
+              <a:rPr sz="1100" b="0" i="0">
+                <a:solidFill>
+                  <a:srgbClr val="666666"/>
+                </a:solidFill>
+                <a:latin typeface="Calibri"/>
+              </a:rPr>
+              <a:t>15</a:t>
+            </a:r>
+          </a:p>
+        </p:txBody>
+      </p:sp>
+    </p:spTree>
+  </p:cSld>
+  <p:clrMapOvr>
+    <a:masterClrMapping/>
+  </p:clrMapOvr>
+</p:sld>
+</file>
+
+<file path=ppt/slides/slide16.xml><?xml version="1.0" encoding="utf-8"?>
+<p:sld xmlns:a="http://schemas.openxmlformats.org/drawingml/2006/main" xmlns:p="http://schemas.openxmlformats.org/presentationml/2006/main" xmlns:r="http://schemas.openxmlformats.org/officeDocument/2006/relationships">
+  <p:cSld>
+    <p:bg>
+      <p:bgPr>
+        <a:solidFill>
+          <a:srgbClr val="FFFFFF"/>
+        </a:solidFill>
+        <a:effectLst/>
+      </p:bgPr>
+    </p:bg>
+    <p:spTree>
+      <p:nvGrpSpPr>
+        <p:cNvPr id="1" name=""/>
+        <p:cNvGrpSpPr/>
+        <p:nvPr/>
+      </p:nvGrpSpPr>
+      <p:grpSpPr/>
+      <p:sp>
+        <p:nvSpPr>
+          <p:cNvPr id="2" name="Rectangle 1"/>
+          <p:cNvSpPr/>
+          <p:nvPr/>
+        </p:nvSpPr>
+        <p:spPr>
+          <a:xfrm>
+            <a:off x="0" y="0"/>
+            <a:ext cx="12191695" cy="960120"/>
+          </a:xfrm>
+          <a:prstGeom prst="rect">
+            <a:avLst/>
+          </a:prstGeom>
+          <a:solidFill>
+            <a:srgbClr val="095292"/>
+          </a:solidFill>
+          <a:ln>
+            <a:noFill/>
+          </a:ln>
+        </p:spPr>
+        <p:style>
+          <a:lnRef idx="1">
+            <a:schemeClr val="accent1"/>
+          </a:lnRef>
+          <a:fillRef idx="3">
+            <a:schemeClr val="accent1"/>
+          </a:fillRef>
+          <a:effectRef idx="2">
+            <a:schemeClr val="accent1"/>
+          </a:effectRef>
+          <a:fontRef idx="minor">
+            <a:schemeClr val="lt1"/>
+          </a:fontRef>
+        </p:style>
+        <p:txBody>
+          <a:bodyPr rtlCol="0" anchor="ctr"/>
+          <a:lstStyle/>
+          <a:p>
+            <a:pPr algn="ctr"/>
+          </a:p>
+        </p:txBody>
+      </p:sp>
+      <p:sp>
+        <p:nvSpPr>
+          <p:cNvPr id="3" name="Rectangle 2"/>
+          <p:cNvSpPr/>
+          <p:nvPr/>
+        </p:nvSpPr>
+        <p:spPr>
+          <a:xfrm>
+            <a:off x="0" y="960120"/>
+            <a:ext cx="12191695" cy="41148"/>
+          </a:xfrm>
+          <a:prstGeom prst="rect">
+            <a:avLst/>
+          </a:prstGeom>
+          <a:solidFill>
+            <a:srgbClr val="FFD000"/>
+          </a:solidFill>
+          <a:ln>
+            <a:noFill/>
+          </a:ln>
+        </p:spPr>
+        <p:style>
+          <a:lnRef idx="1">
+            <a:schemeClr val="accent1"/>
+          </a:lnRef>
+          <a:fillRef idx="3">
+            <a:schemeClr val="accent1"/>
+          </a:fillRef>
+          <a:effectRef idx="2">
+            <a:schemeClr val="accent1"/>
+          </a:effectRef>
+          <a:fontRef idx="minor">
+            <a:schemeClr val="lt1"/>
+          </a:fontRef>
+        </p:style>
+        <p:txBody>
+          <a:bodyPr rtlCol="0" anchor="ctr"/>
+          <a:lstStyle/>
+          <a:p>
+            <a:pPr algn="ctr"/>
+          </a:p>
+        </p:txBody>
+      </p:sp>
+      <p:sp>
+        <p:nvSpPr>
+          <p:cNvPr id="4" name="TextBox 3"/>
+          <p:cNvSpPr txBox="1"/>
+          <p:nvPr/>
+        </p:nvSpPr>
+        <p:spPr>
+          <a:xfrm>
+            <a:off x="457200" y="164592"/>
+            <a:ext cx="11277295" cy="502920"/>
+          </a:xfrm>
+          <a:prstGeom prst="rect">
+            <a:avLst/>
+          </a:prstGeom>
+          <a:noFill/>
+        </p:spPr>
+        <p:txBody>
+          <a:bodyPr wrap="square">
+            <a:spAutoFit/>
+          </a:bodyPr>
+          <a:lstStyle/>
+          <a:p>
+            <a:r>
+              <a:rPr sz="2600" b="1" i="0">
+                <a:solidFill>
+                  <a:srgbClr val="FFFFFF"/>
+                </a:solidFill>
+                <a:latin typeface="Calibri"/>
+              </a:rPr>
+              <a:t>Los afectados que no eligieron nada (2/2)</a:t>
+            </a:r>
+          </a:p>
+        </p:txBody>
+      </p:sp>
+      <p:sp>
+        <p:nvSpPr>
+          <p:cNvPr id="5" name="TextBox 4"/>
+          <p:cNvSpPr txBox="1"/>
+          <p:nvPr/>
+        </p:nvSpPr>
+        <p:spPr>
+          <a:xfrm>
+            <a:off x="457200" y="1170432"/>
+            <a:ext cx="11277295" cy="5230368"/>
+          </a:xfrm>
+          <a:prstGeom prst="rect">
+            <a:avLst/>
+          </a:prstGeom>
+          <a:noFill/>
+        </p:spPr>
+        <p:txBody>
+          <a:bodyPr wrap="square">
+            <a:spAutoFit/>
+          </a:bodyPr>
+          <a:lstStyle/>
+          <a:p>
+            <a:pPr>
+              <a:spcAft>
+                <a:spcPts val="800"/>
+              </a:spcAft>
+            </a:pPr>
+            <a:r>
+              <a:rPr sz="2000" b="0" i="0">
+                <a:solidFill>
+                  <a:srgbClr val="333333"/>
+                </a:solidFill>
+                <a:latin typeface="Calibri"/>
+              </a:rPr>
+              <a:t>–   La regla, dicha en una frase que se les debería quedar: **si su solución solo mejora a quien ya estaba mejor</a:t>
+            </a:r>
+          </a:p>
+          <a:p>
+            <a:pPr>
+              <a:spcAft>
+                <a:spcPts val="800"/>
+              </a:spcAft>
+            </a:pPr>
+            <a:r>
+              <a:rPr sz="2000" b="0" i="0">
+                <a:solidFill>
+                  <a:srgbClr val="333333"/>
+                </a:solidFill>
+                <a:latin typeface="Calibri"/>
+              </a:rPr>
+              <a:t>–   Empeoró la brecha.</a:t>
+            </a:r>
+            <a:r>
+              <a:rPr sz="2000" b="1" i="0">
+                <a:solidFill>
+                  <a:srgbClr val="333333"/>
+                </a:solidFill>
+                <a:latin typeface="Calibri"/>
+              </a:rPr>
+              <a:t> Y el matiz que hace la idea difícil y verdadera: el excluido puede quedar peor </a:t>
+            </a:r>
+            <a:r>
+              <a:rPr sz="2000" b="0" i="0">
+                <a:solidFill>
+                  <a:srgbClr val="333333"/>
+                </a:solidFill>
+                <a:latin typeface="Calibri"/>
+              </a:rPr>
+              <a:t>en términos relativos** aunque nada haya cambiado para él, porque los demás mejoraron y la atención se reordenó.</a:t>
+            </a:r>
+          </a:p>
+          <a:p>
+            <a:pPr>
+              <a:spcAft>
+                <a:spcPts val="800"/>
+              </a:spcAft>
+            </a:pPr>
+            <a:r>
+              <a:rPr sz="2000" b="0" i="0">
+                <a:solidFill>
+                  <a:srgbClr val="333333"/>
+                </a:solidFill>
+                <a:latin typeface="Calibri"/>
+              </a:rPr>
+              <a:t>–   Ese caso es real, es incómodo y es exactamente lo que hay que aprender a ver. </a:t>
+            </a:r>
+            <a:r>
+              <a:rPr sz="2000" b="1" i="0">
+                <a:solidFill>
+                  <a:srgbClr val="333333"/>
+                </a:solidFill>
+                <a:latin typeface="Calibri"/>
+              </a:rPr>
+              <a:t>Paso 4: mirar qué consume.</a:t>
+            </a:r>
+            <a:r>
+              <a:rPr sz="2000" b="0" i="0">
+                <a:solidFill>
+                  <a:srgbClr val="333333"/>
+                </a:solidFill>
+                <a:latin typeface="Calibri"/>
+              </a:rPr>
+              <a:t> Energía, datos, papel, hardware que acaba en basura electrónica.</a:t>
+            </a:r>
+          </a:p>
+          <a:p>
+            <a:pPr>
+              <a:spcAft>
+                <a:spcPts val="800"/>
+              </a:spcAft>
+            </a:pPr>
+            <a:r>
+              <a:rPr sz="2000" b="0" i="0">
+                <a:solidFill>
+                  <a:srgbClr val="333333"/>
+                </a:solidFill>
+                <a:latin typeface="Calibri"/>
+              </a:rPr>
+              <a:t>–   En la sesión 5 ya midieron un pedazo de su huella; hoy ese número entra a la matriz. </a:t>
+            </a:r>
+            <a:r>
+              <a:rPr sz="2000" b="1" i="0">
+                <a:solidFill>
+                  <a:srgbClr val="333333"/>
+                </a:solidFill>
+                <a:latin typeface="Calibri"/>
+              </a:rPr>
+              <a:t>Paso 5: preguntar a quién desplaza.</a:t>
+            </a:r>
+            <a:r>
+              <a:rPr sz="2000" b="0" i="0">
+                <a:solidFill>
+                  <a:srgbClr val="333333"/>
+                </a:solidFill>
+                <a:latin typeface="Calibri"/>
+              </a:rPr>
+              <a:t> Si la solución reemplaza algo, alguien hacía ese algo.</a:t>
+            </a:r>
+          </a:p>
+          <a:p>
+            <a:pPr>
+              <a:spcAft>
+                <a:spcPts val="800"/>
+              </a:spcAft>
+            </a:pPr>
+            <a:r>
+              <a:rPr sz="2000" b="0" i="0">
+                <a:solidFill>
+                  <a:srgbClr val="333333"/>
+                </a:solidFill>
+                <a:latin typeface="Calibri"/>
+              </a:rPr>
+              <a:t>–   Aquí conviene ser equilibrado y no moralizar: no siempre es malo ni siempre es evitable —la ingeniería lleva dos siglos automatizando trabajo—, pero </a:t>
+            </a:r>
+            <a:r>
+              <a:rPr sz="2000" b="1" i="0">
+                <a:solidFill>
+                  <a:srgbClr val="333333"/>
+                </a:solidFill>
+                <a:latin typeface="Calibri"/>
+              </a:rPr>
+              <a:t>omitirlo del análisis sí es un error técnico</a:t>
+            </a:r>
+            <a:r>
+              <a:rPr sz="2000" b="0" i="0">
+                <a:solidFill>
+                  <a:srgbClr val="333333"/>
+                </a:solidFill>
+                <a:latin typeface="Calibri"/>
+              </a:rPr>
+              <a:t>.</a:t>
+            </a:r>
+          </a:p>
+        </p:txBody>
+      </p:sp>
+      <p:sp>
+        <p:nvSpPr>
+          <p:cNvPr id="6" name="TextBox 5"/>
+          <p:cNvSpPr txBox="1"/>
+          <p:nvPr/>
+        </p:nvSpPr>
+        <p:spPr>
+          <a:xfrm>
+            <a:off x="11185855" y="6473952"/>
+            <a:ext cx="640080" cy="274320"/>
+          </a:xfrm>
+          <a:prstGeom prst="rect">
+            <a:avLst/>
+          </a:prstGeom>
+          <a:noFill/>
+        </p:spPr>
+        <p:txBody>
+          <a:bodyPr wrap="square">
+            <a:spAutoFit/>
+          </a:bodyPr>
+          <a:lstStyle/>
+          <a:p>
+            <a:pPr algn="r"/>
+            <a:r>
+              <a:rPr sz="1100" b="0" i="0">
+                <a:solidFill>
+                  <a:srgbClr val="666666"/>
+                </a:solidFill>
+                <a:latin typeface="Calibri"/>
+              </a:rPr>
+              <a:t>16</a:t>
+            </a:r>
+          </a:p>
+        </p:txBody>
+      </p:sp>
+    </p:spTree>
+  </p:cSld>
+  <p:clrMapOvr>
+    <a:masterClrMapping/>
+  </p:clrMapOvr>
+</p:sld>
+</file>
+
+<file path=ppt/slides/slide17.xml><?xml version="1.0" encoding="utf-8"?>
+<p:sld xmlns:a="http://schemas.openxmlformats.org/drawingml/2006/main" xmlns:p="http://schemas.openxmlformats.org/presentationml/2006/main" xmlns:r="http://schemas.openxmlformats.org/officeDocument/2006/relationships">
+  <p:cSld>
+    <p:bg>
+      <p:bgPr>
+        <a:solidFill>
+          <a:srgbClr val="FFFFFF"/>
+        </a:solidFill>
+        <a:effectLst/>
+      </p:bgPr>
+    </p:bg>
+    <p:spTree>
+      <p:nvGrpSpPr>
+        <p:cNvPr id="1" name=""/>
+        <p:cNvGrpSpPr/>
+        <p:nvPr/>
+      </p:nvGrpSpPr>
+      <p:grpSpPr/>
+      <p:sp>
+        <p:nvSpPr>
+          <p:cNvPr id="2" name="Rectangle 1"/>
+          <p:cNvSpPr/>
+          <p:nvPr/>
+        </p:nvSpPr>
+        <p:spPr>
+          <a:xfrm>
+            <a:off x="0" y="0"/>
+            <a:ext cx="12191695" cy="960120"/>
+          </a:xfrm>
+          <a:prstGeom prst="rect">
+            <a:avLst/>
+          </a:prstGeom>
+          <a:solidFill>
+            <a:srgbClr val="095292"/>
+          </a:solidFill>
+          <a:ln>
+            <a:noFill/>
+          </a:ln>
+        </p:spPr>
+        <p:style>
+          <a:lnRef idx="1">
+            <a:schemeClr val="accent1"/>
+          </a:lnRef>
+          <a:fillRef idx="3">
+            <a:schemeClr val="accent1"/>
+          </a:fillRef>
+          <a:effectRef idx="2">
+            <a:schemeClr val="accent1"/>
+          </a:effectRef>
+          <a:fontRef idx="minor">
+            <a:schemeClr val="lt1"/>
+          </a:fontRef>
+        </p:style>
+        <p:txBody>
+          <a:bodyPr rtlCol="0" anchor="ctr"/>
+          <a:lstStyle/>
+          <a:p>
+            <a:pPr algn="ctr"/>
+          </a:p>
+        </p:txBody>
+      </p:sp>
+      <p:sp>
+        <p:nvSpPr>
+          <p:cNvPr id="3" name="Rectangle 2"/>
+          <p:cNvSpPr/>
+          <p:nvPr/>
+        </p:nvSpPr>
+        <p:spPr>
+          <a:xfrm>
+            <a:off x="0" y="960120"/>
+            <a:ext cx="12191695" cy="41148"/>
+          </a:xfrm>
+          <a:prstGeom prst="rect">
+            <a:avLst/>
+          </a:prstGeom>
+          <a:solidFill>
+            <a:srgbClr val="FFD000"/>
+          </a:solidFill>
+          <a:ln>
+            <a:noFill/>
+          </a:ln>
+        </p:spPr>
+        <p:style>
+          <a:lnRef idx="1">
+            <a:schemeClr val="accent1"/>
+          </a:lnRef>
+          <a:fillRef idx="3">
+            <a:schemeClr val="accent1"/>
+          </a:fillRef>
+          <a:effectRef idx="2">
+            <a:schemeClr val="accent1"/>
+          </a:effectRef>
+          <a:fontRef idx="minor">
+            <a:schemeClr val="lt1"/>
+          </a:fontRef>
+        </p:style>
+        <p:txBody>
+          <a:bodyPr rtlCol="0" anchor="ctr"/>
+          <a:lstStyle/>
+          <a:p>
+            <a:pPr algn="ctr"/>
+          </a:p>
+        </p:txBody>
+      </p:sp>
+      <p:sp>
+        <p:nvSpPr>
+          <p:cNvPr id="4" name="TextBox 3"/>
+          <p:cNvSpPr txBox="1"/>
+          <p:nvPr/>
+        </p:nvSpPr>
+        <p:spPr>
+          <a:xfrm>
+            <a:off x="457200" y="164592"/>
+            <a:ext cx="11277295" cy="502920"/>
+          </a:xfrm>
+          <a:prstGeom prst="rect">
+            <a:avLst/>
+          </a:prstGeom>
+          <a:noFill/>
+        </p:spPr>
+        <p:txBody>
+          <a:bodyPr wrap="square">
+            <a:spAutoFit/>
+          </a:bodyPr>
+          <a:lstStyle/>
+          <a:p>
+            <a:r>
+              <a:rPr sz="2600" b="1" i="0">
+                <a:solidFill>
+                  <a:srgbClr val="FFFFFF"/>
+                </a:solidFill>
+                <a:latin typeface="Calibri"/>
+              </a:rPr>
+              <a:t>La matriz, la calificación y los límites del método (1/2)</a:t>
+            </a:r>
+          </a:p>
+        </p:txBody>
+      </p:sp>
+      <p:sp>
+        <p:nvSpPr>
+          <p:cNvPr id="5" name="TextBox 4"/>
+          <p:cNvSpPr txBox="1"/>
+          <p:nvPr/>
+        </p:nvSpPr>
+        <p:spPr>
+          <a:xfrm>
+            <a:off x="457200" y="1170432"/>
+            <a:ext cx="11277295" cy="5230368"/>
+          </a:xfrm>
+          <a:prstGeom prst="rect">
+            <a:avLst/>
+          </a:prstGeom>
+          <a:noFill/>
+        </p:spPr>
+        <p:txBody>
+          <a:bodyPr wrap="square">
+            <a:spAutoFit/>
+          </a:bodyPr>
+          <a:lstStyle/>
+          <a:p>
+            <a:pPr>
+              <a:spcAft>
+                <a:spcPts val="800"/>
+              </a:spcAft>
+            </a:pPr>
+            <a:r>
+              <a:rPr sz="1900" b="0" i="0">
+                <a:solidFill>
+                  <a:srgbClr val="333333"/>
+                </a:solidFill>
+                <a:latin typeface="Calibri"/>
+              </a:rPr>
+              <a:t>–   La primera tabla es la plantilla del taller y conviene recorrerla dimensión por dimensión, deteniéndose en la columna de la derecha: </a:t>
+            </a:r>
+            <a:r>
+              <a:rPr sz="1900" b="1" i="0">
+                <a:solidFill>
+                  <a:srgbClr val="333333"/>
+                </a:solidFill>
+                <a:latin typeface="Calibri"/>
+              </a:rPr>
+              <a:t>cómo se mide</a:t>
+            </a:r>
+            <a:r>
+              <a:rPr sz="1900" b="0" i="0">
+                <a:solidFill>
+                  <a:srgbClr val="333333"/>
+                </a:solidFill>
+                <a:latin typeface="Calibri"/>
+              </a:rPr>
+              <a:t>.</a:t>
+            </a:r>
+          </a:p>
+          <a:p>
+            <a:pPr>
+              <a:spcAft>
+                <a:spcPts val="800"/>
+              </a:spcAft>
+            </a:pPr>
+            <a:r>
+              <a:rPr sz="1900" b="0" i="0">
+                <a:solidFill>
+                  <a:srgbClr val="333333"/>
+                </a:solidFill>
+                <a:latin typeface="Calibri"/>
+              </a:rPr>
+              <a:t>–   Ahí está el aprendizaje.</a:t>
+            </a:r>
+          </a:p>
+          <a:p>
+            <a:pPr>
+              <a:spcAft>
+                <a:spcPts val="800"/>
+              </a:spcAft>
+            </a:pPr>
+            <a:r>
+              <a:rPr sz="1900" b="0" i="0">
+                <a:solidFill>
+                  <a:srgbClr val="333333"/>
+                </a:solidFill>
+                <a:latin typeface="Calibri"/>
+              </a:rPr>
+              <a:t>–   «Acceso» no se mide con adjetivos sino con el número de personas del grupo objetivo que quedan fuera y por qué motivo.</a:t>
+            </a:r>
+          </a:p>
+          <a:p>
+            <a:pPr>
+              <a:spcAft>
+                <a:spcPts val="800"/>
+              </a:spcAft>
+            </a:pPr>
+            <a:r>
+              <a:rPr sz="1900" b="0" i="0">
+                <a:solidFill>
+                  <a:srgbClr val="333333"/>
+                </a:solidFill>
+                <a:latin typeface="Calibri"/>
+              </a:rPr>
+              <a:t>–   «Carga de trabajo» se mide en minutos por día.</a:t>
+            </a:r>
+          </a:p>
+          <a:p>
+            <a:pPr>
+              <a:spcAft>
+                <a:spcPts val="800"/>
+              </a:spcAft>
+            </a:pPr>
+            <a:r>
+              <a:rPr sz="1900" b="0" i="0">
+                <a:solidFill>
+                  <a:srgbClr val="333333"/>
+                </a:solidFill>
+                <a:latin typeface="Calibri"/>
+              </a:rPr>
+              <a:t>–   «Consumo» se mide en KB por consulta por número de consultas estimadas — y ese número ya lo tienen desde la sesión 5.</a:t>
+            </a:r>
+          </a:p>
+          <a:p>
+            <a:pPr>
+              <a:spcAft>
+                <a:spcPts val="800"/>
+              </a:spcAft>
+            </a:pPr>
+            <a:r>
+              <a:rPr sz="1900" b="0" i="0">
+                <a:solidFill>
+                  <a:srgbClr val="333333"/>
+                </a:solidFill>
+                <a:latin typeface="Calibri"/>
+              </a:rPr>
+              <a:t>–   Insista en la nota al pie: </a:t>
+            </a:r>
+            <a:r>
+              <a:rPr sz="1900" b="1" i="0">
+                <a:solidFill>
+                  <a:srgbClr val="333333"/>
+                </a:solidFill>
+                <a:latin typeface="Calibri"/>
+              </a:rPr>
+              <a:t>una fila que no aplica se escribe «no aplica» con una línea de razón.</a:t>
+            </a:r>
+            <a:r>
+              <a:rPr sz="1900" b="0" i="0">
+                <a:solidFill>
+                  <a:srgbClr val="333333"/>
+                </a:solidFill>
+                <a:latin typeface="Calibri"/>
+              </a:rPr>
+              <a:t> Dejarla en blanco parece un olvido, y en un informe real el lector no puede distinguir entre «no aplica» y «no lo pensamos».</a:t>
+            </a:r>
+          </a:p>
+          <a:p>
+            <a:pPr>
+              <a:spcAft>
+                <a:spcPts val="800"/>
+              </a:spcAft>
+            </a:pPr>
+            <a:r>
+              <a:rPr sz="1900" b="0" i="0">
+                <a:solidFill>
+                  <a:srgbClr val="333333"/>
+                </a:solidFill>
+                <a:latin typeface="Calibri"/>
+              </a:rPr>
+              <a:t>–   La segunda tabla es la calificación, y aquí hay que hacer un ejercicio de honestidad intelectual que vale más que la tabla misma.</a:t>
+            </a:r>
+          </a:p>
+          <a:p>
+            <a:pPr>
+              <a:spcAft>
+                <a:spcPts val="800"/>
+              </a:spcAft>
+            </a:pPr>
+            <a:r>
+              <a:rPr sz="1900" b="0" i="0">
+                <a:solidFill>
+                  <a:srgbClr val="333333"/>
+                </a:solidFill>
+                <a:latin typeface="Calibri"/>
+              </a:rPr>
+              <a:t>–   Los cinco criterios —carácter, magnitud, extensión, duración, reversibilidad— provienen de las metodologías de evaluación de impacto ambiental</a:t>
+            </a:r>
+          </a:p>
+        </p:txBody>
+      </p:sp>
+      <p:sp>
+        <p:nvSpPr>
+          <p:cNvPr id="6" name="TextBox 5"/>
+          <p:cNvSpPr txBox="1"/>
+          <p:nvPr/>
+        </p:nvSpPr>
+        <p:spPr>
+          <a:xfrm>
+            <a:off x="11185855" y="6473952"/>
+            <a:ext cx="640080" cy="274320"/>
+          </a:xfrm>
+          <a:prstGeom prst="rect">
+            <a:avLst/>
+          </a:prstGeom>
+          <a:noFill/>
+        </p:spPr>
+        <p:txBody>
+          <a:bodyPr wrap="square">
+            <a:spAutoFit/>
+          </a:bodyPr>
+          <a:lstStyle/>
+          <a:p>
+            <a:pPr algn="r"/>
+            <a:r>
+              <a:rPr sz="1100" b="0" i="0">
+                <a:solidFill>
+                  <a:srgbClr val="666666"/>
+                </a:solidFill>
+                <a:latin typeface="Calibri"/>
+              </a:rPr>
+              <a:t>17</a:t>
+            </a:r>
+          </a:p>
+        </p:txBody>
+      </p:sp>
+    </p:spTree>
+  </p:cSld>
+  <p:clrMapOvr>
+    <a:masterClrMapping/>
+  </p:clrMapOvr>
+</p:sld>
+</file>
+
+<file path=ppt/slides/slide18.xml><?xml version="1.0" encoding="utf-8"?>
+<p:sld xmlns:a="http://schemas.openxmlformats.org/drawingml/2006/main" xmlns:p="http://schemas.openxmlformats.org/presentationml/2006/main" xmlns:r="http://schemas.openxmlformats.org/officeDocument/2006/relationships">
+  <p:cSld>
+    <p:bg>
+      <p:bgPr>
+        <a:solidFill>
+          <a:srgbClr val="FFFFFF"/>
+        </a:solidFill>
+        <a:effectLst/>
+      </p:bgPr>
+    </p:bg>
+    <p:spTree>
+      <p:nvGrpSpPr>
+        <p:cNvPr id="1" name=""/>
+        <p:cNvGrpSpPr/>
+        <p:nvPr/>
+      </p:nvGrpSpPr>
+      <p:grpSpPr/>
+      <p:sp>
+        <p:nvSpPr>
+          <p:cNvPr id="2" name="Rectangle 1"/>
+          <p:cNvSpPr/>
+          <p:nvPr/>
+        </p:nvSpPr>
+        <p:spPr>
+          <a:xfrm>
+            <a:off x="0" y="0"/>
+            <a:ext cx="12191695" cy="960120"/>
+          </a:xfrm>
+          <a:prstGeom prst="rect">
+            <a:avLst/>
+          </a:prstGeom>
+          <a:solidFill>
+            <a:srgbClr val="095292"/>
+          </a:solidFill>
+          <a:ln>
+            <a:noFill/>
+          </a:ln>
+        </p:spPr>
+        <p:style>
+          <a:lnRef idx="1">
+            <a:schemeClr val="accent1"/>
+          </a:lnRef>
+          <a:fillRef idx="3">
+            <a:schemeClr val="accent1"/>
+          </a:fillRef>
+          <a:effectRef idx="2">
+            <a:schemeClr val="accent1"/>
+          </a:effectRef>
+          <a:fontRef idx="minor">
+            <a:schemeClr val="lt1"/>
+          </a:fontRef>
+        </p:style>
+        <p:txBody>
+          <a:bodyPr rtlCol="0" anchor="ctr"/>
+          <a:lstStyle/>
+          <a:p>
+            <a:pPr algn="ctr"/>
+          </a:p>
+        </p:txBody>
+      </p:sp>
+      <p:sp>
+        <p:nvSpPr>
+          <p:cNvPr id="3" name="Rectangle 2"/>
+          <p:cNvSpPr/>
+          <p:nvPr/>
+        </p:nvSpPr>
+        <p:spPr>
+          <a:xfrm>
+            <a:off x="0" y="960120"/>
+            <a:ext cx="12191695" cy="41148"/>
+          </a:xfrm>
+          <a:prstGeom prst="rect">
+            <a:avLst/>
+          </a:prstGeom>
+          <a:solidFill>
+            <a:srgbClr val="FFD000"/>
+          </a:solidFill>
+          <a:ln>
+            <a:noFill/>
+          </a:ln>
+        </p:spPr>
+        <p:style>
+          <a:lnRef idx="1">
+            <a:schemeClr val="accent1"/>
+          </a:lnRef>
+          <a:fillRef idx="3">
+            <a:schemeClr val="accent1"/>
+          </a:fillRef>
+          <a:effectRef idx="2">
+            <a:schemeClr val="accent1"/>
+          </a:effectRef>
+          <a:fontRef idx="minor">
+            <a:schemeClr val="lt1"/>
+          </a:fontRef>
+        </p:style>
+        <p:txBody>
+          <a:bodyPr rtlCol="0" anchor="ctr"/>
+          <a:lstStyle/>
+          <a:p>
+            <a:pPr algn="ctr"/>
+          </a:p>
+        </p:txBody>
+      </p:sp>
+      <p:sp>
+        <p:nvSpPr>
+          <p:cNvPr id="4" name="TextBox 3"/>
+          <p:cNvSpPr txBox="1"/>
+          <p:nvPr/>
+        </p:nvSpPr>
+        <p:spPr>
+          <a:xfrm>
+            <a:off x="457200" y="164592"/>
+            <a:ext cx="11277295" cy="502920"/>
+          </a:xfrm>
+          <a:prstGeom prst="rect">
+            <a:avLst/>
+          </a:prstGeom>
+          <a:noFill/>
+        </p:spPr>
+        <p:txBody>
+          <a:bodyPr wrap="square">
+            <a:spAutoFit/>
+          </a:bodyPr>
+          <a:lstStyle/>
+          <a:p>
+            <a:r>
+              <a:rPr sz="2600" b="1" i="0">
+                <a:solidFill>
+                  <a:srgbClr val="FFFFFF"/>
+                </a:solidFill>
+                <a:latin typeface="Calibri"/>
+              </a:rPr>
+              <a:t>La matriz, la calificación y los límites del método (2/2)</a:t>
+            </a:r>
+          </a:p>
+        </p:txBody>
+      </p:sp>
+      <p:sp>
+        <p:nvSpPr>
+          <p:cNvPr id="5" name="TextBox 4"/>
+          <p:cNvSpPr txBox="1"/>
+          <p:nvPr/>
+        </p:nvSpPr>
+        <p:spPr>
+          <a:xfrm>
+            <a:off x="457200" y="1170432"/>
+            <a:ext cx="11277295" cy="5230368"/>
+          </a:xfrm>
+          <a:prstGeom prst="rect">
+            <a:avLst/>
+          </a:prstGeom>
+          <a:noFill/>
+        </p:spPr>
+        <p:txBody>
+          <a:bodyPr wrap="square">
+            <a:spAutoFit/>
+          </a:bodyPr>
+          <a:lstStyle/>
+          <a:p>
+            <a:pPr>
+              <a:spcAft>
+                <a:spcPts val="800"/>
+              </a:spcAft>
+            </a:pPr>
+            <a:r>
+              <a:rPr sz="2000" b="0" i="0">
+                <a:solidFill>
+                  <a:srgbClr val="333333"/>
+                </a:solidFill>
+                <a:latin typeface="Calibri"/>
+              </a:rPr>
+              <a:t>–   Que trabajan con matrices de este tipo desde los años setenta; la matriz de Leopold, de 1971, es el ejemplo clásico y sigue siendo el punto de partida de la mayoría de las variantes que se usan hoy.</a:t>
+            </a:r>
+          </a:p>
+          <a:p>
+            <a:pPr>
+              <a:spcAft>
+                <a:spcPts val="800"/>
+              </a:spcAft>
+            </a:pPr>
+            <a:r>
+              <a:rPr sz="2000" b="0" i="0">
+                <a:solidFill>
+                  <a:srgbClr val="333333"/>
+                </a:solidFill>
+                <a:latin typeface="Calibri"/>
+              </a:rPr>
+              <a:t>–   Si algún estudiante quiere profundizar, esa es la palabra que debe buscar, y ya saben de la sesión 9 cómo verificar una fuente.</a:t>
+            </a:r>
+          </a:p>
+          <a:p>
+            <a:pPr>
+              <a:spcAft>
+                <a:spcPts val="800"/>
+              </a:spcAft>
+            </a:pPr>
+            <a:r>
+              <a:rPr sz="2000" b="0" i="0">
+                <a:solidFill>
+                  <a:srgbClr val="333333"/>
+                </a:solidFill>
+                <a:latin typeface="Calibri"/>
+              </a:rPr>
+              <a:t>–   Y ahora el límite, que hay que decir en voz alta porque es formativo: </a:t>
+            </a:r>
+            <a:r>
+              <a:rPr sz="2000" b="1" i="0">
+                <a:solidFill>
+                  <a:srgbClr val="333333"/>
+                </a:solidFill>
+                <a:latin typeface="Calibri"/>
+              </a:rPr>
+              <a:t>las escalas son una convención para comparar y ordenar, no una medición.</a:t>
+            </a:r>
+            <a:r>
+              <a:rPr sz="2000" b="0" i="0">
+                <a:solidFill>
+                  <a:srgbClr val="333333"/>
+                </a:solidFill>
+                <a:latin typeface="Calibri"/>
+              </a:rPr>
+              <a:t> Poner «magnitud: alta» no convierte un juicio en un dato.</a:t>
+            </a:r>
+          </a:p>
+          <a:p>
+            <a:pPr>
+              <a:spcAft>
+                <a:spcPts val="800"/>
+              </a:spcAft>
+            </a:pPr>
+            <a:r>
+              <a:rPr sz="2000" b="0" i="0">
+                <a:solidFill>
+                  <a:srgbClr val="333333"/>
+                </a:solidFill>
+                <a:latin typeface="Calibri"/>
+              </a:rPr>
+              <a:t>–   Dos equipos honestos pueden calificar distinto el mismo impacto, y eso no invalida el método: la matriz sirve para </a:t>
+            </a:r>
+            <a:r>
+              <a:rPr sz="2000" b="1" i="0">
+                <a:solidFill>
+                  <a:srgbClr val="333333"/>
+                </a:solidFill>
+                <a:latin typeface="Calibri"/>
+              </a:rPr>
+              <a:t>ordenar prioridades y forzar la conversación</a:t>
+            </a:r>
+            <a:r>
+              <a:rPr sz="2000" b="0" i="0">
+                <a:solidFill>
+                  <a:srgbClr val="333333"/>
+                </a:solidFill>
+                <a:latin typeface="Calibri"/>
+              </a:rPr>
+              <a:t>, no para producir un número objetivo.</a:t>
+            </a:r>
+          </a:p>
+          <a:p>
+            <a:pPr>
+              <a:spcAft>
+                <a:spcPts val="800"/>
+              </a:spcAft>
+            </a:pPr>
+            <a:r>
+              <a:rPr sz="2000" b="0" i="0">
+                <a:solidFill>
+                  <a:srgbClr val="333333"/>
+                </a:solidFill>
+                <a:latin typeface="Calibri"/>
+              </a:rPr>
+              <a:t>–   Lo que sí es exigible es que </a:t>
+            </a:r>
+            <a:r>
+              <a:rPr sz="2000" b="1" i="0">
+                <a:solidFill>
+                  <a:srgbClr val="333333"/>
+                </a:solidFill>
+                <a:latin typeface="Calibri"/>
+              </a:rPr>
+              <a:t>cada calificación tenga una línea de justificación</a:t>
+            </a:r>
+            <a:r>
+              <a:rPr sz="2000" b="0" i="0">
+                <a:solidFill>
+                  <a:srgbClr val="333333"/>
+                </a:solidFill>
+                <a:latin typeface="Calibri"/>
+              </a:rPr>
+              <a:t>.</a:t>
+            </a:r>
+          </a:p>
+          <a:p>
+            <a:pPr>
+              <a:spcAft>
+                <a:spcPts val="800"/>
+              </a:spcAft>
+            </a:pPr>
+            <a:r>
+              <a:rPr sz="2000" b="0" i="0">
+                <a:solidFill>
+                  <a:srgbClr val="333333"/>
+                </a:solidFill>
+                <a:latin typeface="Calibri"/>
+              </a:rPr>
+              <a:t>–   Un estudiante que entiende esto no va a confundir nunca más una escala ordinal con una medición, y esa es una de las confusiones más comunes en informes técnicos.</a:t>
+            </a:r>
+          </a:p>
+        </p:txBody>
+      </p:sp>
+      <p:sp>
+        <p:nvSpPr>
+          <p:cNvPr id="6" name="TextBox 5"/>
+          <p:cNvSpPr txBox="1"/>
+          <p:nvPr/>
+        </p:nvSpPr>
+        <p:spPr>
+          <a:xfrm>
+            <a:off x="11185855" y="6473952"/>
+            <a:ext cx="640080" cy="274320"/>
+          </a:xfrm>
+          <a:prstGeom prst="rect">
+            <a:avLst/>
+          </a:prstGeom>
+          <a:noFill/>
+        </p:spPr>
+        <p:txBody>
+          <a:bodyPr wrap="square">
+            <a:spAutoFit/>
+          </a:bodyPr>
+          <a:lstStyle/>
+          <a:p>
+            <a:pPr algn="r"/>
+            <a:r>
+              <a:rPr sz="1100" b="0" i="0">
+                <a:solidFill>
+                  <a:srgbClr val="666666"/>
+                </a:solidFill>
+                <a:latin typeface="Calibri"/>
+              </a:rPr>
+              <a:t>18</a:t>
+            </a:r>
+          </a:p>
+        </p:txBody>
+      </p:sp>
+    </p:spTree>
+  </p:cSld>
+  <p:clrMapOvr>
+    <a:masterClrMapping/>
+  </p:clrMapOvr>
+</p:sld>
+</file>
+
+<file path=ppt/slides/slide19.xml><?xml version="1.0" encoding="utf-8"?>
+<p:sld xmlns:a="http://schemas.openxmlformats.org/drawingml/2006/main" xmlns:p="http://schemas.openxmlformats.org/presentationml/2006/main" xmlns:r="http://schemas.openxmlformats.org/officeDocument/2006/relationships">
+  <p:cSld>
+    <p:bg>
+      <p:bgPr>
+        <a:solidFill>
+          <a:srgbClr val="FFFFFF"/>
+        </a:solidFill>
+        <a:effectLst/>
+      </p:bgPr>
+    </p:bg>
+    <p:spTree>
+      <p:nvGrpSpPr>
+        <p:cNvPr id="1" name=""/>
+        <p:cNvGrpSpPr/>
+        <p:nvPr/>
+      </p:nvGrpSpPr>
+      <p:grpSpPr/>
+      <p:sp>
+        <p:nvSpPr>
+          <p:cNvPr id="2" name="Rectangle 1"/>
+          <p:cNvSpPr/>
+          <p:nvPr/>
+        </p:nvSpPr>
+        <p:spPr>
+          <a:xfrm>
+            <a:off x="0" y="0"/>
+            <a:ext cx="12191695" cy="960120"/>
+          </a:xfrm>
+          <a:prstGeom prst="rect">
+            <a:avLst/>
+          </a:prstGeom>
+          <a:solidFill>
+            <a:srgbClr val="095292"/>
+          </a:solidFill>
+          <a:ln>
+            <a:noFill/>
+          </a:ln>
+        </p:spPr>
+        <p:style>
+          <a:lnRef idx="1">
+            <a:schemeClr val="accent1"/>
+          </a:lnRef>
+          <a:fillRef idx="3">
+            <a:schemeClr val="accent1"/>
+          </a:fillRef>
+          <a:effectRef idx="2">
+            <a:schemeClr val="accent1"/>
+          </a:effectRef>
+          <a:fontRef idx="minor">
+            <a:schemeClr val="lt1"/>
+          </a:fontRef>
+        </p:style>
+        <p:txBody>
+          <a:bodyPr rtlCol="0" anchor="ctr"/>
+          <a:lstStyle/>
+          <a:p>
+            <a:pPr algn="ctr"/>
+          </a:p>
+        </p:txBody>
+      </p:sp>
+      <p:sp>
+        <p:nvSpPr>
+          <p:cNvPr id="3" name="Rectangle 2"/>
+          <p:cNvSpPr/>
+          <p:nvPr/>
+        </p:nvSpPr>
+        <p:spPr>
+          <a:xfrm>
+            <a:off x="0" y="960120"/>
+            <a:ext cx="12191695" cy="41148"/>
+          </a:xfrm>
+          <a:prstGeom prst="rect">
+            <a:avLst/>
+          </a:prstGeom>
+          <a:solidFill>
+            <a:srgbClr val="FFD000"/>
+          </a:solidFill>
+          <a:ln>
+            <a:noFill/>
+          </a:ln>
+        </p:spPr>
+        <p:style>
+          <a:lnRef idx="1">
+            <a:schemeClr val="accent1"/>
+          </a:lnRef>
+          <a:fillRef idx="3">
+            <a:schemeClr val="accent1"/>
+          </a:fillRef>
+          <a:effectRef idx="2">
+            <a:schemeClr val="accent1"/>
+          </a:effectRef>
+          <a:fontRef idx="minor">
+            <a:schemeClr val="lt1"/>
+          </a:fontRef>
+        </p:style>
+        <p:txBody>
+          <a:bodyPr rtlCol="0" anchor="ctr"/>
+          <a:lstStyle/>
+          <a:p>
+            <a:pPr algn="ctr"/>
+          </a:p>
+        </p:txBody>
+      </p:sp>
+      <p:sp>
+        <p:nvSpPr>
+          <p:cNvPr id="4" name="TextBox 3"/>
+          <p:cNvSpPr txBox="1"/>
+          <p:nvPr/>
+        </p:nvSpPr>
+        <p:spPr>
+          <a:xfrm>
+            <a:off x="457200" y="164592"/>
+            <a:ext cx="11277295" cy="502920"/>
+          </a:xfrm>
+          <a:prstGeom prst="rect">
+            <a:avLst/>
+          </a:prstGeom>
+          <a:noFill/>
+        </p:spPr>
+        <p:txBody>
+          <a:bodyPr wrap="square">
+            <a:spAutoFit/>
+          </a:bodyPr>
+          <a:lstStyle/>
+          <a:p>
+            <a:r>
+              <a:rPr sz="2600" b="1" i="0">
+                <a:solidFill>
+                  <a:srgbClr val="FFFFFF"/>
+                </a:solidFill>
+                <a:latin typeface="Calibri"/>
+              </a:rPr>
+              <a:t>Del adjetivo al indicador, y las tres honestidades (1/2)</a:t>
+            </a:r>
+          </a:p>
+        </p:txBody>
+      </p:sp>
+      <p:sp>
+        <p:nvSpPr>
+          <p:cNvPr id="5" name="TextBox 4"/>
+          <p:cNvSpPr txBox="1"/>
+          <p:nvPr/>
+        </p:nvSpPr>
+        <p:spPr>
+          <a:xfrm>
+            <a:off x="457200" y="1170432"/>
+            <a:ext cx="11277295" cy="5230368"/>
+          </a:xfrm>
+          <a:prstGeom prst="rect">
+            <a:avLst/>
+          </a:prstGeom>
+          <a:noFill/>
+        </p:spPr>
+        <p:txBody>
+          <a:bodyPr wrap="square">
+            <a:spAutoFit/>
+          </a:bodyPr>
+          <a:lstStyle/>
+          <a:p>
+            <a:pPr>
+              <a:spcAft>
+                <a:spcPts val="800"/>
+              </a:spcAft>
+            </a:pPr>
+            <a:r>
+              <a:rPr sz="1900" b="0" i="0">
+                <a:solidFill>
+                  <a:srgbClr val="333333"/>
+                </a:solidFill>
+                <a:latin typeface="Calibri"/>
+              </a:rPr>
+              <a:t>–   La diapositiva de antes y después es la que más rinde en clase, porque la columna izquierda es literalmente lo que van a escribir si no se les enseña otra cosa: «beneficia a la comunidad»</a:t>
+            </a:r>
+          </a:p>
+          <a:p>
+            <a:pPr>
+              <a:spcAft>
+                <a:spcPts val="800"/>
+              </a:spcAft>
+            </a:pPr>
+            <a:r>
+              <a:rPr sz="1900" b="0" i="0">
+                <a:solidFill>
+                  <a:srgbClr val="333333"/>
+                </a:solidFill>
+                <a:latin typeface="Calibri"/>
+              </a:rPr>
+              <a:t>–   «contribuye al cuidado del medio ambiente», «mejora la calidad de vida».</a:t>
+            </a:r>
+          </a:p>
+          <a:p>
+            <a:pPr>
+              <a:spcAft>
+                <a:spcPts val="800"/>
+              </a:spcAft>
+            </a:pPr>
+            <a:r>
+              <a:rPr sz="1900" b="0" i="0">
+                <a:solidFill>
+                  <a:srgbClr val="333333"/>
+                </a:solidFill>
+                <a:latin typeface="Calibri"/>
+              </a:rPr>
+              <a:t>–   Leerlas en voz alta produce risa incómoda, y ese es el momento de hacer la pregunta: </a:t>
+            </a:r>
+            <a:r>
+              <a:rPr sz="1900" b="1" i="0">
+                <a:solidFill>
+                  <a:srgbClr val="333333"/>
+                </a:solidFill>
+                <a:latin typeface="Calibri"/>
+              </a:rPr>
+              <a:t>¿qué proyecto NO podría escribir estas cinco frases?</a:t>
+            </a:r>
+            <a:r>
+              <a:rPr sz="1900" b="0" i="0">
+                <a:solidFill>
+                  <a:srgbClr val="333333"/>
+                </a:solidFill>
+                <a:latin typeface="Calibri"/>
+              </a:rPr>
+              <a:t> Ninguno.</a:t>
+            </a:r>
+          </a:p>
+          <a:p>
+            <a:pPr>
+              <a:spcAft>
+                <a:spcPts val="800"/>
+              </a:spcAft>
+            </a:pPr>
+            <a:r>
+              <a:rPr sz="1900" b="0" i="0">
+                <a:solidFill>
+                  <a:srgbClr val="333333"/>
+                </a:solidFill>
+                <a:latin typeface="Calibri"/>
+              </a:rPr>
+              <a:t>–   Una afirmación que sirve para todo no informa de nada.</a:t>
+            </a:r>
+          </a:p>
+          <a:p>
+            <a:pPr>
+              <a:spcAft>
+                <a:spcPts val="800"/>
+              </a:spcAft>
+            </a:pPr>
+            <a:r>
+              <a:rPr sz="1900" b="0" i="0">
+                <a:solidFill>
+                  <a:srgbClr val="333333"/>
+                </a:solidFill>
+                <a:latin typeface="Calibri"/>
+              </a:rPr>
+              <a:t>–   La columna derecha muestra el mismo contenido convertido en indicador: 4 de cada 10 viajes evitados, menos de 200 KB por consulta, un pasaje y 25 minutos ahorrados por visita.</a:t>
+            </a:r>
+          </a:p>
+          <a:p>
+            <a:pPr>
+              <a:spcAft>
+                <a:spcPts val="800"/>
+              </a:spcAft>
+            </a:pPr>
+            <a:r>
+              <a:rPr sz="1900" b="0" i="0">
+                <a:solidFill>
+                  <a:srgbClr val="333333"/>
+                </a:solidFill>
+                <a:latin typeface="Calibri"/>
+              </a:rPr>
+              <a:t>–   Y el detalle que hay que señalar con el cursor: </a:t>
+            </a:r>
+            <a:r>
+              <a:rPr sz="1900" b="1" i="0">
+                <a:solidFill>
+                  <a:srgbClr val="333333"/>
+                </a:solidFill>
+                <a:latin typeface="Calibri"/>
+              </a:rPr>
+              <a:t>las dos últimas líneas de la derecha son impactos negativos</a:t>
+            </a:r>
+            <a:r>
+              <a:rPr sz="1900" b="0" i="0">
+                <a:solidFill>
+                  <a:srgbClr val="333333"/>
+                </a:solidFill>
+                <a:latin typeface="Calibri"/>
+              </a:rPr>
+              <a:t> —1 de cada 5 vecinos queda fuera, 10 minutos diarios extra para la voluntaria— </a:t>
+            </a:r>
+            <a:r>
+              <a:rPr sz="1900" b="1" i="0">
+                <a:solidFill>
+                  <a:srgbClr val="333333"/>
+                </a:solidFill>
+                <a:latin typeface="Calibri"/>
+              </a:rPr>
+              <a:t>y son precisamente las que hacen creíbles a las otras tres</a:t>
+            </a:r>
+            <a:r>
+              <a:rPr sz="1900" b="0" i="0">
+                <a:solidFill>
+                  <a:srgbClr val="333333"/>
+                </a:solidFill>
+                <a:latin typeface="Calibri"/>
+              </a:rPr>
+              <a:t>.</a:t>
+            </a:r>
+          </a:p>
+          <a:p>
+            <a:pPr>
+              <a:spcAft>
+                <a:spcPts val="800"/>
+              </a:spcAft>
+            </a:pPr>
+            <a:r>
+              <a:rPr sz="1900" b="0" i="0">
+                <a:solidFill>
+                  <a:srgbClr val="333333"/>
+                </a:solidFill>
+                <a:latin typeface="Calibri"/>
+              </a:rPr>
+              <a:t>–   Un lector experimentado confía en un informe que reconoce sus costos.</a:t>
+            </a:r>
+          </a:p>
+          <a:p>
+            <a:pPr>
+              <a:spcAft>
+                <a:spcPts val="800"/>
+              </a:spcAft>
+            </a:pPr>
+            <a:r>
+              <a:rPr sz="1900" b="0" i="0">
+                <a:solidFill>
+                  <a:srgbClr val="333333"/>
+                </a:solidFill>
+                <a:latin typeface="Calibri"/>
+              </a:rPr>
+              <a:t>–   De las tres honestidades, la primera es la que hay que repetir hasta que se instale: </a:t>
+            </a:r>
+            <a:r>
+              <a:rPr sz="1900" b="1" i="0">
+                <a:solidFill>
+                  <a:srgbClr val="333333"/>
+                </a:solidFill>
+                <a:latin typeface="Calibri"/>
+              </a:rPr>
+              <a:t>«no genera ningún impacto negativo» es la frase que más credibilidad quita en un informe de ingeniería.</a:t>
+            </a:r>
+            <a:r>
+              <a:rPr sz="1900" b="0" i="0">
+                <a:solidFill>
+                  <a:srgbClr val="333333"/>
+                </a:solidFill>
+                <a:latin typeface="Calibri"/>
+              </a:rPr>
+              <a:t> Toda solución tiene costos.</a:t>
+            </a:r>
+          </a:p>
+        </p:txBody>
+      </p:sp>
+      <p:sp>
+        <p:nvSpPr>
+          <p:cNvPr id="6" name="TextBox 5"/>
+          <p:cNvSpPr txBox="1"/>
+          <p:nvPr/>
+        </p:nvSpPr>
+        <p:spPr>
+          <a:xfrm>
+            <a:off x="11185855" y="6473952"/>
+            <a:ext cx="640080" cy="274320"/>
+          </a:xfrm>
+          <a:prstGeom prst="rect">
+            <a:avLst/>
+          </a:prstGeom>
+          <a:noFill/>
+        </p:spPr>
+        <p:txBody>
+          <a:bodyPr wrap="square">
+            <a:spAutoFit/>
+          </a:bodyPr>
+          <a:lstStyle/>
+          <a:p>
+            <a:pPr algn="r"/>
+            <a:r>
+              <a:rPr sz="1100" b="0" i="0">
+                <a:solidFill>
+                  <a:srgbClr val="666666"/>
+                </a:solidFill>
+                <a:latin typeface="Calibri"/>
+              </a:rPr>
+              <a:t>19</a:t>
             </a:r>
           </a:p>
         </p:txBody>
@@ -7943,6 +8187,3326 @@
                 <a:latin typeface="Calibri"/>
               </a:rPr>
               <a:t>2</a:t>
+            </a:r>
+          </a:p>
+        </p:txBody>
+      </p:sp>
+    </p:spTree>
+  </p:cSld>
+  <p:clrMapOvr>
+    <a:masterClrMapping/>
+  </p:clrMapOvr>
+</p:sld>
+</file>
+
+<file path=ppt/slides/slide20.xml><?xml version="1.0" encoding="utf-8"?>
+<p:sld xmlns:a="http://schemas.openxmlformats.org/drawingml/2006/main" xmlns:p="http://schemas.openxmlformats.org/presentationml/2006/main" xmlns:r="http://schemas.openxmlformats.org/officeDocument/2006/relationships">
+  <p:cSld>
+    <p:bg>
+      <p:bgPr>
+        <a:solidFill>
+          <a:srgbClr val="FFFFFF"/>
+        </a:solidFill>
+        <a:effectLst/>
+      </p:bgPr>
+    </p:bg>
+    <p:spTree>
+      <p:nvGrpSpPr>
+        <p:cNvPr id="1" name=""/>
+        <p:cNvGrpSpPr/>
+        <p:nvPr/>
+      </p:nvGrpSpPr>
+      <p:grpSpPr/>
+      <p:sp>
+        <p:nvSpPr>
+          <p:cNvPr id="2" name="Rectangle 1"/>
+          <p:cNvSpPr/>
+          <p:nvPr/>
+        </p:nvSpPr>
+        <p:spPr>
+          <a:xfrm>
+            <a:off x="0" y="0"/>
+            <a:ext cx="12191695" cy="960120"/>
+          </a:xfrm>
+          <a:prstGeom prst="rect">
+            <a:avLst/>
+          </a:prstGeom>
+          <a:solidFill>
+            <a:srgbClr val="095292"/>
+          </a:solidFill>
+          <a:ln>
+            <a:noFill/>
+          </a:ln>
+        </p:spPr>
+        <p:style>
+          <a:lnRef idx="1">
+            <a:schemeClr val="accent1"/>
+          </a:lnRef>
+          <a:fillRef idx="3">
+            <a:schemeClr val="accent1"/>
+          </a:fillRef>
+          <a:effectRef idx="2">
+            <a:schemeClr val="accent1"/>
+          </a:effectRef>
+          <a:fontRef idx="minor">
+            <a:schemeClr val="lt1"/>
+          </a:fontRef>
+        </p:style>
+        <p:txBody>
+          <a:bodyPr rtlCol="0" anchor="ctr"/>
+          <a:lstStyle/>
+          <a:p>
+            <a:pPr algn="ctr"/>
+          </a:p>
+        </p:txBody>
+      </p:sp>
+      <p:sp>
+        <p:nvSpPr>
+          <p:cNvPr id="3" name="Rectangle 2"/>
+          <p:cNvSpPr/>
+          <p:nvPr/>
+        </p:nvSpPr>
+        <p:spPr>
+          <a:xfrm>
+            <a:off x="0" y="960120"/>
+            <a:ext cx="12191695" cy="41148"/>
+          </a:xfrm>
+          <a:prstGeom prst="rect">
+            <a:avLst/>
+          </a:prstGeom>
+          <a:solidFill>
+            <a:srgbClr val="FFD000"/>
+          </a:solidFill>
+          <a:ln>
+            <a:noFill/>
+          </a:ln>
+        </p:spPr>
+        <p:style>
+          <a:lnRef idx="1">
+            <a:schemeClr val="accent1"/>
+          </a:lnRef>
+          <a:fillRef idx="3">
+            <a:schemeClr val="accent1"/>
+          </a:fillRef>
+          <a:effectRef idx="2">
+            <a:schemeClr val="accent1"/>
+          </a:effectRef>
+          <a:fontRef idx="minor">
+            <a:schemeClr val="lt1"/>
+          </a:fontRef>
+        </p:style>
+        <p:txBody>
+          <a:bodyPr rtlCol="0" anchor="ctr"/>
+          <a:lstStyle/>
+          <a:p>
+            <a:pPr algn="ctr"/>
+          </a:p>
+        </p:txBody>
+      </p:sp>
+      <p:sp>
+        <p:nvSpPr>
+          <p:cNvPr id="4" name="TextBox 3"/>
+          <p:cNvSpPr txBox="1"/>
+          <p:nvPr/>
+        </p:nvSpPr>
+        <p:spPr>
+          <a:xfrm>
+            <a:off x="457200" y="164592"/>
+            <a:ext cx="11277295" cy="502920"/>
+          </a:xfrm>
+          <a:prstGeom prst="rect">
+            <a:avLst/>
+          </a:prstGeom>
+          <a:noFill/>
+        </p:spPr>
+        <p:txBody>
+          <a:bodyPr wrap="square">
+            <a:spAutoFit/>
+          </a:bodyPr>
+          <a:lstStyle/>
+          <a:p>
+            <a:r>
+              <a:rPr sz="2600" b="1" i="0">
+                <a:solidFill>
+                  <a:srgbClr val="FFFFFF"/>
+                </a:solidFill>
+                <a:latin typeface="Calibri"/>
+              </a:rPr>
+              <a:t>Del adjetivo al indicador, y las tres honestidades (2/2)</a:t>
+            </a:r>
+          </a:p>
+        </p:txBody>
+      </p:sp>
+      <p:sp>
+        <p:nvSpPr>
+          <p:cNvPr id="5" name="TextBox 4"/>
+          <p:cNvSpPr txBox="1"/>
+          <p:nvPr/>
+        </p:nvSpPr>
+        <p:spPr>
+          <a:xfrm>
+            <a:off x="457200" y="1170432"/>
+            <a:ext cx="11277295" cy="5230368"/>
+          </a:xfrm>
+          <a:prstGeom prst="rect">
+            <a:avLst/>
+          </a:prstGeom>
+          <a:noFill/>
+        </p:spPr>
+        <p:txBody>
+          <a:bodyPr wrap="square">
+            <a:spAutoFit/>
+          </a:bodyPr>
+          <a:lstStyle/>
+          <a:p>
+            <a:pPr>
+              <a:spcAft>
+                <a:spcPts val="800"/>
+              </a:spcAft>
+            </a:pPr>
+            <a:r>
+              <a:rPr sz="2000" b="0" i="0">
+                <a:solidFill>
+                  <a:srgbClr val="333333"/>
+                </a:solidFill>
+                <a:latin typeface="Calibri"/>
+              </a:rPr>
+              <a:t>–   Un equipo que no encuentra ninguno no buscó.</a:t>
+            </a:r>
+          </a:p>
+          <a:p>
+            <a:pPr>
+              <a:spcAft>
+                <a:spcPts val="800"/>
+              </a:spcAft>
+            </a:pPr>
+            <a:r>
+              <a:rPr sz="2000" b="0" i="0">
+                <a:solidFill>
+                  <a:srgbClr val="333333"/>
+                </a:solidFill>
+                <a:latin typeface="Calibri"/>
+              </a:rPr>
+              <a:t>–   La segunda desactiva la excusa más común: si no se puede medir, </a:t>
+            </a:r>
+            <a:r>
+              <a:rPr sz="2000" b="1" i="0">
+                <a:solidFill>
+                  <a:srgbClr val="333333"/>
+                </a:solidFill>
+                <a:latin typeface="Calibri"/>
+              </a:rPr>
+              <a:t>se describe con precisión y se dice cómo se podría medir</a:t>
+            </a:r>
+            <a:r>
+              <a:rPr sz="2000" b="0" i="0">
+                <a:solidFill>
+                  <a:srgbClr val="333333"/>
+                </a:solidFill>
+                <a:latin typeface="Calibri"/>
+              </a:rPr>
+              <a:t>.</a:t>
+            </a:r>
+          </a:p>
+          <a:p>
+            <a:pPr>
+              <a:spcAft>
+                <a:spcPts val="800"/>
+              </a:spcAft>
+            </a:pPr>
+            <a:r>
+              <a:rPr sz="2000" b="0" i="0">
+                <a:solidFill>
+                  <a:srgbClr val="333333"/>
+                </a:solidFill>
+                <a:latin typeface="Calibri"/>
+              </a:rPr>
+              <a:t>–   «No sabemos cuántos vecinos no tienen datos móviles; se sabría con una encuesta de diez casas» es una respuesta profesional, y de hecho es el tipo de frase que aparece en informes reales.</a:t>
+            </a:r>
+          </a:p>
+          <a:p>
+            <a:pPr>
+              <a:spcAft>
+                <a:spcPts val="800"/>
+              </a:spcAft>
+            </a:pPr>
+            <a:r>
+              <a:rPr sz="2000" b="0" i="0">
+                <a:solidFill>
+                  <a:srgbClr val="333333"/>
+                </a:solidFill>
+                <a:latin typeface="Calibri"/>
+              </a:rPr>
+              <a:t>–   Lo que no es profesional es un «no aplica» sin razón.</a:t>
+            </a:r>
+          </a:p>
+          <a:p>
+            <a:pPr>
+              <a:spcAft>
+                <a:spcPts val="800"/>
+              </a:spcAft>
+            </a:pPr>
+            <a:r>
+              <a:rPr sz="2000" b="0" i="0">
+                <a:solidFill>
+                  <a:srgbClr val="333333"/>
+                </a:solidFill>
+                <a:latin typeface="Calibri"/>
+              </a:rPr>
+              <a:t>–   La tercera cierra el arco del curso: </a:t>
+            </a:r>
+            <a:r>
+              <a:rPr sz="2000" b="1" i="0">
+                <a:solidFill>
+                  <a:srgbClr val="333333"/>
+                </a:solidFill>
+                <a:latin typeface="Calibri"/>
+              </a:rPr>
+              <a:t>el software también consume.</a:t>
+            </a:r>
+            <a:r>
+              <a:rPr sz="2000" b="0" i="0">
+                <a:solidFill>
+                  <a:srgbClr val="333333"/>
+                </a:solidFill>
+                <a:latin typeface="Calibri"/>
+              </a:rPr>
+              <a:t> Datos que alguien paga, energía, hardware que se vuelve residuo.</a:t>
+            </a:r>
+          </a:p>
+          <a:p>
+            <a:pPr>
+              <a:spcAft>
+                <a:spcPts val="800"/>
+              </a:spcAft>
+            </a:pPr>
+            <a:r>
+              <a:rPr sz="2000" b="0" i="0">
+                <a:solidFill>
+                  <a:srgbClr val="333333"/>
+                </a:solidFill>
+                <a:latin typeface="Calibri"/>
+              </a:rPr>
+              <a:t>–   Y aquí hay un hallazgo que vale la pena hacerles ver, porque conecta cuatro sesiones: el límite de 200 KB por consulta que definieron en la sesión 5 como indicador</a:t>
+            </a:r>
+          </a:p>
+          <a:p>
+            <a:pPr>
+              <a:spcAft>
+                <a:spcPts val="800"/>
+              </a:spcAft>
+            </a:pPr>
+            <a:r>
+              <a:rPr sz="2000" b="0" i="0">
+                <a:solidFill>
+                  <a:srgbClr val="333333"/>
+                </a:solidFill>
+                <a:latin typeface="Calibri"/>
+              </a:rPr>
+              <a:t>–   Se volvió requisito no funcional en la sesión 7, sirvió para descartar imágenes en las sesiones 10 y 11, y hoy entra a la matriz como </a:t>
+            </a:r>
+            <a:r>
+              <a:rPr sz="2000" b="1" i="0">
+                <a:solidFill>
+                  <a:srgbClr val="333333"/>
+                </a:solidFill>
+                <a:latin typeface="Calibri"/>
+              </a:rPr>
+              <a:t>medida de mitigación ambiental</a:t>
+            </a:r>
+            <a:r>
+              <a:rPr sz="2000" b="0" i="0">
+                <a:solidFill>
+                  <a:srgbClr val="333333"/>
+                </a:solidFill>
+                <a:latin typeface="Calibri"/>
+              </a:rPr>
+              <a:t>.</a:t>
+            </a:r>
+          </a:p>
+          <a:p>
+            <a:pPr>
+              <a:spcAft>
+                <a:spcPts val="800"/>
+              </a:spcAft>
+            </a:pPr>
+            <a:r>
+              <a:rPr sz="2000" b="0" i="0">
+                <a:solidFill>
+                  <a:srgbClr val="333333"/>
+                </a:solidFill>
+                <a:latin typeface="Calibri"/>
+              </a:rPr>
+              <a:t>–   Un requisito no funcional bien elegido es, a la vez, una mitigación — y eso no se puede improvisar en la Clase 13 si no se escribió en la 5.</a:t>
+            </a:r>
+          </a:p>
+        </p:txBody>
+      </p:sp>
+      <p:sp>
+        <p:nvSpPr>
+          <p:cNvPr id="6" name="TextBox 5"/>
+          <p:cNvSpPr txBox="1"/>
+          <p:nvPr/>
+        </p:nvSpPr>
+        <p:spPr>
+          <a:xfrm>
+            <a:off x="11185855" y="6473952"/>
+            <a:ext cx="640080" cy="274320"/>
+          </a:xfrm>
+          <a:prstGeom prst="rect">
+            <a:avLst/>
+          </a:prstGeom>
+          <a:noFill/>
+        </p:spPr>
+        <p:txBody>
+          <a:bodyPr wrap="square">
+            <a:spAutoFit/>
+          </a:bodyPr>
+          <a:lstStyle/>
+          <a:p>
+            <a:pPr algn="r"/>
+            <a:r>
+              <a:rPr sz="1100" b="0" i="0">
+                <a:solidFill>
+                  <a:srgbClr val="666666"/>
+                </a:solidFill>
+                <a:latin typeface="Calibri"/>
+              </a:rPr>
+              <a:t>20</a:t>
+            </a:r>
+          </a:p>
+        </p:txBody>
+      </p:sp>
+    </p:spTree>
+  </p:cSld>
+  <p:clrMapOvr>
+    <a:masterClrMapping/>
+  </p:clrMapOvr>
+</p:sld>
+</file>
+
+<file path=ppt/slides/slide21.xml><?xml version="1.0" encoding="utf-8"?>
+<p:sld xmlns:a="http://schemas.openxmlformats.org/drawingml/2006/main" xmlns:p="http://schemas.openxmlformats.org/presentationml/2006/main" xmlns:r="http://schemas.openxmlformats.org/officeDocument/2006/relationships">
+  <p:cSld>
+    <p:bg>
+      <p:bgPr>
+        <a:solidFill>
+          <a:srgbClr val="FFFFFF"/>
+        </a:solidFill>
+        <a:effectLst/>
+      </p:bgPr>
+    </p:bg>
+    <p:spTree>
+      <p:nvGrpSpPr>
+        <p:cNvPr id="1" name=""/>
+        <p:cNvGrpSpPr/>
+        <p:nvPr/>
+      </p:nvGrpSpPr>
+      <p:grpSpPr/>
+      <p:sp>
+        <p:nvSpPr>
+          <p:cNvPr id="2" name="Rectangle 1"/>
+          <p:cNvSpPr/>
+          <p:nvPr/>
+        </p:nvSpPr>
+        <p:spPr>
+          <a:xfrm>
+            <a:off x="0" y="0"/>
+            <a:ext cx="12191695" cy="1170432"/>
+          </a:xfrm>
+          <a:prstGeom prst="rect">
+            <a:avLst/>
+          </a:prstGeom>
+          <a:solidFill>
+            <a:srgbClr val="095292"/>
+          </a:solidFill>
+          <a:ln>
+            <a:noFill/>
+          </a:ln>
+        </p:spPr>
+        <p:style>
+          <a:lnRef idx="1">
+            <a:schemeClr val="accent1"/>
+          </a:lnRef>
+          <a:fillRef idx="3">
+            <a:schemeClr val="accent1"/>
+          </a:fillRef>
+          <a:effectRef idx="2">
+            <a:schemeClr val="accent1"/>
+          </a:effectRef>
+          <a:fontRef idx="minor">
+            <a:schemeClr val="lt1"/>
+          </a:fontRef>
+        </p:style>
+        <p:txBody>
+          <a:bodyPr rtlCol="0" anchor="ctr"/>
+          <a:lstStyle/>
+          <a:p>
+            <a:pPr algn="ctr"/>
+          </a:p>
+        </p:txBody>
+      </p:sp>
+      <p:sp>
+        <p:nvSpPr>
+          <p:cNvPr id="3" name="Rectangle 2"/>
+          <p:cNvSpPr/>
+          <p:nvPr/>
+        </p:nvSpPr>
+        <p:spPr>
+          <a:xfrm>
+            <a:off x="0" y="1170432"/>
+            <a:ext cx="12191695" cy="41148"/>
+          </a:xfrm>
+          <a:prstGeom prst="rect">
+            <a:avLst/>
+          </a:prstGeom>
+          <a:solidFill>
+            <a:srgbClr val="FFD000"/>
+          </a:solidFill>
+          <a:ln>
+            <a:noFill/>
+          </a:ln>
+        </p:spPr>
+        <p:style>
+          <a:lnRef idx="1">
+            <a:schemeClr val="accent1"/>
+          </a:lnRef>
+          <a:fillRef idx="3">
+            <a:schemeClr val="accent1"/>
+          </a:fillRef>
+          <a:effectRef idx="2">
+            <a:schemeClr val="accent1"/>
+          </a:effectRef>
+          <a:fontRef idx="minor">
+            <a:schemeClr val="lt1"/>
+          </a:fontRef>
+        </p:style>
+        <p:txBody>
+          <a:bodyPr rtlCol="0" anchor="ctr"/>
+          <a:lstStyle/>
+          <a:p>
+            <a:pPr algn="ctr"/>
+          </a:p>
+        </p:txBody>
+      </p:sp>
+      <p:sp>
+        <p:nvSpPr>
+          <p:cNvPr id="4" name="TextBox 3"/>
+          <p:cNvSpPr txBox="1"/>
+          <p:nvPr/>
+        </p:nvSpPr>
+        <p:spPr>
+          <a:xfrm>
+            <a:off x="457200" y="164592"/>
+            <a:ext cx="11277295" cy="384048"/>
+          </a:xfrm>
+          <a:prstGeom prst="rect">
+            <a:avLst/>
+          </a:prstGeom>
+          <a:noFill/>
+        </p:spPr>
+        <p:txBody>
+          <a:bodyPr wrap="square">
+            <a:spAutoFit/>
+          </a:bodyPr>
+          <a:lstStyle/>
+          <a:p>
+            <a:r>
+              <a:rPr sz="2600" b="1" i="0">
+                <a:solidFill>
+                  <a:srgbClr val="FFFFFF"/>
+                </a:solidFill>
+                <a:latin typeface="Calibri"/>
+              </a:rPr>
+              <a:t>Taller de hoy: Matriz de impacto social y ambiental</a:t>
+            </a:r>
+          </a:p>
+        </p:txBody>
+      </p:sp>
+      <p:sp>
+        <p:nvSpPr>
+          <p:cNvPr id="5" name="TextBox 4"/>
+          <p:cNvSpPr txBox="1"/>
+          <p:nvPr/>
+        </p:nvSpPr>
+        <p:spPr>
+          <a:xfrm>
+            <a:off x="457200" y="566928"/>
+            <a:ext cx="11277295" cy="411480"/>
+          </a:xfrm>
+          <a:prstGeom prst="rect">
+            <a:avLst/>
+          </a:prstGeom>
+          <a:noFill/>
+        </p:spPr>
+        <p:txBody>
+          <a:bodyPr wrap="square">
+            <a:spAutoFit/>
+          </a:bodyPr>
+          <a:lstStyle/>
+          <a:p>
+            <a:r>
+              <a:rPr sz="1400" b="0" i="0">
+                <a:solidFill>
+                  <a:srgbClr val="B8D8EE"/>
+                </a:solidFill>
+                <a:latin typeface="Calibri"/>
+              </a:rPr>
+              <a:t>17 min en equipos · 17 min: afectados, positivos con indicador, negativos, matriz y mitigación · matriz de impacto con indicadores, negativos declarados y mitigaciones</a:t>
+            </a:r>
+          </a:p>
+        </p:txBody>
+      </p:sp>
+      <p:sp>
+        <p:nvSpPr>
+          <p:cNvPr id="6" name="Rounded Rectangle 5"/>
+          <p:cNvSpPr/>
+          <p:nvPr/>
+        </p:nvSpPr>
+        <p:spPr>
+          <a:xfrm>
+            <a:off x="457200" y="1472184"/>
+            <a:ext cx="11277295" cy="566928"/>
+          </a:xfrm>
+          <a:prstGeom prst="roundRect">
+            <a:avLst>
+              <a:gd name="adj" fmla="val 12000"/>
+            </a:avLst>
+          </a:prstGeom>
+          <a:solidFill>
+            <a:srgbClr val="F2F2F2"/>
+          </a:solidFill>
+          <a:ln>
+            <a:noFill/>
+          </a:ln>
+        </p:spPr>
+        <p:style>
+          <a:lnRef idx="1">
+            <a:schemeClr val="accent1"/>
+          </a:lnRef>
+          <a:fillRef idx="3">
+            <a:schemeClr val="accent1"/>
+          </a:fillRef>
+          <a:effectRef idx="2">
+            <a:schemeClr val="accent1"/>
+          </a:effectRef>
+          <a:fontRef idx="minor">
+            <a:schemeClr val="lt1"/>
+          </a:fontRef>
+        </p:style>
+        <p:txBody>
+          <a:bodyPr rtlCol="0" anchor="ctr"/>
+          <a:lstStyle/>
+          <a:p>
+            <a:pPr algn="ctr"/>
+          </a:p>
+        </p:txBody>
+      </p:sp>
+      <p:sp>
+        <p:nvSpPr>
+          <p:cNvPr id="7" name="Rectangle 6"/>
+          <p:cNvSpPr/>
+          <p:nvPr/>
+        </p:nvSpPr>
+        <p:spPr>
+          <a:xfrm>
+            <a:off x="640080" y="1618487"/>
+            <a:ext cx="274320" cy="274320"/>
+          </a:xfrm>
+          <a:prstGeom prst="rect">
+            <a:avLst/>
+          </a:prstGeom>
+          <a:solidFill>
+            <a:srgbClr val="FFFFFF"/>
+          </a:solidFill>
+          <a:ln>
+            <a:solidFill>
+              <a:srgbClr val="333333"/>
+            </a:solidFill>
+          </a:ln>
+        </p:spPr>
+        <p:style>
+          <a:lnRef idx="1">
+            <a:schemeClr val="accent1"/>
+          </a:lnRef>
+          <a:fillRef idx="3">
+            <a:schemeClr val="accent1"/>
+          </a:fillRef>
+          <a:effectRef idx="2">
+            <a:schemeClr val="accent1"/>
+          </a:effectRef>
+          <a:fontRef idx="minor">
+            <a:schemeClr val="lt1"/>
+          </a:fontRef>
+        </p:style>
+        <p:txBody>
+          <a:bodyPr rtlCol="0" anchor="ctr"/>
+          <a:lstStyle/>
+          <a:p>
+            <a:pPr algn="ctr"/>
+          </a:p>
+        </p:txBody>
+      </p:sp>
+      <p:sp>
+        <p:nvSpPr>
+          <p:cNvPr id="8" name="Rectangle 7"/>
+          <p:cNvSpPr/>
+          <p:nvPr/>
+        </p:nvSpPr>
+        <p:spPr>
+          <a:xfrm>
+            <a:off x="640080" y="1618487"/>
+            <a:ext cx="73152" cy="274320"/>
+          </a:xfrm>
+          <a:prstGeom prst="rect">
+            <a:avLst/>
+          </a:prstGeom>
+          <a:solidFill>
+            <a:srgbClr val="269CCB"/>
+          </a:solidFill>
+          <a:ln>
+            <a:noFill/>
+          </a:ln>
+        </p:spPr>
+        <p:style>
+          <a:lnRef idx="1">
+            <a:schemeClr val="accent1"/>
+          </a:lnRef>
+          <a:fillRef idx="3">
+            <a:schemeClr val="accent1"/>
+          </a:fillRef>
+          <a:effectRef idx="2">
+            <a:schemeClr val="accent1"/>
+          </a:effectRef>
+          <a:fontRef idx="minor">
+            <a:schemeClr val="lt1"/>
+          </a:fontRef>
+        </p:style>
+        <p:txBody>
+          <a:bodyPr rtlCol="0" anchor="ctr"/>
+          <a:lstStyle/>
+          <a:p>
+            <a:pPr algn="ctr"/>
+          </a:p>
+        </p:txBody>
+      </p:sp>
+      <p:sp>
+        <p:nvSpPr>
+          <p:cNvPr id="9" name="TextBox 8"/>
+          <p:cNvSpPr txBox="1"/>
+          <p:nvPr/>
+        </p:nvSpPr>
+        <p:spPr>
+          <a:xfrm>
+            <a:off x="1097280" y="1563624"/>
+            <a:ext cx="10362895" cy="402336"/>
+          </a:xfrm>
+          <a:prstGeom prst="rect">
+            <a:avLst/>
+          </a:prstGeom>
+          <a:noFill/>
+        </p:spPr>
+        <p:txBody>
+          <a:bodyPr wrap="square" anchor="ctr"/>
+          <a:lstStyle/>
+          <a:p>
+            <a:r>
+              <a:rPr sz="1500" b="1" i="0">
+                <a:solidFill>
+                  <a:srgbClr val="333333"/>
+                </a:solidFill>
+                <a:latin typeface="Calibri"/>
+              </a:rPr>
+              <a:t>LOS AFECTADOS QUE NO SON USUARIOS</a:t>
+            </a:r>
+            <a:r>
+              <a:rPr sz="1500" b="0" i="0">
+                <a:solidFill>
+                  <a:srgbClr val="333333"/>
+                </a:solidFill>
+                <a:latin typeface="Calibri"/>
+              </a:rPr>
+              <a:t> — La lista de quienes reciben un efecto sin usar la solución: a quién le llega más trabajo, quién </a:t>
+            </a:r>
+            <a:r>
+              <a:rPr sz="1500" b="1" i="0">
+                <a:solidFill>
+                  <a:srgbClr val="333333"/>
+                </a:solidFill>
+                <a:latin typeface="Calibri"/>
+              </a:rPr>
+              <a:t>no puede</a:t>
+            </a:r>
+            <a:r>
+              <a:rPr sz="1500" b="0" i="0">
+                <a:solidFill>
+                  <a:srgbClr val="333333"/>
+                </a:solidFill>
+                <a:latin typeface="Calibri"/>
+              </a:rPr>
+              <a:t> usarla, y a quién desplaza.</a:t>
+            </a:r>
+          </a:p>
+        </p:txBody>
+      </p:sp>
+      <p:sp>
+        <p:nvSpPr>
+          <p:cNvPr id="10" name="Rounded Rectangle 9"/>
+          <p:cNvSpPr/>
+          <p:nvPr/>
+        </p:nvSpPr>
+        <p:spPr>
+          <a:xfrm>
+            <a:off x="457200" y="2148839"/>
+            <a:ext cx="11277295" cy="566928"/>
+          </a:xfrm>
+          <a:prstGeom prst="roundRect">
+            <a:avLst>
+              <a:gd name="adj" fmla="val 12000"/>
+            </a:avLst>
+          </a:prstGeom>
+          <a:solidFill>
+            <a:srgbClr val="F2F2F2"/>
+          </a:solidFill>
+          <a:ln>
+            <a:noFill/>
+          </a:ln>
+        </p:spPr>
+        <p:style>
+          <a:lnRef idx="1">
+            <a:schemeClr val="accent1"/>
+          </a:lnRef>
+          <a:fillRef idx="3">
+            <a:schemeClr val="accent1"/>
+          </a:fillRef>
+          <a:effectRef idx="2">
+            <a:schemeClr val="accent1"/>
+          </a:effectRef>
+          <a:fontRef idx="minor">
+            <a:schemeClr val="lt1"/>
+          </a:fontRef>
+        </p:style>
+        <p:txBody>
+          <a:bodyPr rtlCol="0" anchor="ctr"/>
+          <a:lstStyle/>
+          <a:p>
+            <a:pPr algn="ctr"/>
+          </a:p>
+        </p:txBody>
+      </p:sp>
+      <p:sp>
+        <p:nvSpPr>
+          <p:cNvPr id="11" name="Rectangle 10"/>
+          <p:cNvSpPr/>
+          <p:nvPr/>
+        </p:nvSpPr>
+        <p:spPr>
+          <a:xfrm>
+            <a:off x="640080" y="2295144"/>
+            <a:ext cx="274320" cy="274320"/>
+          </a:xfrm>
+          <a:prstGeom prst="rect">
+            <a:avLst/>
+          </a:prstGeom>
+          <a:solidFill>
+            <a:srgbClr val="FFFFFF"/>
+          </a:solidFill>
+          <a:ln>
+            <a:solidFill>
+              <a:srgbClr val="333333"/>
+            </a:solidFill>
+          </a:ln>
+        </p:spPr>
+        <p:style>
+          <a:lnRef idx="1">
+            <a:schemeClr val="accent1"/>
+          </a:lnRef>
+          <a:fillRef idx="3">
+            <a:schemeClr val="accent1"/>
+          </a:fillRef>
+          <a:effectRef idx="2">
+            <a:schemeClr val="accent1"/>
+          </a:effectRef>
+          <a:fontRef idx="minor">
+            <a:schemeClr val="lt1"/>
+          </a:fontRef>
+        </p:style>
+        <p:txBody>
+          <a:bodyPr rtlCol="0" anchor="ctr"/>
+          <a:lstStyle/>
+          <a:p>
+            <a:pPr algn="ctr"/>
+          </a:p>
+        </p:txBody>
+      </p:sp>
+      <p:sp>
+        <p:nvSpPr>
+          <p:cNvPr id="12" name="Rectangle 11"/>
+          <p:cNvSpPr/>
+          <p:nvPr/>
+        </p:nvSpPr>
+        <p:spPr>
+          <a:xfrm>
+            <a:off x="640080" y="2295144"/>
+            <a:ext cx="73152" cy="274320"/>
+          </a:xfrm>
+          <a:prstGeom prst="rect">
+            <a:avLst/>
+          </a:prstGeom>
+          <a:solidFill>
+            <a:srgbClr val="269CCB"/>
+          </a:solidFill>
+          <a:ln>
+            <a:noFill/>
+          </a:ln>
+        </p:spPr>
+        <p:style>
+          <a:lnRef idx="1">
+            <a:schemeClr val="accent1"/>
+          </a:lnRef>
+          <a:fillRef idx="3">
+            <a:schemeClr val="accent1"/>
+          </a:fillRef>
+          <a:effectRef idx="2">
+            <a:schemeClr val="accent1"/>
+          </a:effectRef>
+          <a:fontRef idx="minor">
+            <a:schemeClr val="lt1"/>
+          </a:fontRef>
+        </p:style>
+        <p:txBody>
+          <a:bodyPr rtlCol="0" anchor="ctr"/>
+          <a:lstStyle/>
+          <a:p>
+            <a:pPr algn="ctr"/>
+          </a:p>
+        </p:txBody>
+      </p:sp>
+      <p:sp>
+        <p:nvSpPr>
+          <p:cNvPr id="13" name="TextBox 12"/>
+          <p:cNvSpPr txBox="1"/>
+          <p:nvPr/>
+        </p:nvSpPr>
+        <p:spPr>
+          <a:xfrm>
+            <a:off x="1097280" y="2240279"/>
+            <a:ext cx="10362895" cy="402336"/>
+          </a:xfrm>
+          <a:prstGeom prst="rect">
+            <a:avLst/>
+          </a:prstGeom>
+          <a:noFill/>
+        </p:spPr>
+        <p:txBody>
+          <a:bodyPr wrap="square" anchor="ctr"/>
+          <a:lstStyle/>
+          <a:p>
+            <a:r>
+              <a:rPr sz="1500" b="1" i="0">
+                <a:solidFill>
+                  <a:srgbClr val="333333"/>
+                </a:solidFill>
+                <a:latin typeface="Calibri"/>
+              </a:rPr>
+              <a:t>TRES IMPACTOS POSITIVOS CON SU INDICADOR</a:t>
+            </a:r>
+            <a:r>
+              <a:rPr sz="1500" b="0" i="0">
+                <a:solidFill>
+                  <a:srgbClr val="333333"/>
+                </a:solidFill>
+                <a:latin typeface="Calibri"/>
+              </a:rPr>
+              <a:t> — Tres efectos buenos, cada uno con </a:t>
+            </a:r>
+            <a:r>
+              <a:rPr sz="1500" b="1" i="0">
+                <a:solidFill>
+                  <a:srgbClr val="333333"/>
+                </a:solidFill>
+                <a:latin typeface="Calibri"/>
+              </a:rPr>
+              <a:t>un número y una unidad</a:t>
+            </a:r>
+            <a:r>
+              <a:rPr sz="1500" b="0" i="0">
+                <a:solidFill>
+                  <a:srgbClr val="333333"/>
+                </a:solidFill>
+                <a:latin typeface="Calibri"/>
+              </a:rPr>
+              <a:t>: cuántas personas, cuántas veces, cuántos minutos, cuántos pesos.</a:t>
+            </a:r>
+          </a:p>
+        </p:txBody>
+      </p:sp>
+      <p:sp>
+        <p:nvSpPr>
+          <p:cNvPr id="14" name="Rounded Rectangle 13"/>
+          <p:cNvSpPr/>
+          <p:nvPr/>
+        </p:nvSpPr>
+        <p:spPr>
+          <a:xfrm>
+            <a:off x="457200" y="2825496"/>
+            <a:ext cx="11277295" cy="566928"/>
+          </a:xfrm>
+          <a:prstGeom prst="roundRect">
+            <a:avLst>
+              <a:gd name="adj" fmla="val 12000"/>
+            </a:avLst>
+          </a:prstGeom>
+          <a:solidFill>
+            <a:srgbClr val="F2F2F2"/>
+          </a:solidFill>
+          <a:ln>
+            <a:noFill/>
+          </a:ln>
+        </p:spPr>
+        <p:style>
+          <a:lnRef idx="1">
+            <a:schemeClr val="accent1"/>
+          </a:lnRef>
+          <a:fillRef idx="3">
+            <a:schemeClr val="accent1"/>
+          </a:fillRef>
+          <a:effectRef idx="2">
+            <a:schemeClr val="accent1"/>
+          </a:effectRef>
+          <a:fontRef idx="minor">
+            <a:schemeClr val="lt1"/>
+          </a:fontRef>
+        </p:style>
+        <p:txBody>
+          <a:bodyPr rtlCol="0" anchor="ctr"/>
+          <a:lstStyle/>
+          <a:p>
+            <a:pPr algn="ctr"/>
+          </a:p>
+        </p:txBody>
+      </p:sp>
+      <p:sp>
+        <p:nvSpPr>
+          <p:cNvPr id="15" name="Rectangle 14"/>
+          <p:cNvSpPr/>
+          <p:nvPr/>
+        </p:nvSpPr>
+        <p:spPr>
+          <a:xfrm>
+            <a:off x="640080" y="2971800"/>
+            <a:ext cx="274320" cy="274320"/>
+          </a:xfrm>
+          <a:prstGeom prst="rect">
+            <a:avLst/>
+          </a:prstGeom>
+          <a:solidFill>
+            <a:srgbClr val="FFFFFF"/>
+          </a:solidFill>
+          <a:ln>
+            <a:solidFill>
+              <a:srgbClr val="333333"/>
+            </a:solidFill>
+          </a:ln>
+        </p:spPr>
+        <p:style>
+          <a:lnRef idx="1">
+            <a:schemeClr val="accent1"/>
+          </a:lnRef>
+          <a:fillRef idx="3">
+            <a:schemeClr val="accent1"/>
+          </a:fillRef>
+          <a:effectRef idx="2">
+            <a:schemeClr val="accent1"/>
+          </a:effectRef>
+          <a:fontRef idx="minor">
+            <a:schemeClr val="lt1"/>
+          </a:fontRef>
+        </p:style>
+        <p:txBody>
+          <a:bodyPr rtlCol="0" anchor="ctr"/>
+          <a:lstStyle/>
+          <a:p>
+            <a:pPr algn="ctr"/>
+          </a:p>
+        </p:txBody>
+      </p:sp>
+      <p:sp>
+        <p:nvSpPr>
+          <p:cNvPr id="16" name="Rectangle 15"/>
+          <p:cNvSpPr/>
+          <p:nvPr/>
+        </p:nvSpPr>
+        <p:spPr>
+          <a:xfrm>
+            <a:off x="640080" y="2971800"/>
+            <a:ext cx="73152" cy="274320"/>
+          </a:xfrm>
+          <a:prstGeom prst="rect">
+            <a:avLst/>
+          </a:prstGeom>
+          <a:solidFill>
+            <a:srgbClr val="269CCB"/>
+          </a:solidFill>
+          <a:ln>
+            <a:noFill/>
+          </a:ln>
+        </p:spPr>
+        <p:style>
+          <a:lnRef idx="1">
+            <a:schemeClr val="accent1"/>
+          </a:lnRef>
+          <a:fillRef idx="3">
+            <a:schemeClr val="accent1"/>
+          </a:fillRef>
+          <a:effectRef idx="2">
+            <a:schemeClr val="accent1"/>
+          </a:effectRef>
+          <a:fontRef idx="minor">
+            <a:schemeClr val="lt1"/>
+          </a:fontRef>
+        </p:style>
+        <p:txBody>
+          <a:bodyPr rtlCol="0" anchor="ctr"/>
+          <a:lstStyle/>
+          <a:p>
+            <a:pPr algn="ctr"/>
+          </a:p>
+        </p:txBody>
+      </p:sp>
+      <p:sp>
+        <p:nvSpPr>
+          <p:cNvPr id="17" name="TextBox 16"/>
+          <p:cNvSpPr txBox="1"/>
+          <p:nvPr/>
+        </p:nvSpPr>
+        <p:spPr>
+          <a:xfrm>
+            <a:off x="1097280" y="2916936"/>
+            <a:ext cx="10362895" cy="402336"/>
+          </a:xfrm>
+          <a:prstGeom prst="rect">
+            <a:avLst/>
+          </a:prstGeom>
+          <a:noFill/>
+        </p:spPr>
+        <p:txBody>
+          <a:bodyPr wrap="square" anchor="ctr"/>
+          <a:lstStyle/>
+          <a:p>
+            <a:r>
+              <a:rPr sz="1500" b="1" i="0">
+                <a:solidFill>
+                  <a:srgbClr val="333333"/>
+                </a:solidFill>
+                <a:latin typeface="Calibri"/>
+              </a:rPr>
+              <a:t>DOS IMPACTOS NEGATIVOS O RIESGOS</a:t>
+            </a:r>
+            <a:r>
+              <a:rPr sz="1500" b="0" i="0">
+                <a:solidFill>
+                  <a:srgbClr val="333333"/>
+                </a:solidFill>
+                <a:latin typeface="Calibri"/>
+              </a:rPr>
+              <a:t> — Dos efectos malos, con </a:t>
+            </a:r>
+            <a:r>
+              <a:rPr sz="1500" b="1" i="0">
+                <a:solidFill>
+                  <a:srgbClr val="333333"/>
+                </a:solidFill>
+                <a:latin typeface="Calibri"/>
+              </a:rPr>
+              <a:t>quién los recibe</a:t>
+            </a:r>
+            <a:r>
+              <a:rPr sz="1500" b="0" i="0">
+                <a:solidFill>
+                  <a:srgbClr val="333333"/>
+                </a:solidFill>
+                <a:latin typeface="Calibri"/>
+              </a:rPr>
+              <a:t> exactamente. Si no encuentran ninguno, pregúntense quién trabaja más por su solución.</a:t>
+            </a:r>
+          </a:p>
+        </p:txBody>
+      </p:sp>
+      <p:sp>
+        <p:nvSpPr>
+          <p:cNvPr id="18" name="Rounded Rectangle 17"/>
+          <p:cNvSpPr/>
+          <p:nvPr/>
+        </p:nvSpPr>
+        <p:spPr>
+          <a:xfrm>
+            <a:off x="457200" y="3502152"/>
+            <a:ext cx="11277295" cy="566928"/>
+          </a:xfrm>
+          <a:prstGeom prst="roundRect">
+            <a:avLst>
+              <a:gd name="adj" fmla="val 12000"/>
+            </a:avLst>
+          </a:prstGeom>
+          <a:solidFill>
+            <a:srgbClr val="F2F2F2"/>
+          </a:solidFill>
+          <a:ln>
+            <a:noFill/>
+          </a:ln>
+        </p:spPr>
+        <p:style>
+          <a:lnRef idx="1">
+            <a:schemeClr val="accent1"/>
+          </a:lnRef>
+          <a:fillRef idx="3">
+            <a:schemeClr val="accent1"/>
+          </a:fillRef>
+          <a:effectRef idx="2">
+            <a:schemeClr val="accent1"/>
+          </a:effectRef>
+          <a:fontRef idx="minor">
+            <a:schemeClr val="lt1"/>
+          </a:fontRef>
+        </p:style>
+        <p:txBody>
+          <a:bodyPr rtlCol="0" anchor="ctr"/>
+          <a:lstStyle/>
+          <a:p>
+            <a:pPr algn="ctr"/>
+          </a:p>
+        </p:txBody>
+      </p:sp>
+      <p:sp>
+        <p:nvSpPr>
+          <p:cNvPr id="19" name="Rectangle 18"/>
+          <p:cNvSpPr/>
+          <p:nvPr/>
+        </p:nvSpPr>
+        <p:spPr>
+          <a:xfrm>
+            <a:off x="640080" y="3648456"/>
+            <a:ext cx="274320" cy="274320"/>
+          </a:xfrm>
+          <a:prstGeom prst="rect">
+            <a:avLst/>
+          </a:prstGeom>
+          <a:solidFill>
+            <a:srgbClr val="FFFFFF"/>
+          </a:solidFill>
+          <a:ln>
+            <a:solidFill>
+              <a:srgbClr val="333333"/>
+            </a:solidFill>
+          </a:ln>
+        </p:spPr>
+        <p:style>
+          <a:lnRef idx="1">
+            <a:schemeClr val="accent1"/>
+          </a:lnRef>
+          <a:fillRef idx="3">
+            <a:schemeClr val="accent1"/>
+          </a:fillRef>
+          <a:effectRef idx="2">
+            <a:schemeClr val="accent1"/>
+          </a:effectRef>
+          <a:fontRef idx="minor">
+            <a:schemeClr val="lt1"/>
+          </a:fontRef>
+        </p:style>
+        <p:txBody>
+          <a:bodyPr rtlCol="0" anchor="ctr"/>
+          <a:lstStyle/>
+          <a:p>
+            <a:pPr algn="ctr"/>
+          </a:p>
+        </p:txBody>
+      </p:sp>
+      <p:sp>
+        <p:nvSpPr>
+          <p:cNvPr id="20" name="Rectangle 19"/>
+          <p:cNvSpPr/>
+          <p:nvPr/>
+        </p:nvSpPr>
+        <p:spPr>
+          <a:xfrm>
+            <a:off x="640080" y="3648456"/>
+            <a:ext cx="73152" cy="274320"/>
+          </a:xfrm>
+          <a:prstGeom prst="rect">
+            <a:avLst/>
+          </a:prstGeom>
+          <a:solidFill>
+            <a:srgbClr val="269CCB"/>
+          </a:solidFill>
+          <a:ln>
+            <a:noFill/>
+          </a:ln>
+        </p:spPr>
+        <p:style>
+          <a:lnRef idx="1">
+            <a:schemeClr val="accent1"/>
+          </a:lnRef>
+          <a:fillRef idx="3">
+            <a:schemeClr val="accent1"/>
+          </a:fillRef>
+          <a:effectRef idx="2">
+            <a:schemeClr val="accent1"/>
+          </a:effectRef>
+          <a:fontRef idx="minor">
+            <a:schemeClr val="lt1"/>
+          </a:fontRef>
+        </p:style>
+        <p:txBody>
+          <a:bodyPr rtlCol="0" anchor="ctr"/>
+          <a:lstStyle/>
+          <a:p>
+            <a:pPr algn="ctr"/>
+          </a:p>
+        </p:txBody>
+      </p:sp>
+      <p:sp>
+        <p:nvSpPr>
+          <p:cNvPr id="21" name="TextBox 20"/>
+          <p:cNvSpPr txBox="1"/>
+          <p:nvPr/>
+        </p:nvSpPr>
+        <p:spPr>
+          <a:xfrm>
+            <a:off x="1097280" y="3593592"/>
+            <a:ext cx="10362895" cy="402336"/>
+          </a:xfrm>
+          <a:prstGeom prst="rect">
+            <a:avLst/>
+          </a:prstGeom>
+          <a:noFill/>
+        </p:spPr>
+        <p:txBody>
+          <a:bodyPr wrap="square" anchor="ctr"/>
+          <a:lstStyle/>
+          <a:p>
+            <a:r>
+              <a:rPr sz="1500" b="1" i="0">
+                <a:solidFill>
+                  <a:srgbClr val="333333"/>
+                </a:solidFill>
+                <a:latin typeface="Calibri"/>
+              </a:rPr>
+              <a:t>LA MATRIZ CALIFICADA</a:t>
+            </a:r>
+            <a:r>
+              <a:rPr sz="1500" b="0" i="0">
+                <a:solidFill>
+                  <a:srgbClr val="333333"/>
+                </a:solidFill>
+                <a:latin typeface="Calibri"/>
+              </a:rPr>
+              <a:t> — Cada impacto con su carácter, magnitud, extensión, duración y reversibilidad — y </a:t>
+            </a:r>
+            <a:r>
+              <a:rPr sz="1500" b="1" i="0">
+                <a:solidFill>
+                  <a:srgbClr val="333333"/>
+                </a:solidFill>
+                <a:latin typeface="Calibri"/>
+              </a:rPr>
+              <a:t>una línea de justificación</a:t>
+            </a:r>
+            <a:r>
+              <a:rPr sz="1500" b="0" i="0">
+                <a:solidFill>
+                  <a:srgbClr val="333333"/>
+                </a:solidFill>
+                <a:latin typeface="Calibri"/>
+              </a:rPr>
+              <a:t> por calificación.</a:t>
+            </a:r>
+          </a:p>
+        </p:txBody>
+      </p:sp>
+      <p:sp>
+        <p:nvSpPr>
+          <p:cNvPr id="22" name="Rounded Rectangle 21"/>
+          <p:cNvSpPr/>
+          <p:nvPr/>
+        </p:nvSpPr>
+        <p:spPr>
+          <a:xfrm>
+            <a:off x="457200" y="4178808"/>
+            <a:ext cx="11277295" cy="566928"/>
+          </a:xfrm>
+          <a:prstGeom prst="roundRect">
+            <a:avLst>
+              <a:gd name="adj" fmla="val 12000"/>
+            </a:avLst>
+          </a:prstGeom>
+          <a:solidFill>
+            <a:srgbClr val="F2F2F2"/>
+          </a:solidFill>
+          <a:ln>
+            <a:noFill/>
+          </a:ln>
+        </p:spPr>
+        <p:style>
+          <a:lnRef idx="1">
+            <a:schemeClr val="accent1"/>
+          </a:lnRef>
+          <a:fillRef idx="3">
+            <a:schemeClr val="accent1"/>
+          </a:fillRef>
+          <a:effectRef idx="2">
+            <a:schemeClr val="accent1"/>
+          </a:effectRef>
+          <a:fontRef idx="minor">
+            <a:schemeClr val="lt1"/>
+          </a:fontRef>
+        </p:style>
+        <p:txBody>
+          <a:bodyPr rtlCol="0" anchor="ctr"/>
+          <a:lstStyle/>
+          <a:p>
+            <a:pPr algn="ctr"/>
+          </a:p>
+        </p:txBody>
+      </p:sp>
+      <p:sp>
+        <p:nvSpPr>
+          <p:cNvPr id="23" name="Rectangle 22"/>
+          <p:cNvSpPr/>
+          <p:nvPr/>
+        </p:nvSpPr>
+        <p:spPr>
+          <a:xfrm>
+            <a:off x="640080" y="4325112"/>
+            <a:ext cx="274320" cy="274320"/>
+          </a:xfrm>
+          <a:prstGeom prst="rect">
+            <a:avLst/>
+          </a:prstGeom>
+          <a:solidFill>
+            <a:srgbClr val="FFFFFF"/>
+          </a:solidFill>
+          <a:ln>
+            <a:solidFill>
+              <a:srgbClr val="333333"/>
+            </a:solidFill>
+          </a:ln>
+        </p:spPr>
+        <p:style>
+          <a:lnRef idx="1">
+            <a:schemeClr val="accent1"/>
+          </a:lnRef>
+          <a:fillRef idx="3">
+            <a:schemeClr val="accent1"/>
+          </a:fillRef>
+          <a:effectRef idx="2">
+            <a:schemeClr val="accent1"/>
+          </a:effectRef>
+          <a:fontRef idx="minor">
+            <a:schemeClr val="lt1"/>
+          </a:fontRef>
+        </p:style>
+        <p:txBody>
+          <a:bodyPr rtlCol="0" anchor="ctr"/>
+          <a:lstStyle/>
+          <a:p>
+            <a:pPr algn="ctr"/>
+          </a:p>
+        </p:txBody>
+      </p:sp>
+      <p:sp>
+        <p:nvSpPr>
+          <p:cNvPr id="24" name="Rectangle 23"/>
+          <p:cNvSpPr/>
+          <p:nvPr/>
+        </p:nvSpPr>
+        <p:spPr>
+          <a:xfrm>
+            <a:off x="640080" y="4325112"/>
+            <a:ext cx="73152" cy="274320"/>
+          </a:xfrm>
+          <a:prstGeom prst="rect">
+            <a:avLst/>
+          </a:prstGeom>
+          <a:solidFill>
+            <a:srgbClr val="269CCB"/>
+          </a:solidFill>
+          <a:ln>
+            <a:noFill/>
+          </a:ln>
+        </p:spPr>
+        <p:style>
+          <a:lnRef idx="1">
+            <a:schemeClr val="accent1"/>
+          </a:lnRef>
+          <a:fillRef idx="3">
+            <a:schemeClr val="accent1"/>
+          </a:fillRef>
+          <a:effectRef idx="2">
+            <a:schemeClr val="accent1"/>
+          </a:effectRef>
+          <a:fontRef idx="minor">
+            <a:schemeClr val="lt1"/>
+          </a:fontRef>
+        </p:style>
+        <p:txBody>
+          <a:bodyPr rtlCol="0" anchor="ctr"/>
+          <a:lstStyle/>
+          <a:p>
+            <a:pPr algn="ctr"/>
+          </a:p>
+        </p:txBody>
+      </p:sp>
+      <p:sp>
+        <p:nvSpPr>
+          <p:cNvPr id="25" name="TextBox 24"/>
+          <p:cNvSpPr txBox="1"/>
+          <p:nvPr/>
+        </p:nvSpPr>
+        <p:spPr>
+          <a:xfrm>
+            <a:off x="1097280" y="4270248"/>
+            <a:ext cx="10362895" cy="402336"/>
+          </a:xfrm>
+          <a:prstGeom prst="rect">
+            <a:avLst/>
+          </a:prstGeom>
+          <a:noFill/>
+        </p:spPr>
+        <p:txBody>
+          <a:bodyPr wrap="square" anchor="ctr"/>
+          <a:lstStyle/>
+          <a:p>
+            <a:r>
+              <a:rPr sz="1500" b="1" i="0">
+                <a:solidFill>
+                  <a:srgbClr val="333333"/>
+                </a:solidFill>
+                <a:latin typeface="Calibri"/>
+              </a:rPr>
+              <a:t>LAS MEDIDAS DE MITIGACIÓN</a:t>
+            </a:r>
+            <a:r>
+              <a:rPr sz="1500" b="0" i="0">
+                <a:solidFill>
+                  <a:srgbClr val="333333"/>
+                </a:solidFill>
+                <a:latin typeface="Calibri"/>
+              </a:rPr>
+              <a:t> — Qué van a hacer para reducir cada impacto negativo. Puede ser </a:t>
+            </a:r>
+            <a:r>
+              <a:rPr sz="1500" b="1" i="0">
+                <a:solidFill>
+                  <a:srgbClr val="333333"/>
+                </a:solidFill>
+                <a:latin typeface="Calibri"/>
+              </a:rPr>
+              <a:t>una medida no digital</a:t>
+            </a:r>
+            <a:r>
+              <a:rPr sz="1500" b="0" i="0">
+                <a:solidFill>
+                  <a:srgbClr val="333333"/>
+                </a:solidFill>
+                <a:latin typeface="Calibri"/>
+              </a:rPr>
+              <a:t>, y muchas veces es la mejor.</a:t>
+            </a:r>
+          </a:p>
+        </p:txBody>
+      </p:sp>
+      <p:sp>
+        <p:nvSpPr>
+          <p:cNvPr id="26" name="TextBox 25"/>
+          <p:cNvSpPr txBox="1"/>
+          <p:nvPr/>
+        </p:nvSpPr>
+        <p:spPr>
+          <a:xfrm>
+            <a:off x="11185855" y="6473952"/>
+            <a:ext cx="640080" cy="274320"/>
+          </a:xfrm>
+          <a:prstGeom prst="rect">
+            <a:avLst/>
+          </a:prstGeom>
+          <a:noFill/>
+        </p:spPr>
+        <p:txBody>
+          <a:bodyPr wrap="square">
+            <a:spAutoFit/>
+          </a:bodyPr>
+          <a:lstStyle/>
+          <a:p>
+            <a:pPr algn="r"/>
+            <a:r>
+              <a:rPr sz="1100" b="0" i="0">
+                <a:solidFill>
+                  <a:srgbClr val="666666"/>
+                </a:solidFill>
+                <a:latin typeface="Calibri"/>
+              </a:rPr>
+              <a:t>21</a:t>
+            </a:r>
+          </a:p>
+        </p:txBody>
+      </p:sp>
+    </p:spTree>
+  </p:cSld>
+  <p:clrMapOvr>
+    <a:masterClrMapping/>
+  </p:clrMapOvr>
+</p:sld>
+</file>
+
+<file path=ppt/slides/slide22.xml><?xml version="1.0" encoding="utf-8"?>
+<p:sld xmlns:a="http://schemas.openxmlformats.org/drawingml/2006/main" xmlns:p="http://schemas.openxmlformats.org/presentationml/2006/main" xmlns:r="http://schemas.openxmlformats.org/officeDocument/2006/relationships">
+  <p:cSld>
+    <p:bg>
+      <p:bgPr>
+        <a:solidFill>
+          <a:srgbClr val="FFFFFF"/>
+        </a:solidFill>
+        <a:effectLst/>
+      </p:bgPr>
+    </p:bg>
+    <p:spTree>
+      <p:nvGrpSpPr>
+        <p:cNvPr id="1" name=""/>
+        <p:cNvGrpSpPr/>
+        <p:nvPr/>
+      </p:nvGrpSpPr>
+      <p:grpSpPr/>
+      <p:sp>
+        <p:nvSpPr>
+          <p:cNvPr id="2" name="Rectangle 1"/>
+          <p:cNvSpPr/>
+          <p:nvPr/>
+        </p:nvSpPr>
+        <p:spPr>
+          <a:xfrm>
+            <a:off x="0" y="0"/>
+            <a:ext cx="12191695" cy="1170432"/>
+          </a:xfrm>
+          <a:prstGeom prst="rect">
+            <a:avLst/>
+          </a:prstGeom>
+          <a:solidFill>
+            <a:srgbClr val="095292"/>
+          </a:solidFill>
+          <a:ln>
+            <a:noFill/>
+          </a:ln>
+        </p:spPr>
+        <p:style>
+          <a:lnRef idx="1">
+            <a:schemeClr val="accent1"/>
+          </a:lnRef>
+          <a:fillRef idx="3">
+            <a:schemeClr val="accent1"/>
+          </a:fillRef>
+          <a:effectRef idx="2">
+            <a:schemeClr val="accent1"/>
+          </a:effectRef>
+          <a:fontRef idx="minor">
+            <a:schemeClr val="lt1"/>
+          </a:fontRef>
+        </p:style>
+        <p:txBody>
+          <a:bodyPr rtlCol="0" anchor="ctr"/>
+          <a:lstStyle/>
+          <a:p>
+            <a:pPr algn="ctr"/>
+          </a:p>
+        </p:txBody>
+      </p:sp>
+      <p:sp>
+        <p:nvSpPr>
+          <p:cNvPr id="3" name="Rectangle 2"/>
+          <p:cNvSpPr/>
+          <p:nvPr/>
+        </p:nvSpPr>
+        <p:spPr>
+          <a:xfrm>
+            <a:off x="0" y="1170432"/>
+            <a:ext cx="12191695" cy="41148"/>
+          </a:xfrm>
+          <a:prstGeom prst="rect">
+            <a:avLst/>
+          </a:prstGeom>
+          <a:solidFill>
+            <a:srgbClr val="FFD000"/>
+          </a:solidFill>
+          <a:ln>
+            <a:noFill/>
+          </a:ln>
+        </p:spPr>
+        <p:style>
+          <a:lnRef idx="1">
+            <a:schemeClr val="accent1"/>
+          </a:lnRef>
+          <a:fillRef idx="3">
+            <a:schemeClr val="accent1"/>
+          </a:fillRef>
+          <a:effectRef idx="2">
+            <a:schemeClr val="accent1"/>
+          </a:effectRef>
+          <a:fontRef idx="minor">
+            <a:schemeClr val="lt1"/>
+          </a:fontRef>
+        </p:style>
+        <p:txBody>
+          <a:bodyPr rtlCol="0" anchor="ctr"/>
+          <a:lstStyle/>
+          <a:p>
+            <a:pPr algn="ctr"/>
+          </a:p>
+        </p:txBody>
+      </p:sp>
+      <p:sp>
+        <p:nvSpPr>
+          <p:cNvPr id="4" name="TextBox 3"/>
+          <p:cNvSpPr txBox="1"/>
+          <p:nvPr/>
+        </p:nvSpPr>
+        <p:spPr>
+          <a:xfrm>
+            <a:off x="457200" y="164592"/>
+            <a:ext cx="11277295" cy="384048"/>
+          </a:xfrm>
+          <a:prstGeom prst="rect">
+            <a:avLst/>
+          </a:prstGeom>
+          <a:noFill/>
+        </p:spPr>
+        <p:txBody>
+          <a:bodyPr wrap="square">
+            <a:spAutoFit/>
+          </a:bodyPr>
+          <a:lstStyle/>
+          <a:p>
+            <a:r>
+              <a:rPr sz="2600" b="1" i="0">
+                <a:solidFill>
+                  <a:srgbClr val="FFFFFF"/>
+                </a:solidFill>
+                <a:latin typeface="Calibri"/>
+              </a:rPr>
+              <a:t>Cómo se expone en 3 minutos</a:t>
+            </a:r>
+          </a:p>
+        </p:txBody>
+      </p:sp>
+      <p:sp>
+        <p:nvSpPr>
+          <p:cNvPr id="5" name="TextBox 4"/>
+          <p:cNvSpPr txBox="1"/>
+          <p:nvPr/>
+        </p:nvSpPr>
+        <p:spPr>
+          <a:xfrm>
+            <a:off x="457200" y="566928"/>
+            <a:ext cx="11277295" cy="411480"/>
+          </a:xfrm>
+          <a:prstGeom prst="rect">
+            <a:avLst/>
+          </a:prstGeom>
+          <a:noFill/>
+        </p:spPr>
+        <p:txBody>
+          <a:bodyPr wrap="square">
+            <a:spAutoFit/>
+          </a:bodyPr>
+          <a:lstStyle/>
+          <a:p>
+            <a:r>
+              <a:rPr sz="1400" b="0" i="0">
+                <a:solidFill>
+                  <a:srgbClr val="B8D8EE"/>
+                </a:solidFill>
+                <a:latin typeface="Calibri"/>
+              </a:rPr>
+              <a:t>Habla el vocero con la pantalla ya compartida · cronómetro en pantalla · se corta al llegar a cero</a:t>
+            </a:r>
+          </a:p>
+        </p:txBody>
+      </p:sp>
+      <p:sp>
+        <p:nvSpPr>
+          <p:cNvPr id="6" name="Rounded Rectangle 5"/>
+          <p:cNvSpPr/>
+          <p:nvPr/>
+        </p:nvSpPr>
+        <p:spPr>
+          <a:xfrm>
+            <a:off x="457200" y="1444752"/>
+            <a:ext cx="11277295" cy="908913"/>
+          </a:xfrm>
+          <a:prstGeom prst="roundRect">
+            <a:avLst>
+              <a:gd name="adj" fmla="val 12000"/>
+            </a:avLst>
+          </a:prstGeom>
+          <a:solidFill>
+            <a:srgbClr val="F2F2F2"/>
+          </a:solidFill>
+          <a:ln>
+            <a:noFill/>
+          </a:ln>
+        </p:spPr>
+        <p:style>
+          <a:lnRef idx="1">
+            <a:schemeClr val="accent1"/>
+          </a:lnRef>
+          <a:fillRef idx="3">
+            <a:schemeClr val="accent1"/>
+          </a:fillRef>
+          <a:effectRef idx="2">
+            <a:schemeClr val="accent1"/>
+          </a:effectRef>
+          <a:fontRef idx="minor">
+            <a:schemeClr val="lt1"/>
+          </a:fontRef>
+        </p:style>
+        <p:txBody>
+          <a:bodyPr rtlCol="0" anchor="ctr"/>
+          <a:lstStyle/>
+          <a:p>
+            <a:pPr algn="ctr"/>
+          </a:p>
+        </p:txBody>
+      </p:sp>
+      <p:sp>
+        <p:nvSpPr>
+          <p:cNvPr id="7" name="Rounded Rectangle 6"/>
+          <p:cNvSpPr/>
+          <p:nvPr/>
+        </p:nvSpPr>
+        <p:spPr>
+          <a:xfrm>
+            <a:off x="594360" y="1679752"/>
+            <a:ext cx="438912" cy="438912"/>
+          </a:xfrm>
+          <a:prstGeom prst="roundRect">
+            <a:avLst>
+              <a:gd name="adj" fmla="val 12000"/>
+            </a:avLst>
+          </a:prstGeom>
+          <a:solidFill>
+            <a:srgbClr val="095292"/>
+          </a:solidFill>
+          <a:ln>
+            <a:noFill/>
+          </a:ln>
+        </p:spPr>
+        <p:style>
+          <a:lnRef idx="1">
+            <a:schemeClr val="accent1"/>
+          </a:lnRef>
+          <a:fillRef idx="3">
+            <a:schemeClr val="accent1"/>
+          </a:fillRef>
+          <a:effectRef idx="2">
+            <a:schemeClr val="accent1"/>
+          </a:effectRef>
+          <a:fontRef idx="minor">
+            <a:schemeClr val="lt1"/>
+          </a:fontRef>
+        </p:style>
+        <p:txBody>
+          <a:bodyPr rtlCol="0" anchor="ctr"/>
+          <a:lstStyle/>
+          <a:p>
+            <a:pPr algn="ctr"/>
+          </a:p>
+        </p:txBody>
+      </p:sp>
+      <p:sp>
+        <p:nvSpPr>
+          <p:cNvPr id="8" name="TextBox 7"/>
+          <p:cNvSpPr txBox="1"/>
+          <p:nvPr/>
+        </p:nvSpPr>
+        <p:spPr>
+          <a:xfrm>
+            <a:off x="594360" y="1679752"/>
+            <a:ext cx="438912" cy="438912"/>
+          </a:xfrm>
+          <a:prstGeom prst="rect">
+            <a:avLst/>
+          </a:prstGeom>
+          <a:noFill/>
+        </p:spPr>
+        <p:txBody>
+          <a:bodyPr wrap="square" anchor="ctr"/>
+          <a:lstStyle/>
+          <a:p>
+            <a:pPr algn="ctr"/>
+            <a:r>
+              <a:rPr sz="1600" b="1" i="0">
+                <a:solidFill>
+                  <a:srgbClr val="FFFFFF"/>
+                </a:solidFill>
+                <a:latin typeface="Calibri"/>
+              </a:rPr>
+              <a:t>1</a:t>
+            </a:r>
+          </a:p>
+        </p:txBody>
+      </p:sp>
+      <p:sp>
+        <p:nvSpPr>
+          <p:cNvPr id="9" name="TextBox 8"/>
+          <p:cNvSpPr txBox="1"/>
+          <p:nvPr/>
+        </p:nvSpPr>
+        <p:spPr>
+          <a:xfrm>
+            <a:off x="1188720" y="1536192"/>
+            <a:ext cx="10271455" cy="744321"/>
+          </a:xfrm>
+          <a:prstGeom prst="rect">
+            <a:avLst/>
+          </a:prstGeom>
+          <a:noFill/>
+        </p:spPr>
+        <p:txBody>
+          <a:bodyPr wrap="square" anchor="ctr"/>
+          <a:lstStyle/>
+          <a:p>
+            <a:r>
+              <a:rPr sz="1500" b="1" i="0">
+                <a:solidFill>
+                  <a:srgbClr val="095292"/>
+                </a:solidFill>
+                <a:latin typeface="Calibri"/>
+              </a:rPr>
+              <a:t>30 s · Los afectados que no son usuarios</a:t>
+            </a:r>
+          </a:p>
+          <a:p>
+            <a:pPr>
+              <a:spcBef>
+                <a:spcPts val="200"/>
+              </a:spcBef>
+            </a:pPr>
+            <a:r>
+              <a:rPr sz="1300" b="0" i="0">
+                <a:solidFill>
+                  <a:srgbClr val="333333"/>
+                </a:solidFill>
+                <a:latin typeface="Calibri"/>
+              </a:rPr>
+              <a:t>Nómbrelos. Sin «la comunidad».</a:t>
+            </a:r>
+          </a:p>
+        </p:txBody>
+      </p:sp>
+      <p:sp>
+        <p:nvSpPr>
+          <p:cNvPr id="10" name="Rounded Rectangle 9"/>
+          <p:cNvSpPr/>
+          <p:nvPr/>
+        </p:nvSpPr>
+        <p:spPr>
+          <a:xfrm>
+            <a:off x="457200" y="2445105"/>
+            <a:ext cx="11277295" cy="908913"/>
+          </a:xfrm>
+          <a:prstGeom prst="roundRect">
+            <a:avLst>
+              <a:gd name="adj" fmla="val 12000"/>
+            </a:avLst>
+          </a:prstGeom>
+          <a:solidFill>
+            <a:srgbClr val="E8F4FA"/>
+          </a:solidFill>
+          <a:ln>
+            <a:noFill/>
+          </a:ln>
+        </p:spPr>
+        <p:style>
+          <a:lnRef idx="1">
+            <a:schemeClr val="accent1"/>
+          </a:lnRef>
+          <a:fillRef idx="3">
+            <a:schemeClr val="accent1"/>
+          </a:fillRef>
+          <a:effectRef idx="2">
+            <a:schemeClr val="accent1"/>
+          </a:effectRef>
+          <a:fontRef idx="minor">
+            <a:schemeClr val="lt1"/>
+          </a:fontRef>
+        </p:style>
+        <p:txBody>
+          <a:bodyPr rtlCol="0" anchor="ctr"/>
+          <a:lstStyle/>
+          <a:p>
+            <a:pPr algn="ctr"/>
+          </a:p>
+        </p:txBody>
+      </p:sp>
+      <p:sp>
+        <p:nvSpPr>
+          <p:cNvPr id="11" name="Rounded Rectangle 10"/>
+          <p:cNvSpPr/>
+          <p:nvPr/>
+        </p:nvSpPr>
+        <p:spPr>
+          <a:xfrm>
+            <a:off x="594360" y="2680106"/>
+            <a:ext cx="438912" cy="438912"/>
+          </a:xfrm>
+          <a:prstGeom prst="roundRect">
+            <a:avLst>
+              <a:gd name="adj" fmla="val 12000"/>
+            </a:avLst>
+          </a:prstGeom>
+          <a:solidFill>
+            <a:srgbClr val="095292"/>
+          </a:solidFill>
+          <a:ln>
+            <a:noFill/>
+          </a:ln>
+        </p:spPr>
+        <p:style>
+          <a:lnRef idx="1">
+            <a:schemeClr val="accent1"/>
+          </a:lnRef>
+          <a:fillRef idx="3">
+            <a:schemeClr val="accent1"/>
+          </a:fillRef>
+          <a:effectRef idx="2">
+            <a:schemeClr val="accent1"/>
+          </a:effectRef>
+          <a:fontRef idx="minor">
+            <a:schemeClr val="lt1"/>
+          </a:fontRef>
+        </p:style>
+        <p:txBody>
+          <a:bodyPr rtlCol="0" anchor="ctr"/>
+          <a:lstStyle/>
+          <a:p>
+            <a:pPr algn="ctr"/>
+          </a:p>
+        </p:txBody>
+      </p:sp>
+      <p:sp>
+        <p:nvSpPr>
+          <p:cNvPr id="12" name="TextBox 11"/>
+          <p:cNvSpPr txBox="1"/>
+          <p:nvPr/>
+        </p:nvSpPr>
+        <p:spPr>
+          <a:xfrm>
+            <a:off x="594360" y="2680106"/>
+            <a:ext cx="438912" cy="438912"/>
+          </a:xfrm>
+          <a:prstGeom prst="rect">
+            <a:avLst/>
+          </a:prstGeom>
+          <a:noFill/>
+        </p:spPr>
+        <p:txBody>
+          <a:bodyPr wrap="square" anchor="ctr"/>
+          <a:lstStyle/>
+          <a:p>
+            <a:pPr algn="ctr"/>
+            <a:r>
+              <a:rPr sz="1600" b="1" i="0">
+                <a:solidFill>
+                  <a:srgbClr val="FFFFFF"/>
+                </a:solidFill>
+                <a:latin typeface="Calibri"/>
+              </a:rPr>
+              <a:t>2</a:t>
+            </a:r>
+          </a:p>
+        </p:txBody>
+      </p:sp>
+      <p:sp>
+        <p:nvSpPr>
+          <p:cNvPr id="13" name="TextBox 12"/>
+          <p:cNvSpPr txBox="1"/>
+          <p:nvPr/>
+        </p:nvSpPr>
+        <p:spPr>
+          <a:xfrm>
+            <a:off x="1188720" y="2536545"/>
+            <a:ext cx="10271455" cy="744321"/>
+          </a:xfrm>
+          <a:prstGeom prst="rect">
+            <a:avLst/>
+          </a:prstGeom>
+          <a:noFill/>
+        </p:spPr>
+        <p:txBody>
+          <a:bodyPr wrap="square" anchor="ctr"/>
+          <a:lstStyle/>
+          <a:p>
+            <a:r>
+              <a:rPr sz="1500" b="1" i="0">
+                <a:solidFill>
+                  <a:srgbClr val="095292"/>
+                </a:solidFill>
+                <a:latin typeface="Calibri"/>
+              </a:rPr>
+              <a:t>40 s · Un impacto positivo con su número</a:t>
+            </a:r>
+          </a:p>
+          <a:p>
+            <a:pPr>
+              <a:spcBef>
+                <a:spcPts val="200"/>
+              </a:spcBef>
+            </a:pPr>
+            <a:r>
+              <a:rPr sz="1300" b="0" i="0">
+                <a:solidFill>
+                  <a:srgbClr val="333333"/>
+                </a:solidFill>
+                <a:latin typeface="Calibri"/>
+              </a:rPr>
+              <a:t>El más fuerte, con indicador.</a:t>
+            </a:r>
+          </a:p>
+        </p:txBody>
+      </p:sp>
+      <p:sp>
+        <p:nvSpPr>
+          <p:cNvPr id="14" name="Rounded Rectangle 13"/>
+          <p:cNvSpPr/>
+          <p:nvPr/>
+        </p:nvSpPr>
+        <p:spPr>
+          <a:xfrm>
+            <a:off x="457200" y="3445459"/>
+            <a:ext cx="11277295" cy="908913"/>
+          </a:xfrm>
+          <a:prstGeom prst="roundRect">
+            <a:avLst>
+              <a:gd name="adj" fmla="val 12000"/>
+            </a:avLst>
+          </a:prstGeom>
+          <a:solidFill>
+            <a:srgbClr val="F2F2F2"/>
+          </a:solidFill>
+          <a:ln>
+            <a:noFill/>
+          </a:ln>
+        </p:spPr>
+        <p:style>
+          <a:lnRef idx="1">
+            <a:schemeClr val="accent1"/>
+          </a:lnRef>
+          <a:fillRef idx="3">
+            <a:schemeClr val="accent1"/>
+          </a:fillRef>
+          <a:effectRef idx="2">
+            <a:schemeClr val="accent1"/>
+          </a:effectRef>
+          <a:fontRef idx="minor">
+            <a:schemeClr val="lt1"/>
+          </a:fontRef>
+        </p:style>
+        <p:txBody>
+          <a:bodyPr rtlCol="0" anchor="ctr"/>
+          <a:lstStyle/>
+          <a:p>
+            <a:pPr algn="ctr"/>
+          </a:p>
+        </p:txBody>
+      </p:sp>
+      <p:sp>
+        <p:nvSpPr>
+          <p:cNvPr id="15" name="Rounded Rectangle 14"/>
+          <p:cNvSpPr/>
+          <p:nvPr/>
+        </p:nvSpPr>
+        <p:spPr>
+          <a:xfrm>
+            <a:off x="594360" y="3680460"/>
+            <a:ext cx="438912" cy="438912"/>
+          </a:xfrm>
+          <a:prstGeom prst="roundRect">
+            <a:avLst>
+              <a:gd name="adj" fmla="val 12000"/>
+            </a:avLst>
+          </a:prstGeom>
+          <a:solidFill>
+            <a:srgbClr val="095292"/>
+          </a:solidFill>
+          <a:ln>
+            <a:noFill/>
+          </a:ln>
+        </p:spPr>
+        <p:style>
+          <a:lnRef idx="1">
+            <a:schemeClr val="accent1"/>
+          </a:lnRef>
+          <a:fillRef idx="3">
+            <a:schemeClr val="accent1"/>
+          </a:fillRef>
+          <a:effectRef idx="2">
+            <a:schemeClr val="accent1"/>
+          </a:effectRef>
+          <a:fontRef idx="minor">
+            <a:schemeClr val="lt1"/>
+          </a:fontRef>
+        </p:style>
+        <p:txBody>
+          <a:bodyPr rtlCol="0" anchor="ctr"/>
+          <a:lstStyle/>
+          <a:p>
+            <a:pPr algn="ctr"/>
+          </a:p>
+        </p:txBody>
+      </p:sp>
+      <p:sp>
+        <p:nvSpPr>
+          <p:cNvPr id="16" name="TextBox 15"/>
+          <p:cNvSpPr txBox="1"/>
+          <p:nvPr/>
+        </p:nvSpPr>
+        <p:spPr>
+          <a:xfrm>
+            <a:off x="594360" y="3680460"/>
+            <a:ext cx="438912" cy="438912"/>
+          </a:xfrm>
+          <a:prstGeom prst="rect">
+            <a:avLst/>
+          </a:prstGeom>
+          <a:noFill/>
+        </p:spPr>
+        <p:txBody>
+          <a:bodyPr wrap="square" anchor="ctr"/>
+          <a:lstStyle/>
+          <a:p>
+            <a:pPr algn="ctr"/>
+            <a:r>
+              <a:rPr sz="1600" b="1" i="0">
+                <a:solidFill>
+                  <a:srgbClr val="FFFFFF"/>
+                </a:solidFill>
+                <a:latin typeface="Calibri"/>
+              </a:rPr>
+              <a:t>3</a:t>
+            </a:r>
+          </a:p>
+        </p:txBody>
+      </p:sp>
+      <p:sp>
+        <p:nvSpPr>
+          <p:cNvPr id="17" name="TextBox 16"/>
+          <p:cNvSpPr txBox="1"/>
+          <p:nvPr/>
+        </p:nvSpPr>
+        <p:spPr>
+          <a:xfrm>
+            <a:off x="1188720" y="3536899"/>
+            <a:ext cx="10271455" cy="744321"/>
+          </a:xfrm>
+          <a:prstGeom prst="rect">
+            <a:avLst/>
+          </a:prstGeom>
+          <a:noFill/>
+        </p:spPr>
+        <p:txBody>
+          <a:bodyPr wrap="square" anchor="ctr"/>
+          <a:lstStyle/>
+          <a:p>
+            <a:r>
+              <a:rPr sz="1500" b="1" i="0">
+                <a:solidFill>
+                  <a:srgbClr val="095292"/>
+                </a:solidFill>
+                <a:latin typeface="Calibri"/>
+              </a:rPr>
+              <a:t>70 s · El impacto negativo y su mitigación</a:t>
+            </a:r>
+          </a:p>
+          <a:p>
+            <a:pPr>
+              <a:spcBef>
+                <a:spcPts val="200"/>
+              </a:spcBef>
+            </a:pPr>
+            <a:r>
+              <a:rPr sz="1300" b="1" i="0">
+                <a:solidFill>
+                  <a:srgbClr val="333333"/>
+                </a:solidFill>
+                <a:latin typeface="Calibri"/>
+              </a:rPr>
+              <a:t>El minuto obligatorio.</a:t>
+            </a:r>
+            <a:r>
+              <a:rPr sz="1300" b="0" i="0">
+                <a:solidFill>
+                  <a:srgbClr val="333333"/>
+                </a:solidFill>
+                <a:latin typeface="Calibri"/>
+              </a:rPr>
+              <a:t> El más incómodo que hayan encontrado.</a:t>
+            </a:r>
+          </a:p>
+        </p:txBody>
+      </p:sp>
+      <p:sp>
+        <p:nvSpPr>
+          <p:cNvPr id="18" name="Rounded Rectangle 17"/>
+          <p:cNvSpPr/>
+          <p:nvPr/>
+        </p:nvSpPr>
+        <p:spPr>
+          <a:xfrm>
+            <a:off x="457200" y="4445812"/>
+            <a:ext cx="11277295" cy="908913"/>
+          </a:xfrm>
+          <a:prstGeom prst="roundRect">
+            <a:avLst>
+              <a:gd name="adj" fmla="val 12000"/>
+            </a:avLst>
+          </a:prstGeom>
+          <a:solidFill>
+            <a:srgbClr val="E8F4FA"/>
+          </a:solidFill>
+          <a:ln>
+            <a:noFill/>
+          </a:ln>
+        </p:spPr>
+        <p:style>
+          <a:lnRef idx="1">
+            <a:schemeClr val="accent1"/>
+          </a:lnRef>
+          <a:fillRef idx="3">
+            <a:schemeClr val="accent1"/>
+          </a:fillRef>
+          <a:effectRef idx="2">
+            <a:schemeClr val="accent1"/>
+          </a:effectRef>
+          <a:fontRef idx="minor">
+            <a:schemeClr val="lt1"/>
+          </a:fontRef>
+        </p:style>
+        <p:txBody>
+          <a:bodyPr rtlCol="0" anchor="ctr"/>
+          <a:lstStyle/>
+          <a:p>
+            <a:pPr algn="ctr"/>
+          </a:p>
+        </p:txBody>
+      </p:sp>
+      <p:sp>
+        <p:nvSpPr>
+          <p:cNvPr id="19" name="Rounded Rectangle 18"/>
+          <p:cNvSpPr/>
+          <p:nvPr/>
+        </p:nvSpPr>
+        <p:spPr>
+          <a:xfrm>
+            <a:off x="594360" y="4680813"/>
+            <a:ext cx="438912" cy="438912"/>
+          </a:xfrm>
+          <a:prstGeom prst="roundRect">
+            <a:avLst>
+              <a:gd name="adj" fmla="val 12000"/>
+            </a:avLst>
+          </a:prstGeom>
+          <a:solidFill>
+            <a:srgbClr val="095292"/>
+          </a:solidFill>
+          <a:ln>
+            <a:noFill/>
+          </a:ln>
+        </p:spPr>
+        <p:style>
+          <a:lnRef idx="1">
+            <a:schemeClr val="accent1"/>
+          </a:lnRef>
+          <a:fillRef idx="3">
+            <a:schemeClr val="accent1"/>
+          </a:fillRef>
+          <a:effectRef idx="2">
+            <a:schemeClr val="accent1"/>
+          </a:effectRef>
+          <a:fontRef idx="minor">
+            <a:schemeClr val="lt1"/>
+          </a:fontRef>
+        </p:style>
+        <p:txBody>
+          <a:bodyPr rtlCol="0" anchor="ctr"/>
+          <a:lstStyle/>
+          <a:p>
+            <a:pPr algn="ctr"/>
+          </a:p>
+        </p:txBody>
+      </p:sp>
+      <p:sp>
+        <p:nvSpPr>
+          <p:cNvPr id="20" name="TextBox 19"/>
+          <p:cNvSpPr txBox="1"/>
+          <p:nvPr/>
+        </p:nvSpPr>
+        <p:spPr>
+          <a:xfrm>
+            <a:off x="594360" y="4680813"/>
+            <a:ext cx="438912" cy="438912"/>
+          </a:xfrm>
+          <a:prstGeom prst="rect">
+            <a:avLst/>
+          </a:prstGeom>
+          <a:noFill/>
+        </p:spPr>
+        <p:txBody>
+          <a:bodyPr wrap="square" anchor="ctr"/>
+          <a:lstStyle/>
+          <a:p>
+            <a:pPr algn="ctr"/>
+            <a:r>
+              <a:rPr sz="1600" b="1" i="0">
+                <a:solidFill>
+                  <a:srgbClr val="FFFFFF"/>
+                </a:solidFill>
+                <a:latin typeface="Calibri"/>
+              </a:rPr>
+              <a:t>4</a:t>
+            </a:r>
+          </a:p>
+        </p:txBody>
+      </p:sp>
+      <p:sp>
+        <p:nvSpPr>
+          <p:cNvPr id="21" name="TextBox 20"/>
+          <p:cNvSpPr txBox="1"/>
+          <p:nvPr/>
+        </p:nvSpPr>
+        <p:spPr>
+          <a:xfrm>
+            <a:off x="1188720" y="4537252"/>
+            <a:ext cx="10271455" cy="744321"/>
+          </a:xfrm>
+          <a:prstGeom prst="rect">
+            <a:avLst/>
+          </a:prstGeom>
+          <a:noFill/>
+        </p:spPr>
+        <p:txBody>
+          <a:bodyPr wrap="square" anchor="ctr"/>
+          <a:lstStyle/>
+          <a:p>
+            <a:r>
+              <a:rPr sz="1500" b="1" i="0">
+                <a:solidFill>
+                  <a:srgbClr val="095292"/>
+                </a:solidFill>
+                <a:latin typeface="Calibri"/>
+              </a:rPr>
+              <a:t>30 s · La calificación</a:t>
+            </a:r>
+          </a:p>
+          <a:p>
+            <a:pPr>
+              <a:spcBef>
+                <a:spcPts val="200"/>
+              </a:spcBef>
+            </a:pPr>
+            <a:r>
+              <a:rPr sz="1300" b="0" i="0">
+                <a:solidFill>
+                  <a:srgbClr val="333333"/>
+                </a:solidFill>
+                <a:latin typeface="Calibri"/>
+              </a:rPr>
+              <a:t>Cuál es el impacto más grave y por qué lo calificaron así.</a:t>
+            </a:r>
+          </a:p>
+        </p:txBody>
+      </p:sp>
+      <p:sp>
+        <p:nvSpPr>
+          <p:cNvPr id="22" name="Rounded Rectangle 21"/>
+          <p:cNvSpPr/>
+          <p:nvPr/>
+        </p:nvSpPr>
+        <p:spPr>
+          <a:xfrm>
+            <a:off x="457200" y="5446166"/>
+            <a:ext cx="11277295" cy="908913"/>
+          </a:xfrm>
+          <a:prstGeom prst="roundRect">
+            <a:avLst>
+              <a:gd name="adj" fmla="val 12000"/>
+            </a:avLst>
+          </a:prstGeom>
+          <a:solidFill>
+            <a:srgbClr val="F2F2F2"/>
+          </a:solidFill>
+          <a:ln>
+            <a:noFill/>
+          </a:ln>
+        </p:spPr>
+        <p:style>
+          <a:lnRef idx="1">
+            <a:schemeClr val="accent1"/>
+          </a:lnRef>
+          <a:fillRef idx="3">
+            <a:schemeClr val="accent1"/>
+          </a:fillRef>
+          <a:effectRef idx="2">
+            <a:schemeClr val="accent1"/>
+          </a:effectRef>
+          <a:fontRef idx="minor">
+            <a:schemeClr val="lt1"/>
+          </a:fontRef>
+        </p:style>
+        <p:txBody>
+          <a:bodyPr rtlCol="0" anchor="ctr"/>
+          <a:lstStyle/>
+          <a:p>
+            <a:pPr algn="ctr"/>
+          </a:p>
+        </p:txBody>
+      </p:sp>
+      <p:sp>
+        <p:nvSpPr>
+          <p:cNvPr id="23" name="Rounded Rectangle 22"/>
+          <p:cNvSpPr/>
+          <p:nvPr/>
+        </p:nvSpPr>
+        <p:spPr>
+          <a:xfrm>
+            <a:off x="594360" y="5681167"/>
+            <a:ext cx="438912" cy="438912"/>
+          </a:xfrm>
+          <a:prstGeom prst="roundRect">
+            <a:avLst>
+              <a:gd name="adj" fmla="val 12000"/>
+            </a:avLst>
+          </a:prstGeom>
+          <a:solidFill>
+            <a:srgbClr val="095292"/>
+          </a:solidFill>
+          <a:ln>
+            <a:noFill/>
+          </a:ln>
+        </p:spPr>
+        <p:style>
+          <a:lnRef idx="1">
+            <a:schemeClr val="accent1"/>
+          </a:lnRef>
+          <a:fillRef idx="3">
+            <a:schemeClr val="accent1"/>
+          </a:fillRef>
+          <a:effectRef idx="2">
+            <a:schemeClr val="accent1"/>
+          </a:effectRef>
+          <a:fontRef idx="minor">
+            <a:schemeClr val="lt1"/>
+          </a:fontRef>
+        </p:style>
+        <p:txBody>
+          <a:bodyPr rtlCol="0" anchor="ctr"/>
+          <a:lstStyle/>
+          <a:p>
+            <a:pPr algn="ctr"/>
+          </a:p>
+        </p:txBody>
+      </p:sp>
+      <p:sp>
+        <p:nvSpPr>
+          <p:cNvPr id="24" name="TextBox 23"/>
+          <p:cNvSpPr txBox="1"/>
+          <p:nvPr/>
+        </p:nvSpPr>
+        <p:spPr>
+          <a:xfrm>
+            <a:off x="594360" y="5681167"/>
+            <a:ext cx="438912" cy="438912"/>
+          </a:xfrm>
+          <a:prstGeom prst="rect">
+            <a:avLst/>
+          </a:prstGeom>
+          <a:noFill/>
+        </p:spPr>
+        <p:txBody>
+          <a:bodyPr wrap="square" anchor="ctr"/>
+          <a:lstStyle/>
+          <a:p>
+            <a:pPr algn="ctr"/>
+            <a:r>
+              <a:rPr sz="1600" b="1" i="0">
+                <a:solidFill>
+                  <a:srgbClr val="FFFFFF"/>
+                </a:solidFill>
+                <a:latin typeface="Calibri"/>
+              </a:rPr>
+              <a:t>5</a:t>
+            </a:r>
+          </a:p>
+        </p:txBody>
+      </p:sp>
+      <p:sp>
+        <p:nvSpPr>
+          <p:cNvPr id="25" name="TextBox 24"/>
+          <p:cNvSpPr txBox="1"/>
+          <p:nvPr/>
+        </p:nvSpPr>
+        <p:spPr>
+          <a:xfrm>
+            <a:off x="1188720" y="5537606"/>
+            <a:ext cx="10271455" cy="744321"/>
+          </a:xfrm>
+          <a:prstGeom prst="rect">
+            <a:avLst/>
+          </a:prstGeom>
+          <a:noFill/>
+        </p:spPr>
+        <p:txBody>
+          <a:bodyPr wrap="square" anchor="ctr"/>
+          <a:lstStyle/>
+          <a:p>
+            <a:r>
+              <a:rPr sz="1500" b="1" i="0">
+                <a:solidFill>
+                  <a:srgbClr val="095292"/>
+                </a:solidFill>
+                <a:latin typeface="Calibri"/>
+              </a:rPr>
+              <a:t>10 s · Cierre</a:t>
+            </a:r>
+          </a:p>
+          <a:p>
+            <a:pPr>
+              <a:spcBef>
+                <a:spcPts val="200"/>
+              </a:spcBef>
+            </a:pPr>
+            <a:r>
+              <a:rPr sz="1300" b="0" i="0">
+                <a:solidFill>
+                  <a:srgbClr val="333333"/>
+                </a:solidFill>
+                <a:latin typeface="Calibri"/>
+              </a:rPr>
+              <a:t>Qué dimensión no aplica en su proyecto, y por qué.</a:t>
+            </a:r>
+          </a:p>
+        </p:txBody>
+      </p:sp>
+      <p:sp>
+        <p:nvSpPr>
+          <p:cNvPr id="26" name="TextBox 25"/>
+          <p:cNvSpPr txBox="1"/>
+          <p:nvPr/>
+        </p:nvSpPr>
+        <p:spPr>
+          <a:xfrm>
+            <a:off x="11185855" y="6473952"/>
+            <a:ext cx="640080" cy="274320"/>
+          </a:xfrm>
+          <a:prstGeom prst="rect">
+            <a:avLst/>
+          </a:prstGeom>
+          <a:noFill/>
+        </p:spPr>
+        <p:txBody>
+          <a:bodyPr wrap="square">
+            <a:spAutoFit/>
+          </a:bodyPr>
+          <a:lstStyle/>
+          <a:p>
+            <a:pPr algn="r"/>
+            <a:r>
+              <a:rPr sz="1100" b="0" i="0">
+                <a:solidFill>
+                  <a:srgbClr val="666666"/>
+                </a:solidFill>
+                <a:latin typeface="Calibri"/>
+              </a:rPr>
+              <a:t>22</a:t>
+            </a:r>
+          </a:p>
+        </p:txBody>
+      </p:sp>
+    </p:spTree>
+  </p:cSld>
+  <p:clrMapOvr>
+    <a:masterClrMapping/>
+  </p:clrMapOvr>
+</p:sld>
+</file>
+
+<file path=ppt/slides/slide23.xml><?xml version="1.0" encoding="utf-8"?>
+<p:sld xmlns:a="http://schemas.openxmlformats.org/drawingml/2006/main" xmlns:p="http://schemas.openxmlformats.org/presentationml/2006/main" xmlns:r="http://schemas.openxmlformats.org/officeDocument/2006/relationships">
+  <p:cSld>
+    <p:bg>
+      <p:bgPr>
+        <a:solidFill>
+          <a:srgbClr val="FFFFFF"/>
+        </a:solidFill>
+        <a:effectLst/>
+      </p:bgPr>
+    </p:bg>
+    <p:spTree>
+      <p:nvGrpSpPr>
+        <p:cNvPr id="1" name=""/>
+        <p:cNvGrpSpPr/>
+        <p:nvPr/>
+      </p:nvGrpSpPr>
+      <p:grpSpPr/>
+      <p:sp>
+        <p:nvSpPr>
+          <p:cNvPr id="2" name="Rectangle 1"/>
+          <p:cNvSpPr/>
+          <p:nvPr/>
+        </p:nvSpPr>
+        <p:spPr>
+          <a:xfrm>
+            <a:off x="0" y="0"/>
+            <a:ext cx="12191695" cy="960120"/>
+          </a:xfrm>
+          <a:prstGeom prst="rect">
+            <a:avLst/>
+          </a:prstGeom>
+          <a:solidFill>
+            <a:srgbClr val="095292"/>
+          </a:solidFill>
+          <a:ln>
+            <a:noFill/>
+          </a:ln>
+        </p:spPr>
+        <p:style>
+          <a:lnRef idx="1">
+            <a:schemeClr val="accent1"/>
+          </a:lnRef>
+          <a:fillRef idx="3">
+            <a:schemeClr val="accent1"/>
+          </a:fillRef>
+          <a:effectRef idx="2">
+            <a:schemeClr val="accent1"/>
+          </a:effectRef>
+          <a:fontRef idx="minor">
+            <a:schemeClr val="lt1"/>
+          </a:fontRef>
+        </p:style>
+        <p:txBody>
+          <a:bodyPr rtlCol="0" anchor="ctr"/>
+          <a:lstStyle/>
+          <a:p>
+            <a:pPr algn="ctr"/>
+          </a:p>
+        </p:txBody>
+      </p:sp>
+      <p:sp>
+        <p:nvSpPr>
+          <p:cNvPr id="3" name="Rectangle 2"/>
+          <p:cNvSpPr/>
+          <p:nvPr/>
+        </p:nvSpPr>
+        <p:spPr>
+          <a:xfrm>
+            <a:off x="0" y="960120"/>
+            <a:ext cx="12191695" cy="41148"/>
+          </a:xfrm>
+          <a:prstGeom prst="rect">
+            <a:avLst/>
+          </a:prstGeom>
+          <a:solidFill>
+            <a:srgbClr val="FFD000"/>
+          </a:solidFill>
+          <a:ln>
+            <a:noFill/>
+          </a:ln>
+        </p:spPr>
+        <p:style>
+          <a:lnRef idx="1">
+            <a:schemeClr val="accent1"/>
+          </a:lnRef>
+          <a:fillRef idx="3">
+            <a:schemeClr val="accent1"/>
+          </a:fillRef>
+          <a:effectRef idx="2">
+            <a:schemeClr val="accent1"/>
+          </a:effectRef>
+          <a:fontRef idx="minor">
+            <a:schemeClr val="lt1"/>
+          </a:fontRef>
+        </p:style>
+        <p:txBody>
+          <a:bodyPr rtlCol="0" anchor="ctr"/>
+          <a:lstStyle/>
+          <a:p>
+            <a:pPr algn="ctr"/>
+          </a:p>
+        </p:txBody>
+      </p:sp>
+      <p:sp>
+        <p:nvSpPr>
+          <p:cNvPr id="4" name="TextBox 3"/>
+          <p:cNvSpPr txBox="1"/>
+          <p:nvPr/>
+        </p:nvSpPr>
+        <p:spPr>
+          <a:xfrm>
+            <a:off x="457200" y="164592"/>
+            <a:ext cx="11277295" cy="502920"/>
+          </a:xfrm>
+          <a:prstGeom prst="rect">
+            <a:avLst/>
+          </a:prstGeom>
+          <a:noFill/>
+        </p:spPr>
+        <p:txBody>
+          <a:bodyPr wrap="square">
+            <a:spAutoFit/>
+          </a:bodyPr>
+          <a:lstStyle/>
+          <a:p>
+            <a:r>
+              <a:rPr sz="2600" b="1" i="0">
+                <a:solidFill>
+                  <a:srgbClr val="FFFFFF"/>
+                </a:solidFill>
+                <a:latin typeface="Calibri"/>
+              </a:rPr>
+              <a:t>Para la Clase 14</a:t>
+            </a:r>
+          </a:p>
+        </p:txBody>
+      </p:sp>
+      <p:sp>
+        <p:nvSpPr>
+          <p:cNvPr id="5" name="TextBox 4"/>
+          <p:cNvSpPr txBox="1"/>
+          <p:nvPr/>
+        </p:nvSpPr>
+        <p:spPr>
+          <a:xfrm>
+            <a:off x="457200" y="1170432"/>
+            <a:ext cx="11277295" cy="5230368"/>
+          </a:xfrm>
+          <a:prstGeom prst="rect">
+            <a:avLst/>
+          </a:prstGeom>
+          <a:noFill/>
+        </p:spPr>
+        <p:txBody>
+          <a:bodyPr wrap="square">
+            <a:spAutoFit/>
+          </a:bodyPr>
+          <a:lstStyle/>
+          <a:p>
+            <a:pPr>
+              <a:spcAft>
+                <a:spcPts val="800"/>
+              </a:spcAft>
+            </a:pPr>
+            <a:r>
+              <a:rPr sz="2000" b="0" i="0">
+                <a:solidFill>
+                  <a:srgbClr val="333333"/>
+                </a:solidFill>
+                <a:latin typeface="Calibri"/>
+              </a:rPr>
+              <a:t>–   </a:t>
+            </a:r>
+            <a:r>
+              <a:rPr sz="2000" b="1" i="0">
+                <a:solidFill>
+                  <a:srgbClr val="333333"/>
+                </a:solidFill>
+                <a:latin typeface="Calibri"/>
+              </a:rPr>
+              <a:t>Trabajo dirigido:</a:t>
+            </a:r>
+            <a:r>
+              <a:rPr sz="2000" b="0" i="0">
+                <a:solidFill>
+                  <a:srgbClr val="333333"/>
+                </a:solidFill>
+                <a:latin typeface="Calibri"/>
+              </a:rPr>
+              <a:t> Aplicación de matrices de evaluación — dejar la matriz de impacto completa en el documento del equipo, con indicadores, negativos y mitigaciones.</a:t>
+            </a:r>
+          </a:p>
+          <a:p>
+            <a:pPr>
+              <a:spcAft>
+                <a:spcPts val="800"/>
+              </a:spcAft>
+            </a:pPr>
+            <a:r>
+              <a:rPr sz="2000" b="0" i="0">
+                <a:solidFill>
+                  <a:srgbClr val="333333"/>
+                </a:solidFill>
+                <a:latin typeface="Calibri"/>
+              </a:rPr>
+              <a:t>–   </a:t>
+            </a:r>
+            <a:r>
+              <a:rPr sz="2000" b="1" i="0">
+                <a:solidFill>
+                  <a:srgbClr val="333333"/>
+                </a:solidFill>
+                <a:latin typeface="Calibri"/>
+              </a:rPr>
+              <a:t>Trabajo independiente:</a:t>
+            </a:r>
+            <a:r>
+              <a:rPr sz="2000" b="0" i="0">
+                <a:solidFill>
+                  <a:srgbClr val="333333"/>
+                </a:solidFill>
+                <a:latin typeface="Calibri"/>
+              </a:rPr>
+              <a:t> Informe de evaluación del impacto: media página que resuma </a:t>
+            </a:r>
+            <a:r>
+              <a:rPr sz="2000" b="1" i="0">
+                <a:solidFill>
+                  <a:srgbClr val="333333"/>
+                </a:solidFill>
+                <a:latin typeface="Calibri"/>
+              </a:rPr>
+              <a:t>el impacto positivo más fuerte con su número y el negativo más importante con su mitigación</a:t>
+            </a:r>
+            <a:r>
+              <a:rPr sz="2000" b="0" i="0">
+                <a:solidFill>
+                  <a:srgbClr val="333333"/>
+                </a:solidFill>
+                <a:latin typeface="Calibri"/>
+              </a:rPr>
+              <a:t>. Es el borrador de dos diapositivas de la presentación final.</a:t>
+            </a:r>
+          </a:p>
+          <a:p>
+            <a:pPr>
+              <a:spcAft>
+                <a:spcPts val="800"/>
+              </a:spcAft>
+            </a:pPr>
+            <a:r>
+              <a:rPr sz="2000" b="0" i="0">
+                <a:solidFill>
+                  <a:srgbClr val="333333"/>
+                </a:solidFill>
+                <a:latin typeface="Calibri"/>
+              </a:rPr>
+              <a:t>–   </a:t>
+            </a:r>
+            <a:r>
+              <a:rPr sz="2000" b="1" i="0">
+                <a:solidFill>
+                  <a:srgbClr val="333333"/>
+                </a:solidFill>
+                <a:latin typeface="Calibri"/>
+              </a:rPr>
+              <a:t>Clase 14 · Preparación de la presentación final</a:t>
+            </a:r>
+            <a:r>
+              <a:rPr sz="2000" b="0" i="0">
+                <a:solidFill>
+                  <a:srgbClr val="333333"/>
+                </a:solidFill>
+                <a:latin typeface="Calibri"/>
+              </a:rPr>
+              <a:t> — preparamos la </a:t>
+            </a:r>
+            <a:r>
+              <a:rPr sz="2000" b="1" i="0">
+                <a:solidFill>
+                  <a:srgbClr val="333333"/>
+                </a:solidFill>
+                <a:latin typeface="Calibri"/>
+              </a:rPr>
+              <a:t>presentación final</a:t>
+            </a:r>
+            <a:r>
+              <a:rPr sz="2000" b="0" i="0">
+                <a:solidFill>
+                  <a:srgbClr val="333333"/>
+                </a:solidFill>
+                <a:latin typeface="Calibri"/>
+              </a:rPr>
+              <a:t>: la estructura de 8 minutos, las diapositivas, el reparto entre integrantes y el </a:t>
+            </a:r>
+            <a:r>
+              <a:rPr sz="2000" b="1" i="0">
+                <a:solidFill>
+                  <a:srgbClr val="333333"/>
+                </a:solidFill>
+                <a:latin typeface="Calibri"/>
+              </a:rPr>
+              <a:t>ensayo general cronometrado</a:t>
+            </a:r>
+            <a:r>
+              <a:rPr sz="2000" b="0" i="0">
+                <a:solidFill>
+                  <a:srgbClr val="333333"/>
+                </a:solidFill>
+                <a:latin typeface="Calibri"/>
+              </a:rPr>
+              <a:t>.</a:t>
+            </a:r>
+          </a:p>
+          <a:p>
+            <a:pPr>
+              <a:spcAft>
+                <a:spcPts val="800"/>
+              </a:spcAft>
+            </a:pPr>
+            <a:r>
+              <a:rPr sz="2000" b="0" i="0">
+                <a:solidFill>
+                  <a:srgbClr val="333333"/>
+                </a:solidFill>
+                <a:latin typeface="Calibri"/>
+              </a:rPr>
+              <a:t>–   </a:t>
+            </a:r>
+            <a:r>
+              <a:rPr sz="2000" b="1" i="0">
+                <a:solidFill>
+                  <a:srgbClr val="333333"/>
+                </a:solidFill>
+                <a:latin typeface="Calibri"/>
+              </a:rPr>
+              <a:t>Aviso:</a:t>
+            </a:r>
+            <a:r>
+              <a:rPr sz="2000" b="0" i="0">
+                <a:solidFill>
+                  <a:srgbClr val="333333"/>
+                </a:solidFill>
+                <a:latin typeface="Calibri"/>
+              </a:rPr>
+              <a:t> Para la Clase 14 el </a:t>
+            </a:r>
+            <a:r>
+              <a:rPr sz="2000" b="1" i="0">
+                <a:solidFill>
+                  <a:srgbClr val="333333"/>
+                </a:solidFill>
+                <a:latin typeface="Calibri"/>
+              </a:rPr>
+              <a:t>prototipo tiene que estar ya ajustado</a:t>
+            </a:r>
+            <a:r>
+              <a:rPr sz="2000" b="0" i="0">
+                <a:solidFill>
+                  <a:srgbClr val="333333"/>
+                </a:solidFill>
+                <a:latin typeface="Calibri"/>
+              </a:rPr>
+              <a:t> con lo que salió de la Clase 12: si ensayan con la versión vieja, el ensayo no sirve. Traigan también la cuenta de Canva o Google Slides lista y </a:t>
+            </a:r>
+            <a:r>
+              <a:rPr sz="2000" b="1" i="0">
+                <a:solidFill>
+                  <a:srgbClr val="333333"/>
+                </a:solidFill>
+                <a:latin typeface="Calibri"/>
+              </a:rPr>
+              <a:t>quién va a hablar de qué</a:t>
+            </a:r>
+            <a:r>
+              <a:rPr sz="2000" b="0" i="0">
+                <a:solidFill>
+                  <a:srgbClr val="333333"/>
+                </a:solidFill>
+                <a:latin typeface="Calibri"/>
+              </a:rPr>
+              <a:t>.</a:t>
+            </a:r>
+          </a:p>
+          <a:p>
+            <a:pPr>
+              <a:spcAft>
+                <a:spcPts val="800"/>
+              </a:spcAft>
+            </a:pPr>
+            <a:r>
+              <a:rPr sz="2000" b="0" i="0">
+                <a:solidFill>
+                  <a:srgbClr val="333333"/>
+                </a:solidFill>
+                <a:latin typeface="Calibri"/>
+              </a:rPr>
+              <a:t>–   </a:t>
+            </a:r>
+            <a:r>
+              <a:rPr sz="2000" b="1" i="0">
+                <a:solidFill>
+                  <a:srgbClr val="333333"/>
+                </a:solidFill>
+                <a:latin typeface="Calibri"/>
+              </a:rPr>
+              <a:t>Antes de salir:</a:t>
+            </a:r>
+            <a:r>
+              <a:rPr sz="2000" b="0" i="0">
+                <a:solidFill>
+                  <a:srgbClr val="333333"/>
+                </a:solidFill>
+                <a:latin typeface="Calibri"/>
+              </a:rPr>
+              <a:t> el enlace del documento del equipo en el chat, con permiso de lectura para el docente, y el nombre del vocero de hoy.</a:t>
+            </a:r>
+          </a:p>
+        </p:txBody>
+      </p:sp>
+      <p:sp>
+        <p:nvSpPr>
+          <p:cNvPr id="6" name="TextBox 5"/>
+          <p:cNvSpPr txBox="1"/>
+          <p:nvPr/>
+        </p:nvSpPr>
+        <p:spPr>
+          <a:xfrm>
+            <a:off x="11185855" y="6473952"/>
+            <a:ext cx="640080" cy="274320"/>
+          </a:xfrm>
+          <a:prstGeom prst="rect">
+            <a:avLst/>
+          </a:prstGeom>
+          <a:noFill/>
+        </p:spPr>
+        <p:txBody>
+          <a:bodyPr wrap="square">
+            <a:spAutoFit/>
+          </a:bodyPr>
+          <a:lstStyle/>
+          <a:p>
+            <a:pPr algn="r"/>
+            <a:r>
+              <a:rPr sz="1100" b="0" i="0">
+                <a:solidFill>
+                  <a:srgbClr val="666666"/>
+                </a:solidFill>
+                <a:latin typeface="Calibri"/>
+              </a:rPr>
+              <a:t>23</a:t>
+            </a:r>
+          </a:p>
+        </p:txBody>
+      </p:sp>
+    </p:spTree>
+  </p:cSld>
+  <p:clrMapOvr>
+    <a:masterClrMapping/>
+  </p:clrMapOvr>
+</p:sld>
+</file>
+
+<file path=ppt/slides/slide24.xml><?xml version="1.0" encoding="utf-8"?>
+<p:sld xmlns:a="http://schemas.openxmlformats.org/drawingml/2006/main" xmlns:p="http://schemas.openxmlformats.org/presentationml/2006/main" xmlns:r="http://schemas.openxmlformats.org/officeDocument/2006/relationships">
+  <p:cSld>
+    <p:bg>
+      <p:bgPr>
+        <a:solidFill>
+          <a:srgbClr val="FFFFFF"/>
+        </a:solidFill>
+        <a:effectLst/>
+      </p:bgPr>
+    </p:bg>
+    <p:spTree>
+      <p:nvGrpSpPr>
+        <p:cNvPr id="1" name=""/>
+        <p:cNvGrpSpPr/>
+        <p:nvPr/>
+      </p:nvGrpSpPr>
+      <p:grpSpPr/>
+      <p:sp>
+        <p:nvSpPr>
+          <p:cNvPr id="2" name="Rectangle 1"/>
+          <p:cNvSpPr/>
+          <p:nvPr/>
+        </p:nvSpPr>
+        <p:spPr>
+          <a:xfrm>
+            <a:off x="0" y="0"/>
+            <a:ext cx="12191695" cy="164592"/>
+          </a:xfrm>
+          <a:prstGeom prst="rect">
+            <a:avLst/>
+          </a:prstGeom>
+          <a:solidFill>
+            <a:srgbClr val="269CCB"/>
+          </a:solidFill>
+          <a:ln>
+            <a:noFill/>
+          </a:ln>
+        </p:spPr>
+        <p:style>
+          <a:lnRef idx="1">
+            <a:schemeClr val="accent1"/>
+          </a:lnRef>
+          <a:fillRef idx="3">
+            <a:schemeClr val="accent1"/>
+          </a:fillRef>
+          <a:effectRef idx="2">
+            <a:schemeClr val="accent1"/>
+          </a:effectRef>
+          <a:fontRef idx="minor">
+            <a:schemeClr val="lt1"/>
+          </a:fontRef>
+        </p:style>
+        <p:txBody>
+          <a:bodyPr rtlCol="0" anchor="ctr"/>
+          <a:lstStyle/>
+          <a:p>
+            <a:pPr algn="ctr"/>
+          </a:p>
+        </p:txBody>
+      </p:sp>
+      <p:pic>
+        <p:nvPicPr>
+          <p:cNvPr id="3" name="Picture 2" descr="logo_uniajc_color.png"/>
+          <p:cNvPicPr>
+            <a:picLocks noChangeAspect="1"/>
+          </p:cNvPicPr>
+          <p:nvPr/>
+        </p:nvPicPr>
+        <p:blipFill>
+          <a:blip r:embed="rId2"/>
+          <a:stretch>
+            <a:fillRect/>
+          </a:stretch>
+        </p:blipFill>
+        <p:spPr>
+          <a:xfrm>
+            <a:off x="10271455" y="5998464"/>
+            <a:ext cx="1463040" cy="643233"/>
+          </a:xfrm>
+          <a:prstGeom prst="rect">
+            <a:avLst/>
+          </a:prstGeom>
+        </p:spPr>
+      </p:pic>
+      <p:sp>
+        <p:nvSpPr>
+          <p:cNvPr id="4" name="TextBox 3"/>
+          <p:cNvSpPr txBox="1"/>
+          <p:nvPr/>
+        </p:nvSpPr>
+        <p:spPr>
+          <a:xfrm>
+            <a:off x="457200" y="1737360"/>
+            <a:ext cx="11277295" cy="1097280"/>
+          </a:xfrm>
+          <a:prstGeom prst="rect">
+            <a:avLst/>
+          </a:prstGeom>
+          <a:noFill/>
+        </p:spPr>
+        <p:txBody>
+          <a:bodyPr wrap="square" anchor="ctr"/>
+          <a:lstStyle/>
+          <a:p>
+            <a:pPr algn="ctr"/>
+            <a:r>
+              <a:rPr sz="3400" b="1" i="0">
+                <a:solidFill>
+                  <a:srgbClr val="095292"/>
+                </a:solidFill>
+                <a:latin typeface="Calibri"/>
+              </a:rPr>
+              <a:t>Nos vemos en la Clase 14</a:t>
+            </a:r>
+          </a:p>
+        </p:txBody>
+      </p:sp>
+      <p:sp>
+        <p:nvSpPr>
+          <p:cNvPr id="5" name="TextBox 4"/>
+          <p:cNvSpPr txBox="1"/>
+          <p:nvPr/>
+        </p:nvSpPr>
+        <p:spPr>
+          <a:xfrm>
+            <a:off x="457200" y="3017520"/>
+            <a:ext cx="11277295" cy="1645920"/>
+          </a:xfrm>
+          <a:prstGeom prst="rect">
+            <a:avLst/>
+          </a:prstGeom>
+          <a:noFill/>
+        </p:spPr>
+        <p:txBody>
+          <a:bodyPr wrap="square">
+            <a:spAutoFit/>
+          </a:bodyPr>
+          <a:lstStyle/>
+          <a:p>
+            <a:pPr algn="ctr">
+              <a:spcAft>
+                <a:spcPts val="600"/>
+              </a:spcAft>
+            </a:pPr>
+            <a:r>
+              <a:rPr sz="1600" b="0" i="0">
+                <a:solidFill>
+                  <a:srgbClr val="333333"/>
+                </a:solidFill>
+                <a:latin typeface="Calibri"/>
+              </a:rPr>
+              <a:t>Evaluación de impacto social y ambiental · Clase 13</a:t>
+            </a:r>
+          </a:p>
+          <a:p>
+            <a:pPr algn="ctr">
+              <a:spcAft>
+                <a:spcPts val="600"/>
+              </a:spcAft>
+            </a:pPr>
+            <a:r>
+              <a:rPr sz="1600" b="0" i="0">
+                <a:solidFill>
+                  <a:srgbClr val="333333"/>
+                </a:solidFill>
+                <a:latin typeface="Calibri"/>
+              </a:rPr>
+              <a:t>FI300101 · UNIAJC · Ingeniería de Sistemas</a:t>
+            </a:r>
+          </a:p>
+        </p:txBody>
+      </p:sp>
+      <p:sp>
+        <p:nvSpPr>
+          <p:cNvPr id="6" name="TextBox 5"/>
+          <p:cNvSpPr txBox="1"/>
+          <p:nvPr/>
+        </p:nvSpPr>
+        <p:spPr>
+          <a:xfrm>
+            <a:off x="457200" y="4754880"/>
+            <a:ext cx="11277295" cy="640080"/>
+          </a:xfrm>
+          <a:prstGeom prst="rect">
+            <a:avLst/>
+          </a:prstGeom>
+          <a:noFill/>
+        </p:spPr>
+        <p:txBody>
+          <a:bodyPr wrap="square">
+            <a:spAutoFit/>
+          </a:bodyPr>
+          <a:lstStyle/>
+          <a:p>
+            <a:pPr algn="ctr"/>
+            <a:r>
+              <a:rPr sz="2000" b="1" i="0">
+                <a:solidFill>
+                  <a:srgbClr val="269CCB"/>
+                </a:solidFill>
+                <a:latin typeface="Calibri"/>
+              </a:rPr>
+              <a:t>Los usuarios eligieron usarla; los afectados no eligieron nada</a:t>
             </a:r>
           </a:p>
         </p:txBody>

--- a/Introduccion a la Ingenieria/Clases/Clase 13 - Evaluacion de impacto social y ambiental/Presentacion.pptx
+++ b/Introduccion a la Ingenieria/Clases/Clase 13 - Evaluacion de impacto social y ambiental/Presentacion.pptx
@@ -29,6 +29,7 @@
     <p:sldId id="277" r:id="rId28"/>
     <p:sldId id="278" r:id="rId29"/>
     <p:sldId id="279" r:id="rId30"/>
+    <p:sldId id="280" r:id="rId31"/>
   </p:sldIdLst>
   <p:sldSz cx="12191695" cy="6858000" type="screen4x3"/>
   <p:notesSz cx="6858000" cy="9144000"/>
@@ -4397,22 +4398,6 @@
                 </a:solidFill>
                 <a:latin typeface="Calibri"/>
               </a:rPr>
-              <a:t>–   Ninguno de los dos usa el sistema para consultar, y a los dos les cambió la vida por él.</a:t>
-            </a:r>
-          </a:p>
-          <a:p>
-            <a:pPr>
-              <a:spcAft>
-                <a:spcPts val="800"/>
-              </a:spcAft>
-            </a:pPr>
-            <a:r>
-              <a:rPr sz="2000" b="0" i="0">
-                <a:solidFill>
-                  <a:srgbClr val="333333"/>
-                </a:solidFill>
-                <a:latin typeface="Calibri"/>
-              </a:rPr>
               <a:t>–   El encuadre que justifica la sesión completa, y que conviene decir sin solemnidad: </a:t>
             </a:r>
             <a:r>
@@ -4704,22 +4689,6 @@
               <a:t>–   Los equipos que traigan el listado de la sesión 3 lo van a hacer en treinta segundos; los que no, van a escribir «los usuarios».</a:t>
             </a:r>
           </a:p>
-          <a:p>
-            <a:pPr>
-              <a:spcAft>
-                <a:spcPts val="800"/>
-              </a:spcAft>
-            </a:pPr>
-            <a:r>
-              <a:rPr sz="2000" b="0" i="0">
-                <a:solidFill>
-                  <a:srgbClr val="333333"/>
-                </a:solidFill>
-                <a:latin typeface="Calibri"/>
-              </a:rPr>
-              <a:t>–   Ahí ya sabe con quién tiene que sentarse en las salas de grupo.</a:t>
-            </a:r>
-          </a:p>
         </p:txBody>
       </p:sp>
       <p:sp>
@@ -5665,7 +5634,7 @@
                 </a:solidFill>
                 <a:latin typeface="Calibri"/>
               </a:rPr>
-              <a:t>–   Casi todos lo olvidaron, y ahí está la mitad del trabajo de hoy.</a:t>
+              <a:t>–   Es el impacto indirecto más frecuente.</a:t>
             </a:r>
           </a:p>
           <a:p>
@@ -5681,7 +5650,7 @@
                 </a:solidFill>
                 <a:latin typeface="Calibri"/>
               </a:rPr>
-              <a:t>–   Vale la pena señalar la lección de método —es la tercera vez en el curso que un material viejo resuelve un problema nuevo—: </a:t>
+              <a:t>–   En el caso modelo, la voluntaria del cierre; en un proyecto de gestión, la persona que ahora tiene que llenar el formato. </a:t>
             </a:r>
             <a:r>
               <a:rPr sz="2000" b="1" i="0">
@@ -5690,7 +5659,7 @@
                 </a:solidFill>
                 <a:latin typeface="Calibri"/>
               </a:rPr>
-              <a:t>documentar es una inversión, no un trámite.</a:t>
+              <a:t>Paso 3: preguntar quién NO puede usarla.</a:t>
             </a:r>
             <a:r>
               <a:rPr sz="2000" b="0" i="0">
@@ -5699,25 +5668,7 @@
                 </a:solidFill>
                 <a:latin typeface="Calibri"/>
               </a:rPr>
-              <a:t> </a:t>
-            </a:r>
-            <a:r>
-              <a:rPr sz="2000" b="1" i="0">
-                <a:solidFill>
-                  <a:srgbClr val="333333"/>
-                </a:solidFill>
-                <a:latin typeface="Calibri"/>
-              </a:rPr>
-              <a:t>Paso 2: seguir la cadena de trabajo.</a:t>
-            </a:r>
-            <a:r>
-              <a:rPr sz="2000" b="0" i="0">
-                <a:solidFill>
-                  <a:srgbClr val="333333"/>
-                </a:solidFill>
-                <a:latin typeface="Calibri"/>
-              </a:rPr>
-              <a:t> ¿A quién le llega más trabajo y a quién menos?</a:t>
+              <a:t> Este paso es el corazón ético de la sesión y hay que darle tiempo.</a:t>
             </a:r>
           </a:p>
           <a:p>
@@ -5733,7 +5684,7 @@
                 </a:solidFill>
                 <a:latin typeface="Calibri"/>
               </a:rPr>
-              <a:t>–   Es el impacto indirecto más frecuente.</a:t>
+              <a:t>–   La regla, dicha en una frase que se les debería quedar: **si su solución solo mejora a quien ya estaba mejor</a:t>
             </a:r>
           </a:p>
           <a:p>
@@ -5749,7 +5700,7 @@
                 </a:solidFill>
                 <a:latin typeface="Calibri"/>
               </a:rPr>
-              <a:t>–   En el caso modelo, la voluntaria del cierre; en un proyecto de gestión, la persona que ahora tiene que llenar el formato. </a:t>
+              <a:t>–   Empeoró la brecha.</a:t>
             </a:r>
             <a:r>
               <a:rPr sz="2000" b="1" i="0">
@@ -5758,7 +5709,7 @@
                 </a:solidFill>
                 <a:latin typeface="Calibri"/>
               </a:rPr>
-              <a:t>Paso 3: preguntar quién NO puede usarla.</a:t>
+              <a:t> Y el matiz que hace la idea difícil y verdadera: el excluido puede quedar peor </a:t>
             </a:r>
             <a:r>
               <a:rPr sz="2000" b="0" i="0">
@@ -5767,23 +5718,7 @@
                 </a:solidFill>
                 <a:latin typeface="Calibri"/>
               </a:rPr>
-              <a:t> Este paso es el corazón ético de la sesión y hay que darle tiempo.</a:t>
-            </a:r>
-          </a:p>
-          <a:p>
-            <a:pPr>
-              <a:spcAft>
-                <a:spcPts val="800"/>
-              </a:spcAft>
-            </a:pPr>
-            <a:r>
-              <a:rPr sz="2000" b="0" i="0">
-                <a:solidFill>
-                  <a:srgbClr val="333333"/>
-                </a:solidFill>
-                <a:latin typeface="Calibri"/>
-              </a:rPr>
-              <a:t>–   Quien no tiene celular, datos, lectura fluida, buena vista, o el idioma.</a:t>
+              <a:t>en términos relativos** aunque nada haya cambiado para él, porque los demás mejoraron y la atención se reordenó.</a:t>
             </a:r>
           </a:p>
         </p:txBody>
@@ -6003,56 +5938,6 @@
                 </a:solidFill>
                 <a:latin typeface="Calibri"/>
               </a:rPr>
-              <a:t>–   La regla, dicha en una frase que se les debería quedar: **si su solución solo mejora a quien ya estaba mejor</a:t>
-            </a:r>
-          </a:p>
-          <a:p>
-            <a:pPr>
-              <a:spcAft>
-                <a:spcPts val="800"/>
-              </a:spcAft>
-            </a:pPr>
-            <a:r>
-              <a:rPr sz="2000" b="0" i="0">
-                <a:solidFill>
-                  <a:srgbClr val="333333"/>
-                </a:solidFill>
-                <a:latin typeface="Calibri"/>
-              </a:rPr>
-              <a:t>–   Empeoró la brecha.</a:t>
-            </a:r>
-            <a:r>
-              <a:rPr sz="2000" b="1" i="0">
-                <a:solidFill>
-                  <a:srgbClr val="333333"/>
-                </a:solidFill>
-                <a:latin typeface="Calibri"/>
-              </a:rPr>
-              <a:t> Y el matiz que hace la idea difícil y verdadera: el excluido puede quedar peor </a:t>
-            </a:r>
-            <a:r>
-              <a:rPr sz="2000" b="0" i="0">
-                <a:solidFill>
-                  <a:srgbClr val="333333"/>
-                </a:solidFill>
-                <a:latin typeface="Calibri"/>
-              </a:rPr>
-              <a:t>en términos relativos** aunque nada haya cambiado para él, porque los demás mejoraron y la atención se reordenó.</a:t>
-            </a:r>
-          </a:p>
-          <a:p>
-            <a:pPr>
-              <a:spcAft>
-                <a:spcPts val="800"/>
-              </a:spcAft>
-            </a:pPr>
-            <a:r>
-              <a:rPr sz="2000" b="0" i="0">
-                <a:solidFill>
-                  <a:srgbClr val="333333"/>
-                </a:solidFill>
-                <a:latin typeface="Calibri"/>
-              </a:rPr>
               <a:t>–   Ese caso es real, es incómodo y es exactamente lo que hay que aprender a ver. </a:t>
             </a:r>
             <a:r>
@@ -6320,7 +6205,7 @@
                 </a:solidFill>
                 <a:latin typeface="Calibri"/>
               </a:rPr>
-              <a:t>La matriz, la calificación y los límites del método (1/2)</a:t>
+              <a:t>La matriz, la calificación y los límites del método (1/3)</a:t>
             </a:r>
           </a:p>
         </p:txBody>
@@ -6353,7 +6238,7 @@
               </a:spcAft>
             </a:pPr>
             <a:r>
-              <a:rPr sz="1900" b="0" i="0">
+              <a:rPr sz="2000" b="0" i="0">
                 <a:solidFill>
                   <a:srgbClr val="333333"/>
                 </a:solidFill>
@@ -6362,7 +6247,7 @@
               <a:t>–   La primera tabla es la plantilla del taller y conviene recorrerla dimensión por dimensión, deteniéndose en la columna de la derecha: </a:t>
             </a:r>
             <a:r>
-              <a:rPr sz="1900" b="1" i="0">
+              <a:rPr sz="2000" b="1" i="0">
                 <a:solidFill>
                   <a:srgbClr val="333333"/>
                 </a:solidFill>
@@ -6371,7 +6256,7 @@
               <a:t>cómo se mide</a:t>
             </a:r>
             <a:r>
-              <a:rPr sz="1900" b="0" i="0">
+              <a:rPr sz="2000" b="0" i="0">
                 <a:solidFill>
                   <a:srgbClr val="333333"/>
                 </a:solidFill>
@@ -6387,13 +6272,13 @@
               </a:spcAft>
             </a:pPr>
             <a:r>
-              <a:rPr sz="1900" b="0" i="0">
-                <a:solidFill>
-                  <a:srgbClr val="333333"/>
-                </a:solidFill>
-                <a:latin typeface="Calibri"/>
-              </a:rPr>
-              <a:t>–   Ahí está el aprendizaje.</a:t>
+              <a:rPr sz="2000" b="0" i="0">
+                <a:solidFill>
+                  <a:srgbClr val="333333"/>
+                </a:solidFill>
+                <a:latin typeface="Calibri"/>
+              </a:rPr>
+              <a:t>–   «Acceso» no se mide con adjetivos sino con el número de personas del grupo objetivo que quedan fuera y por qué motivo.</a:t>
             </a:r>
           </a:p>
           <a:p>
@@ -6403,13 +6288,13 @@
               </a:spcAft>
             </a:pPr>
             <a:r>
-              <a:rPr sz="1900" b="0" i="0">
-                <a:solidFill>
-                  <a:srgbClr val="333333"/>
-                </a:solidFill>
-                <a:latin typeface="Calibri"/>
-              </a:rPr>
-              <a:t>–   «Acceso» no se mide con adjetivos sino con el número de personas del grupo objetivo que quedan fuera y por qué motivo.</a:t>
+              <a:rPr sz="2000" b="0" i="0">
+                <a:solidFill>
+                  <a:srgbClr val="333333"/>
+                </a:solidFill>
+                <a:latin typeface="Calibri"/>
+              </a:rPr>
+              <a:t>–   «Consumo» se mide en KB por consulta por número de consultas estimadas — y ese número ya lo tienen desde la sesión 5.</a:t>
             </a:r>
           </a:p>
           <a:p>
@@ -6419,39 +6304,7 @@
               </a:spcAft>
             </a:pPr>
             <a:r>
-              <a:rPr sz="1900" b="0" i="0">
-                <a:solidFill>
-                  <a:srgbClr val="333333"/>
-                </a:solidFill>
-                <a:latin typeface="Calibri"/>
-              </a:rPr>
-              <a:t>–   «Carga de trabajo» se mide en minutos por día.</a:t>
-            </a:r>
-          </a:p>
-          <a:p>
-            <a:pPr>
-              <a:spcAft>
-                <a:spcPts val="800"/>
-              </a:spcAft>
-            </a:pPr>
-            <a:r>
-              <a:rPr sz="1900" b="0" i="0">
-                <a:solidFill>
-                  <a:srgbClr val="333333"/>
-                </a:solidFill>
-                <a:latin typeface="Calibri"/>
-              </a:rPr>
-              <a:t>–   «Consumo» se mide en KB por consulta por número de consultas estimadas — y ese número ya lo tienen desde la sesión 5.</a:t>
-            </a:r>
-          </a:p>
-          <a:p>
-            <a:pPr>
-              <a:spcAft>
-                <a:spcPts val="800"/>
-              </a:spcAft>
-            </a:pPr>
-            <a:r>
-              <a:rPr sz="1900" b="0" i="0">
+              <a:rPr sz="2000" b="0" i="0">
                 <a:solidFill>
                   <a:srgbClr val="333333"/>
                 </a:solidFill>
@@ -6460,7 +6313,7 @@
               <a:t>–   Insista en la nota al pie: </a:t>
             </a:r>
             <a:r>
-              <a:rPr sz="1900" b="1" i="0">
+              <a:rPr sz="2000" b="1" i="0">
                 <a:solidFill>
                   <a:srgbClr val="333333"/>
                 </a:solidFill>
@@ -6469,45 +6322,13 @@
               <a:t>una fila que no aplica se escribe «no aplica» con una línea de razón.</a:t>
             </a:r>
             <a:r>
-              <a:rPr sz="1900" b="0" i="0">
+              <a:rPr sz="2000" b="0" i="0">
                 <a:solidFill>
                   <a:srgbClr val="333333"/>
                 </a:solidFill>
                 <a:latin typeface="Calibri"/>
               </a:rPr>
               <a:t> Dejarla en blanco parece un olvido, y en un informe real el lector no puede distinguir entre «no aplica» y «no lo pensamos».</a:t>
-            </a:r>
-          </a:p>
-          <a:p>
-            <a:pPr>
-              <a:spcAft>
-                <a:spcPts val="800"/>
-              </a:spcAft>
-            </a:pPr>
-            <a:r>
-              <a:rPr sz="1900" b="0" i="0">
-                <a:solidFill>
-                  <a:srgbClr val="333333"/>
-                </a:solidFill>
-                <a:latin typeface="Calibri"/>
-              </a:rPr>
-              <a:t>–   La segunda tabla es la calificación, y aquí hay que hacer un ejercicio de honestidad intelectual que vale más que la tabla misma.</a:t>
-            </a:r>
-          </a:p>
-          <a:p>
-            <a:pPr>
-              <a:spcAft>
-                <a:spcPts val="800"/>
-              </a:spcAft>
-            </a:pPr>
-            <a:r>
-              <a:rPr sz="1900" b="0" i="0">
-                <a:solidFill>
-                  <a:srgbClr val="333333"/>
-                </a:solidFill>
-                <a:latin typeface="Calibri"/>
-              </a:rPr>
-              <a:t>–   Los cinco criterios —carácter, magnitud, extensión, duración, reversibilidad— provienen de las metodologías de evaluación de impacto ambiental</a:t>
             </a:r>
           </a:p>
         </p:txBody>
@@ -6688,7 +6509,7 @@
                 </a:solidFill>
                 <a:latin typeface="Calibri"/>
               </a:rPr>
-              <a:t>La matriz, la calificación y los límites del método (2/2)</a:t>
+              <a:t>La matriz, la calificación y los límites del método (2/3)</a:t>
             </a:r>
           </a:p>
         </p:txBody>
@@ -6727,7 +6548,7 @@
                 </a:solidFill>
                 <a:latin typeface="Calibri"/>
               </a:rPr>
-              <a:t>–   Que trabajan con matrices de este tipo desde los años setenta; la matriz de Leopold, de 1971, es el ejemplo clásico y sigue siendo el punto de partida de la mayoría de las variantes que se usan hoy.</a:t>
+              <a:t>–   La segunda tabla es la calificación, y aquí hay que hacer un ejercicio de honestidad intelectual que vale más que la tabla misma.</a:t>
             </a:r>
           </a:p>
           <a:p>
@@ -6743,7 +6564,7 @@
                 </a:solidFill>
                 <a:latin typeface="Calibri"/>
               </a:rPr>
-              <a:t>–   Si algún estudiante quiere profundizar, esa es la palabra que debe buscar, y ya saben de la sesión 9 cómo verificar una fuente.</a:t>
+              <a:t>–   Los cinco criterios —carácter, magnitud, extensión, duración, reversibilidad— provienen de las metodologías de evaluación de impacto ambiental</a:t>
             </a:r>
           </a:p>
           <a:p>
@@ -6759,25 +6580,7 @@
                 </a:solidFill>
                 <a:latin typeface="Calibri"/>
               </a:rPr>
-              <a:t>–   Y ahora el límite, que hay que decir en voz alta porque es formativo: </a:t>
-            </a:r>
-            <a:r>
-              <a:rPr sz="2000" b="1" i="0">
-                <a:solidFill>
-                  <a:srgbClr val="333333"/>
-                </a:solidFill>
-                <a:latin typeface="Calibri"/>
-              </a:rPr>
-              <a:t>las escalas son una convención para comparar y ordenar, no una medición.</a:t>
-            </a:r>
-            <a:r>
-              <a:rPr sz="2000" b="0" i="0">
-                <a:solidFill>
-                  <a:srgbClr val="333333"/>
-                </a:solidFill>
-                <a:latin typeface="Calibri"/>
-              </a:rPr>
-              <a:t> Poner «magnitud: alta» no convierte un juicio en un dato.</a:t>
+              <a:t>–   Que trabajan con matrices de este tipo desde los años setenta; la matriz de Leopold, de 1971, es el ejemplo clásico y sigue siendo el punto de partida de la mayoría de las variantes que se usan hoy.</a:t>
             </a:r>
           </a:p>
           <a:p>
@@ -6793,75 +6596,7 @@
                 </a:solidFill>
                 <a:latin typeface="Calibri"/>
               </a:rPr>
-              <a:t>–   Dos equipos honestos pueden calificar distinto el mismo impacto, y eso no invalida el método: la matriz sirve para </a:t>
-            </a:r>
-            <a:r>
-              <a:rPr sz="2000" b="1" i="0">
-                <a:solidFill>
-                  <a:srgbClr val="333333"/>
-                </a:solidFill>
-                <a:latin typeface="Calibri"/>
-              </a:rPr>
-              <a:t>ordenar prioridades y forzar la conversación</a:t>
-            </a:r>
-            <a:r>
-              <a:rPr sz="2000" b="0" i="0">
-                <a:solidFill>
-                  <a:srgbClr val="333333"/>
-                </a:solidFill>
-                <a:latin typeface="Calibri"/>
-              </a:rPr>
-              <a:t>, no para producir un número objetivo.</a:t>
-            </a:r>
-          </a:p>
-          <a:p>
-            <a:pPr>
-              <a:spcAft>
-                <a:spcPts val="800"/>
-              </a:spcAft>
-            </a:pPr>
-            <a:r>
-              <a:rPr sz="2000" b="0" i="0">
-                <a:solidFill>
-                  <a:srgbClr val="333333"/>
-                </a:solidFill>
-                <a:latin typeface="Calibri"/>
-              </a:rPr>
-              <a:t>–   Lo que sí es exigible es que </a:t>
-            </a:r>
-            <a:r>
-              <a:rPr sz="2000" b="1" i="0">
-                <a:solidFill>
-                  <a:srgbClr val="333333"/>
-                </a:solidFill>
-                <a:latin typeface="Calibri"/>
-              </a:rPr>
-              <a:t>cada calificación tenga una línea de justificación</a:t>
-            </a:r>
-            <a:r>
-              <a:rPr sz="2000" b="0" i="0">
-                <a:solidFill>
-                  <a:srgbClr val="333333"/>
-                </a:solidFill>
-                <a:latin typeface="Calibri"/>
-              </a:rPr>
-              <a:t>.</a:t>
-            </a:r>
-          </a:p>
-          <a:p>
-            <a:pPr>
-              <a:spcAft>
-                <a:spcPts val="800"/>
-              </a:spcAft>
-            </a:pPr>
-            <a:r>
-              <a:rPr sz="2000" b="0" i="0">
-                <a:solidFill>
-                  <a:srgbClr val="333333"/>
-                </a:solidFill>
-                <a:latin typeface="Calibri"/>
-              </a:rPr>
-              <a:t>–   Un estudiante que entiende esto no va a confundir nunca más una escala ordinal con una medición, y esa es una de las confusiones más comunes en informes técnicos.</a:t>
+              <a:t>–   Si algún estudiante quiere profundizar, esa es la palabra que debe buscar, y ya saben de la sesión 9 cómo verificar una fuente.</a:t>
             </a:r>
           </a:p>
         </p:txBody>
@@ -7042,7 +6777,7 @@
                 </a:solidFill>
                 <a:latin typeface="Calibri"/>
               </a:rPr>
-              <a:t>Del adjetivo al indicador, y las tres honestidades (1/2)</a:t>
+              <a:t>La matriz, la calificación y los límites del método (3/3)</a:t>
             </a:r>
           </a:p>
         </p:txBody>
@@ -7075,13 +6810,31 @@
               </a:spcAft>
             </a:pPr>
             <a:r>
-              <a:rPr sz="1900" b="0" i="0">
-                <a:solidFill>
-                  <a:srgbClr val="333333"/>
-                </a:solidFill>
-                <a:latin typeface="Calibri"/>
-              </a:rPr>
-              <a:t>–   La diapositiva de antes y después es la que más rinde en clase, porque la columna izquierda es literalmente lo que van a escribir si no se les enseña otra cosa: «beneficia a la comunidad»</a:t>
+              <a:rPr sz="2000" b="0" i="0">
+                <a:solidFill>
+                  <a:srgbClr val="333333"/>
+                </a:solidFill>
+                <a:latin typeface="Calibri"/>
+              </a:rPr>
+              <a:t>–   Y ahora el límite, que hay que decir en voz alta porque es formativo: </a:t>
+            </a:r>
+            <a:r>
+              <a:rPr sz="2000" b="1" i="0">
+                <a:solidFill>
+                  <a:srgbClr val="333333"/>
+                </a:solidFill>
+                <a:latin typeface="Calibri"/>
+              </a:rPr>
+              <a:t>las escalas son una convención para comparar y ordenar, no una medición.</a:t>
+            </a:r>
+            <a:r>
+              <a:rPr sz="2000" b="0" i="0">
+                <a:solidFill>
+                  <a:srgbClr val="333333"/>
+                </a:solidFill>
+                <a:latin typeface="Calibri"/>
+              </a:rPr>
+              <a:t> Poner «magnitud: alta» no convierte un juicio en un dato.</a:t>
             </a:r>
           </a:p>
           <a:p>
@@ -7091,13 +6844,31 @@
               </a:spcAft>
             </a:pPr>
             <a:r>
-              <a:rPr sz="1900" b="0" i="0">
-                <a:solidFill>
-                  <a:srgbClr val="333333"/>
-                </a:solidFill>
-                <a:latin typeface="Calibri"/>
-              </a:rPr>
-              <a:t>–   «contribuye al cuidado del medio ambiente», «mejora la calidad de vida».</a:t>
+              <a:rPr sz="2000" b="0" i="0">
+                <a:solidFill>
+                  <a:srgbClr val="333333"/>
+                </a:solidFill>
+                <a:latin typeface="Calibri"/>
+              </a:rPr>
+              <a:t>–   Dos equipos honestos pueden calificar distinto el mismo impacto, y eso no invalida el método: la matriz sirve para </a:t>
+            </a:r>
+            <a:r>
+              <a:rPr sz="2000" b="1" i="0">
+                <a:solidFill>
+                  <a:srgbClr val="333333"/>
+                </a:solidFill>
+                <a:latin typeface="Calibri"/>
+              </a:rPr>
+              <a:t>ordenar prioridades y forzar la conversación</a:t>
+            </a:r>
+            <a:r>
+              <a:rPr sz="2000" b="0" i="0">
+                <a:solidFill>
+                  <a:srgbClr val="333333"/>
+                </a:solidFill>
+                <a:latin typeface="Calibri"/>
+              </a:rPr>
+              <a:t>, no para producir un número objetivo.</a:t>
             </a:r>
           </a:p>
           <a:p>
@@ -7107,165 +6878,13 @@
               </a:spcAft>
             </a:pPr>
             <a:r>
-              <a:rPr sz="1900" b="0" i="0">
-                <a:solidFill>
-                  <a:srgbClr val="333333"/>
-                </a:solidFill>
-                <a:latin typeface="Calibri"/>
-              </a:rPr>
-              <a:t>–   Leerlas en voz alta produce risa incómoda, y ese es el momento de hacer la pregunta: </a:t>
-            </a:r>
-            <a:r>
-              <a:rPr sz="1900" b="1" i="0">
-                <a:solidFill>
-                  <a:srgbClr val="333333"/>
-                </a:solidFill>
-                <a:latin typeface="Calibri"/>
-              </a:rPr>
-              <a:t>¿qué proyecto NO podría escribir estas cinco frases?</a:t>
-            </a:r>
-            <a:r>
-              <a:rPr sz="1900" b="0" i="0">
-                <a:solidFill>
-                  <a:srgbClr val="333333"/>
-                </a:solidFill>
-                <a:latin typeface="Calibri"/>
-              </a:rPr>
-              <a:t> Ninguno.</a:t>
-            </a:r>
-          </a:p>
-          <a:p>
-            <a:pPr>
-              <a:spcAft>
-                <a:spcPts val="800"/>
-              </a:spcAft>
-            </a:pPr>
-            <a:r>
-              <a:rPr sz="1900" b="0" i="0">
-                <a:solidFill>
-                  <a:srgbClr val="333333"/>
-                </a:solidFill>
-                <a:latin typeface="Calibri"/>
-              </a:rPr>
-              <a:t>–   Una afirmación que sirve para todo no informa de nada.</a:t>
-            </a:r>
-          </a:p>
-          <a:p>
-            <a:pPr>
-              <a:spcAft>
-                <a:spcPts val="800"/>
-              </a:spcAft>
-            </a:pPr>
-            <a:r>
-              <a:rPr sz="1900" b="0" i="0">
-                <a:solidFill>
-                  <a:srgbClr val="333333"/>
-                </a:solidFill>
-                <a:latin typeface="Calibri"/>
-              </a:rPr>
-              <a:t>–   La columna derecha muestra el mismo contenido convertido en indicador: 4 de cada 10 viajes evitados, menos de 200 KB por consulta, un pasaje y 25 minutos ahorrados por visita.</a:t>
-            </a:r>
-          </a:p>
-          <a:p>
-            <a:pPr>
-              <a:spcAft>
-                <a:spcPts val="800"/>
-              </a:spcAft>
-            </a:pPr>
-            <a:r>
-              <a:rPr sz="1900" b="0" i="0">
-                <a:solidFill>
-                  <a:srgbClr val="333333"/>
-                </a:solidFill>
-                <a:latin typeface="Calibri"/>
-              </a:rPr>
-              <a:t>–   Y el detalle que hay que señalar con el cursor: </a:t>
-            </a:r>
-            <a:r>
-              <a:rPr sz="1900" b="1" i="0">
-                <a:solidFill>
-                  <a:srgbClr val="333333"/>
-                </a:solidFill>
-                <a:latin typeface="Calibri"/>
-              </a:rPr>
-              <a:t>las dos últimas líneas de la derecha son impactos negativos</a:t>
-            </a:r>
-            <a:r>
-              <a:rPr sz="1900" b="0" i="0">
-                <a:solidFill>
-                  <a:srgbClr val="333333"/>
-                </a:solidFill>
-                <a:latin typeface="Calibri"/>
-              </a:rPr>
-              <a:t> —1 de cada 5 vecinos queda fuera, 10 minutos diarios extra para la voluntaria— </a:t>
-            </a:r>
-            <a:r>
-              <a:rPr sz="1900" b="1" i="0">
-                <a:solidFill>
-                  <a:srgbClr val="333333"/>
-                </a:solidFill>
-                <a:latin typeface="Calibri"/>
-              </a:rPr>
-              <a:t>y son precisamente las que hacen creíbles a las otras tres</a:t>
-            </a:r>
-            <a:r>
-              <a:rPr sz="1900" b="0" i="0">
-                <a:solidFill>
-                  <a:srgbClr val="333333"/>
-                </a:solidFill>
-                <a:latin typeface="Calibri"/>
-              </a:rPr>
-              <a:t>.</a:t>
-            </a:r>
-          </a:p>
-          <a:p>
-            <a:pPr>
-              <a:spcAft>
-                <a:spcPts val="800"/>
-              </a:spcAft>
-            </a:pPr>
-            <a:r>
-              <a:rPr sz="1900" b="0" i="0">
-                <a:solidFill>
-                  <a:srgbClr val="333333"/>
-                </a:solidFill>
-                <a:latin typeface="Calibri"/>
-              </a:rPr>
-              <a:t>–   Un lector experimentado confía en un informe que reconoce sus costos.</a:t>
-            </a:r>
-          </a:p>
-          <a:p>
-            <a:pPr>
-              <a:spcAft>
-                <a:spcPts val="800"/>
-              </a:spcAft>
-            </a:pPr>
-            <a:r>
-              <a:rPr sz="1900" b="0" i="0">
-                <a:solidFill>
-                  <a:srgbClr val="333333"/>
-                </a:solidFill>
-                <a:latin typeface="Calibri"/>
-              </a:rPr>
-              <a:t>–   De las tres honestidades, la primera es la que hay que repetir hasta que se instale: </a:t>
-            </a:r>
-            <a:r>
-              <a:rPr sz="1900" b="1" i="0">
-                <a:solidFill>
-                  <a:srgbClr val="333333"/>
-                </a:solidFill>
-                <a:latin typeface="Calibri"/>
-              </a:rPr>
-              <a:t>«no genera ningún impacto negativo» es la frase que más credibilidad quita en un informe de ingeniería.</a:t>
-            </a:r>
-            <a:r>
-              <a:rPr sz="1900" b="0" i="0">
-                <a:solidFill>
-                  <a:srgbClr val="333333"/>
-                </a:solidFill>
-                <a:latin typeface="Calibri"/>
-              </a:rPr>
-              <a:t> Toda solución tiene costos.</a:t>
+              <a:rPr sz="2000" b="0" i="0">
+                <a:solidFill>
+                  <a:srgbClr val="333333"/>
+                </a:solidFill>
+                <a:latin typeface="Calibri"/>
+              </a:rPr>
+              <a:t>–   Un estudiante que entiende esto no va a confundir nunca más una escala ordinal con una medición, y esa es una de las confusiones más comunes en informes técnicos.</a:t>
             </a:r>
           </a:p>
         </p:txBody>
@@ -8332,7 +7951,7 @@
                 </a:solidFill>
                 <a:latin typeface="Calibri"/>
               </a:rPr>
-              <a:t>Del adjetivo al indicador, y las tres honestidades (2/2)</a:t>
+              <a:t>Del adjetivo al indicador, y las tres honestidades (1/2)</a:t>
             </a:r>
           </a:p>
         </p:txBody>
@@ -8371,7 +7990,25 @@
                 </a:solidFill>
                 <a:latin typeface="Calibri"/>
               </a:rPr>
-              <a:t>–   Un equipo que no encuentra ninguno no buscó.</a:t>
+              <a:t>–   Leerlas en voz alta produce risa incómoda, y ese es el momento de hacer la pregunta: </a:t>
+            </a:r>
+            <a:r>
+              <a:rPr sz="2000" b="1" i="0">
+                <a:solidFill>
+                  <a:srgbClr val="333333"/>
+                </a:solidFill>
+                <a:latin typeface="Calibri"/>
+              </a:rPr>
+              <a:t>¿qué proyecto NO podría escribir estas cinco frases?</a:t>
+            </a:r>
+            <a:r>
+              <a:rPr sz="2000" b="0" i="0">
+                <a:solidFill>
+                  <a:srgbClr val="333333"/>
+                </a:solidFill>
+                <a:latin typeface="Calibri"/>
+              </a:rPr>
+              <a:t> Ninguno.</a:t>
             </a:r>
           </a:p>
           <a:p>
@@ -8387,25 +8024,7 @@
                 </a:solidFill>
                 <a:latin typeface="Calibri"/>
               </a:rPr>
-              <a:t>–   La segunda desactiva la excusa más común: si no se puede medir, </a:t>
-            </a:r>
-            <a:r>
-              <a:rPr sz="2000" b="1" i="0">
-                <a:solidFill>
-                  <a:srgbClr val="333333"/>
-                </a:solidFill>
-                <a:latin typeface="Calibri"/>
-              </a:rPr>
-              <a:t>se describe con precisión y se dice cómo se podría medir</a:t>
-            </a:r>
-            <a:r>
-              <a:rPr sz="2000" b="0" i="0">
-                <a:solidFill>
-                  <a:srgbClr val="333333"/>
-                </a:solidFill>
-                <a:latin typeface="Calibri"/>
-              </a:rPr>
-              <a:t>.</a:t>
+              <a:t>–   La columna derecha muestra el mismo contenido convertido en indicador: 4 de cada 10 viajes evitados, menos de 200 KB por consulta, un pasaje y 25 minutos ahorrados por visita.</a:t>
             </a:r>
           </a:p>
           <a:p>
@@ -8421,7 +8040,43 @@
                 </a:solidFill>
                 <a:latin typeface="Calibri"/>
               </a:rPr>
-              <a:t>–   «No sabemos cuántos vecinos no tienen datos móviles; se sabría con una encuesta de diez casas» es una respuesta profesional, y de hecho es el tipo de frase que aparece en informes reales.</a:t>
+              <a:t>–   Y el detalle que hay que señalar con el cursor: </a:t>
+            </a:r>
+            <a:r>
+              <a:rPr sz="2000" b="1" i="0">
+                <a:solidFill>
+                  <a:srgbClr val="333333"/>
+                </a:solidFill>
+                <a:latin typeface="Calibri"/>
+              </a:rPr>
+              <a:t>las dos últimas líneas de la derecha son impactos negativos</a:t>
+            </a:r>
+            <a:r>
+              <a:rPr sz="2000" b="0" i="0">
+                <a:solidFill>
+                  <a:srgbClr val="333333"/>
+                </a:solidFill>
+                <a:latin typeface="Calibri"/>
+              </a:rPr>
+              <a:t> —1 de cada 5 vecinos queda fuera, 10 minutos diarios extra para la voluntaria— </a:t>
+            </a:r>
+            <a:r>
+              <a:rPr sz="2000" b="1" i="0">
+                <a:solidFill>
+                  <a:srgbClr val="333333"/>
+                </a:solidFill>
+                <a:latin typeface="Calibri"/>
+              </a:rPr>
+              <a:t>y son precisamente las que hacen creíbles a las otras tres</a:t>
+            </a:r>
+            <a:r>
+              <a:rPr sz="2000" b="0" i="0">
+                <a:solidFill>
+                  <a:srgbClr val="333333"/>
+                </a:solidFill>
+                <a:latin typeface="Calibri"/>
+              </a:rPr>
+              <a:t>.</a:t>
             </a:r>
           </a:p>
           <a:p>
@@ -8437,7 +8092,25 @@
                 </a:solidFill>
                 <a:latin typeface="Calibri"/>
               </a:rPr>
-              <a:t>–   Lo que no es profesional es un «no aplica» sin razón.</a:t>
+              <a:t>–   La segunda desactiva la excusa más común: si no se puede medir, </a:t>
+            </a:r>
+            <a:r>
+              <a:rPr sz="2000" b="1" i="0">
+                <a:solidFill>
+                  <a:srgbClr val="333333"/>
+                </a:solidFill>
+                <a:latin typeface="Calibri"/>
+              </a:rPr>
+              <a:t>se describe con precisión y se dice cómo se podría medir</a:t>
+            </a:r>
+            <a:r>
+              <a:rPr sz="2000" b="0" i="0">
+                <a:solidFill>
+                  <a:srgbClr val="333333"/>
+                </a:solidFill>
+                <a:latin typeface="Calibri"/>
+              </a:rPr>
+              <a:t>.</a:t>
             </a:r>
           </a:p>
           <a:p>
@@ -8453,91 +8126,7 @@
                 </a:solidFill>
                 <a:latin typeface="Calibri"/>
               </a:rPr>
-              <a:t>–   La tercera cierra el arco del curso: </a:t>
-            </a:r>
-            <a:r>
-              <a:rPr sz="2000" b="1" i="0">
-                <a:solidFill>
-                  <a:srgbClr val="333333"/>
-                </a:solidFill>
-                <a:latin typeface="Calibri"/>
-              </a:rPr>
-              <a:t>el software también consume.</a:t>
-            </a:r>
-            <a:r>
-              <a:rPr sz="2000" b="0" i="0">
-                <a:solidFill>
-                  <a:srgbClr val="333333"/>
-                </a:solidFill>
-                <a:latin typeface="Calibri"/>
-              </a:rPr>
-              <a:t> Datos que alguien paga, energía, hardware que se vuelve residuo.</a:t>
-            </a:r>
-          </a:p>
-          <a:p>
-            <a:pPr>
-              <a:spcAft>
-                <a:spcPts val="800"/>
-              </a:spcAft>
-            </a:pPr>
-            <a:r>
-              <a:rPr sz="2000" b="0" i="0">
-                <a:solidFill>
-                  <a:srgbClr val="333333"/>
-                </a:solidFill>
-                <a:latin typeface="Calibri"/>
-              </a:rPr>
-              <a:t>–   Y aquí hay un hallazgo que vale la pena hacerles ver, porque conecta cuatro sesiones: el límite de 200 KB por consulta que definieron en la sesión 5 como indicador</a:t>
-            </a:r>
-          </a:p>
-          <a:p>
-            <a:pPr>
-              <a:spcAft>
-                <a:spcPts val="800"/>
-              </a:spcAft>
-            </a:pPr>
-            <a:r>
-              <a:rPr sz="2000" b="0" i="0">
-                <a:solidFill>
-                  <a:srgbClr val="333333"/>
-                </a:solidFill>
-                <a:latin typeface="Calibri"/>
-              </a:rPr>
-              <a:t>–   Se volvió requisito no funcional en la sesión 7, sirvió para descartar imágenes en las sesiones 10 y 11, y hoy entra a la matriz como </a:t>
-            </a:r>
-            <a:r>
-              <a:rPr sz="2000" b="1" i="0">
-                <a:solidFill>
-                  <a:srgbClr val="333333"/>
-                </a:solidFill>
-                <a:latin typeface="Calibri"/>
-              </a:rPr>
-              <a:t>medida de mitigación ambiental</a:t>
-            </a:r>
-            <a:r>
-              <a:rPr sz="2000" b="0" i="0">
-                <a:solidFill>
-                  <a:srgbClr val="333333"/>
-                </a:solidFill>
-                <a:latin typeface="Calibri"/>
-              </a:rPr>
-              <a:t>.</a:t>
-            </a:r>
-          </a:p>
-          <a:p>
-            <a:pPr>
-              <a:spcAft>
-                <a:spcPts val="800"/>
-              </a:spcAft>
-            </a:pPr>
-            <a:r>
-              <a:rPr sz="2000" b="0" i="0">
-                <a:solidFill>
-                  <a:srgbClr val="333333"/>
-                </a:solidFill>
-                <a:latin typeface="Calibri"/>
-              </a:rPr>
-              <a:t>–   Un requisito no funcional bien elegido es, a la vez, una mitigación — y eso no se puede improvisar en la Clase 13 si no se escribió en la 5.</a:t>
+              <a:t>–   «No sabemos cuántos vecinos no tienen datos móviles; se sabría con una encuesta de diez casas» es una respuesta profesional, y de hecho es el tipo de frase que aparece en informes reales.</a:t>
             </a:r>
           </a:p>
         </p:txBody>
@@ -8612,7 +8201,7 @@
         <p:spPr>
           <a:xfrm>
             <a:off x="0" y="0"/>
-            <a:ext cx="12191695" cy="1170432"/>
+            <a:ext cx="12191695" cy="960120"/>
           </a:xfrm>
           <a:prstGeom prst="rect">
             <a:avLst/>
@@ -8654,7 +8243,7 @@
         </p:nvSpPr>
         <p:spPr>
           <a:xfrm>
-            <a:off x="0" y="1170432"/>
+            <a:off x="0" y="960120"/>
             <a:ext cx="12191695" cy="41148"/>
           </a:xfrm>
           <a:prstGeom prst="rect">
@@ -8698,7 +8287,7 @@
         <p:spPr>
           <a:xfrm>
             <a:off x="457200" y="164592"/>
-            <a:ext cx="11277295" cy="384048"/>
+            <a:ext cx="11277295" cy="502920"/>
           </a:xfrm>
           <a:prstGeom prst="rect">
             <a:avLst/>
@@ -8718,7 +8307,7 @@
                 </a:solidFill>
                 <a:latin typeface="Calibri"/>
               </a:rPr>
-              <a:t>Taller de hoy: Matriz de impacto social y ambiental</a:t>
+              <a:t>Del adjetivo al indicador, y las tres honestidades (2/2)</a:t>
             </a:r>
           </a:p>
         </p:txBody>
@@ -8731,8 +8320,8 @@
         </p:nvSpPr>
         <p:spPr>
           <a:xfrm>
-            <a:off x="457200" y="566928"/>
-            <a:ext cx="11277295" cy="411480"/>
+            <a:off x="457200" y="1170432"/>
+            <a:ext cx="11277295" cy="5230368"/>
           </a:xfrm>
           <a:prstGeom prst="rect">
             <a:avLst/>
@@ -8745,981 +8334,110 @@
           </a:bodyPr>
           <a:lstStyle/>
           <a:p>
-            <a:r>
-              <a:rPr sz="1400" b="0" i="0">
-                <a:solidFill>
-                  <a:srgbClr val="B8D8EE"/>
-                </a:solidFill>
-                <a:latin typeface="Calibri"/>
-              </a:rPr>
-              <a:t>17 min en equipos · 17 min: afectados, positivos con indicador, negativos, matriz y mitigación · matriz de impacto con indicadores, negativos declarados y mitigaciones</a:t>
-            </a:r>
-          </a:p>
-        </p:txBody>
-      </p:sp>
-      <p:sp>
-        <p:nvSpPr>
-          <p:cNvPr id="6" name="Rounded Rectangle 5"/>
-          <p:cNvSpPr/>
-          <p:nvPr/>
-        </p:nvSpPr>
-        <p:spPr>
-          <a:xfrm>
-            <a:off x="457200" y="1472184"/>
-            <a:ext cx="11277295" cy="566928"/>
-          </a:xfrm>
-          <a:prstGeom prst="roundRect">
-            <a:avLst>
-              <a:gd name="adj" fmla="val 12000"/>
-            </a:avLst>
-          </a:prstGeom>
-          <a:solidFill>
-            <a:srgbClr val="F2F2F2"/>
-          </a:solidFill>
-          <a:ln>
-            <a:noFill/>
-          </a:ln>
-        </p:spPr>
-        <p:style>
-          <a:lnRef idx="1">
-            <a:schemeClr val="accent1"/>
-          </a:lnRef>
-          <a:fillRef idx="3">
-            <a:schemeClr val="accent1"/>
-          </a:fillRef>
-          <a:effectRef idx="2">
-            <a:schemeClr val="accent1"/>
-          </a:effectRef>
-          <a:fontRef idx="minor">
-            <a:schemeClr val="lt1"/>
-          </a:fontRef>
-        </p:style>
-        <p:txBody>
-          <a:bodyPr rtlCol="0" anchor="ctr"/>
-          <a:lstStyle/>
-          <a:p>
-            <a:pPr algn="ctr"/>
-          </a:p>
-        </p:txBody>
-      </p:sp>
-      <p:sp>
-        <p:nvSpPr>
-          <p:cNvPr id="7" name="Rectangle 6"/>
-          <p:cNvSpPr/>
-          <p:nvPr/>
-        </p:nvSpPr>
-        <p:spPr>
-          <a:xfrm>
-            <a:off x="640080" y="1618487"/>
-            <a:ext cx="274320" cy="274320"/>
-          </a:xfrm>
-          <a:prstGeom prst="rect">
-            <a:avLst/>
-          </a:prstGeom>
-          <a:solidFill>
-            <a:srgbClr val="FFFFFF"/>
-          </a:solidFill>
-          <a:ln>
-            <a:solidFill>
-              <a:srgbClr val="333333"/>
-            </a:solidFill>
-          </a:ln>
-        </p:spPr>
-        <p:style>
-          <a:lnRef idx="1">
-            <a:schemeClr val="accent1"/>
-          </a:lnRef>
-          <a:fillRef idx="3">
-            <a:schemeClr val="accent1"/>
-          </a:fillRef>
-          <a:effectRef idx="2">
-            <a:schemeClr val="accent1"/>
-          </a:effectRef>
-          <a:fontRef idx="minor">
-            <a:schemeClr val="lt1"/>
-          </a:fontRef>
-        </p:style>
-        <p:txBody>
-          <a:bodyPr rtlCol="0" anchor="ctr"/>
-          <a:lstStyle/>
-          <a:p>
-            <a:pPr algn="ctr"/>
-          </a:p>
-        </p:txBody>
-      </p:sp>
-      <p:sp>
-        <p:nvSpPr>
-          <p:cNvPr id="8" name="Rectangle 7"/>
-          <p:cNvSpPr/>
-          <p:nvPr/>
-        </p:nvSpPr>
-        <p:spPr>
-          <a:xfrm>
-            <a:off x="640080" y="1618487"/>
-            <a:ext cx="73152" cy="274320"/>
-          </a:xfrm>
-          <a:prstGeom prst="rect">
-            <a:avLst/>
-          </a:prstGeom>
-          <a:solidFill>
-            <a:srgbClr val="269CCB"/>
-          </a:solidFill>
-          <a:ln>
-            <a:noFill/>
-          </a:ln>
-        </p:spPr>
-        <p:style>
-          <a:lnRef idx="1">
-            <a:schemeClr val="accent1"/>
-          </a:lnRef>
-          <a:fillRef idx="3">
-            <a:schemeClr val="accent1"/>
-          </a:fillRef>
-          <a:effectRef idx="2">
-            <a:schemeClr val="accent1"/>
-          </a:effectRef>
-          <a:fontRef idx="minor">
-            <a:schemeClr val="lt1"/>
-          </a:fontRef>
-        </p:style>
-        <p:txBody>
-          <a:bodyPr rtlCol="0" anchor="ctr"/>
-          <a:lstStyle/>
-          <a:p>
-            <a:pPr algn="ctr"/>
-          </a:p>
-        </p:txBody>
-      </p:sp>
-      <p:sp>
-        <p:nvSpPr>
-          <p:cNvPr id="9" name="TextBox 8"/>
-          <p:cNvSpPr txBox="1"/>
-          <p:nvPr/>
-        </p:nvSpPr>
-        <p:spPr>
-          <a:xfrm>
-            <a:off x="1097280" y="1563624"/>
-            <a:ext cx="10362895" cy="402336"/>
-          </a:xfrm>
-          <a:prstGeom prst="rect">
-            <a:avLst/>
-          </a:prstGeom>
-          <a:noFill/>
-        </p:spPr>
-        <p:txBody>
-          <a:bodyPr wrap="square" anchor="ctr"/>
-          <a:lstStyle/>
-          <a:p>
-            <a:r>
-              <a:rPr sz="1500" b="1" i="0">
-                <a:solidFill>
-                  <a:srgbClr val="333333"/>
-                </a:solidFill>
-                <a:latin typeface="Calibri"/>
-              </a:rPr>
-              <a:t>LOS AFECTADOS QUE NO SON USUARIOS</a:t>
-            </a:r>
-            <a:r>
-              <a:rPr sz="1500" b="0" i="0">
-                <a:solidFill>
-                  <a:srgbClr val="333333"/>
-                </a:solidFill>
-                <a:latin typeface="Calibri"/>
-              </a:rPr>
-              <a:t> — La lista de quienes reciben un efecto sin usar la solución: a quién le llega más trabajo, quién </a:t>
-            </a:r>
-            <a:r>
-              <a:rPr sz="1500" b="1" i="0">
-                <a:solidFill>
-                  <a:srgbClr val="333333"/>
-                </a:solidFill>
-                <a:latin typeface="Calibri"/>
-              </a:rPr>
-              <a:t>no puede</a:t>
-            </a:r>
-            <a:r>
-              <a:rPr sz="1500" b="0" i="0">
-                <a:solidFill>
-                  <a:srgbClr val="333333"/>
-                </a:solidFill>
-                <a:latin typeface="Calibri"/>
-              </a:rPr>
-              <a:t> usarla, y a quién desplaza.</a:t>
-            </a:r>
-          </a:p>
-        </p:txBody>
-      </p:sp>
-      <p:sp>
-        <p:nvSpPr>
-          <p:cNvPr id="10" name="Rounded Rectangle 9"/>
-          <p:cNvSpPr/>
-          <p:nvPr/>
-        </p:nvSpPr>
-        <p:spPr>
-          <a:xfrm>
-            <a:off x="457200" y="2148839"/>
-            <a:ext cx="11277295" cy="566928"/>
-          </a:xfrm>
-          <a:prstGeom prst="roundRect">
-            <a:avLst>
-              <a:gd name="adj" fmla="val 12000"/>
-            </a:avLst>
-          </a:prstGeom>
-          <a:solidFill>
-            <a:srgbClr val="F2F2F2"/>
-          </a:solidFill>
-          <a:ln>
-            <a:noFill/>
-          </a:ln>
-        </p:spPr>
-        <p:style>
-          <a:lnRef idx="1">
-            <a:schemeClr val="accent1"/>
-          </a:lnRef>
-          <a:fillRef idx="3">
-            <a:schemeClr val="accent1"/>
-          </a:fillRef>
-          <a:effectRef idx="2">
-            <a:schemeClr val="accent1"/>
-          </a:effectRef>
-          <a:fontRef idx="minor">
-            <a:schemeClr val="lt1"/>
-          </a:fontRef>
-        </p:style>
-        <p:txBody>
-          <a:bodyPr rtlCol="0" anchor="ctr"/>
-          <a:lstStyle/>
-          <a:p>
-            <a:pPr algn="ctr"/>
-          </a:p>
-        </p:txBody>
-      </p:sp>
-      <p:sp>
-        <p:nvSpPr>
-          <p:cNvPr id="11" name="Rectangle 10"/>
-          <p:cNvSpPr/>
-          <p:nvPr/>
-        </p:nvSpPr>
-        <p:spPr>
-          <a:xfrm>
-            <a:off x="640080" y="2295144"/>
-            <a:ext cx="274320" cy="274320"/>
-          </a:xfrm>
-          <a:prstGeom prst="rect">
-            <a:avLst/>
-          </a:prstGeom>
-          <a:solidFill>
-            <a:srgbClr val="FFFFFF"/>
-          </a:solidFill>
-          <a:ln>
-            <a:solidFill>
-              <a:srgbClr val="333333"/>
-            </a:solidFill>
-          </a:ln>
-        </p:spPr>
-        <p:style>
-          <a:lnRef idx="1">
-            <a:schemeClr val="accent1"/>
-          </a:lnRef>
-          <a:fillRef idx="3">
-            <a:schemeClr val="accent1"/>
-          </a:fillRef>
-          <a:effectRef idx="2">
-            <a:schemeClr val="accent1"/>
-          </a:effectRef>
-          <a:fontRef idx="minor">
-            <a:schemeClr val="lt1"/>
-          </a:fontRef>
-        </p:style>
-        <p:txBody>
-          <a:bodyPr rtlCol="0" anchor="ctr"/>
-          <a:lstStyle/>
-          <a:p>
-            <a:pPr algn="ctr"/>
-          </a:p>
-        </p:txBody>
-      </p:sp>
-      <p:sp>
-        <p:nvSpPr>
-          <p:cNvPr id="12" name="Rectangle 11"/>
-          <p:cNvSpPr/>
-          <p:nvPr/>
-        </p:nvSpPr>
-        <p:spPr>
-          <a:xfrm>
-            <a:off x="640080" y="2295144"/>
-            <a:ext cx="73152" cy="274320"/>
-          </a:xfrm>
-          <a:prstGeom prst="rect">
-            <a:avLst/>
-          </a:prstGeom>
-          <a:solidFill>
-            <a:srgbClr val="269CCB"/>
-          </a:solidFill>
-          <a:ln>
-            <a:noFill/>
-          </a:ln>
-        </p:spPr>
-        <p:style>
-          <a:lnRef idx="1">
-            <a:schemeClr val="accent1"/>
-          </a:lnRef>
-          <a:fillRef idx="3">
-            <a:schemeClr val="accent1"/>
-          </a:fillRef>
-          <a:effectRef idx="2">
-            <a:schemeClr val="accent1"/>
-          </a:effectRef>
-          <a:fontRef idx="minor">
-            <a:schemeClr val="lt1"/>
-          </a:fontRef>
-        </p:style>
-        <p:txBody>
-          <a:bodyPr rtlCol="0" anchor="ctr"/>
-          <a:lstStyle/>
-          <a:p>
-            <a:pPr algn="ctr"/>
-          </a:p>
-        </p:txBody>
-      </p:sp>
-      <p:sp>
-        <p:nvSpPr>
-          <p:cNvPr id="13" name="TextBox 12"/>
-          <p:cNvSpPr txBox="1"/>
-          <p:nvPr/>
-        </p:nvSpPr>
-        <p:spPr>
-          <a:xfrm>
-            <a:off x="1097280" y="2240279"/>
-            <a:ext cx="10362895" cy="402336"/>
-          </a:xfrm>
-          <a:prstGeom prst="rect">
-            <a:avLst/>
-          </a:prstGeom>
-          <a:noFill/>
-        </p:spPr>
-        <p:txBody>
-          <a:bodyPr wrap="square" anchor="ctr"/>
-          <a:lstStyle/>
-          <a:p>
-            <a:r>
-              <a:rPr sz="1500" b="1" i="0">
-                <a:solidFill>
-                  <a:srgbClr val="333333"/>
-                </a:solidFill>
-                <a:latin typeface="Calibri"/>
-              </a:rPr>
-              <a:t>TRES IMPACTOS POSITIVOS CON SU INDICADOR</a:t>
-            </a:r>
-            <a:r>
-              <a:rPr sz="1500" b="0" i="0">
-                <a:solidFill>
-                  <a:srgbClr val="333333"/>
-                </a:solidFill>
-                <a:latin typeface="Calibri"/>
-              </a:rPr>
-              <a:t> — Tres efectos buenos, cada uno con </a:t>
-            </a:r>
-            <a:r>
-              <a:rPr sz="1500" b="1" i="0">
-                <a:solidFill>
-                  <a:srgbClr val="333333"/>
-                </a:solidFill>
-                <a:latin typeface="Calibri"/>
-              </a:rPr>
-              <a:t>un número y una unidad</a:t>
-            </a:r>
-            <a:r>
-              <a:rPr sz="1500" b="0" i="0">
-                <a:solidFill>
-                  <a:srgbClr val="333333"/>
-                </a:solidFill>
-                <a:latin typeface="Calibri"/>
-              </a:rPr>
-              <a:t>: cuántas personas, cuántas veces, cuántos minutos, cuántos pesos.</a:t>
-            </a:r>
-          </a:p>
-        </p:txBody>
-      </p:sp>
-      <p:sp>
-        <p:nvSpPr>
-          <p:cNvPr id="14" name="Rounded Rectangle 13"/>
-          <p:cNvSpPr/>
-          <p:nvPr/>
-        </p:nvSpPr>
-        <p:spPr>
-          <a:xfrm>
-            <a:off x="457200" y="2825496"/>
-            <a:ext cx="11277295" cy="566928"/>
-          </a:xfrm>
-          <a:prstGeom prst="roundRect">
-            <a:avLst>
-              <a:gd name="adj" fmla="val 12000"/>
-            </a:avLst>
-          </a:prstGeom>
-          <a:solidFill>
-            <a:srgbClr val="F2F2F2"/>
-          </a:solidFill>
-          <a:ln>
-            <a:noFill/>
-          </a:ln>
-        </p:spPr>
-        <p:style>
-          <a:lnRef idx="1">
-            <a:schemeClr val="accent1"/>
-          </a:lnRef>
-          <a:fillRef idx="3">
-            <a:schemeClr val="accent1"/>
-          </a:fillRef>
-          <a:effectRef idx="2">
-            <a:schemeClr val="accent1"/>
-          </a:effectRef>
-          <a:fontRef idx="minor">
-            <a:schemeClr val="lt1"/>
-          </a:fontRef>
-        </p:style>
-        <p:txBody>
-          <a:bodyPr rtlCol="0" anchor="ctr"/>
-          <a:lstStyle/>
-          <a:p>
-            <a:pPr algn="ctr"/>
-          </a:p>
-        </p:txBody>
-      </p:sp>
-      <p:sp>
-        <p:nvSpPr>
-          <p:cNvPr id="15" name="Rectangle 14"/>
-          <p:cNvSpPr/>
-          <p:nvPr/>
-        </p:nvSpPr>
-        <p:spPr>
-          <a:xfrm>
-            <a:off x="640080" y="2971800"/>
-            <a:ext cx="274320" cy="274320"/>
-          </a:xfrm>
-          <a:prstGeom prst="rect">
-            <a:avLst/>
-          </a:prstGeom>
-          <a:solidFill>
-            <a:srgbClr val="FFFFFF"/>
-          </a:solidFill>
-          <a:ln>
-            <a:solidFill>
-              <a:srgbClr val="333333"/>
-            </a:solidFill>
-          </a:ln>
-        </p:spPr>
-        <p:style>
-          <a:lnRef idx="1">
-            <a:schemeClr val="accent1"/>
-          </a:lnRef>
-          <a:fillRef idx="3">
-            <a:schemeClr val="accent1"/>
-          </a:fillRef>
-          <a:effectRef idx="2">
-            <a:schemeClr val="accent1"/>
-          </a:effectRef>
-          <a:fontRef idx="minor">
-            <a:schemeClr val="lt1"/>
-          </a:fontRef>
-        </p:style>
-        <p:txBody>
-          <a:bodyPr rtlCol="0" anchor="ctr"/>
-          <a:lstStyle/>
-          <a:p>
-            <a:pPr algn="ctr"/>
-          </a:p>
-        </p:txBody>
-      </p:sp>
-      <p:sp>
-        <p:nvSpPr>
-          <p:cNvPr id="16" name="Rectangle 15"/>
-          <p:cNvSpPr/>
-          <p:nvPr/>
-        </p:nvSpPr>
-        <p:spPr>
-          <a:xfrm>
-            <a:off x="640080" y="2971800"/>
-            <a:ext cx="73152" cy="274320"/>
-          </a:xfrm>
-          <a:prstGeom prst="rect">
-            <a:avLst/>
-          </a:prstGeom>
-          <a:solidFill>
-            <a:srgbClr val="269CCB"/>
-          </a:solidFill>
-          <a:ln>
-            <a:noFill/>
-          </a:ln>
-        </p:spPr>
-        <p:style>
-          <a:lnRef idx="1">
-            <a:schemeClr val="accent1"/>
-          </a:lnRef>
-          <a:fillRef idx="3">
-            <a:schemeClr val="accent1"/>
-          </a:fillRef>
-          <a:effectRef idx="2">
-            <a:schemeClr val="accent1"/>
-          </a:effectRef>
-          <a:fontRef idx="minor">
-            <a:schemeClr val="lt1"/>
-          </a:fontRef>
-        </p:style>
-        <p:txBody>
-          <a:bodyPr rtlCol="0" anchor="ctr"/>
-          <a:lstStyle/>
-          <a:p>
-            <a:pPr algn="ctr"/>
-          </a:p>
-        </p:txBody>
-      </p:sp>
-      <p:sp>
-        <p:nvSpPr>
-          <p:cNvPr id="17" name="TextBox 16"/>
-          <p:cNvSpPr txBox="1"/>
-          <p:nvPr/>
-        </p:nvSpPr>
-        <p:spPr>
-          <a:xfrm>
-            <a:off x="1097280" y="2916936"/>
-            <a:ext cx="10362895" cy="402336"/>
-          </a:xfrm>
-          <a:prstGeom prst="rect">
-            <a:avLst/>
-          </a:prstGeom>
-          <a:noFill/>
-        </p:spPr>
-        <p:txBody>
-          <a:bodyPr wrap="square" anchor="ctr"/>
-          <a:lstStyle/>
-          <a:p>
-            <a:r>
-              <a:rPr sz="1500" b="1" i="0">
-                <a:solidFill>
-                  <a:srgbClr val="333333"/>
-                </a:solidFill>
-                <a:latin typeface="Calibri"/>
-              </a:rPr>
-              <a:t>DOS IMPACTOS NEGATIVOS O RIESGOS</a:t>
-            </a:r>
-            <a:r>
-              <a:rPr sz="1500" b="0" i="0">
-                <a:solidFill>
-                  <a:srgbClr val="333333"/>
-                </a:solidFill>
-                <a:latin typeface="Calibri"/>
-              </a:rPr>
-              <a:t> — Dos efectos malos, con </a:t>
-            </a:r>
-            <a:r>
-              <a:rPr sz="1500" b="1" i="0">
-                <a:solidFill>
-                  <a:srgbClr val="333333"/>
-                </a:solidFill>
-                <a:latin typeface="Calibri"/>
-              </a:rPr>
-              <a:t>quién los recibe</a:t>
-            </a:r>
-            <a:r>
-              <a:rPr sz="1500" b="0" i="0">
-                <a:solidFill>
-                  <a:srgbClr val="333333"/>
-                </a:solidFill>
-                <a:latin typeface="Calibri"/>
-              </a:rPr>
-              <a:t> exactamente. Si no encuentran ninguno, pregúntense quién trabaja más por su solución.</a:t>
-            </a:r>
-          </a:p>
-        </p:txBody>
-      </p:sp>
-      <p:sp>
-        <p:nvSpPr>
-          <p:cNvPr id="18" name="Rounded Rectangle 17"/>
-          <p:cNvSpPr/>
-          <p:nvPr/>
-        </p:nvSpPr>
-        <p:spPr>
-          <a:xfrm>
-            <a:off x="457200" y="3502152"/>
-            <a:ext cx="11277295" cy="566928"/>
-          </a:xfrm>
-          <a:prstGeom prst="roundRect">
-            <a:avLst>
-              <a:gd name="adj" fmla="val 12000"/>
-            </a:avLst>
-          </a:prstGeom>
-          <a:solidFill>
-            <a:srgbClr val="F2F2F2"/>
-          </a:solidFill>
-          <a:ln>
-            <a:noFill/>
-          </a:ln>
-        </p:spPr>
-        <p:style>
-          <a:lnRef idx="1">
-            <a:schemeClr val="accent1"/>
-          </a:lnRef>
-          <a:fillRef idx="3">
-            <a:schemeClr val="accent1"/>
-          </a:fillRef>
-          <a:effectRef idx="2">
-            <a:schemeClr val="accent1"/>
-          </a:effectRef>
-          <a:fontRef idx="minor">
-            <a:schemeClr val="lt1"/>
-          </a:fontRef>
-        </p:style>
-        <p:txBody>
-          <a:bodyPr rtlCol="0" anchor="ctr"/>
-          <a:lstStyle/>
-          <a:p>
-            <a:pPr algn="ctr"/>
-          </a:p>
-        </p:txBody>
-      </p:sp>
-      <p:sp>
-        <p:nvSpPr>
-          <p:cNvPr id="19" name="Rectangle 18"/>
-          <p:cNvSpPr/>
-          <p:nvPr/>
-        </p:nvSpPr>
-        <p:spPr>
-          <a:xfrm>
-            <a:off x="640080" y="3648456"/>
-            <a:ext cx="274320" cy="274320"/>
-          </a:xfrm>
-          <a:prstGeom prst="rect">
-            <a:avLst/>
-          </a:prstGeom>
-          <a:solidFill>
-            <a:srgbClr val="FFFFFF"/>
-          </a:solidFill>
-          <a:ln>
-            <a:solidFill>
-              <a:srgbClr val="333333"/>
-            </a:solidFill>
-          </a:ln>
-        </p:spPr>
-        <p:style>
-          <a:lnRef idx="1">
-            <a:schemeClr val="accent1"/>
-          </a:lnRef>
-          <a:fillRef idx="3">
-            <a:schemeClr val="accent1"/>
-          </a:fillRef>
-          <a:effectRef idx="2">
-            <a:schemeClr val="accent1"/>
-          </a:effectRef>
-          <a:fontRef idx="minor">
-            <a:schemeClr val="lt1"/>
-          </a:fontRef>
-        </p:style>
-        <p:txBody>
-          <a:bodyPr rtlCol="0" anchor="ctr"/>
-          <a:lstStyle/>
-          <a:p>
-            <a:pPr algn="ctr"/>
-          </a:p>
-        </p:txBody>
-      </p:sp>
-      <p:sp>
-        <p:nvSpPr>
-          <p:cNvPr id="20" name="Rectangle 19"/>
-          <p:cNvSpPr/>
-          <p:nvPr/>
-        </p:nvSpPr>
-        <p:spPr>
-          <a:xfrm>
-            <a:off x="640080" y="3648456"/>
-            <a:ext cx="73152" cy="274320"/>
-          </a:xfrm>
-          <a:prstGeom prst="rect">
-            <a:avLst/>
-          </a:prstGeom>
-          <a:solidFill>
-            <a:srgbClr val="269CCB"/>
-          </a:solidFill>
-          <a:ln>
-            <a:noFill/>
-          </a:ln>
-        </p:spPr>
-        <p:style>
-          <a:lnRef idx="1">
-            <a:schemeClr val="accent1"/>
-          </a:lnRef>
-          <a:fillRef idx="3">
-            <a:schemeClr val="accent1"/>
-          </a:fillRef>
-          <a:effectRef idx="2">
-            <a:schemeClr val="accent1"/>
-          </a:effectRef>
-          <a:fontRef idx="minor">
-            <a:schemeClr val="lt1"/>
-          </a:fontRef>
-        </p:style>
-        <p:txBody>
-          <a:bodyPr rtlCol="0" anchor="ctr"/>
-          <a:lstStyle/>
-          <a:p>
-            <a:pPr algn="ctr"/>
-          </a:p>
-        </p:txBody>
-      </p:sp>
-      <p:sp>
-        <p:nvSpPr>
-          <p:cNvPr id="21" name="TextBox 20"/>
-          <p:cNvSpPr txBox="1"/>
-          <p:nvPr/>
-        </p:nvSpPr>
-        <p:spPr>
-          <a:xfrm>
-            <a:off x="1097280" y="3593592"/>
-            <a:ext cx="10362895" cy="402336"/>
-          </a:xfrm>
-          <a:prstGeom prst="rect">
-            <a:avLst/>
-          </a:prstGeom>
-          <a:noFill/>
-        </p:spPr>
-        <p:txBody>
-          <a:bodyPr wrap="square" anchor="ctr"/>
-          <a:lstStyle/>
-          <a:p>
-            <a:r>
-              <a:rPr sz="1500" b="1" i="0">
-                <a:solidFill>
-                  <a:srgbClr val="333333"/>
-                </a:solidFill>
-                <a:latin typeface="Calibri"/>
-              </a:rPr>
-              <a:t>LA MATRIZ CALIFICADA</a:t>
-            </a:r>
-            <a:r>
-              <a:rPr sz="1500" b="0" i="0">
-                <a:solidFill>
-                  <a:srgbClr val="333333"/>
-                </a:solidFill>
-                <a:latin typeface="Calibri"/>
-              </a:rPr>
-              <a:t> — Cada impacto con su carácter, magnitud, extensión, duración y reversibilidad — y </a:t>
-            </a:r>
-            <a:r>
-              <a:rPr sz="1500" b="1" i="0">
-                <a:solidFill>
-                  <a:srgbClr val="333333"/>
-                </a:solidFill>
-                <a:latin typeface="Calibri"/>
-              </a:rPr>
-              <a:t>una línea de justificación</a:t>
-            </a:r>
-            <a:r>
-              <a:rPr sz="1500" b="0" i="0">
-                <a:solidFill>
-                  <a:srgbClr val="333333"/>
-                </a:solidFill>
-                <a:latin typeface="Calibri"/>
-              </a:rPr>
-              <a:t> por calificación.</a:t>
-            </a:r>
-          </a:p>
-        </p:txBody>
-      </p:sp>
-      <p:sp>
-        <p:nvSpPr>
-          <p:cNvPr id="22" name="Rounded Rectangle 21"/>
-          <p:cNvSpPr/>
-          <p:nvPr/>
-        </p:nvSpPr>
-        <p:spPr>
-          <a:xfrm>
-            <a:off x="457200" y="4178808"/>
-            <a:ext cx="11277295" cy="566928"/>
-          </a:xfrm>
-          <a:prstGeom prst="roundRect">
-            <a:avLst>
-              <a:gd name="adj" fmla="val 12000"/>
-            </a:avLst>
-          </a:prstGeom>
-          <a:solidFill>
-            <a:srgbClr val="F2F2F2"/>
-          </a:solidFill>
-          <a:ln>
-            <a:noFill/>
-          </a:ln>
-        </p:spPr>
-        <p:style>
-          <a:lnRef idx="1">
-            <a:schemeClr val="accent1"/>
-          </a:lnRef>
-          <a:fillRef idx="3">
-            <a:schemeClr val="accent1"/>
-          </a:fillRef>
-          <a:effectRef idx="2">
-            <a:schemeClr val="accent1"/>
-          </a:effectRef>
-          <a:fontRef idx="minor">
-            <a:schemeClr val="lt1"/>
-          </a:fontRef>
-        </p:style>
-        <p:txBody>
-          <a:bodyPr rtlCol="0" anchor="ctr"/>
-          <a:lstStyle/>
-          <a:p>
-            <a:pPr algn="ctr"/>
-          </a:p>
-        </p:txBody>
-      </p:sp>
-      <p:sp>
-        <p:nvSpPr>
-          <p:cNvPr id="23" name="Rectangle 22"/>
-          <p:cNvSpPr/>
-          <p:nvPr/>
-        </p:nvSpPr>
-        <p:spPr>
-          <a:xfrm>
-            <a:off x="640080" y="4325112"/>
-            <a:ext cx="274320" cy="274320"/>
-          </a:xfrm>
-          <a:prstGeom prst="rect">
-            <a:avLst/>
-          </a:prstGeom>
-          <a:solidFill>
-            <a:srgbClr val="FFFFFF"/>
-          </a:solidFill>
-          <a:ln>
-            <a:solidFill>
-              <a:srgbClr val="333333"/>
-            </a:solidFill>
-          </a:ln>
-        </p:spPr>
-        <p:style>
-          <a:lnRef idx="1">
-            <a:schemeClr val="accent1"/>
-          </a:lnRef>
-          <a:fillRef idx="3">
-            <a:schemeClr val="accent1"/>
-          </a:fillRef>
-          <a:effectRef idx="2">
-            <a:schemeClr val="accent1"/>
-          </a:effectRef>
-          <a:fontRef idx="minor">
-            <a:schemeClr val="lt1"/>
-          </a:fontRef>
-        </p:style>
-        <p:txBody>
-          <a:bodyPr rtlCol="0" anchor="ctr"/>
-          <a:lstStyle/>
-          <a:p>
-            <a:pPr algn="ctr"/>
-          </a:p>
-        </p:txBody>
-      </p:sp>
-      <p:sp>
-        <p:nvSpPr>
-          <p:cNvPr id="24" name="Rectangle 23"/>
-          <p:cNvSpPr/>
-          <p:nvPr/>
-        </p:nvSpPr>
-        <p:spPr>
-          <a:xfrm>
-            <a:off x="640080" y="4325112"/>
-            <a:ext cx="73152" cy="274320"/>
-          </a:xfrm>
-          <a:prstGeom prst="rect">
-            <a:avLst/>
-          </a:prstGeom>
-          <a:solidFill>
-            <a:srgbClr val="269CCB"/>
-          </a:solidFill>
-          <a:ln>
-            <a:noFill/>
-          </a:ln>
-        </p:spPr>
-        <p:style>
-          <a:lnRef idx="1">
-            <a:schemeClr val="accent1"/>
-          </a:lnRef>
-          <a:fillRef idx="3">
-            <a:schemeClr val="accent1"/>
-          </a:fillRef>
-          <a:effectRef idx="2">
-            <a:schemeClr val="accent1"/>
-          </a:effectRef>
-          <a:fontRef idx="minor">
-            <a:schemeClr val="lt1"/>
-          </a:fontRef>
-        </p:style>
-        <p:txBody>
-          <a:bodyPr rtlCol="0" anchor="ctr"/>
-          <a:lstStyle/>
-          <a:p>
-            <a:pPr algn="ctr"/>
-          </a:p>
-        </p:txBody>
-      </p:sp>
-      <p:sp>
-        <p:nvSpPr>
-          <p:cNvPr id="25" name="TextBox 24"/>
-          <p:cNvSpPr txBox="1"/>
-          <p:nvPr/>
-        </p:nvSpPr>
-        <p:spPr>
-          <a:xfrm>
-            <a:off x="1097280" y="4270248"/>
-            <a:ext cx="10362895" cy="402336"/>
-          </a:xfrm>
-          <a:prstGeom prst="rect">
-            <a:avLst/>
-          </a:prstGeom>
-          <a:noFill/>
-        </p:spPr>
-        <p:txBody>
-          <a:bodyPr wrap="square" anchor="ctr"/>
-          <a:lstStyle/>
-          <a:p>
-            <a:r>
-              <a:rPr sz="1500" b="1" i="0">
-                <a:solidFill>
-                  <a:srgbClr val="333333"/>
-                </a:solidFill>
-                <a:latin typeface="Calibri"/>
-              </a:rPr>
-              <a:t>LAS MEDIDAS DE MITIGACIÓN</a:t>
-            </a:r>
-            <a:r>
-              <a:rPr sz="1500" b="0" i="0">
-                <a:solidFill>
-                  <a:srgbClr val="333333"/>
-                </a:solidFill>
-                <a:latin typeface="Calibri"/>
-              </a:rPr>
-              <a:t> — Qué van a hacer para reducir cada impacto negativo. Puede ser </a:t>
-            </a:r>
-            <a:r>
-              <a:rPr sz="1500" b="1" i="0">
-                <a:solidFill>
-                  <a:srgbClr val="333333"/>
-                </a:solidFill>
-                <a:latin typeface="Calibri"/>
-              </a:rPr>
-              <a:t>una medida no digital</a:t>
-            </a:r>
-            <a:r>
-              <a:rPr sz="1500" b="0" i="0">
-                <a:solidFill>
-                  <a:srgbClr val="333333"/>
-                </a:solidFill>
-                <a:latin typeface="Calibri"/>
-              </a:rPr>
-              <a:t>, y muchas veces es la mejor.</a:t>
-            </a:r>
-          </a:p>
-        </p:txBody>
-      </p:sp>
-      <p:sp>
-        <p:nvSpPr>
-          <p:cNvPr id="26" name="TextBox 25"/>
+            <a:pPr>
+              <a:spcAft>
+                <a:spcPts val="800"/>
+              </a:spcAft>
+            </a:pPr>
+            <a:r>
+              <a:rPr sz="2000" b="0" i="0">
+                <a:solidFill>
+                  <a:srgbClr val="333333"/>
+                </a:solidFill>
+                <a:latin typeface="Calibri"/>
+              </a:rPr>
+              <a:t>–   La tercera cierra el arco del curso: </a:t>
+            </a:r>
+            <a:r>
+              <a:rPr sz="2000" b="1" i="0">
+                <a:solidFill>
+                  <a:srgbClr val="333333"/>
+                </a:solidFill>
+                <a:latin typeface="Calibri"/>
+              </a:rPr>
+              <a:t>el software también consume.</a:t>
+            </a:r>
+            <a:r>
+              <a:rPr sz="2000" b="0" i="0">
+                <a:solidFill>
+                  <a:srgbClr val="333333"/>
+                </a:solidFill>
+                <a:latin typeface="Calibri"/>
+              </a:rPr>
+              <a:t> Datos que alguien paga, energía, hardware que se vuelve residuo.</a:t>
+            </a:r>
+          </a:p>
+          <a:p>
+            <a:pPr>
+              <a:spcAft>
+                <a:spcPts val="800"/>
+              </a:spcAft>
+            </a:pPr>
+            <a:r>
+              <a:rPr sz="2000" b="0" i="0">
+                <a:solidFill>
+                  <a:srgbClr val="333333"/>
+                </a:solidFill>
+                <a:latin typeface="Calibri"/>
+              </a:rPr>
+              <a:t>–   Y aquí hay un hallazgo que vale la pena hacerles ver, porque conecta cuatro sesiones: el límite de 200 KB por consulta que definieron en la sesión 5 como indicador</a:t>
+            </a:r>
+          </a:p>
+          <a:p>
+            <a:pPr>
+              <a:spcAft>
+                <a:spcPts val="800"/>
+              </a:spcAft>
+            </a:pPr>
+            <a:r>
+              <a:rPr sz="2000" b="0" i="0">
+                <a:solidFill>
+                  <a:srgbClr val="333333"/>
+                </a:solidFill>
+                <a:latin typeface="Calibri"/>
+              </a:rPr>
+              <a:t>–   Se volvió requisito no funcional en la sesión 7, sirvió para descartar imágenes en las sesiones 10 y 11, y hoy entra a la matriz como </a:t>
+            </a:r>
+            <a:r>
+              <a:rPr sz="2000" b="1" i="0">
+                <a:solidFill>
+                  <a:srgbClr val="333333"/>
+                </a:solidFill>
+                <a:latin typeface="Calibri"/>
+              </a:rPr>
+              <a:t>medida de mitigación ambiental</a:t>
+            </a:r>
+            <a:r>
+              <a:rPr sz="2000" b="0" i="0">
+                <a:solidFill>
+                  <a:srgbClr val="333333"/>
+                </a:solidFill>
+                <a:latin typeface="Calibri"/>
+              </a:rPr>
+              <a:t>.</a:t>
+            </a:r>
+          </a:p>
+          <a:p>
+            <a:pPr>
+              <a:spcAft>
+                <a:spcPts val="800"/>
+              </a:spcAft>
+            </a:pPr>
+            <a:r>
+              <a:rPr sz="2000" b="0" i="0">
+                <a:solidFill>
+                  <a:srgbClr val="333333"/>
+                </a:solidFill>
+                <a:latin typeface="Calibri"/>
+              </a:rPr>
+              <a:t>–   Un requisito no funcional bien elegido es, a la vez, una mitigación — y eso no se puede improvisar en la Clase 13 si no se escribió en la 5.</a:t>
+            </a:r>
+          </a:p>
+        </p:txBody>
+      </p:sp>
+      <p:sp>
+        <p:nvSpPr>
+          <p:cNvPr id="6" name="TextBox 5"/>
           <p:cNvSpPr txBox="1"/>
           <p:nvPr/>
         </p:nvSpPr>
@@ -9893,7 +8611,7 @@
                 </a:solidFill>
                 <a:latin typeface="Calibri"/>
               </a:rPr>
-              <a:t>Cómo se expone en 3 minutos</a:t>
+              <a:t>Taller de hoy: Matriz de impacto social y ambiental</a:t>
             </a:r>
           </a:p>
         </p:txBody>
@@ -9927,7 +8645,7 @@
                 </a:solidFill>
                 <a:latin typeface="Calibri"/>
               </a:rPr>
-              <a:t>Habla el vocero con la pantalla ya compartida · cronómetro en pantalla · se corta al llegar a cero</a:t>
+              <a:t>17 min en equipos · 17 min: afectados, positivos con indicador, negativos, matriz y mitigación · matriz de impacto con indicadores, negativos declarados y mitigaciones</a:t>
             </a:r>
           </a:p>
         </p:txBody>
@@ -9940,8 +8658,8 @@
         </p:nvSpPr>
         <p:spPr>
           <a:xfrm>
-            <a:off x="457200" y="1444752"/>
-            <a:ext cx="11277295" cy="908913"/>
+            <a:off x="457200" y="1472184"/>
+            <a:ext cx="11277295" cy="566928"/>
           </a:xfrm>
           <a:prstGeom prst="roundRect">
             <a:avLst>
@@ -9979,25 +8697,25 @@
       </p:sp>
       <p:sp>
         <p:nvSpPr>
-          <p:cNvPr id="7" name="Rounded Rectangle 6"/>
+          <p:cNvPr id="7" name="Rectangle 6"/>
           <p:cNvSpPr/>
           <p:nvPr/>
         </p:nvSpPr>
         <p:spPr>
           <a:xfrm>
-            <a:off x="594360" y="1679752"/>
-            <a:ext cx="438912" cy="438912"/>
-          </a:xfrm>
-          <a:prstGeom prst="roundRect">
-            <a:avLst>
-              <a:gd name="adj" fmla="val 12000"/>
-            </a:avLst>
+            <a:off x="640080" y="1618487"/>
+            <a:ext cx="274320" cy="274320"/>
+          </a:xfrm>
+          <a:prstGeom prst="rect">
+            <a:avLst/>
           </a:prstGeom>
           <a:solidFill>
-            <a:srgbClr val="095292"/>
+            <a:srgbClr val="FFFFFF"/>
           </a:solidFill>
           <a:ln>
-            <a:noFill/>
+            <a:solidFill>
+              <a:srgbClr val="333333"/>
+            </a:solidFill>
           </a:ln>
         </p:spPr>
         <p:style>
@@ -10024,103 +8742,20 @@
       </p:sp>
       <p:sp>
         <p:nvSpPr>
-          <p:cNvPr id="8" name="TextBox 7"/>
-          <p:cNvSpPr txBox="1"/>
-          <p:nvPr/>
-        </p:nvSpPr>
-        <p:spPr>
-          <a:xfrm>
-            <a:off x="594360" y="1679752"/>
-            <a:ext cx="438912" cy="438912"/>
-          </a:xfrm>
-          <a:prstGeom prst="rect">
-            <a:avLst/>
-          </a:prstGeom>
-          <a:noFill/>
-        </p:spPr>
-        <p:txBody>
-          <a:bodyPr wrap="square" anchor="ctr"/>
-          <a:lstStyle/>
-          <a:p>
-            <a:pPr algn="ctr"/>
-            <a:r>
-              <a:rPr sz="1600" b="1" i="0">
-                <a:solidFill>
-                  <a:srgbClr val="FFFFFF"/>
-                </a:solidFill>
-                <a:latin typeface="Calibri"/>
-              </a:rPr>
-              <a:t>1</a:t>
-            </a:r>
-          </a:p>
-        </p:txBody>
-      </p:sp>
-      <p:sp>
-        <p:nvSpPr>
-          <p:cNvPr id="9" name="TextBox 8"/>
-          <p:cNvSpPr txBox="1"/>
-          <p:nvPr/>
-        </p:nvSpPr>
-        <p:spPr>
-          <a:xfrm>
-            <a:off x="1188720" y="1536192"/>
-            <a:ext cx="10271455" cy="744321"/>
-          </a:xfrm>
-          <a:prstGeom prst="rect">
-            <a:avLst/>
-          </a:prstGeom>
-          <a:noFill/>
-        </p:spPr>
-        <p:txBody>
-          <a:bodyPr wrap="square" anchor="ctr"/>
-          <a:lstStyle/>
-          <a:p>
-            <a:r>
-              <a:rPr sz="1500" b="1" i="0">
-                <a:solidFill>
-                  <a:srgbClr val="095292"/>
-                </a:solidFill>
-                <a:latin typeface="Calibri"/>
-              </a:rPr>
-              <a:t>30 s · Los afectados que no son usuarios</a:t>
-            </a:r>
-          </a:p>
-          <a:p>
-            <a:pPr>
-              <a:spcBef>
-                <a:spcPts val="200"/>
-              </a:spcBef>
-            </a:pPr>
-            <a:r>
-              <a:rPr sz="1300" b="0" i="0">
-                <a:solidFill>
-                  <a:srgbClr val="333333"/>
-                </a:solidFill>
-                <a:latin typeface="Calibri"/>
-              </a:rPr>
-              <a:t>Nómbrelos. Sin «la comunidad».</a:t>
-            </a:r>
-          </a:p>
-        </p:txBody>
-      </p:sp>
-      <p:sp>
-        <p:nvSpPr>
-          <p:cNvPr id="10" name="Rounded Rectangle 9"/>
+          <p:cNvPr id="8" name="Rectangle 7"/>
           <p:cNvSpPr/>
           <p:nvPr/>
         </p:nvSpPr>
         <p:spPr>
           <a:xfrm>
-            <a:off x="457200" y="2445105"/>
-            <a:ext cx="11277295" cy="908913"/>
-          </a:xfrm>
-          <a:prstGeom prst="roundRect">
-            <a:avLst>
-              <a:gd name="adj" fmla="val 12000"/>
-            </a:avLst>
+            <a:off x="640080" y="1618487"/>
+            <a:ext cx="73152" cy="274320"/>
+          </a:xfrm>
+          <a:prstGeom prst="rect">
+            <a:avLst/>
           </a:prstGeom>
           <a:solidFill>
-            <a:srgbClr val="E8F4FA"/>
+            <a:srgbClr val="269CCB"/>
           </a:solidFill>
           <a:ln>
             <a:noFill/>
@@ -10150,140 +8785,73 @@
       </p:sp>
       <p:sp>
         <p:nvSpPr>
-          <p:cNvPr id="11" name="Rounded Rectangle 10"/>
+          <p:cNvPr id="9" name="TextBox 8"/>
+          <p:cNvSpPr txBox="1"/>
+          <p:nvPr/>
+        </p:nvSpPr>
+        <p:spPr>
+          <a:xfrm>
+            <a:off x="1097280" y="1563624"/>
+            <a:ext cx="10362895" cy="402336"/>
+          </a:xfrm>
+          <a:prstGeom prst="rect">
+            <a:avLst/>
+          </a:prstGeom>
+          <a:noFill/>
+        </p:spPr>
+        <p:txBody>
+          <a:bodyPr wrap="square" anchor="ctr"/>
+          <a:lstStyle/>
+          <a:p>
+            <a:r>
+              <a:rPr sz="1500" b="1" i="0">
+                <a:solidFill>
+                  <a:srgbClr val="333333"/>
+                </a:solidFill>
+                <a:latin typeface="Calibri"/>
+              </a:rPr>
+              <a:t>LOS AFECTADOS QUE NO SON USUARIOS</a:t>
+            </a:r>
+            <a:r>
+              <a:rPr sz="1500" b="0" i="0">
+                <a:solidFill>
+                  <a:srgbClr val="333333"/>
+                </a:solidFill>
+                <a:latin typeface="Calibri"/>
+              </a:rPr>
+              <a:t> — La lista de quienes reciben un efecto sin usar la solución: a quién le llega más trabajo, quién </a:t>
+            </a:r>
+            <a:r>
+              <a:rPr sz="1500" b="1" i="0">
+                <a:solidFill>
+                  <a:srgbClr val="333333"/>
+                </a:solidFill>
+                <a:latin typeface="Calibri"/>
+              </a:rPr>
+              <a:t>no puede</a:t>
+            </a:r>
+            <a:r>
+              <a:rPr sz="1500" b="0" i="0">
+                <a:solidFill>
+                  <a:srgbClr val="333333"/>
+                </a:solidFill>
+                <a:latin typeface="Calibri"/>
+              </a:rPr>
+              <a:t> usarla, y a quién desplaza.</a:t>
+            </a:r>
+          </a:p>
+        </p:txBody>
+      </p:sp>
+      <p:sp>
+        <p:nvSpPr>
+          <p:cNvPr id="10" name="Rounded Rectangle 9"/>
           <p:cNvSpPr/>
           <p:nvPr/>
         </p:nvSpPr>
         <p:spPr>
           <a:xfrm>
-            <a:off x="594360" y="2680106"/>
-            <a:ext cx="438912" cy="438912"/>
-          </a:xfrm>
-          <a:prstGeom prst="roundRect">
-            <a:avLst>
-              <a:gd name="adj" fmla="val 12000"/>
-            </a:avLst>
-          </a:prstGeom>
-          <a:solidFill>
-            <a:srgbClr val="095292"/>
-          </a:solidFill>
-          <a:ln>
-            <a:noFill/>
-          </a:ln>
-        </p:spPr>
-        <p:style>
-          <a:lnRef idx="1">
-            <a:schemeClr val="accent1"/>
-          </a:lnRef>
-          <a:fillRef idx="3">
-            <a:schemeClr val="accent1"/>
-          </a:fillRef>
-          <a:effectRef idx="2">
-            <a:schemeClr val="accent1"/>
-          </a:effectRef>
-          <a:fontRef idx="minor">
-            <a:schemeClr val="lt1"/>
-          </a:fontRef>
-        </p:style>
-        <p:txBody>
-          <a:bodyPr rtlCol="0" anchor="ctr"/>
-          <a:lstStyle/>
-          <a:p>
-            <a:pPr algn="ctr"/>
-          </a:p>
-        </p:txBody>
-      </p:sp>
-      <p:sp>
-        <p:nvSpPr>
-          <p:cNvPr id="12" name="TextBox 11"/>
-          <p:cNvSpPr txBox="1"/>
-          <p:nvPr/>
-        </p:nvSpPr>
-        <p:spPr>
-          <a:xfrm>
-            <a:off x="594360" y="2680106"/>
-            <a:ext cx="438912" cy="438912"/>
-          </a:xfrm>
-          <a:prstGeom prst="rect">
-            <a:avLst/>
-          </a:prstGeom>
-          <a:noFill/>
-        </p:spPr>
-        <p:txBody>
-          <a:bodyPr wrap="square" anchor="ctr"/>
-          <a:lstStyle/>
-          <a:p>
-            <a:pPr algn="ctr"/>
-            <a:r>
-              <a:rPr sz="1600" b="1" i="0">
-                <a:solidFill>
-                  <a:srgbClr val="FFFFFF"/>
-                </a:solidFill>
-                <a:latin typeface="Calibri"/>
-              </a:rPr>
-              <a:t>2</a:t>
-            </a:r>
-          </a:p>
-        </p:txBody>
-      </p:sp>
-      <p:sp>
-        <p:nvSpPr>
-          <p:cNvPr id="13" name="TextBox 12"/>
-          <p:cNvSpPr txBox="1"/>
-          <p:nvPr/>
-        </p:nvSpPr>
-        <p:spPr>
-          <a:xfrm>
-            <a:off x="1188720" y="2536545"/>
-            <a:ext cx="10271455" cy="744321"/>
-          </a:xfrm>
-          <a:prstGeom prst="rect">
-            <a:avLst/>
-          </a:prstGeom>
-          <a:noFill/>
-        </p:spPr>
-        <p:txBody>
-          <a:bodyPr wrap="square" anchor="ctr"/>
-          <a:lstStyle/>
-          <a:p>
-            <a:r>
-              <a:rPr sz="1500" b="1" i="0">
-                <a:solidFill>
-                  <a:srgbClr val="095292"/>
-                </a:solidFill>
-                <a:latin typeface="Calibri"/>
-              </a:rPr>
-              <a:t>40 s · Un impacto positivo con su número</a:t>
-            </a:r>
-          </a:p>
-          <a:p>
-            <a:pPr>
-              <a:spcBef>
-                <a:spcPts val="200"/>
-              </a:spcBef>
-            </a:pPr>
-            <a:r>
-              <a:rPr sz="1300" b="0" i="0">
-                <a:solidFill>
-                  <a:srgbClr val="333333"/>
-                </a:solidFill>
-                <a:latin typeface="Calibri"/>
-              </a:rPr>
-              <a:t>El más fuerte, con indicador.</a:t>
-            </a:r>
-          </a:p>
-        </p:txBody>
-      </p:sp>
-      <p:sp>
-        <p:nvSpPr>
-          <p:cNvPr id="14" name="Rounded Rectangle 13"/>
-          <p:cNvSpPr/>
-          <p:nvPr/>
-        </p:nvSpPr>
-        <p:spPr>
-          <a:xfrm>
-            <a:off x="457200" y="3445459"/>
-            <a:ext cx="11277295" cy="908913"/>
+            <a:off x="457200" y="2148839"/>
+            <a:ext cx="11277295" cy="566928"/>
           </a:xfrm>
           <a:prstGeom prst="roundRect">
             <a:avLst>
@@ -10321,25 +8889,25 @@
       </p:sp>
       <p:sp>
         <p:nvSpPr>
-          <p:cNvPr id="15" name="Rounded Rectangle 14"/>
+          <p:cNvPr id="11" name="Rectangle 10"/>
           <p:cNvSpPr/>
           <p:nvPr/>
         </p:nvSpPr>
         <p:spPr>
           <a:xfrm>
-            <a:off x="594360" y="3680460"/>
-            <a:ext cx="438912" cy="438912"/>
-          </a:xfrm>
-          <a:prstGeom prst="roundRect">
-            <a:avLst>
-              <a:gd name="adj" fmla="val 12000"/>
-            </a:avLst>
+            <a:off x="640080" y="2295144"/>
+            <a:ext cx="274320" cy="274320"/>
+          </a:xfrm>
+          <a:prstGeom prst="rect">
+            <a:avLst/>
           </a:prstGeom>
           <a:solidFill>
-            <a:srgbClr val="095292"/>
+            <a:srgbClr val="FFFFFF"/>
           </a:solidFill>
           <a:ln>
-            <a:noFill/>
+            <a:solidFill>
+              <a:srgbClr val="333333"/>
+            </a:solidFill>
           </a:ln>
         </p:spPr>
         <p:style>
@@ -10366,112 +8934,20 @@
       </p:sp>
       <p:sp>
         <p:nvSpPr>
-          <p:cNvPr id="16" name="TextBox 15"/>
-          <p:cNvSpPr txBox="1"/>
-          <p:nvPr/>
-        </p:nvSpPr>
-        <p:spPr>
-          <a:xfrm>
-            <a:off x="594360" y="3680460"/>
-            <a:ext cx="438912" cy="438912"/>
-          </a:xfrm>
-          <a:prstGeom prst="rect">
-            <a:avLst/>
-          </a:prstGeom>
-          <a:noFill/>
-        </p:spPr>
-        <p:txBody>
-          <a:bodyPr wrap="square" anchor="ctr"/>
-          <a:lstStyle/>
-          <a:p>
-            <a:pPr algn="ctr"/>
-            <a:r>
-              <a:rPr sz="1600" b="1" i="0">
-                <a:solidFill>
-                  <a:srgbClr val="FFFFFF"/>
-                </a:solidFill>
-                <a:latin typeface="Calibri"/>
-              </a:rPr>
-              <a:t>3</a:t>
-            </a:r>
-          </a:p>
-        </p:txBody>
-      </p:sp>
-      <p:sp>
-        <p:nvSpPr>
-          <p:cNvPr id="17" name="TextBox 16"/>
-          <p:cNvSpPr txBox="1"/>
-          <p:nvPr/>
-        </p:nvSpPr>
-        <p:spPr>
-          <a:xfrm>
-            <a:off x="1188720" y="3536899"/>
-            <a:ext cx="10271455" cy="744321"/>
-          </a:xfrm>
-          <a:prstGeom prst="rect">
-            <a:avLst/>
-          </a:prstGeom>
-          <a:noFill/>
-        </p:spPr>
-        <p:txBody>
-          <a:bodyPr wrap="square" anchor="ctr"/>
-          <a:lstStyle/>
-          <a:p>
-            <a:r>
-              <a:rPr sz="1500" b="1" i="0">
-                <a:solidFill>
-                  <a:srgbClr val="095292"/>
-                </a:solidFill>
-                <a:latin typeface="Calibri"/>
-              </a:rPr>
-              <a:t>70 s · El impacto negativo y su mitigación</a:t>
-            </a:r>
-          </a:p>
-          <a:p>
-            <a:pPr>
-              <a:spcBef>
-                <a:spcPts val="200"/>
-              </a:spcBef>
-            </a:pPr>
-            <a:r>
-              <a:rPr sz="1300" b="1" i="0">
-                <a:solidFill>
-                  <a:srgbClr val="333333"/>
-                </a:solidFill>
-                <a:latin typeface="Calibri"/>
-              </a:rPr>
-              <a:t>El minuto obligatorio.</a:t>
-            </a:r>
-            <a:r>
-              <a:rPr sz="1300" b="0" i="0">
-                <a:solidFill>
-                  <a:srgbClr val="333333"/>
-                </a:solidFill>
-                <a:latin typeface="Calibri"/>
-              </a:rPr>
-              <a:t> El más incómodo que hayan encontrado.</a:t>
-            </a:r>
-          </a:p>
-        </p:txBody>
-      </p:sp>
-      <p:sp>
-        <p:nvSpPr>
-          <p:cNvPr id="18" name="Rounded Rectangle 17"/>
+          <p:cNvPr id="12" name="Rectangle 11"/>
           <p:cNvSpPr/>
           <p:nvPr/>
         </p:nvSpPr>
         <p:spPr>
           <a:xfrm>
-            <a:off x="457200" y="4445812"/>
-            <a:ext cx="11277295" cy="908913"/>
-          </a:xfrm>
-          <a:prstGeom prst="roundRect">
-            <a:avLst>
-              <a:gd name="adj" fmla="val 12000"/>
-            </a:avLst>
+            <a:off x="640080" y="2295144"/>
+            <a:ext cx="73152" cy="274320"/>
+          </a:xfrm>
+          <a:prstGeom prst="rect">
+            <a:avLst/>
           </a:prstGeom>
           <a:solidFill>
-            <a:srgbClr val="E8F4FA"/>
+            <a:srgbClr val="269CCB"/>
           </a:solidFill>
           <a:ln>
             <a:noFill/>
@@ -10501,140 +8977,73 @@
       </p:sp>
       <p:sp>
         <p:nvSpPr>
-          <p:cNvPr id="19" name="Rounded Rectangle 18"/>
+          <p:cNvPr id="13" name="TextBox 12"/>
+          <p:cNvSpPr txBox="1"/>
+          <p:nvPr/>
+        </p:nvSpPr>
+        <p:spPr>
+          <a:xfrm>
+            <a:off x="1097280" y="2240279"/>
+            <a:ext cx="10362895" cy="402336"/>
+          </a:xfrm>
+          <a:prstGeom prst="rect">
+            <a:avLst/>
+          </a:prstGeom>
+          <a:noFill/>
+        </p:spPr>
+        <p:txBody>
+          <a:bodyPr wrap="square" anchor="ctr"/>
+          <a:lstStyle/>
+          <a:p>
+            <a:r>
+              <a:rPr sz="1500" b="1" i="0">
+                <a:solidFill>
+                  <a:srgbClr val="333333"/>
+                </a:solidFill>
+                <a:latin typeface="Calibri"/>
+              </a:rPr>
+              <a:t>TRES IMPACTOS POSITIVOS CON SU INDICADOR</a:t>
+            </a:r>
+            <a:r>
+              <a:rPr sz="1500" b="0" i="0">
+                <a:solidFill>
+                  <a:srgbClr val="333333"/>
+                </a:solidFill>
+                <a:latin typeface="Calibri"/>
+              </a:rPr>
+              <a:t> — Tres efectos buenos, cada uno con </a:t>
+            </a:r>
+            <a:r>
+              <a:rPr sz="1500" b="1" i="0">
+                <a:solidFill>
+                  <a:srgbClr val="333333"/>
+                </a:solidFill>
+                <a:latin typeface="Calibri"/>
+              </a:rPr>
+              <a:t>un número y una unidad</a:t>
+            </a:r>
+            <a:r>
+              <a:rPr sz="1500" b="0" i="0">
+                <a:solidFill>
+                  <a:srgbClr val="333333"/>
+                </a:solidFill>
+                <a:latin typeface="Calibri"/>
+              </a:rPr>
+              <a:t>: cuántas personas, cuántas veces, cuántos minutos, cuántos pesos.</a:t>
+            </a:r>
+          </a:p>
+        </p:txBody>
+      </p:sp>
+      <p:sp>
+        <p:nvSpPr>
+          <p:cNvPr id="14" name="Rounded Rectangle 13"/>
           <p:cNvSpPr/>
           <p:nvPr/>
         </p:nvSpPr>
         <p:spPr>
           <a:xfrm>
-            <a:off x="594360" y="4680813"/>
-            <a:ext cx="438912" cy="438912"/>
-          </a:xfrm>
-          <a:prstGeom prst="roundRect">
-            <a:avLst>
-              <a:gd name="adj" fmla="val 12000"/>
-            </a:avLst>
-          </a:prstGeom>
-          <a:solidFill>
-            <a:srgbClr val="095292"/>
-          </a:solidFill>
-          <a:ln>
-            <a:noFill/>
-          </a:ln>
-        </p:spPr>
-        <p:style>
-          <a:lnRef idx="1">
-            <a:schemeClr val="accent1"/>
-          </a:lnRef>
-          <a:fillRef idx="3">
-            <a:schemeClr val="accent1"/>
-          </a:fillRef>
-          <a:effectRef idx="2">
-            <a:schemeClr val="accent1"/>
-          </a:effectRef>
-          <a:fontRef idx="minor">
-            <a:schemeClr val="lt1"/>
-          </a:fontRef>
-        </p:style>
-        <p:txBody>
-          <a:bodyPr rtlCol="0" anchor="ctr"/>
-          <a:lstStyle/>
-          <a:p>
-            <a:pPr algn="ctr"/>
-          </a:p>
-        </p:txBody>
-      </p:sp>
-      <p:sp>
-        <p:nvSpPr>
-          <p:cNvPr id="20" name="TextBox 19"/>
-          <p:cNvSpPr txBox="1"/>
-          <p:nvPr/>
-        </p:nvSpPr>
-        <p:spPr>
-          <a:xfrm>
-            <a:off x="594360" y="4680813"/>
-            <a:ext cx="438912" cy="438912"/>
-          </a:xfrm>
-          <a:prstGeom prst="rect">
-            <a:avLst/>
-          </a:prstGeom>
-          <a:noFill/>
-        </p:spPr>
-        <p:txBody>
-          <a:bodyPr wrap="square" anchor="ctr"/>
-          <a:lstStyle/>
-          <a:p>
-            <a:pPr algn="ctr"/>
-            <a:r>
-              <a:rPr sz="1600" b="1" i="0">
-                <a:solidFill>
-                  <a:srgbClr val="FFFFFF"/>
-                </a:solidFill>
-                <a:latin typeface="Calibri"/>
-              </a:rPr>
-              <a:t>4</a:t>
-            </a:r>
-          </a:p>
-        </p:txBody>
-      </p:sp>
-      <p:sp>
-        <p:nvSpPr>
-          <p:cNvPr id="21" name="TextBox 20"/>
-          <p:cNvSpPr txBox="1"/>
-          <p:nvPr/>
-        </p:nvSpPr>
-        <p:spPr>
-          <a:xfrm>
-            <a:off x="1188720" y="4537252"/>
-            <a:ext cx="10271455" cy="744321"/>
-          </a:xfrm>
-          <a:prstGeom prst="rect">
-            <a:avLst/>
-          </a:prstGeom>
-          <a:noFill/>
-        </p:spPr>
-        <p:txBody>
-          <a:bodyPr wrap="square" anchor="ctr"/>
-          <a:lstStyle/>
-          <a:p>
-            <a:r>
-              <a:rPr sz="1500" b="1" i="0">
-                <a:solidFill>
-                  <a:srgbClr val="095292"/>
-                </a:solidFill>
-                <a:latin typeface="Calibri"/>
-              </a:rPr>
-              <a:t>30 s · La calificación</a:t>
-            </a:r>
-          </a:p>
-          <a:p>
-            <a:pPr>
-              <a:spcBef>
-                <a:spcPts val="200"/>
-              </a:spcBef>
-            </a:pPr>
-            <a:r>
-              <a:rPr sz="1300" b="0" i="0">
-                <a:solidFill>
-                  <a:srgbClr val="333333"/>
-                </a:solidFill>
-                <a:latin typeface="Calibri"/>
-              </a:rPr>
-              <a:t>Cuál es el impacto más grave y por qué lo calificaron así.</a:t>
-            </a:r>
-          </a:p>
-        </p:txBody>
-      </p:sp>
-      <p:sp>
-        <p:nvSpPr>
-          <p:cNvPr id="22" name="Rounded Rectangle 21"/>
-          <p:cNvSpPr/>
-          <p:nvPr/>
-        </p:nvSpPr>
-        <p:spPr>
-          <a:xfrm>
-            <a:off x="457200" y="5446166"/>
-            <a:ext cx="11277295" cy="908913"/>
+            <a:off x="457200" y="2825496"/>
+            <a:ext cx="11277295" cy="566928"/>
           </a:xfrm>
           <a:prstGeom prst="roundRect">
             <a:avLst>
@@ -10672,25 +9081,25 @@
       </p:sp>
       <p:sp>
         <p:nvSpPr>
-          <p:cNvPr id="23" name="Rounded Rectangle 22"/>
+          <p:cNvPr id="15" name="Rectangle 14"/>
           <p:cNvSpPr/>
           <p:nvPr/>
         </p:nvSpPr>
         <p:spPr>
           <a:xfrm>
-            <a:off x="594360" y="5681167"/>
-            <a:ext cx="438912" cy="438912"/>
-          </a:xfrm>
-          <a:prstGeom prst="roundRect">
-            <a:avLst>
-              <a:gd name="adj" fmla="val 12000"/>
-            </a:avLst>
+            <a:off x="640080" y="2971800"/>
+            <a:ext cx="274320" cy="274320"/>
+          </a:xfrm>
+          <a:prstGeom prst="rect">
+            <a:avLst/>
           </a:prstGeom>
           <a:solidFill>
-            <a:srgbClr val="095292"/>
+            <a:srgbClr val="FFFFFF"/>
           </a:solidFill>
           <a:ln>
-            <a:noFill/>
+            <a:solidFill>
+              <a:srgbClr val="333333"/>
+            </a:solidFill>
           </a:ln>
         </p:spPr>
         <p:style>
@@ -10717,14 +9126,57 @@
       </p:sp>
       <p:sp>
         <p:nvSpPr>
-          <p:cNvPr id="24" name="TextBox 23"/>
+          <p:cNvPr id="16" name="Rectangle 15"/>
+          <p:cNvSpPr/>
+          <p:nvPr/>
+        </p:nvSpPr>
+        <p:spPr>
+          <a:xfrm>
+            <a:off x="640080" y="2971800"/>
+            <a:ext cx="73152" cy="274320"/>
+          </a:xfrm>
+          <a:prstGeom prst="rect">
+            <a:avLst/>
+          </a:prstGeom>
+          <a:solidFill>
+            <a:srgbClr val="269CCB"/>
+          </a:solidFill>
+          <a:ln>
+            <a:noFill/>
+          </a:ln>
+        </p:spPr>
+        <p:style>
+          <a:lnRef idx="1">
+            <a:schemeClr val="accent1"/>
+          </a:lnRef>
+          <a:fillRef idx="3">
+            <a:schemeClr val="accent1"/>
+          </a:fillRef>
+          <a:effectRef idx="2">
+            <a:schemeClr val="accent1"/>
+          </a:effectRef>
+          <a:fontRef idx="minor">
+            <a:schemeClr val="lt1"/>
+          </a:fontRef>
+        </p:style>
+        <p:txBody>
+          <a:bodyPr rtlCol="0" anchor="ctr"/>
+          <a:lstStyle/>
+          <a:p>
+            <a:pPr algn="ctr"/>
+          </a:p>
+        </p:txBody>
+      </p:sp>
+      <p:sp>
+        <p:nvSpPr>
+          <p:cNvPr id="17" name="TextBox 16"/>
           <p:cNvSpPr txBox="1"/>
           <p:nvPr/>
         </p:nvSpPr>
         <p:spPr>
           <a:xfrm>
-            <a:off x="594360" y="5681167"/>
-            <a:ext cx="438912" cy="438912"/>
+            <a:off x="1097280" y="2916936"/>
+            <a:ext cx="10362895" cy="402336"/>
           </a:xfrm>
           <a:prstGeom prst="rect">
             <a:avLst/>
@@ -10735,16 +9187,367 @@
           <a:bodyPr wrap="square" anchor="ctr"/>
           <a:lstStyle/>
           <a:p>
+            <a:r>
+              <a:rPr sz="1500" b="1" i="0">
+                <a:solidFill>
+                  <a:srgbClr val="333333"/>
+                </a:solidFill>
+                <a:latin typeface="Calibri"/>
+              </a:rPr>
+              <a:t>DOS IMPACTOS NEGATIVOS O RIESGOS</a:t>
+            </a:r>
+            <a:r>
+              <a:rPr sz="1500" b="0" i="0">
+                <a:solidFill>
+                  <a:srgbClr val="333333"/>
+                </a:solidFill>
+                <a:latin typeface="Calibri"/>
+              </a:rPr>
+              <a:t> — Dos efectos malos, con </a:t>
+            </a:r>
+            <a:r>
+              <a:rPr sz="1500" b="1" i="0">
+                <a:solidFill>
+                  <a:srgbClr val="333333"/>
+                </a:solidFill>
+                <a:latin typeface="Calibri"/>
+              </a:rPr>
+              <a:t>quién los recibe</a:t>
+            </a:r>
+            <a:r>
+              <a:rPr sz="1500" b="0" i="0">
+                <a:solidFill>
+                  <a:srgbClr val="333333"/>
+                </a:solidFill>
+                <a:latin typeface="Calibri"/>
+              </a:rPr>
+              <a:t> exactamente. Si no encuentran ninguno, pregúntense quién trabaja más por su solución.</a:t>
+            </a:r>
+          </a:p>
+        </p:txBody>
+      </p:sp>
+      <p:sp>
+        <p:nvSpPr>
+          <p:cNvPr id="18" name="Rounded Rectangle 17"/>
+          <p:cNvSpPr/>
+          <p:nvPr/>
+        </p:nvSpPr>
+        <p:spPr>
+          <a:xfrm>
+            <a:off x="457200" y="3502152"/>
+            <a:ext cx="11277295" cy="566928"/>
+          </a:xfrm>
+          <a:prstGeom prst="roundRect">
+            <a:avLst>
+              <a:gd name="adj" fmla="val 12000"/>
+            </a:avLst>
+          </a:prstGeom>
+          <a:solidFill>
+            <a:srgbClr val="F2F2F2"/>
+          </a:solidFill>
+          <a:ln>
+            <a:noFill/>
+          </a:ln>
+        </p:spPr>
+        <p:style>
+          <a:lnRef idx="1">
+            <a:schemeClr val="accent1"/>
+          </a:lnRef>
+          <a:fillRef idx="3">
+            <a:schemeClr val="accent1"/>
+          </a:fillRef>
+          <a:effectRef idx="2">
+            <a:schemeClr val="accent1"/>
+          </a:effectRef>
+          <a:fontRef idx="minor">
+            <a:schemeClr val="lt1"/>
+          </a:fontRef>
+        </p:style>
+        <p:txBody>
+          <a:bodyPr rtlCol="0" anchor="ctr"/>
+          <a:lstStyle/>
+          <a:p>
             <a:pPr algn="ctr"/>
-            <a:r>
-              <a:rPr sz="1600" b="1" i="0">
-                <a:solidFill>
-                  <a:srgbClr val="FFFFFF"/>
-                </a:solidFill>
-                <a:latin typeface="Calibri"/>
-              </a:rPr>
-              <a:t>5</a:t>
-            </a:r>
+          </a:p>
+        </p:txBody>
+      </p:sp>
+      <p:sp>
+        <p:nvSpPr>
+          <p:cNvPr id="19" name="Rectangle 18"/>
+          <p:cNvSpPr/>
+          <p:nvPr/>
+        </p:nvSpPr>
+        <p:spPr>
+          <a:xfrm>
+            <a:off x="640080" y="3648456"/>
+            <a:ext cx="274320" cy="274320"/>
+          </a:xfrm>
+          <a:prstGeom prst="rect">
+            <a:avLst/>
+          </a:prstGeom>
+          <a:solidFill>
+            <a:srgbClr val="FFFFFF"/>
+          </a:solidFill>
+          <a:ln>
+            <a:solidFill>
+              <a:srgbClr val="333333"/>
+            </a:solidFill>
+          </a:ln>
+        </p:spPr>
+        <p:style>
+          <a:lnRef idx="1">
+            <a:schemeClr val="accent1"/>
+          </a:lnRef>
+          <a:fillRef idx="3">
+            <a:schemeClr val="accent1"/>
+          </a:fillRef>
+          <a:effectRef idx="2">
+            <a:schemeClr val="accent1"/>
+          </a:effectRef>
+          <a:fontRef idx="minor">
+            <a:schemeClr val="lt1"/>
+          </a:fontRef>
+        </p:style>
+        <p:txBody>
+          <a:bodyPr rtlCol="0" anchor="ctr"/>
+          <a:lstStyle/>
+          <a:p>
+            <a:pPr algn="ctr"/>
+          </a:p>
+        </p:txBody>
+      </p:sp>
+      <p:sp>
+        <p:nvSpPr>
+          <p:cNvPr id="20" name="Rectangle 19"/>
+          <p:cNvSpPr/>
+          <p:nvPr/>
+        </p:nvSpPr>
+        <p:spPr>
+          <a:xfrm>
+            <a:off x="640080" y="3648456"/>
+            <a:ext cx="73152" cy="274320"/>
+          </a:xfrm>
+          <a:prstGeom prst="rect">
+            <a:avLst/>
+          </a:prstGeom>
+          <a:solidFill>
+            <a:srgbClr val="269CCB"/>
+          </a:solidFill>
+          <a:ln>
+            <a:noFill/>
+          </a:ln>
+        </p:spPr>
+        <p:style>
+          <a:lnRef idx="1">
+            <a:schemeClr val="accent1"/>
+          </a:lnRef>
+          <a:fillRef idx="3">
+            <a:schemeClr val="accent1"/>
+          </a:fillRef>
+          <a:effectRef idx="2">
+            <a:schemeClr val="accent1"/>
+          </a:effectRef>
+          <a:fontRef idx="minor">
+            <a:schemeClr val="lt1"/>
+          </a:fontRef>
+        </p:style>
+        <p:txBody>
+          <a:bodyPr rtlCol="0" anchor="ctr"/>
+          <a:lstStyle/>
+          <a:p>
+            <a:pPr algn="ctr"/>
+          </a:p>
+        </p:txBody>
+      </p:sp>
+      <p:sp>
+        <p:nvSpPr>
+          <p:cNvPr id="21" name="TextBox 20"/>
+          <p:cNvSpPr txBox="1"/>
+          <p:nvPr/>
+        </p:nvSpPr>
+        <p:spPr>
+          <a:xfrm>
+            <a:off x="1097280" y="3593592"/>
+            <a:ext cx="10362895" cy="402336"/>
+          </a:xfrm>
+          <a:prstGeom prst="rect">
+            <a:avLst/>
+          </a:prstGeom>
+          <a:noFill/>
+        </p:spPr>
+        <p:txBody>
+          <a:bodyPr wrap="square" anchor="ctr"/>
+          <a:lstStyle/>
+          <a:p>
+            <a:r>
+              <a:rPr sz="1500" b="1" i="0">
+                <a:solidFill>
+                  <a:srgbClr val="333333"/>
+                </a:solidFill>
+                <a:latin typeface="Calibri"/>
+              </a:rPr>
+              <a:t>LA MATRIZ CALIFICADA</a:t>
+            </a:r>
+            <a:r>
+              <a:rPr sz="1500" b="0" i="0">
+                <a:solidFill>
+                  <a:srgbClr val="333333"/>
+                </a:solidFill>
+                <a:latin typeface="Calibri"/>
+              </a:rPr>
+              <a:t> — Cada impacto con su carácter, magnitud, extensión, duración y reversibilidad — y </a:t>
+            </a:r>
+            <a:r>
+              <a:rPr sz="1500" b="1" i="0">
+                <a:solidFill>
+                  <a:srgbClr val="333333"/>
+                </a:solidFill>
+                <a:latin typeface="Calibri"/>
+              </a:rPr>
+              <a:t>una línea de justificación</a:t>
+            </a:r>
+            <a:r>
+              <a:rPr sz="1500" b="0" i="0">
+                <a:solidFill>
+                  <a:srgbClr val="333333"/>
+                </a:solidFill>
+                <a:latin typeface="Calibri"/>
+              </a:rPr>
+              <a:t> por calificación.</a:t>
+            </a:r>
+          </a:p>
+        </p:txBody>
+      </p:sp>
+      <p:sp>
+        <p:nvSpPr>
+          <p:cNvPr id="22" name="Rounded Rectangle 21"/>
+          <p:cNvSpPr/>
+          <p:nvPr/>
+        </p:nvSpPr>
+        <p:spPr>
+          <a:xfrm>
+            <a:off x="457200" y="4178808"/>
+            <a:ext cx="11277295" cy="566928"/>
+          </a:xfrm>
+          <a:prstGeom prst="roundRect">
+            <a:avLst>
+              <a:gd name="adj" fmla="val 12000"/>
+            </a:avLst>
+          </a:prstGeom>
+          <a:solidFill>
+            <a:srgbClr val="F2F2F2"/>
+          </a:solidFill>
+          <a:ln>
+            <a:noFill/>
+          </a:ln>
+        </p:spPr>
+        <p:style>
+          <a:lnRef idx="1">
+            <a:schemeClr val="accent1"/>
+          </a:lnRef>
+          <a:fillRef idx="3">
+            <a:schemeClr val="accent1"/>
+          </a:fillRef>
+          <a:effectRef idx="2">
+            <a:schemeClr val="accent1"/>
+          </a:effectRef>
+          <a:fontRef idx="minor">
+            <a:schemeClr val="lt1"/>
+          </a:fontRef>
+        </p:style>
+        <p:txBody>
+          <a:bodyPr rtlCol="0" anchor="ctr"/>
+          <a:lstStyle/>
+          <a:p>
+            <a:pPr algn="ctr"/>
+          </a:p>
+        </p:txBody>
+      </p:sp>
+      <p:sp>
+        <p:nvSpPr>
+          <p:cNvPr id="23" name="Rectangle 22"/>
+          <p:cNvSpPr/>
+          <p:nvPr/>
+        </p:nvSpPr>
+        <p:spPr>
+          <a:xfrm>
+            <a:off x="640080" y="4325112"/>
+            <a:ext cx="274320" cy="274320"/>
+          </a:xfrm>
+          <a:prstGeom prst="rect">
+            <a:avLst/>
+          </a:prstGeom>
+          <a:solidFill>
+            <a:srgbClr val="FFFFFF"/>
+          </a:solidFill>
+          <a:ln>
+            <a:solidFill>
+              <a:srgbClr val="333333"/>
+            </a:solidFill>
+          </a:ln>
+        </p:spPr>
+        <p:style>
+          <a:lnRef idx="1">
+            <a:schemeClr val="accent1"/>
+          </a:lnRef>
+          <a:fillRef idx="3">
+            <a:schemeClr val="accent1"/>
+          </a:fillRef>
+          <a:effectRef idx="2">
+            <a:schemeClr val="accent1"/>
+          </a:effectRef>
+          <a:fontRef idx="minor">
+            <a:schemeClr val="lt1"/>
+          </a:fontRef>
+        </p:style>
+        <p:txBody>
+          <a:bodyPr rtlCol="0" anchor="ctr"/>
+          <a:lstStyle/>
+          <a:p>
+            <a:pPr algn="ctr"/>
+          </a:p>
+        </p:txBody>
+      </p:sp>
+      <p:sp>
+        <p:nvSpPr>
+          <p:cNvPr id="24" name="Rectangle 23"/>
+          <p:cNvSpPr/>
+          <p:nvPr/>
+        </p:nvSpPr>
+        <p:spPr>
+          <a:xfrm>
+            <a:off x="640080" y="4325112"/>
+            <a:ext cx="73152" cy="274320"/>
+          </a:xfrm>
+          <a:prstGeom prst="rect">
+            <a:avLst/>
+          </a:prstGeom>
+          <a:solidFill>
+            <a:srgbClr val="269CCB"/>
+          </a:solidFill>
+          <a:ln>
+            <a:noFill/>
+          </a:ln>
+        </p:spPr>
+        <p:style>
+          <a:lnRef idx="1">
+            <a:schemeClr val="accent1"/>
+          </a:lnRef>
+          <a:fillRef idx="3">
+            <a:schemeClr val="accent1"/>
+          </a:fillRef>
+          <a:effectRef idx="2">
+            <a:schemeClr val="accent1"/>
+          </a:effectRef>
+          <a:fontRef idx="minor">
+            <a:schemeClr val="lt1"/>
+          </a:fontRef>
+        </p:style>
+        <p:txBody>
+          <a:bodyPr rtlCol="0" anchor="ctr"/>
+          <a:lstStyle/>
+          <a:p>
+            <a:pPr algn="ctr"/>
           </a:p>
         </p:txBody>
       </p:sp>
@@ -10756,8 +9559,8 @@
         </p:nvSpPr>
         <p:spPr>
           <a:xfrm>
-            <a:off x="1188720" y="5537606"/>
-            <a:ext cx="10271455" cy="744321"/>
+            <a:off x="1097280" y="4270248"/>
+            <a:ext cx="10362895" cy="402336"/>
           </a:xfrm>
           <a:prstGeom prst="rect">
             <a:avLst/>
@@ -10771,27 +9574,38 @@
             <a:r>
               <a:rPr sz="1500" b="1" i="0">
                 <a:solidFill>
-                  <a:srgbClr val="095292"/>
-                </a:solidFill>
-                <a:latin typeface="Calibri"/>
-              </a:rPr>
-              <a:t>10 s · Cierre</a:t>
-            </a:r>
-          </a:p>
-          <a:p>
-            <a:pPr>
-              <a:spcBef>
-                <a:spcPts val="200"/>
-              </a:spcBef>
-            </a:pPr>
-            <a:r>
-              <a:rPr sz="1300" b="0" i="0">
-                <a:solidFill>
-                  <a:srgbClr val="333333"/>
-                </a:solidFill>
-                <a:latin typeface="Calibri"/>
-              </a:rPr>
-              <a:t>Qué dimensión no aplica en su proyecto, y por qué.</a:t>
+                  <a:srgbClr val="333333"/>
+                </a:solidFill>
+                <a:latin typeface="Calibri"/>
+              </a:rPr>
+              <a:t>LAS MEDIDAS DE MITIGACIÓN</a:t>
+            </a:r>
+            <a:r>
+              <a:rPr sz="1500" b="0" i="0">
+                <a:solidFill>
+                  <a:srgbClr val="333333"/>
+                </a:solidFill>
+                <a:latin typeface="Calibri"/>
+              </a:rPr>
+              <a:t> — Qué van a hacer para reducir cada impacto negativo. Puede ser </a:t>
+            </a:r>
+            <a:r>
+              <a:rPr sz="1500" b="1" i="0">
+                <a:solidFill>
+                  <a:srgbClr val="333333"/>
+                </a:solidFill>
+                <a:latin typeface="Calibri"/>
+              </a:rPr>
+              <a:t>una medida no digital</a:t>
+            </a:r>
+            <a:r>
+              <a:rPr sz="1500" b="0" i="0">
+                <a:solidFill>
+                  <a:srgbClr val="333333"/>
+                </a:solidFill>
+                <a:latin typeface="Calibri"/>
+              </a:rPr>
+              <a:t>, y muchas veces es la mejor.</a:t>
             </a:r>
           </a:p>
         </p:txBody>
@@ -10866,7 +9680,7 @@
         <p:spPr>
           <a:xfrm>
             <a:off x="0" y="0"/>
-            <a:ext cx="12191695" cy="960120"/>
+            <a:ext cx="12191695" cy="1170432"/>
           </a:xfrm>
           <a:prstGeom prst="rect">
             <a:avLst/>
@@ -10908,7 +9722,7 @@
         </p:nvSpPr>
         <p:spPr>
           <a:xfrm>
-            <a:off x="0" y="960120"/>
+            <a:off x="0" y="1170432"/>
             <a:ext cx="12191695" cy="41148"/>
           </a:xfrm>
           <a:prstGeom prst="rect">
@@ -10952,7 +9766,7 @@
         <p:spPr>
           <a:xfrm>
             <a:off x="457200" y="164592"/>
-            <a:ext cx="11277295" cy="502920"/>
+            <a:ext cx="11277295" cy="384048"/>
           </a:xfrm>
           <a:prstGeom prst="rect">
             <a:avLst/>
@@ -10972,7 +9786,7 @@
                 </a:solidFill>
                 <a:latin typeface="Calibri"/>
               </a:rPr>
-              <a:t>Para la Clase 14</a:t>
+              <a:t>Cómo se expone en 3 minutos</a:t>
             </a:r>
           </a:p>
         </p:txBody>
@@ -10985,8 +9799,8 @@
         </p:nvSpPr>
         <p:spPr>
           <a:xfrm>
-            <a:off x="457200" y="1170432"/>
-            <a:ext cx="11277295" cy="5230368"/>
+            <a:off x="457200" y="566928"/>
+            <a:ext cx="11277295" cy="411480"/>
           </a:xfrm>
           <a:prstGeom prst="rect">
             <a:avLst/>
@@ -10999,270 +9813,885 @@
           </a:bodyPr>
           <a:lstStyle/>
           <a:p>
+            <a:r>
+              <a:rPr sz="1400" b="0" i="0">
+                <a:solidFill>
+                  <a:srgbClr val="B8D8EE"/>
+                </a:solidFill>
+                <a:latin typeface="Calibri"/>
+              </a:rPr>
+              <a:t>Habla el vocero con la pantalla ya compartida · cronómetro en pantalla · se corta al llegar a cero</a:t>
+            </a:r>
+          </a:p>
+        </p:txBody>
+      </p:sp>
+      <p:sp>
+        <p:nvSpPr>
+          <p:cNvPr id="6" name="Rounded Rectangle 5"/>
+          <p:cNvSpPr/>
+          <p:nvPr/>
+        </p:nvSpPr>
+        <p:spPr>
+          <a:xfrm>
+            <a:off x="457200" y="1444752"/>
+            <a:ext cx="11277295" cy="908913"/>
+          </a:xfrm>
+          <a:prstGeom prst="roundRect">
+            <a:avLst>
+              <a:gd name="adj" fmla="val 12000"/>
+            </a:avLst>
+          </a:prstGeom>
+          <a:solidFill>
+            <a:srgbClr val="F2F2F2"/>
+          </a:solidFill>
+          <a:ln>
+            <a:noFill/>
+          </a:ln>
+        </p:spPr>
+        <p:style>
+          <a:lnRef idx="1">
+            <a:schemeClr val="accent1"/>
+          </a:lnRef>
+          <a:fillRef idx="3">
+            <a:schemeClr val="accent1"/>
+          </a:fillRef>
+          <a:effectRef idx="2">
+            <a:schemeClr val="accent1"/>
+          </a:effectRef>
+          <a:fontRef idx="minor">
+            <a:schemeClr val="lt1"/>
+          </a:fontRef>
+        </p:style>
+        <p:txBody>
+          <a:bodyPr rtlCol="0" anchor="ctr"/>
+          <a:lstStyle/>
+          <a:p>
+            <a:pPr algn="ctr"/>
+          </a:p>
+        </p:txBody>
+      </p:sp>
+      <p:sp>
+        <p:nvSpPr>
+          <p:cNvPr id="7" name="Rounded Rectangle 6"/>
+          <p:cNvSpPr/>
+          <p:nvPr/>
+        </p:nvSpPr>
+        <p:spPr>
+          <a:xfrm>
+            <a:off x="594360" y="1679752"/>
+            <a:ext cx="438912" cy="438912"/>
+          </a:xfrm>
+          <a:prstGeom prst="roundRect">
+            <a:avLst>
+              <a:gd name="adj" fmla="val 12000"/>
+            </a:avLst>
+          </a:prstGeom>
+          <a:solidFill>
+            <a:srgbClr val="095292"/>
+          </a:solidFill>
+          <a:ln>
+            <a:noFill/>
+          </a:ln>
+        </p:spPr>
+        <p:style>
+          <a:lnRef idx="1">
+            <a:schemeClr val="accent1"/>
+          </a:lnRef>
+          <a:fillRef idx="3">
+            <a:schemeClr val="accent1"/>
+          </a:fillRef>
+          <a:effectRef idx="2">
+            <a:schemeClr val="accent1"/>
+          </a:effectRef>
+          <a:fontRef idx="minor">
+            <a:schemeClr val="lt1"/>
+          </a:fontRef>
+        </p:style>
+        <p:txBody>
+          <a:bodyPr rtlCol="0" anchor="ctr"/>
+          <a:lstStyle/>
+          <a:p>
+            <a:pPr algn="ctr"/>
+          </a:p>
+        </p:txBody>
+      </p:sp>
+      <p:sp>
+        <p:nvSpPr>
+          <p:cNvPr id="8" name="TextBox 7"/>
+          <p:cNvSpPr txBox="1"/>
+          <p:nvPr/>
+        </p:nvSpPr>
+        <p:spPr>
+          <a:xfrm>
+            <a:off x="594360" y="1679752"/>
+            <a:ext cx="438912" cy="438912"/>
+          </a:xfrm>
+          <a:prstGeom prst="rect">
+            <a:avLst/>
+          </a:prstGeom>
+          <a:noFill/>
+        </p:spPr>
+        <p:txBody>
+          <a:bodyPr wrap="square" anchor="ctr"/>
+          <a:lstStyle/>
+          <a:p>
+            <a:pPr algn="ctr"/>
+            <a:r>
+              <a:rPr sz="1600" b="1" i="0">
+                <a:solidFill>
+                  <a:srgbClr val="FFFFFF"/>
+                </a:solidFill>
+                <a:latin typeface="Calibri"/>
+              </a:rPr>
+              <a:t>1</a:t>
+            </a:r>
+          </a:p>
+        </p:txBody>
+      </p:sp>
+      <p:sp>
+        <p:nvSpPr>
+          <p:cNvPr id="9" name="TextBox 8"/>
+          <p:cNvSpPr txBox="1"/>
+          <p:nvPr/>
+        </p:nvSpPr>
+        <p:spPr>
+          <a:xfrm>
+            <a:off x="1188720" y="1536192"/>
+            <a:ext cx="10271455" cy="744321"/>
+          </a:xfrm>
+          <a:prstGeom prst="rect">
+            <a:avLst/>
+          </a:prstGeom>
+          <a:noFill/>
+        </p:spPr>
+        <p:txBody>
+          <a:bodyPr wrap="square" anchor="ctr"/>
+          <a:lstStyle/>
+          <a:p>
+            <a:r>
+              <a:rPr sz="1500" b="1" i="0">
+                <a:solidFill>
+                  <a:srgbClr val="095292"/>
+                </a:solidFill>
+                <a:latin typeface="Calibri"/>
+              </a:rPr>
+              <a:t>30 s · Los afectados que no son usuarios</a:t>
+            </a:r>
+          </a:p>
+          <a:p>
             <a:pPr>
-              <a:spcAft>
-                <a:spcPts val="800"/>
-              </a:spcAft>
+              <a:spcBef>
+                <a:spcPts val="200"/>
+              </a:spcBef>
             </a:pPr>
             <a:r>
-              <a:rPr sz="2000" b="0" i="0">
-                <a:solidFill>
-                  <a:srgbClr val="333333"/>
-                </a:solidFill>
-                <a:latin typeface="Calibri"/>
-              </a:rPr>
-              <a:t>–   </a:t>
-            </a:r>
-            <a:r>
-              <a:rPr sz="2000" b="1" i="0">
-                <a:solidFill>
-                  <a:srgbClr val="333333"/>
-                </a:solidFill>
-                <a:latin typeface="Calibri"/>
-              </a:rPr>
-              <a:t>Trabajo dirigido:</a:t>
-            </a:r>
-            <a:r>
-              <a:rPr sz="2000" b="0" i="0">
-                <a:solidFill>
-                  <a:srgbClr val="333333"/>
-                </a:solidFill>
-                <a:latin typeface="Calibri"/>
-              </a:rPr>
-              <a:t> Aplicación de matrices de evaluación — dejar la matriz de impacto completa en el documento del equipo, con indicadores, negativos y mitigaciones.</a:t>
+              <a:rPr sz="1300" b="0" i="0">
+                <a:solidFill>
+                  <a:srgbClr val="333333"/>
+                </a:solidFill>
+                <a:latin typeface="Calibri"/>
+              </a:rPr>
+              <a:t>Nómbrelos. Sin «la comunidad».</a:t>
+            </a:r>
+          </a:p>
+        </p:txBody>
+      </p:sp>
+      <p:sp>
+        <p:nvSpPr>
+          <p:cNvPr id="10" name="Rounded Rectangle 9"/>
+          <p:cNvSpPr/>
+          <p:nvPr/>
+        </p:nvSpPr>
+        <p:spPr>
+          <a:xfrm>
+            <a:off x="457200" y="2445105"/>
+            <a:ext cx="11277295" cy="908913"/>
+          </a:xfrm>
+          <a:prstGeom prst="roundRect">
+            <a:avLst>
+              <a:gd name="adj" fmla="val 12000"/>
+            </a:avLst>
+          </a:prstGeom>
+          <a:solidFill>
+            <a:srgbClr val="E8F4FA"/>
+          </a:solidFill>
+          <a:ln>
+            <a:noFill/>
+          </a:ln>
+        </p:spPr>
+        <p:style>
+          <a:lnRef idx="1">
+            <a:schemeClr val="accent1"/>
+          </a:lnRef>
+          <a:fillRef idx="3">
+            <a:schemeClr val="accent1"/>
+          </a:fillRef>
+          <a:effectRef idx="2">
+            <a:schemeClr val="accent1"/>
+          </a:effectRef>
+          <a:fontRef idx="minor">
+            <a:schemeClr val="lt1"/>
+          </a:fontRef>
+        </p:style>
+        <p:txBody>
+          <a:bodyPr rtlCol="0" anchor="ctr"/>
+          <a:lstStyle/>
+          <a:p>
+            <a:pPr algn="ctr"/>
+          </a:p>
+        </p:txBody>
+      </p:sp>
+      <p:sp>
+        <p:nvSpPr>
+          <p:cNvPr id="11" name="Rounded Rectangle 10"/>
+          <p:cNvSpPr/>
+          <p:nvPr/>
+        </p:nvSpPr>
+        <p:spPr>
+          <a:xfrm>
+            <a:off x="594360" y="2680106"/>
+            <a:ext cx="438912" cy="438912"/>
+          </a:xfrm>
+          <a:prstGeom prst="roundRect">
+            <a:avLst>
+              <a:gd name="adj" fmla="val 12000"/>
+            </a:avLst>
+          </a:prstGeom>
+          <a:solidFill>
+            <a:srgbClr val="095292"/>
+          </a:solidFill>
+          <a:ln>
+            <a:noFill/>
+          </a:ln>
+        </p:spPr>
+        <p:style>
+          <a:lnRef idx="1">
+            <a:schemeClr val="accent1"/>
+          </a:lnRef>
+          <a:fillRef idx="3">
+            <a:schemeClr val="accent1"/>
+          </a:fillRef>
+          <a:effectRef idx="2">
+            <a:schemeClr val="accent1"/>
+          </a:effectRef>
+          <a:fontRef idx="minor">
+            <a:schemeClr val="lt1"/>
+          </a:fontRef>
+        </p:style>
+        <p:txBody>
+          <a:bodyPr rtlCol="0" anchor="ctr"/>
+          <a:lstStyle/>
+          <a:p>
+            <a:pPr algn="ctr"/>
+          </a:p>
+        </p:txBody>
+      </p:sp>
+      <p:sp>
+        <p:nvSpPr>
+          <p:cNvPr id="12" name="TextBox 11"/>
+          <p:cNvSpPr txBox="1"/>
+          <p:nvPr/>
+        </p:nvSpPr>
+        <p:spPr>
+          <a:xfrm>
+            <a:off x="594360" y="2680106"/>
+            <a:ext cx="438912" cy="438912"/>
+          </a:xfrm>
+          <a:prstGeom prst="rect">
+            <a:avLst/>
+          </a:prstGeom>
+          <a:noFill/>
+        </p:spPr>
+        <p:txBody>
+          <a:bodyPr wrap="square" anchor="ctr"/>
+          <a:lstStyle/>
+          <a:p>
+            <a:pPr algn="ctr"/>
+            <a:r>
+              <a:rPr sz="1600" b="1" i="0">
+                <a:solidFill>
+                  <a:srgbClr val="FFFFFF"/>
+                </a:solidFill>
+                <a:latin typeface="Calibri"/>
+              </a:rPr>
+              <a:t>2</a:t>
+            </a:r>
+          </a:p>
+        </p:txBody>
+      </p:sp>
+      <p:sp>
+        <p:nvSpPr>
+          <p:cNvPr id="13" name="TextBox 12"/>
+          <p:cNvSpPr txBox="1"/>
+          <p:nvPr/>
+        </p:nvSpPr>
+        <p:spPr>
+          <a:xfrm>
+            <a:off x="1188720" y="2536545"/>
+            <a:ext cx="10271455" cy="744321"/>
+          </a:xfrm>
+          <a:prstGeom prst="rect">
+            <a:avLst/>
+          </a:prstGeom>
+          <a:noFill/>
+        </p:spPr>
+        <p:txBody>
+          <a:bodyPr wrap="square" anchor="ctr"/>
+          <a:lstStyle/>
+          <a:p>
+            <a:r>
+              <a:rPr sz="1500" b="1" i="0">
+                <a:solidFill>
+                  <a:srgbClr val="095292"/>
+                </a:solidFill>
+                <a:latin typeface="Calibri"/>
+              </a:rPr>
+              <a:t>40 s · Un impacto positivo con su número</a:t>
             </a:r>
           </a:p>
           <a:p>
             <a:pPr>
-              <a:spcAft>
-                <a:spcPts val="800"/>
-              </a:spcAft>
+              <a:spcBef>
+                <a:spcPts val="200"/>
+              </a:spcBef>
             </a:pPr>
             <a:r>
-              <a:rPr sz="2000" b="0" i="0">
-                <a:solidFill>
-                  <a:srgbClr val="333333"/>
-                </a:solidFill>
-                <a:latin typeface="Calibri"/>
-              </a:rPr>
-              <a:t>–   </a:t>
-            </a:r>
-            <a:r>
-              <a:rPr sz="2000" b="1" i="0">
-                <a:solidFill>
-                  <a:srgbClr val="333333"/>
-                </a:solidFill>
-                <a:latin typeface="Calibri"/>
-              </a:rPr>
-              <a:t>Trabajo independiente:</a:t>
-            </a:r>
-            <a:r>
-              <a:rPr sz="2000" b="0" i="0">
-                <a:solidFill>
-                  <a:srgbClr val="333333"/>
-                </a:solidFill>
-                <a:latin typeface="Calibri"/>
-              </a:rPr>
-              <a:t> Informe de evaluación del impacto: media página que resuma </a:t>
-            </a:r>
-            <a:r>
-              <a:rPr sz="2000" b="1" i="0">
-                <a:solidFill>
-                  <a:srgbClr val="333333"/>
-                </a:solidFill>
-                <a:latin typeface="Calibri"/>
-              </a:rPr>
-              <a:t>el impacto positivo más fuerte con su número y el negativo más importante con su mitigación</a:t>
-            </a:r>
-            <a:r>
-              <a:rPr sz="2000" b="0" i="0">
-                <a:solidFill>
-                  <a:srgbClr val="333333"/>
-                </a:solidFill>
-                <a:latin typeface="Calibri"/>
-              </a:rPr>
-              <a:t>. Es el borrador de dos diapositivas de la presentación final.</a:t>
+              <a:rPr sz="1300" b="0" i="0">
+                <a:solidFill>
+                  <a:srgbClr val="333333"/>
+                </a:solidFill>
+                <a:latin typeface="Calibri"/>
+              </a:rPr>
+              <a:t>El más fuerte, con indicador.</a:t>
+            </a:r>
+          </a:p>
+        </p:txBody>
+      </p:sp>
+      <p:sp>
+        <p:nvSpPr>
+          <p:cNvPr id="14" name="Rounded Rectangle 13"/>
+          <p:cNvSpPr/>
+          <p:nvPr/>
+        </p:nvSpPr>
+        <p:spPr>
+          <a:xfrm>
+            <a:off x="457200" y="3445459"/>
+            <a:ext cx="11277295" cy="908913"/>
+          </a:xfrm>
+          <a:prstGeom prst="roundRect">
+            <a:avLst>
+              <a:gd name="adj" fmla="val 12000"/>
+            </a:avLst>
+          </a:prstGeom>
+          <a:solidFill>
+            <a:srgbClr val="F2F2F2"/>
+          </a:solidFill>
+          <a:ln>
+            <a:noFill/>
+          </a:ln>
+        </p:spPr>
+        <p:style>
+          <a:lnRef idx="1">
+            <a:schemeClr val="accent1"/>
+          </a:lnRef>
+          <a:fillRef idx="3">
+            <a:schemeClr val="accent1"/>
+          </a:fillRef>
+          <a:effectRef idx="2">
+            <a:schemeClr val="accent1"/>
+          </a:effectRef>
+          <a:fontRef idx="minor">
+            <a:schemeClr val="lt1"/>
+          </a:fontRef>
+        </p:style>
+        <p:txBody>
+          <a:bodyPr rtlCol="0" anchor="ctr"/>
+          <a:lstStyle/>
+          <a:p>
+            <a:pPr algn="ctr"/>
+          </a:p>
+        </p:txBody>
+      </p:sp>
+      <p:sp>
+        <p:nvSpPr>
+          <p:cNvPr id="15" name="Rounded Rectangle 14"/>
+          <p:cNvSpPr/>
+          <p:nvPr/>
+        </p:nvSpPr>
+        <p:spPr>
+          <a:xfrm>
+            <a:off x="594360" y="3680460"/>
+            <a:ext cx="438912" cy="438912"/>
+          </a:xfrm>
+          <a:prstGeom prst="roundRect">
+            <a:avLst>
+              <a:gd name="adj" fmla="val 12000"/>
+            </a:avLst>
+          </a:prstGeom>
+          <a:solidFill>
+            <a:srgbClr val="095292"/>
+          </a:solidFill>
+          <a:ln>
+            <a:noFill/>
+          </a:ln>
+        </p:spPr>
+        <p:style>
+          <a:lnRef idx="1">
+            <a:schemeClr val="accent1"/>
+          </a:lnRef>
+          <a:fillRef idx="3">
+            <a:schemeClr val="accent1"/>
+          </a:fillRef>
+          <a:effectRef idx="2">
+            <a:schemeClr val="accent1"/>
+          </a:effectRef>
+          <a:fontRef idx="minor">
+            <a:schemeClr val="lt1"/>
+          </a:fontRef>
+        </p:style>
+        <p:txBody>
+          <a:bodyPr rtlCol="0" anchor="ctr"/>
+          <a:lstStyle/>
+          <a:p>
+            <a:pPr algn="ctr"/>
+          </a:p>
+        </p:txBody>
+      </p:sp>
+      <p:sp>
+        <p:nvSpPr>
+          <p:cNvPr id="16" name="TextBox 15"/>
+          <p:cNvSpPr txBox="1"/>
+          <p:nvPr/>
+        </p:nvSpPr>
+        <p:spPr>
+          <a:xfrm>
+            <a:off x="594360" y="3680460"/>
+            <a:ext cx="438912" cy="438912"/>
+          </a:xfrm>
+          <a:prstGeom prst="rect">
+            <a:avLst/>
+          </a:prstGeom>
+          <a:noFill/>
+        </p:spPr>
+        <p:txBody>
+          <a:bodyPr wrap="square" anchor="ctr"/>
+          <a:lstStyle/>
+          <a:p>
+            <a:pPr algn="ctr"/>
+            <a:r>
+              <a:rPr sz="1600" b="1" i="0">
+                <a:solidFill>
+                  <a:srgbClr val="FFFFFF"/>
+                </a:solidFill>
+                <a:latin typeface="Calibri"/>
+              </a:rPr>
+              <a:t>3</a:t>
+            </a:r>
+          </a:p>
+        </p:txBody>
+      </p:sp>
+      <p:sp>
+        <p:nvSpPr>
+          <p:cNvPr id="17" name="TextBox 16"/>
+          <p:cNvSpPr txBox="1"/>
+          <p:nvPr/>
+        </p:nvSpPr>
+        <p:spPr>
+          <a:xfrm>
+            <a:off x="1188720" y="3536899"/>
+            <a:ext cx="10271455" cy="744321"/>
+          </a:xfrm>
+          <a:prstGeom prst="rect">
+            <a:avLst/>
+          </a:prstGeom>
+          <a:noFill/>
+        </p:spPr>
+        <p:txBody>
+          <a:bodyPr wrap="square" anchor="ctr"/>
+          <a:lstStyle/>
+          <a:p>
+            <a:r>
+              <a:rPr sz="1500" b="1" i="0">
+                <a:solidFill>
+                  <a:srgbClr val="095292"/>
+                </a:solidFill>
+                <a:latin typeface="Calibri"/>
+              </a:rPr>
+              <a:t>70 s · El impacto negativo y su mitigación</a:t>
             </a:r>
           </a:p>
           <a:p>
             <a:pPr>
-              <a:spcAft>
-                <a:spcPts val="800"/>
-              </a:spcAft>
+              <a:spcBef>
+                <a:spcPts val="200"/>
+              </a:spcBef>
             </a:pPr>
             <a:r>
-              <a:rPr sz="2000" b="0" i="0">
-                <a:solidFill>
-                  <a:srgbClr val="333333"/>
-                </a:solidFill>
-                <a:latin typeface="Calibri"/>
-              </a:rPr>
-              <a:t>–   </a:t>
-            </a:r>
-            <a:r>
-              <a:rPr sz="2000" b="1" i="0">
-                <a:solidFill>
-                  <a:srgbClr val="333333"/>
-                </a:solidFill>
-                <a:latin typeface="Calibri"/>
-              </a:rPr>
-              <a:t>Clase 14 · Preparación de la presentación final</a:t>
-            </a:r>
-            <a:r>
-              <a:rPr sz="2000" b="0" i="0">
-                <a:solidFill>
-                  <a:srgbClr val="333333"/>
-                </a:solidFill>
-                <a:latin typeface="Calibri"/>
-              </a:rPr>
-              <a:t> — preparamos la </a:t>
-            </a:r>
-            <a:r>
-              <a:rPr sz="2000" b="1" i="0">
-                <a:solidFill>
-                  <a:srgbClr val="333333"/>
-                </a:solidFill>
-                <a:latin typeface="Calibri"/>
-              </a:rPr>
-              <a:t>presentación final</a:t>
-            </a:r>
-            <a:r>
-              <a:rPr sz="2000" b="0" i="0">
-                <a:solidFill>
-                  <a:srgbClr val="333333"/>
-                </a:solidFill>
-                <a:latin typeface="Calibri"/>
-              </a:rPr>
-              <a:t>: la estructura de 8 minutos, las diapositivas, el reparto entre integrantes y el </a:t>
-            </a:r>
-            <a:r>
-              <a:rPr sz="2000" b="1" i="0">
-                <a:solidFill>
-                  <a:srgbClr val="333333"/>
-                </a:solidFill>
-                <a:latin typeface="Calibri"/>
-              </a:rPr>
-              <a:t>ensayo general cronometrado</a:t>
-            </a:r>
-            <a:r>
-              <a:rPr sz="2000" b="0" i="0">
-                <a:solidFill>
-                  <a:srgbClr val="333333"/>
-                </a:solidFill>
-                <a:latin typeface="Calibri"/>
-              </a:rPr>
-              <a:t>.</a:t>
+              <a:rPr sz="1300" b="1" i="0">
+                <a:solidFill>
+                  <a:srgbClr val="333333"/>
+                </a:solidFill>
+                <a:latin typeface="Calibri"/>
+              </a:rPr>
+              <a:t>El minuto obligatorio.</a:t>
+            </a:r>
+            <a:r>
+              <a:rPr sz="1300" b="0" i="0">
+                <a:solidFill>
+                  <a:srgbClr val="333333"/>
+                </a:solidFill>
+                <a:latin typeface="Calibri"/>
+              </a:rPr>
+              <a:t> El más incómodo que hayan encontrado.</a:t>
+            </a:r>
+          </a:p>
+        </p:txBody>
+      </p:sp>
+      <p:sp>
+        <p:nvSpPr>
+          <p:cNvPr id="18" name="Rounded Rectangle 17"/>
+          <p:cNvSpPr/>
+          <p:nvPr/>
+        </p:nvSpPr>
+        <p:spPr>
+          <a:xfrm>
+            <a:off x="457200" y="4445812"/>
+            <a:ext cx="11277295" cy="908913"/>
+          </a:xfrm>
+          <a:prstGeom prst="roundRect">
+            <a:avLst>
+              <a:gd name="adj" fmla="val 12000"/>
+            </a:avLst>
+          </a:prstGeom>
+          <a:solidFill>
+            <a:srgbClr val="E8F4FA"/>
+          </a:solidFill>
+          <a:ln>
+            <a:noFill/>
+          </a:ln>
+        </p:spPr>
+        <p:style>
+          <a:lnRef idx="1">
+            <a:schemeClr val="accent1"/>
+          </a:lnRef>
+          <a:fillRef idx="3">
+            <a:schemeClr val="accent1"/>
+          </a:fillRef>
+          <a:effectRef idx="2">
+            <a:schemeClr val="accent1"/>
+          </a:effectRef>
+          <a:fontRef idx="minor">
+            <a:schemeClr val="lt1"/>
+          </a:fontRef>
+        </p:style>
+        <p:txBody>
+          <a:bodyPr rtlCol="0" anchor="ctr"/>
+          <a:lstStyle/>
+          <a:p>
+            <a:pPr algn="ctr"/>
+          </a:p>
+        </p:txBody>
+      </p:sp>
+      <p:sp>
+        <p:nvSpPr>
+          <p:cNvPr id="19" name="Rounded Rectangle 18"/>
+          <p:cNvSpPr/>
+          <p:nvPr/>
+        </p:nvSpPr>
+        <p:spPr>
+          <a:xfrm>
+            <a:off x="594360" y="4680813"/>
+            <a:ext cx="438912" cy="438912"/>
+          </a:xfrm>
+          <a:prstGeom prst="roundRect">
+            <a:avLst>
+              <a:gd name="adj" fmla="val 12000"/>
+            </a:avLst>
+          </a:prstGeom>
+          <a:solidFill>
+            <a:srgbClr val="095292"/>
+          </a:solidFill>
+          <a:ln>
+            <a:noFill/>
+          </a:ln>
+        </p:spPr>
+        <p:style>
+          <a:lnRef idx="1">
+            <a:schemeClr val="accent1"/>
+          </a:lnRef>
+          <a:fillRef idx="3">
+            <a:schemeClr val="accent1"/>
+          </a:fillRef>
+          <a:effectRef idx="2">
+            <a:schemeClr val="accent1"/>
+          </a:effectRef>
+          <a:fontRef idx="minor">
+            <a:schemeClr val="lt1"/>
+          </a:fontRef>
+        </p:style>
+        <p:txBody>
+          <a:bodyPr rtlCol="0" anchor="ctr"/>
+          <a:lstStyle/>
+          <a:p>
+            <a:pPr algn="ctr"/>
+          </a:p>
+        </p:txBody>
+      </p:sp>
+      <p:sp>
+        <p:nvSpPr>
+          <p:cNvPr id="20" name="TextBox 19"/>
+          <p:cNvSpPr txBox="1"/>
+          <p:nvPr/>
+        </p:nvSpPr>
+        <p:spPr>
+          <a:xfrm>
+            <a:off x="594360" y="4680813"/>
+            <a:ext cx="438912" cy="438912"/>
+          </a:xfrm>
+          <a:prstGeom prst="rect">
+            <a:avLst/>
+          </a:prstGeom>
+          <a:noFill/>
+        </p:spPr>
+        <p:txBody>
+          <a:bodyPr wrap="square" anchor="ctr"/>
+          <a:lstStyle/>
+          <a:p>
+            <a:pPr algn="ctr"/>
+            <a:r>
+              <a:rPr sz="1600" b="1" i="0">
+                <a:solidFill>
+                  <a:srgbClr val="FFFFFF"/>
+                </a:solidFill>
+                <a:latin typeface="Calibri"/>
+              </a:rPr>
+              <a:t>4</a:t>
+            </a:r>
+          </a:p>
+        </p:txBody>
+      </p:sp>
+      <p:sp>
+        <p:nvSpPr>
+          <p:cNvPr id="21" name="TextBox 20"/>
+          <p:cNvSpPr txBox="1"/>
+          <p:nvPr/>
+        </p:nvSpPr>
+        <p:spPr>
+          <a:xfrm>
+            <a:off x="1188720" y="4537252"/>
+            <a:ext cx="10271455" cy="744321"/>
+          </a:xfrm>
+          <a:prstGeom prst="rect">
+            <a:avLst/>
+          </a:prstGeom>
+          <a:noFill/>
+        </p:spPr>
+        <p:txBody>
+          <a:bodyPr wrap="square" anchor="ctr"/>
+          <a:lstStyle/>
+          <a:p>
+            <a:r>
+              <a:rPr sz="1500" b="1" i="0">
+                <a:solidFill>
+                  <a:srgbClr val="095292"/>
+                </a:solidFill>
+                <a:latin typeface="Calibri"/>
+              </a:rPr>
+              <a:t>30 s · La calificación</a:t>
             </a:r>
           </a:p>
           <a:p>
             <a:pPr>
-              <a:spcAft>
-                <a:spcPts val="800"/>
-              </a:spcAft>
+              <a:spcBef>
+                <a:spcPts val="200"/>
+              </a:spcBef>
             </a:pPr>
             <a:r>
-              <a:rPr sz="2000" b="0" i="0">
-                <a:solidFill>
-                  <a:srgbClr val="333333"/>
-                </a:solidFill>
-                <a:latin typeface="Calibri"/>
-              </a:rPr>
-              <a:t>–   </a:t>
-            </a:r>
-            <a:r>
-              <a:rPr sz="2000" b="1" i="0">
-                <a:solidFill>
-                  <a:srgbClr val="333333"/>
-                </a:solidFill>
-                <a:latin typeface="Calibri"/>
-              </a:rPr>
-              <a:t>Aviso:</a:t>
-            </a:r>
-            <a:r>
-              <a:rPr sz="2000" b="0" i="0">
-                <a:solidFill>
-                  <a:srgbClr val="333333"/>
-                </a:solidFill>
-                <a:latin typeface="Calibri"/>
-              </a:rPr>
-              <a:t> Para la Clase 14 el </a:t>
-            </a:r>
-            <a:r>
-              <a:rPr sz="2000" b="1" i="0">
-                <a:solidFill>
-                  <a:srgbClr val="333333"/>
-                </a:solidFill>
-                <a:latin typeface="Calibri"/>
-              </a:rPr>
-              <a:t>prototipo tiene que estar ya ajustado</a:t>
-            </a:r>
-            <a:r>
-              <a:rPr sz="2000" b="0" i="0">
-                <a:solidFill>
-                  <a:srgbClr val="333333"/>
-                </a:solidFill>
-                <a:latin typeface="Calibri"/>
-              </a:rPr>
-              <a:t> con lo que salió de la Clase 12: si ensayan con la versión vieja, el ensayo no sirve. Traigan también la cuenta de Canva o Google Slides lista y </a:t>
-            </a:r>
-            <a:r>
-              <a:rPr sz="2000" b="1" i="0">
-                <a:solidFill>
-                  <a:srgbClr val="333333"/>
-                </a:solidFill>
-                <a:latin typeface="Calibri"/>
-              </a:rPr>
-              <a:t>quién va a hablar de qué</a:t>
-            </a:r>
-            <a:r>
-              <a:rPr sz="2000" b="0" i="0">
-                <a:solidFill>
-                  <a:srgbClr val="333333"/>
-                </a:solidFill>
-                <a:latin typeface="Calibri"/>
-              </a:rPr>
-              <a:t>.</a:t>
+              <a:rPr sz="1300" b="0" i="0">
+                <a:solidFill>
+                  <a:srgbClr val="333333"/>
+                </a:solidFill>
+                <a:latin typeface="Calibri"/>
+              </a:rPr>
+              <a:t>Cuál es el impacto más grave y por qué lo calificaron así.</a:t>
+            </a:r>
+          </a:p>
+        </p:txBody>
+      </p:sp>
+      <p:sp>
+        <p:nvSpPr>
+          <p:cNvPr id="22" name="Rounded Rectangle 21"/>
+          <p:cNvSpPr/>
+          <p:nvPr/>
+        </p:nvSpPr>
+        <p:spPr>
+          <a:xfrm>
+            <a:off x="457200" y="5446166"/>
+            <a:ext cx="11277295" cy="908913"/>
+          </a:xfrm>
+          <a:prstGeom prst="roundRect">
+            <a:avLst>
+              <a:gd name="adj" fmla="val 12000"/>
+            </a:avLst>
+          </a:prstGeom>
+          <a:solidFill>
+            <a:srgbClr val="F2F2F2"/>
+          </a:solidFill>
+          <a:ln>
+            <a:noFill/>
+          </a:ln>
+        </p:spPr>
+        <p:style>
+          <a:lnRef idx="1">
+            <a:schemeClr val="accent1"/>
+          </a:lnRef>
+          <a:fillRef idx="3">
+            <a:schemeClr val="accent1"/>
+          </a:fillRef>
+          <a:effectRef idx="2">
+            <a:schemeClr val="accent1"/>
+          </a:effectRef>
+          <a:fontRef idx="minor">
+            <a:schemeClr val="lt1"/>
+          </a:fontRef>
+        </p:style>
+        <p:txBody>
+          <a:bodyPr rtlCol="0" anchor="ctr"/>
+          <a:lstStyle/>
+          <a:p>
+            <a:pPr algn="ctr"/>
+          </a:p>
+        </p:txBody>
+      </p:sp>
+      <p:sp>
+        <p:nvSpPr>
+          <p:cNvPr id="23" name="Rounded Rectangle 22"/>
+          <p:cNvSpPr/>
+          <p:nvPr/>
+        </p:nvSpPr>
+        <p:spPr>
+          <a:xfrm>
+            <a:off x="594360" y="5681167"/>
+            <a:ext cx="438912" cy="438912"/>
+          </a:xfrm>
+          <a:prstGeom prst="roundRect">
+            <a:avLst>
+              <a:gd name="adj" fmla="val 12000"/>
+            </a:avLst>
+          </a:prstGeom>
+          <a:solidFill>
+            <a:srgbClr val="095292"/>
+          </a:solidFill>
+          <a:ln>
+            <a:noFill/>
+          </a:ln>
+        </p:spPr>
+        <p:style>
+          <a:lnRef idx="1">
+            <a:schemeClr val="accent1"/>
+          </a:lnRef>
+          <a:fillRef idx="3">
+            <a:schemeClr val="accent1"/>
+          </a:fillRef>
+          <a:effectRef idx="2">
+            <a:schemeClr val="accent1"/>
+          </a:effectRef>
+          <a:fontRef idx="minor">
+            <a:schemeClr val="lt1"/>
+          </a:fontRef>
+        </p:style>
+        <p:txBody>
+          <a:bodyPr rtlCol="0" anchor="ctr"/>
+          <a:lstStyle/>
+          <a:p>
+            <a:pPr algn="ctr"/>
+          </a:p>
+        </p:txBody>
+      </p:sp>
+      <p:sp>
+        <p:nvSpPr>
+          <p:cNvPr id="24" name="TextBox 23"/>
+          <p:cNvSpPr txBox="1"/>
+          <p:nvPr/>
+        </p:nvSpPr>
+        <p:spPr>
+          <a:xfrm>
+            <a:off x="594360" y="5681167"/>
+            <a:ext cx="438912" cy="438912"/>
+          </a:xfrm>
+          <a:prstGeom prst="rect">
+            <a:avLst/>
+          </a:prstGeom>
+          <a:noFill/>
+        </p:spPr>
+        <p:txBody>
+          <a:bodyPr wrap="square" anchor="ctr"/>
+          <a:lstStyle/>
+          <a:p>
+            <a:pPr algn="ctr"/>
+            <a:r>
+              <a:rPr sz="1600" b="1" i="0">
+                <a:solidFill>
+                  <a:srgbClr val="FFFFFF"/>
+                </a:solidFill>
+                <a:latin typeface="Calibri"/>
+              </a:rPr>
+              <a:t>5</a:t>
+            </a:r>
+          </a:p>
+        </p:txBody>
+      </p:sp>
+      <p:sp>
+        <p:nvSpPr>
+          <p:cNvPr id="25" name="TextBox 24"/>
+          <p:cNvSpPr txBox="1"/>
+          <p:nvPr/>
+        </p:nvSpPr>
+        <p:spPr>
+          <a:xfrm>
+            <a:off x="1188720" y="5537606"/>
+            <a:ext cx="10271455" cy="744321"/>
+          </a:xfrm>
+          <a:prstGeom prst="rect">
+            <a:avLst/>
+          </a:prstGeom>
+          <a:noFill/>
+        </p:spPr>
+        <p:txBody>
+          <a:bodyPr wrap="square" anchor="ctr"/>
+          <a:lstStyle/>
+          <a:p>
+            <a:r>
+              <a:rPr sz="1500" b="1" i="0">
+                <a:solidFill>
+                  <a:srgbClr val="095292"/>
+                </a:solidFill>
+                <a:latin typeface="Calibri"/>
+              </a:rPr>
+              <a:t>10 s · Cierre</a:t>
             </a:r>
           </a:p>
           <a:p>
             <a:pPr>
-              <a:spcAft>
-                <a:spcPts val="800"/>
-              </a:spcAft>
+              <a:spcBef>
+                <a:spcPts val="200"/>
+              </a:spcBef>
             </a:pPr>
             <a:r>
-              <a:rPr sz="2000" b="0" i="0">
-                <a:solidFill>
-                  <a:srgbClr val="333333"/>
-                </a:solidFill>
-                <a:latin typeface="Calibri"/>
-              </a:rPr>
-              <a:t>–   </a:t>
-            </a:r>
-            <a:r>
-              <a:rPr sz="2000" b="1" i="0">
-                <a:solidFill>
-                  <a:srgbClr val="333333"/>
-                </a:solidFill>
-                <a:latin typeface="Calibri"/>
-              </a:rPr>
-              <a:t>Antes de salir:</a:t>
-            </a:r>
-            <a:r>
-              <a:rPr sz="2000" b="0" i="0">
-                <a:solidFill>
-                  <a:srgbClr val="333333"/>
-                </a:solidFill>
-                <a:latin typeface="Calibri"/>
-              </a:rPr>
-              <a:t> el enlace del documento del equipo en el chat, con permiso de lectura para el docente, y el nombre del vocero de hoy.</a:t>
-            </a:r>
-          </a:p>
-        </p:txBody>
-      </p:sp>
-      <p:sp>
-        <p:nvSpPr>
-          <p:cNvPr id="6" name="TextBox 5"/>
+              <a:rPr sz="1300" b="0" i="0">
+                <a:solidFill>
+                  <a:srgbClr val="333333"/>
+                </a:solidFill>
+                <a:latin typeface="Calibri"/>
+              </a:rPr>
+              <a:t>Qué dimensión no aplica en su proyecto, y por qué.</a:t>
+            </a:r>
+          </a:p>
+        </p:txBody>
+      </p:sp>
+      <p:sp>
+        <p:nvSpPr>
+          <p:cNvPr id="26" name="TextBox 25"/>
           <p:cNvSpPr txBox="1"/>
           <p:nvPr/>
         </p:nvSpPr>
@@ -11304,6 +10733,470 @@
 </file>
 
 <file path=ppt/slides/slide24.xml><?xml version="1.0" encoding="utf-8"?>
+<p:sld xmlns:a="http://schemas.openxmlformats.org/drawingml/2006/main" xmlns:p="http://schemas.openxmlformats.org/presentationml/2006/main" xmlns:r="http://schemas.openxmlformats.org/officeDocument/2006/relationships">
+  <p:cSld>
+    <p:bg>
+      <p:bgPr>
+        <a:solidFill>
+          <a:srgbClr val="FFFFFF"/>
+        </a:solidFill>
+        <a:effectLst/>
+      </p:bgPr>
+    </p:bg>
+    <p:spTree>
+      <p:nvGrpSpPr>
+        <p:cNvPr id="1" name=""/>
+        <p:cNvGrpSpPr/>
+        <p:nvPr/>
+      </p:nvGrpSpPr>
+      <p:grpSpPr/>
+      <p:sp>
+        <p:nvSpPr>
+          <p:cNvPr id="2" name="Rectangle 1"/>
+          <p:cNvSpPr/>
+          <p:nvPr/>
+        </p:nvSpPr>
+        <p:spPr>
+          <a:xfrm>
+            <a:off x="0" y="0"/>
+            <a:ext cx="12191695" cy="960120"/>
+          </a:xfrm>
+          <a:prstGeom prst="rect">
+            <a:avLst/>
+          </a:prstGeom>
+          <a:solidFill>
+            <a:srgbClr val="095292"/>
+          </a:solidFill>
+          <a:ln>
+            <a:noFill/>
+          </a:ln>
+        </p:spPr>
+        <p:style>
+          <a:lnRef idx="1">
+            <a:schemeClr val="accent1"/>
+          </a:lnRef>
+          <a:fillRef idx="3">
+            <a:schemeClr val="accent1"/>
+          </a:fillRef>
+          <a:effectRef idx="2">
+            <a:schemeClr val="accent1"/>
+          </a:effectRef>
+          <a:fontRef idx="minor">
+            <a:schemeClr val="lt1"/>
+          </a:fontRef>
+        </p:style>
+        <p:txBody>
+          <a:bodyPr rtlCol="0" anchor="ctr"/>
+          <a:lstStyle/>
+          <a:p>
+            <a:pPr algn="ctr"/>
+          </a:p>
+        </p:txBody>
+      </p:sp>
+      <p:sp>
+        <p:nvSpPr>
+          <p:cNvPr id="3" name="Rectangle 2"/>
+          <p:cNvSpPr/>
+          <p:nvPr/>
+        </p:nvSpPr>
+        <p:spPr>
+          <a:xfrm>
+            <a:off x="0" y="960120"/>
+            <a:ext cx="12191695" cy="41148"/>
+          </a:xfrm>
+          <a:prstGeom prst="rect">
+            <a:avLst/>
+          </a:prstGeom>
+          <a:solidFill>
+            <a:srgbClr val="FFD000"/>
+          </a:solidFill>
+          <a:ln>
+            <a:noFill/>
+          </a:ln>
+        </p:spPr>
+        <p:style>
+          <a:lnRef idx="1">
+            <a:schemeClr val="accent1"/>
+          </a:lnRef>
+          <a:fillRef idx="3">
+            <a:schemeClr val="accent1"/>
+          </a:fillRef>
+          <a:effectRef idx="2">
+            <a:schemeClr val="accent1"/>
+          </a:effectRef>
+          <a:fontRef idx="minor">
+            <a:schemeClr val="lt1"/>
+          </a:fontRef>
+        </p:style>
+        <p:txBody>
+          <a:bodyPr rtlCol="0" anchor="ctr"/>
+          <a:lstStyle/>
+          <a:p>
+            <a:pPr algn="ctr"/>
+          </a:p>
+        </p:txBody>
+      </p:sp>
+      <p:sp>
+        <p:nvSpPr>
+          <p:cNvPr id="4" name="TextBox 3"/>
+          <p:cNvSpPr txBox="1"/>
+          <p:nvPr/>
+        </p:nvSpPr>
+        <p:spPr>
+          <a:xfrm>
+            <a:off x="457200" y="164592"/>
+            <a:ext cx="11277295" cy="502920"/>
+          </a:xfrm>
+          <a:prstGeom prst="rect">
+            <a:avLst/>
+          </a:prstGeom>
+          <a:noFill/>
+        </p:spPr>
+        <p:txBody>
+          <a:bodyPr wrap="square">
+            <a:spAutoFit/>
+          </a:bodyPr>
+          <a:lstStyle/>
+          <a:p>
+            <a:r>
+              <a:rPr sz="2600" b="1" i="0">
+                <a:solidFill>
+                  <a:srgbClr val="FFFFFF"/>
+                </a:solidFill>
+                <a:latin typeface="Calibri"/>
+              </a:rPr>
+              <a:t>Para la Clase 14</a:t>
+            </a:r>
+          </a:p>
+        </p:txBody>
+      </p:sp>
+      <p:sp>
+        <p:nvSpPr>
+          <p:cNvPr id="5" name="TextBox 4"/>
+          <p:cNvSpPr txBox="1"/>
+          <p:nvPr/>
+        </p:nvSpPr>
+        <p:spPr>
+          <a:xfrm>
+            <a:off x="457200" y="1170432"/>
+            <a:ext cx="11277295" cy="5230368"/>
+          </a:xfrm>
+          <a:prstGeom prst="rect">
+            <a:avLst/>
+          </a:prstGeom>
+          <a:noFill/>
+        </p:spPr>
+        <p:txBody>
+          <a:bodyPr wrap="square">
+            <a:spAutoFit/>
+          </a:bodyPr>
+          <a:lstStyle/>
+          <a:p>
+            <a:pPr>
+              <a:spcAft>
+                <a:spcPts val="800"/>
+              </a:spcAft>
+            </a:pPr>
+            <a:r>
+              <a:rPr sz="2000" b="0" i="0">
+                <a:solidFill>
+                  <a:srgbClr val="333333"/>
+                </a:solidFill>
+                <a:latin typeface="Calibri"/>
+              </a:rPr>
+              <a:t>–   </a:t>
+            </a:r>
+            <a:r>
+              <a:rPr sz="2000" b="1" i="0">
+                <a:solidFill>
+                  <a:srgbClr val="333333"/>
+                </a:solidFill>
+                <a:latin typeface="Calibri"/>
+              </a:rPr>
+              <a:t>Trabajo dirigido:</a:t>
+            </a:r>
+            <a:r>
+              <a:rPr sz="2000" b="0" i="0">
+                <a:solidFill>
+                  <a:srgbClr val="333333"/>
+                </a:solidFill>
+                <a:latin typeface="Calibri"/>
+              </a:rPr>
+              <a:t> Aplicación de matrices de evaluación — dejar la matriz de impacto completa en el documento del equipo, con indicadores, negativos y mitigaciones.</a:t>
+            </a:r>
+          </a:p>
+          <a:p>
+            <a:pPr>
+              <a:spcAft>
+                <a:spcPts val="800"/>
+              </a:spcAft>
+            </a:pPr>
+            <a:r>
+              <a:rPr sz="2000" b="0" i="0">
+                <a:solidFill>
+                  <a:srgbClr val="333333"/>
+                </a:solidFill>
+                <a:latin typeface="Calibri"/>
+              </a:rPr>
+              <a:t>–   </a:t>
+            </a:r>
+            <a:r>
+              <a:rPr sz="2000" b="1" i="0">
+                <a:solidFill>
+                  <a:srgbClr val="333333"/>
+                </a:solidFill>
+                <a:latin typeface="Calibri"/>
+              </a:rPr>
+              <a:t>Trabajo independiente:</a:t>
+            </a:r>
+            <a:r>
+              <a:rPr sz="2000" b="0" i="0">
+                <a:solidFill>
+                  <a:srgbClr val="333333"/>
+                </a:solidFill>
+                <a:latin typeface="Calibri"/>
+              </a:rPr>
+              <a:t> Informe de evaluación del impacto: media página que resuma </a:t>
+            </a:r>
+            <a:r>
+              <a:rPr sz="2000" b="1" i="0">
+                <a:solidFill>
+                  <a:srgbClr val="333333"/>
+                </a:solidFill>
+                <a:latin typeface="Calibri"/>
+              </a:rPr>
+              <a:t>el impacto positivo más fuerte con su número y el negativo más importante con su mitigación</a:t>
+            </a:r>
+            <a:r>
+              <a:rPr sz="2000" b="0" i="0">
+                <a:solidFill>
+                  <a:srgbClr val="333333"/>
+                </a:solidFill>
+                <a:latin typeface="Calibri"/>
+              </a:rPr>
+              <a:t>. Es el borrador de dos diapositivas de la presentación final.</a:t>
+            </a:r>
+          </a:p>
+          <a:p>
+            <a:pPr>
+              <a:spcAft>
+                <a:spcPts val="800"/>
+              </a:spcAft>
+            </a:pPr>
+            <a:r>
+              <a:rPr sz="2000" b="0" i="0">
+                <a:solidFill>
+                  <a:srgbClr val="333333"/>
+                </a:solidFill>
+                <a:latin typeface="Calibri"/>
+              </a:rPr>
+              <a:t>–   </a:t>
+            </a:r>
+            <a:r>
+              <a:rPr sz="2000" b="1" i="0">
+                <a:solidFill>
+                  <a:srgbClr val="333333"/>
+                </a:solidFill>
+                <a:latin typeface="Calibri"/>
+              </a:rPr>
+              <a:t>Clase 14 · Preparación de la presentación final</a:t>
+            </a:r>
+            <a:r>
+              <a:rPr sz="2000" b="0" i="0">
+                <a:solidFill>
+                  <a:srgbClr val="333333"/>
+                </a:solidFill>
+                <a:latin typeface="Calibri"/>
+              </a:rPr>
+              <a:t> — preparamos la </a:t>
+            </a:r>
+            <a:r>
+              <a:rPr sz="2000" b="1" i="0">
+                <a:solidFill>
+                  <a:srgbClr val="333333"/>
+                </a:solidFill>
+                <a:latin typeface="Calibri"/>
+              </a:rPr>
+              <a:t>presentación final</a:t>
+            </a:r>
+            <a:r>
+              <a:rPr sz="2000" b="0" i="0">
+                <a:solidFill>
+                  <a:srgbClr val="333333"/>
+                </a:solidFill>
+                <a:latin typeface="Calibri"/>
+              </a:rPr>
+              <a:t>: la estructura de 8 minutos, las diapositivas, el reparto entre integrantes y el </a:t>
+            </a:r>
+            <a:r>
+              <a:rPr sz="2000" b="1" i="0">
+                <a:solidFill>
+                  <a:srgbClr val="333333"/>
+                </a:solidFill>
+                <a:latin typeface="Calibri"/>
+              </a:rPr>
+              <a:t>ensayo general cronometrado</a:t>
+            </a:r>
+            <a:r>
+              <a:rPr sz="2000" b="0" i="0">
+                <a:solidFill>
+                  <a:srgbClr val="333333"/>
+                </a:solidFill>
+                <a:latin typeface="Calibri"/>
+              </a:rPr>
+              <a:t>.</a:t>
+            </a:r>
+          </a:p>
+          <a:p>
+            <a:pPr>
+              <a:spcAft>
+                <a:spcPts val="800"/>
+              </a:spcAft>
+            </a:pPr>
+            <a:r>
+              <a:rPr sz="2000" b="0" i="0">
+                <a:solidFill>
+                  <a:srgbClr val="333333"/>
+                </a:solidFill>
+                <a:latin typeface="Calibri"/>
+              </a:rPr>
+              <a:t>–   </a:t>
+            </a:r>
+            <a:r>
+              <a:rPr sz="2000" b="1" i="0">
+                <a:solidFill>
+                  <a:srgbClr val="333333"/>
+                </a:solidFill>
+                <a:latin typeface="Calibri"/>
+              </a:rPr>
+              <a:t>Aviso:</a:t>
+            </a:r>
+            <a:r>
+              <a:rPr sz="2000" b="0" i="0">
+                <a:solidFill>
+                  <a:srgbClr val="333333"/>
+                </a:solidFill>
+                <a:latin typeface="Calibri"/>
+              </a:rPr>
+              <a:t> Para la Clase 14 el </a:t>
+            </a:r>
+            <a:r>
+              <a:rPr sz="2000" b="1" i="0">
+                <a:solidFill>
+                  <a:srgbClr val="333333"/>
+                </a:solidFill>
+                <a:latin typeface="Calibri"/>
+              </a:rPr>
+              <a:t>prototipo tiene que estar ya ajustado</a:t>
+            </a:r>
+            <a:r>
+              <a:rPr sz="2000" b="0" i="0">
+                <a:solidFill>
+                  <a:srgbClr val="333333"/>
+                </a:solidFill>
+                <a:latin typeface="Calibri"/>
+              </a:rPr>
+              <a:t> con lo que salió de la Clase 12: si ensayan con la versión vieja, el ensayo no sirve. Traigan también la cuenta de Canva o Google Slides lista y </a:t>
+            </a:r>
+            <a:r>
+              <a:rPr sz="2000" b="1" i="0">
+                <a:solidFill>
+                  <a:srgbClr val="333333"/>
+                </a:solidFill>
+                <a:latin typeface="Calibri"/>
+              </a:rPr>
+              <a:t>quién va a hablar de qué</a:t>
+            </a:r>
+            <a:r>
+              <a:rPr sz="2000" b="0" i="0">
+                <a:solidFill>
+                  <a:srgbClr val="333333"/>
+                </a:solidFill>
+                <a:latin typeface="Calibri"/>
+              </a:rPr>
+              <a:t>.</a:t>
+            </a:r>
+          </a:p>
+          <a:p>
+            <a:pPr>
+              <a:spcAft>
+                <a:spcPts val="800"/>
+              </a:spcAft>
+            </a:pPr>
+            <a:r>
+              <a:rPr sz="2000" b="0" i="0">
+                <a:solidFill>
+                  <a:srgbClr val="333333"/>
+                </a:solidFill>
+                <a:latin typeface="Calibri"/>
+              </a:rPr>
+              <a:t>–   </a:t>
+            </a:r>
+            <a:r>
+              <a:rPr sz="2000" b="1" i="0">
+                <a:solidFill>
+                  <a:srgbClr val="333333"/>
+                </a:solidFill>
+                <a:latin typeface="Calibri"/>
+              </a:rPr>
+              <a:t>Antes de salir:</a:t>
+            </a:r>
+            <a:r>
+              <a:rPr sz="2000" b="0" i="0">
+                <a:solidFill>
+                  <a:srgbClr val="333333"/>
+                </a:solidFill>
+                <a:latin typeface="Calibri"/>
+              </a:rPr>
+              <a:t> el enlace del documento del equipo en el chat, con permiso de lectura para el docente, y el nombre del vocero de hoy.</a:t>
+            </a:r>
+          </a:p>
+        </p:txBody>
+      </p:sp>
+      <p:sp>
+        <p:nvSpPr>
+          <p:cNvPr id="6" name="TextBox 5"/>
+          <p:cNvSpPr txBox="1"/>
+          <p:nvPr/>
+        </p:nvSpPr>
+        <p:spPr>
+          <a:xfrm>
+            <a:off x="11185855" y="6473952"/>
+            <a:ext cx="640080" cy="274320"/>
+          </a:xfrm>
+          <a:prstGeom prst="rect">
+            <a:avLst/>
+          </a:prstGeom>
+          <a:noFill/>
+        </p:spPr>
+        <p:txBody>
+          <a:bodyPr wrap="square">
+            <a:spAutoFit/>
+          </a:bodyPr>
+          <a:lstStyle/>
+          <a:p>
+            <a:pPr algn="r"/>
+            <a:r>
+              <a:rPr sz="1100" b="0" i="0">
+                <a:solidFill>
+                  <a:srgbClr val="666666"/>
+                </a:solidFill>
+                <a:latin typeface="Calibri"/>
+              </a:rPr>
+              <a:t>24</a:t>
+            </a:r>
+          </a:p>
+        </p:txBody>
+      </p:sp>
+    </p:spTree>
+  </p:cSld>
+  <p:clrMapOvr>
+    <a:masterClrMapping/>
+  </p:clrMapOvr>
+</p:sld>
+</file>
+
+<file path=ppt/slides/slide25.xml><?xml version="1.0" encoding="utf-8"?>
 <p:sld xmlns:a="http://schemas.openxmlformats.org/drawingml/2006/main" xmlns:p="http://schemas.openxmlformats.org/presentationml/2006/main" xmlns:r="http://schemas.openxmlformats.org/officeDocument/2006/relationships">
   <p:cSld>
     <p:bg>

--- a/Introduccion a la Ingenieria/Clases/Clase 13 - Evaluacion de impacto social y ambiental/Presentacion.pptx
+++ b/Introduccion a la Ingenieria/Clases/Clase 13 - Evaluacion de impacto social y ambiental/Presentacion.pptx
@@ -30,6 +30,8 @@
     <p:sldId id="278" r:id="rId29"/>
     <p:sldId id="279" r:id="rId30"/>
     <p:sldId id="280" r:id="rId31"/>
+    <p:sldId id="281" r:id="rId32"/>
+    <p:sldId id="282" r:id="rId33"/>
   </p:sldIdLst>
   <p:sldSz cx="12191695" cy="6858000" type="screen4x3"/>
   <p:notesSz cx="6858000" cy="9144000"/>
@@ -8505,7 +8507,7 @@
         <p:spPr>
           <a:xfrm>
             <a:off x="0" y="0"/>
-            <a:ext cx="12191695" cy="1170432"/>
+            <a:ext cx="12191695" cy="960120"/>
           </a:xfrm>
           <a:prstGeom prst="rect">
             <a:avLst/>
@@ -8547,7 +8549,7 @@
         </p:nvSpPr>
         <p:spPr>
           <a:xfrm>
-            <a:off x="0" y="1170432"/>
+            <a:off x="0" y="960120"/>
             <a:ext cx="12191695" cy="41148"/>
           </a:xfrm>
           <a:prstGeom prst="rect">
@@ -8591,7 +8593,7 @@
         <p:spPr>
           <a:xfrm>
             <a:off x="457200" y="164592"/>
-            <a:ext cx="11277295" cy="384048"/>
+            <a:ext cx="11277295" cy="502920"/>
           </a:xfrm>
           <a:prstGeom prst="rect">
             <a:avLst/>
@@ -8611,55 +8613,21 @@
                 </a:solidFill>
                 <a:latin typeface="Calibri"/>
               </a:rPr>
-              <a:t>Taller de hoy: Matriz de impacto social y ambiental</a:t>
-            </a:r>
-          </a:p>
-        </p:txBody>
-      </p:sp>
-      <p:sp>
-        <p:nvSpPr>
-          <p:cNvPr id="5" name="TextBox 4"/>
-          <p:cNvSpPr txBox="1"/>
-          <p:nvPr/>
-        </p:nvSpPr>
-        <p:spPr>
-          <a:xfrm>
-            <a:off x="457200" y="566928"/>
-            <a:ext cx="11277295" cy="411480"/>
-          </a:xfrm>
-          <a:prstGeom prst="rect">
-            <a:avLst/>
-          </a:prstGeom>
-          <a:noFill/>
-        </p:spPr>
-        <p:txBody>
-          <a:bodyPr wrap="square">
-            <a:spAutoFit/>
-          </a:bodyPr>
-          <a:lstStyle/>
-          <a:p>
-            <a:r>
-              <a:rPr sz="1400" b="0" i="0">
-                <a:solidFill>
-                  <a:srgbClr val="B8D8EE"/>
-                </a:solidFill>
-                <a:latin typeface="Calibri"/>
-              </a:rPr>
-              <a:t>17 min en equipos · 17 min: afectados, positivos con indicador, negativos, matriz y mitigación · matriz de impacto con indicadores, negativos declarados y mitigaciones</a:t>
-            </a:r>
-          </a:p>
-        </p:txBody>
-      </p:sp>
-      <p:sp>
-        <p:nvSpPr>
-          <p:cNvPr id="6" name="Rounded Rectangle 5"/>
+              <a:t>Plantilla del entregable: los 5 bloques</a:t>
+            </a:r>
+          </a:p>
+        </p:txBody>
+      </p:sp>
+      <p:sp>
+        <p:nvSpPr>
+          <p:cNvPr id="5" name="Rounded Rectangle 4"/>
           <p:cNvSpPr/>
           <p:nvPr/>
         </p:nvSpPr>
         <p:spPr>
           <a:xfrm>
-            <a:off x="457200" y="1472184"/>
-            <a:ext cx="11277295" cy="566928"/>
+            <a:off x="457200" y="1261872"/>
+            <a:ext cx="11277295" cy="5093208"/>
           </a:xfrm>
           <a:prstGeom prst="roundRect">
             <a:avLst>
@@ -8667,7 +8635,7 @@
             </a:avLst>
           </a:prstGeom>
           <a:solidFill>
-            <a:srgbClr val="F2F2F2"/>
+            <a:srgbClr val="1E2A38"/>
           </a:solidFill>
           <a:ln>
             <a:noFill/>
@@ -8697,25 +8665,23 @@
       </p:sp>
       <p:sp>
         <p:nvSpPr>
-          <p:cNvPr id="7" name="Rectangle 6"/>
+          <p:cNvPr id="6" name="Rectangle 5"/>
           <p:cNvSpPr/>
           <p:nvPr/>
         </p:nvSpPr>
         <p:spPr>
           <a:xfrm>
-            <a:off x="640080" y="1618487"/>
-            <a:ext cx="274320" cy="274320"/>
+            <a:off x="457200" y="1261872"/>
+            <a:ext cx="11277295" cy="320040"/>
           </a:xfrm>
           <a:prstGeom prst="rect">
             <a:avLst/>
           </a:prstGeom>
           <a:solidFill>
-            <a:srgbClr val="FFFFFF"/>
+            <a:srgbClr val="095292"/>
           </a:solidFill>
           <a:ln>
-            <a:solidFill>
-              <a:srgbClr val="333333"/>
-            </a:solidFill>
+            <a:noFill/>
           </a:ln>
         </p:spPr>
         <p:style>
@@ -8742,877 +8708,222 @@
       </p:sp>
       <p:sp>
         <p:nvSpPr>
-          <p:cNvPr id="8" name="Rectangle 7"/>
-          <p:cNvSpPr/>
-          <p:nvPr/>
-        </p:nvSpPr>
-        <p:spPr>
-          <a:xfrm>
-            <a:off x="640080" y="1618487"/>
-            <a:ext cx="73152" cy="274320"/>
-          </a:xfrm>
-          <a:prstGeom prst="rect">
-            <a:avLst/>
-          </a:prstGeom>
-          <a:solidFill>
-            <a:srgbClr val="269CCB"/>
-          </a:solidFill>
-          <a:ln>
-            <a:noFill/>
-          </a:ln>
-        </p:spPr>
-        <p:style>
-          <a:lnRef idx="1">
-            <a:schemeClr val="accent1"/>
-          </a:lnRef>
-          <a:fillRef idx="3">
-            <a:schemeClr val="accent1"/>
-          </a:fillRef>
-          <a:effectRef idx="2">
-            <a:schemeClr val="accent1"/>
-          </a:effectRef>
-          <a:fontRef idx="minor">
-            <a:schemeClr val="lt1"/>
-          </a:fontRef>
-        </p:style>
-        <p:txBody>
-          <a:bodyPr rtlCol="0" anchor="ctr"/>
-          <a:lstStyle/>
-          <a:p>
-            <a:pPr algn="ctr"/>
+          <p:cNvPr id="7" name="TextBox 6"/>
+          <p:cNvSpPr txBox="1"/>
+          <p:nvPr/>
+        </p:nvSpPr>
+        <p:spPr>
+          <a:xfrm>
+            <a:off x="685800" y="1307592"/>
+            <a:ext cx="10820095" cy="256032"/>
+          </a:xfrm>
+          <a:prstGeom prst="rect">
+            <a:avLst/>
+          </a:prstGeom>
+          <a:noFill/>
+        </p:spPr>
+        <p:txBody>
+          <a:bodyPr wrap="square" anchor="ctr"/>
+          <a:lstStyle/>
+          <a:p>
+            <a:r>
+              <a:rPr sz="1000" b="1" i="0">
+                <a:solidFill>
+                  <a:srgbClr val="269CCB"/>
+                </a:solidFill>
+                <a:latin typeface="Calibri"/>
+              </a:rPr>
+              <a:t>● ● ●</a:t>
+            </a:r>
+          </a:p>
+        </p:txBody>
+      </p:sp>
+      <p:sp>
+        <p:nvSpPr>
+          <p:cNvPr id="8" name="TextBox 7"/>
+          <p:cNvSpPr txBox="1"/>
+          <p:nvPr/>
+        </p:nvSpPr>
+        <p:spPr>
+          <a:xfrm>
+            <a:off x="777240" y="1719072"/>
+            <a:ext cx="10637215" cy="4453128"/>
+          </a:xfrm>
+          <a:prstGeom prst="rect">
+            <a:avLst/>
+          </a:prstGeom>
+          <a:noFill/>
+        </p:spPr>
+        <p:txBody>
+          <a:bodyPr wrap="square">
+            <a:spAutoFit/>
+          </a:bodyPr>
+          <a:lstStyle/>
+          <a:p>
+            <a:pPr>
+              <a:spcAft>
+                <a:spcPts val="400"/>
+              </a:spcAft>
+            </a:pPr>
+            <a:r>
+              <a:rPr sz="1400" b="0" i="0">
+                <a:solidFill>
+                  <a:srgbClr val="FFFFFF"/>
+                </a:solidFill>
+                <a:latin typeface="Calibri"/>
+              </a:rPr>
+              <a:t># Matriz de impacto social y ambiental</a:t>
+            </a:r>
+          </a:p>
+          <a:p>
+            <a:pPr>
+              <a:spcAft>
+                <a:spcPts val="400"/>
+              </a:spcAft>
+            </a:pPr>
+            <a:r>
+              <a:rPr sz="1400" b="0" i="0">
+                <a:solidFill>
+                  <a:srgbClr val="FFFFFF"/>
+                </a:solidFill>
+                <a:latin typeface="Calibri"/>
+              </a:rPr>
+              <a:t># Documento del equipo · un bloque por titulo, sin cambiar los nombres</a:t>
+            </a:r>
+          </a:p>
+          <a:p>
+            <a:pPr>
+              <a:spcAft>
+                <a:spcPts val="400"/>
+              </a:spcAft>
+            </a:pPr>
+            <a:r>
+              <a:rPr sz="1400" b="0" i="0">
+                <a:solidFill>
+                  <a:srgbClr val="FFFFFF"/>
+                </a:solidFill>
+                <a:latin typeface="Calibri"/>
+              </a:rPr>
+              <a:t/>
+            </a:r>
+          </a:p>
+          <a:p>
+            <a:pPr>
+              <a:spcAft>
+                <a:spcPts val="400"/>
+              </a:spcAft>
+            </a:pPr>
+            <a:r>
+              <a:rPr sz="1400" b="0" i="0">
+                <a:solidFill>
+                  <a:srgbClr val="FFFFFF"/>
+                </a:solidFill>
+                <a:latin typeface="Calibri"/>
+              </a:rPr>
+              <a:t>## 1. LOS AFECTADOS QUE NO SON USUARIOS</a:t>
+            </a:r>
+          </a:p>
+          <a:p>
+            <a:pPr>
+              <a:spcAft>
+                <a:spcPts val="400"/>
+              </a:spcAft>
+            </a:pPr>
+            <a:r>
+              <a:rPr sz="1400" b="0" i="0">
+                <a:solidFill>
+                  <a:srgbClr val="FFFFFF"/>
+                </a:solidFill>
+                <a:latin typeface="Calibri"/>
+              </a:rPr>
+              <a:t>## 2. TRES IMPACTOS POSITIVOS CON SU INDICADOR</a:t>
+            </a:r>
+          </a:p>
+          <a:p>
+            <a:pPr>
+              <a:spcAft>
+                <a:spcPts val="400"/>
+              </a:spcAft>
+            </a:pPr>
+            <a:r>
+              <a:rPr sz="1400" b="0" i="0">
+                <a:solidFill>
+                  <a:srgbClr val="FFFFFF"/>
+                </a:solidFill>
+                <a:latin typeface="Calibri"/>
+              </a:rPr>
+              <a:t>## 3. DOS IMPACTOS NEGATIVOS O RIESGOS</a:t>
+            </a:r>
+          </a:p>
+          <a:p>
+            <a:pPr>
+              <a:spcAft>
+                <a:spcPts val="400"/>
+              </a:spcAft>
+            </a:pPr>
+            <a:r>
+              <a:rPr sz="1400" b="0" i="0">
+                <a:solidFill>
+                  <a:srgbClr val="FFFFFF"/>
+                </a:solidFill>
+                <a:latin typeface="Calibri"/>
+              </a:rPr>
+              <a:t>## 4. LA MATRIZ CALIFICADA</a:t>
+            </a:r>
+          </a:p>
+          <a:p>
+            <a:pPr>
+              <a:spcAft>
+                <a:spcPts val="400"/>
+              </a:spcAft>
+            </a:pPr>
+            <a:r>
+              <a:rPr sz="1400" b="0" i="0">
+                <a:solidFill>
+                  <a:srgbClr val="FFFFFF"/>
+                </a:solidFill>
+                <a:latin typeface="Calibri"/>
+              </a:rPr>
+              <a:t>## 5. LAS MEDIDAS DE MITIGACIÓN</a:t>
+            </a:r>
+          </a:p>
+          <a:p>
+            <a:pPr>
+              <a:spcAft>
+                <a:spcPts val="400"/>
+              </a:spcAft>
+            </a:pPr>
+            <a:r>
+              <a:rPr sz="1400" b="0" i="0">
+                <a:solidFill>
+                  <a:srgbClr val="FFFFFF"/>
+                </a:solidFill>
+                <a:latin typeface="Calibri"/>
+              </a:rPr>
+              <a:t/>
+            </a:r>
+          </a:p>
+          <a:p>
+            <a:pPr>
+              <a:spcAft>
+                <a:spcPts val="400"/>
+              </a:spcAft>
+            </a:pPr>
+            <a:r>
+              <a:rPr sz="1400" b="0" i="0">
+                <a:solidFill>
+                  <a:srgbClr val="FFFFFF"/>
+                </a:solidFill>
+                <a:latin typeface="Calibri"/>
+              </a:rPr>
+              <a:t># Los titulos van TAL CUAL: son con los que se califica.</a:t>
+            </a:r>
           </a:p>
         </p:txBody>
       </p:sp>
       <p:sp>
         <p:nvSpPr>
           <p:cNvPr id="9" name="TextBox 8"/>
-          <p:cNvSpPr txBox="1"/>
-          <p:nvPr/>
-        </p:nvSpPr>
-        <p:spPr>
-          <a:xfrm>
-            <a:off x="1097280" y="1563624"/>
-            <a:ext cx="10362895" cy="402336"/>
-          </a:xfrm>
-          <a:prstGeom prst="rect">
-            <a:avLst/>
-          </a:prstGeom>
-          <a:noFill/>
-        </p:spPr>
-        <p:txBody>
-          <a:bodyPr wrap="square" anchor="ctr"/>
-          <a:lstStyle/>
-          <a:p>
-            <a:r>
-              <a:rPr sz="1500" b="1" i="0">
-                <a:solidFill>
-                  <a:srgbClr val="333333"/>
-                </a:solidFill>
-                <a:latin typeface="Calibri"/>
-              </a:rPr>
-              <a:t>LOS AFECTADOS QUE NO SON USUARIOS</a:t>
-            </a:r>
-            <a:r>
-              <a:rPr sz="1500" b="0" i="0">
-                <a:solidFill>
-                  <a:srgbClr val="333333"/>
-                </a:solidFill>
-                <a:latin typeface="Calibri"/>
-              </a:rPr>
-              <a:t> — La lista de quienes reciben un efecto sin usar la solución: a quién le llega más trabajo, quién </a:t>
-            </a:r>
-            <a:r>
-              <a:rPr sz="1500" b="1" i="0">
-                <a:solidFill>
-                  <a:srgbClr val="333333"/>
-                </a:solidFill>
-                <a:latin typeface="Calibri"/>
-              </a:rPr>
-              <a:t>no puede</a:t>
-            </a:r>
-            <a:r>
-              <a:rPr sz="1500" b="0" i="0">
-                <a:solidFill>
-                  <a:srgbClr val="333333"/>
-                </a:solidFill>
-                <a:latin typeface="Calibri"/>
-              </a:rPr>
-              <a:t> usarla, y a quién desplaza.</a:t>
-            </a:r>
-          </a:p>
-        </p:txBody>
-      </p:sp>
-      <p:sp>
-        <p:nvSpPr>
-          <p:cNvPr id="10" name="Rounded Rectangle 9"/>
-          <p:cNvSpPr/>
-          <p:nvPr/>
-        </p:nvSpPr>
-        <p:spPr>
-          <a:xfrm>
-            <a:off x="457200" y="2148839"/>
-            <a:ext cx="11277295" cy="566928"/>
-          </a:xfrm>
-          <a:prstGeom prst="roundRect">
-            <a:avLst>
-              <a:gd name="adj" fmla="val 12000"/>
-            </a:avLst>
-          </a:prstGeom>
-          <a:solidFill>
-            <a:srgbClr val="F2F2F2"/>
-          </a:solidFill>
-          <a:ln>
-            <a:noFill/>
-          </a:ln>
-        </p:spPr>
-        <p:style>
-          <a:lnRef idx="1">
-            <a:schemeClr val="accent1"/>
-          </a:lnRef>
-          <a:fillRef idx="3">
-            <a:schemeClr val="accent1"/>
-          </a:fillRef>
-          <a:effectRef idx="2">
-            <a:schemeClr val="accent1"/>
-          </a:effectRef>
-          <a:fontRef idx="minor">
-            <a:schemeClr val="lt1"/>
-          </a:fontRef>
-        </p:style>
-        <p:txBody>
-          <a:bodyPr rtlCol="0" anchor="ctr"/>
-          <a:lstStyle/>
-          <a:p>
-            <a:pPr algn="ctr"/>
-          </a:p>
-        </p:txBody>
-      </p:sp>
-      <p:sp>
-        <p:nvSpPr>
-          <p:cNvPr id="11" name="Rectangle 10"/>
-          <p:cNvSpPr/>
-          <p:nvPr/>
-        </p:nvSpPr>
-        <p:spPr>
-          <a:xfrm>
-            <a:off x="640080" y="2295144"/>
-            <a:ext cx="274320" cy="274320"/>
-          </a:xfrm>
-          <a:prstGeom prst="rect">
-            <a:avLst/>
-          </a:prstGeom>
-          <a:solidFill>
-            <a:srgbClr val="FFFFFF"/>
-          </a:solidFill>
-          <a:ln>
-            <a:solidFill>
-              <a:srgbClr val="333333"/>
-            </a:solidFill>
-          </a:ln>
-        </p:spPr>
-        <p:style>
-          <a:lnRef idx="1">
-            <a:schemeClr val="accent1"/>
-          </a:lnRef>
-          <a:fillRef idx="3">
-            <a:schemeClr val="accent1"/>
-          </a:fillRef>
-          <a:effectRef idx="2">
-            <a:schemeClr val="accent1"/>
-          </a:effectRef>
-          <a:fontRef idx="minor">
-            <a:schemeClr val="lt1"/>
-          </a:fontRef>
-        </p:style>
-        <p:txBody>
-          <a:bodyPr rtlCol="0" anchor="ctr"/>
-          <a:lstStyle/>
-          <a:p>
-            <a:pPr algn="ctr"/>
-          </a:p>
-        </p:txBody>
-      </p:sp>
-      <p:sp>
-        <p:nvSpPr>
-          <p:cNvPr id="12" name="Rectangle 11"/>
-          <p:cNvSpPr/>
-          <p:nvPr/>
-        </p:nvSpPr>
-        <p:spPr>
-          <a:xfrm>
-            <a:off x="640080" y="2295144"/>
-            <a:ext cx="73152" cy="274320"/>
-          </a:xfrm>
-          <a:prstGeom prst="rect">
-            <a:avLst/>
-          </a:prstGeom>
-          <a:solidFill>
-            <a:srgbClr val="269CCB"/>
-          </a:solidFill>
-          <a:ln>
-            <a:noFill/>
-          </a:ln>
-        </p:spPr>
-        <p:style>
-          <a:lnRef idx="1">
-            <a:schemeClr val="accent1"/>
-          </a:lnRef>
-          <a:fillRef idx="3">
-            <a:schemeClr val="accent1"/>
-          </a:fillRef>
-          <a:effectRef idx="2">
-            <a:schemeClr val="accent1"/>
-          </a:effectRef>
-          <a:fontRef idx="minor">
-            <a:schemeClr val="lt1"/>
-          </a:fontRef>
-        </p:style>
-        <p:txBody>
-          <a:bodyPr rtlCol="0" anchor="ctr"/>
-          <a:lstStyle/>
-          <a:p>
-            <a:pPr algn="ctr"/>
-          </a:p>
-        </p:txBody>
-      </p:sp>
-      <p:sp>
-        <p:nvSpPr>
-          <p:cNvPr id="13" name="TextBox 12"/>
-          <p:cNvSpPr txBox="1"/>
-          <p:nvPr/>
-        </p:nvSpPr>
-        <p:spPr>
-          <a:xfrm>
-            <a:off x="1097280" y="2240279"/>
-            <a:ext cx="10362895" cy="402336"/>
-          </a:xfrm>
-          <a:prstGeom prst="rect">
-            <a:avLst/>
-          </a:prstGeom>
-          <a:noFill/>
-        </p:spPr>
-        <p:txBody>
-          <a:bodyPr wrap="square" anchor="ctr"/>
-          <a:lstStyle/>
-          <a:p>
-            <a:r>
-              <a:rPr sz="1500" b="1" i="0">
-                <a:solidFill>
-                  <a:srgbClr val="333333"/>
-                </a:solidFill>
-                <a:latin typeface="Calibri"/>
-              </a:rPr>
-              <a:t>TRES IMPACTOS POSITIVOS CON SU INDICADOR</a:t>
-            </a:r>
-            <a:r>
-              <a:rPr sz="1500" b="0" i="0">
-                <a:solidFill>
-                  <a:srgbClr val="333333"/>
-                </a:solidFill>
-                <a:latin typeface="Calibri"/>
-              </a:rPr>
-              <a:t> — Tres efectos buenos, cada uno con </a:t>
-            </a:r>
-            <a:r>
-              <a:rPr sz="1500" b="1" i="0">
-                <a:solidFill>
-                  <a:srgbClr val="333333"/>
-                </a:solidFill>
-                <a:latin typeface="Calibri"/>
-              </a:rPr>
-              <a:t>un número y una unidad</a:t>
-            </a:r>
-            <a:r>
-              <a:rPr sz="1500" b="0" i="0">
-                <a:solidFill>
-                  <a:srgbClr val="333333"/>
-                </a:solidFill>
-                <a:latin typeface="Calibri"/>
-              </a:rPr>
-              <a:t>: cuántas personas, cuántas veces, cuántos minutos, cuántos pesos.</a:t>
-            </a:r>
-          </a:p>
-        </p:txBody>
-      </p:sp>
-      <p:sp>
-        <p:nvSpPr>
-          <p:cNvPr id="14" name="Rounded Rectangle 13"/>
-          <p:cNvSpPr/>
-          <p:nvPr/>
-        </p:nvSpPr>
-        <p:spPr>
-          <a:xfrm>
-            <a:off x="457200" y="2825496"/>
-            <a:ext cx="11277295" cy="566928"/>
-          </a:xfrm>
-          <a:prstGeom prst="roundRect">
-            <a:avLst>
-              <a:gd name="adj" fmla="val 12000"/>
-            </a:avLst>
-          </a:prstGeom>
-          <a:solidFill>
-            <a:srgbClr val="F2F2F2"/>
-          </a:solidFill>
-          <a:ln>
-            <a:noFill/>
-          </a:ln>
-        </p:spPr>
-        <p:style>
-          <a:lnRef idx="1">
-            <a:schemeClr val="accent1"/>
-          </a:lnRef>
-          <a:fillRef idx="3">
-            <a:schemeClr val="accent1"/>
-          </a:fillRef>
-          <a:effectRef idx="2">
-            <a:schemeClr val="accent1"/>
-          </a:effectRef>
-          <a:fontRef idx="minor">
-            <a:schemeClr val="lt1"/>
-          </a:fontRef>
-        </p:style>
-        <p:txBody>
-          <a:bodyPr rtlCol="0" anchor="ctr"/>
-          <a:lstStyle/>
-          <a:p>
-            <a:pPr algn="ctr"/>
-          </a:p>
-        </p:txBody>
-      </p:sp>
-      <p:sp>
-        <p:nvSpPr>
-          <p:cNvPr id="15" name="Rectangle 14"/>
-          <p:cNvSpPr/>
-          <p:nvPr/>
-        </p:nvSpPr>
-        <p:spPr>
-          <a:xfrm>
-            <a:off x="640080" y="2971800"/>
-            <a:ext cx="274320" cy="274320"/>
-          </a:xfrm>
-          <a:prstGeom prst="rect">
-            <a:avLst/>
-          </a:prstGeom>
-          <a:solidFill>
-            <a:srgbClr val="FFFFFF"/>
-          </a:solidFill>
-          <a:ln>
-            <a:solidFill>
-              <a:srgbClr val="333333"/>
-            </a:solidFill>
-          </a:ln>
-        </p:spPr>
-        <p:style>
-          <a:lnRef idx="1">
-            <a:schemeClr val="accent1"/>
-          </a:lnRef>
-          <a:fillRef idx="3">
-            <a:schemeClr val="accent1"/>
-          </a:fillRef>
-          <a:effectRef idx="2">
-            <a:schemeClr val="accent1"/>
-          </a:effectRef>
-          <a:fontRef idx="minor">
-            <a:schemeClr val="lt1"/>
-          </a:fontRef>
-        </p:style>
-        <p:txBody>
-          <a:bodyPr rtlCol="0" anchor="ctr"/>
-          <a:lstStyle/>
-          <a:p>
-            <a:pPr algn="ctr"/>
-          </a:p>
-        </p:txBody>
-      </p:sp>
-      <p:sp>
-        <p:nvSpPr>
-          <p:cNvPr id="16" name="Rectangle 15"/>
-          <p:cNvSpPr/>
-          <p:nvPr/>
-        </p:nvSpPr>
-        <p:spPr>
-          <a:xfrm>
-            <a:off x="640080" y="2971800"/>
-            <a:ext cx="73152" cy="274320"/>
-          </a:xfrm>
-          <a:prstGeom prst="rect">
-            <a:avLst/>
-          </a:prstGeom>
-          <a:solidFill>
-            <a:srgbClr val="269CCB"/>
-          </a:solidFill>
-          <a:ln>
-            <a:noFill/>
-          </a:ln>
-        </p:spPr>
-        <p:style>
-          <a:lnRef idx="1">
-            <a:schemeClr val="accent1"/>
-          </a:lnRef>
-          <a:fillRef idx="3">
-            <a:schemeClr val="accent1"/>
-          </a:fillRef>
-          <a:effectRef idx="2">
-            <a:schemeClr val="accent1"/>
-          </a:effectRef>
-          <a:fontRef idx="minor">
-            <a:schemeClr val="lt1"/>
-          </a:fontRef>
-        </p:style>
-        <p:txBody>
-          <a:bodyPr rtlCol="0" anchor="ctr"/>
-          <a:lstStyle/>
-          <a:p>
-            <a:pPr algn="ctr"/>
-          </a:p>
-        </p:txBody>
-      </p:sp>
-      <p:sp>
-        <p:nvSpPr>
-          <p:cNvPr id="17" name="TextBox 16"/>
-          <p:cNvSpPr txBox="1"/>
-          <p:nvPr/>
-        </p:nvSpPr>
-        <p:spPr>
-          <a:xfrm>
-            <a:off x="1097280" y="2916936"/>
-            <a:ext cx="10362895" cy="402336"/>
-          </a:xfrm>
-          <a:prstGeom prst="rect">
-            <a:avLst/>
-          </a:prstGeom>
-          <a:noFill/>
-        </p:spPr>
-        <p:txBody>
-          <a:bodyPr wrap="square" anchor="ctr"/>
-          <a:lstStyle/>
-          <a:p>
-            <a:r>
-              <a:rPr sz="1500" b="1" i="0">
-                <a:solidFill>
-                  <a:srgbClr val="333333"/>
-                </a:solidFill>
-                <a:latin typeface="Calibri"/>
-              </a:rPr>
-              <a:t>DOS IMPACTOS NEGATIVOS O RIESGOS</a:t>
-            </a:r>
-            <a:r>
-              <a:rPr sz="1500" b="0" i="0">
-                <a:solidFill>
-                  <a:srgbClr val="333333"/>
-                </a:solidFill>
-                <a:latin typeface="Calibri"/>
-              </a:rPr>
-              <a:t> — Dos efectos malos, con </a:t>
-            </a:r>
-            <a:r>
-              <a:rPr sz="1500" b="1" i="0">
-                <a:solidFill>
-                  <a:srgbClr val="333333"/>
-                </a:solidFill>
-                <a:latin typeface="Calibri"/>
-              </a:rPr>
-              <a:t>quién los recibe</a:t>
-            </a:r>
-            <a:r>
-              <a:rPr sz="1500" b="0" i="0">
-                <a:solidFill>
-                  <a:srgbClr val="333333"/>
-                </a:solidFill>
-                <a:latin typeface="Calibri"/>
-              </a:rPr>
-              <a:t> exactamente. Si no encuentran ninguno, pregúntense quién trabaja más por su solución.</a:t>
-            </a:r>
-          </a:p>
-        </p:txBody>
-      </p:sp>
-      <p:sp>
-        <p:nvSpPr>
-          <p:cNvPr id="18" name="Rounded Rectangle 17"/>
-          <p:cNvSpPr/>
-          <p:nvPr/>
-        </p:nvSpPr>
-        <p:spPr>
-          <a:xfrm>
-            <a:off x="457200" y="3502152"/>
-            <a:ext cx="11277295" cy="566928"/>
-          </a:xfrm>
-          <a:prstGeom prst="roundRect">
-            <a:avLst>
-              <a:gd name="adj" fmla="val 12000"/>
-            </a:avLst>
-          </a:prstGeom>
-          <a:solidFill>
-            <a:srgbClr val="F2F2F2"/>
-          </a:solidFill>
-          <a:ln>
-            <a:noFill/>
-          </a:ln>
-        </p:spPr>
-        <p:style>
-          <a:lnRef idx="1">
-            <a:schemeClr val="accent1"/>
-          </a:lnRef>
-          <a:fillRef idx="3">
-            <a:schemeClr val="accent1"/>
-          </a:fillRef>
-          <a:effectRef idx="2">
-            <a:schemeClr val="accent1"/>
-          </a:effectRef>
-          <a:fontRef idx="minor">
-            <a:schemeClr val="lt1"/>
-          </a:fontRef>
-        </p:style>
-        <p:txBody>
-          <a:bodyPr rtlCol="0" anchor="ctr"/>
-          <a:lstStyle/>
-          <a:p>
-            <a:pPr algn="ctr"/>
-          </a:p>
-        </p:txBody>
-      </p:sp>
-      <p:sp>
-        <p:nvSpPr>
-          <p:cNvPr id="19" name="Rectangle 18"/>
-          <p:cNvSpPr/>
-          <p:nvPr/>
-        </p:nvSpPr>
-        <p:spPr>
-          <a:xfrm>
-            <a:off x="640080" y="3648456"/>
-            <a:ext cx="274320" cy="274320"/>
-          </a:xfrm>
-          <a:prstGeom prst="rect">
-            <a:avLst/>
-          </a:prstGeom>
-          <a:solidFill>
-            <a:srgbClr val="FFFFFF"/>
-          </a:solidFill>
-          <a:ln>
-            <a:solidFill>
-              <a:srgbClr val="333333"/>
-            </a:solidFill>
-          </a:ln>
-        </p:spPr>
-        <p:style>
-          <a:lnRef idx="1">
-            <a:schemeClr val="accent1"/>
-          </a:lnRef>
-          <a:fillRef idx="3">
-            <a:schemeClr val="accent1"/>
-          </a:fillRef>
-          <a:effectRef idx="2">
-            <a:schemeClr val="accent1"/>
-          </a:effectRef>
-          <a:fontRef idx="minor">
-            <a:schemeClr val="lt1"/>
-          </a:fontRef>
-        </p:style>
-        <p:txBody>
-          <a:bodyPr rtlCol="0" anchor="ctr"/>
-          <a:lstStyle/>
-          <a:p>
-            <a:pPr algn="ctr"/>
-          </a:p>
-        </p:txBody>
-      </p:sp>
-      <p:sp>
-        <p:nvSpPr>
-          <p:cNvPr id="20" name="Rectangle 19"/>
-          <p:cNvSpPr/>
-          <p:nvPr/>
-        </p:nvSpPr>
-        <p:spPr>
-          <a:xfrm>
-            <a:off x="640080" y="3648456"/>
-            <a:ext cx="73152" cy="274320"/>
-          </a:xfrm>
-          <a:prstGeom prst="rect">
-            <a:avLst/>
-          </a:prstGeom>
-          <a:solidFill>
-            <a:srgbClr val="269CCB"/>
-          </a:solidFill>
-          <a:ln>
-            <a:noFill/>
-          </a:ln>
-        </p:spPr>
-        <p:style>
-          <a:lnRef idx="1">
-            <a:schemeClr val="accent1"/>
-          </a:lnRef>
-          <a:fillRef idx="3">
-            <a:schemeClr val="accent1"/>
-          </a:fillRef>
-          <a:effectRef idx="2">
-            <a:schemeClr val="accent1"/>
-          </a:effectRef>
-          <a:fontRef idx="minor">
-            <a:schemeClr val="lt1"/>
-          </a:fontRef>
-        </p:style>
-        <p:txBody>
-          <a:bodyPr rtlCol="0" anchor="ctr"/>
-          <a:lstStyle/>
-          <a:p>
-            <a:pPr algn="ctr"/>
-          </a:p>
-        </p:txBody>
-      </p:sp>
-      <p:sp>
-        <p:nvSpPr>
-          <p:cNvPr id="21" name="TextBox 20"/>
-          <p:cNvSpPr txBox="1"/>
-          <p:nvPr/>
-        </p:nvSpPr>
-        <p:spPr>
-          <a:xfrm>
-            <a:off x="1097280" y="3593592"/>
-            <a:ext cx="10362895" cy="402336"/>
-          </a:xfrm>
-          <a:prstGeom prst="rect">
-            <a:avLst/>
-          </a:prstGeom>
-          <a:noFill/>
-        </p:spPr>
-        <p:txBody>
-          <a:bodyPr wrap="square" anchor="ctr"/>
-          <a:lstStyle/>
-          <a:p>
-            <a:r>
-              <a:rPr sz="1500" b="1" i="0">
-                <a:solidFill>
-                  <a:srgbClr val="333333"/>
-                </a:solidFill>
-                <a:latin typeface="Calibri"/>
-              </a:rPr>
-              <a:t>LA MATRIZ CALIFICADA</a:t>
-            </a:r>
-            <a:r>
-              <a:rPr sz="1500" b="0" i="0">
-                <a:solidFill>
-                  <a:srgbClr val="333333"/>
-                </a:solidFill>
-                <a:latin typeface="Calibri"/>
-              </a:rPr>
-              <a:t> — Cada impacto con su carácter, magnitud, extensión, duración y reversibilidad — y </a:t>
-            </a:r>
-            <a:r>
-              <a:rPr sz="1500" b="1" i="0">
-                <a:solidFill>
-                  <a:srgbClr val="333333"/>
-                </a:solidFill>
-                <a:latin typeface="Calibri"/>
-              </a:rPr>
-              <a:t>una línea de justificación</a:t>
-            </a:r>
-            <a:r>
-              <a:rPr sz="1500" b="0" i="0">
-                <a:solidFill>
-                  <a:srgbClr val="333333"/>
-                </a:solidFill>
-                <a:latin typeface="Calibri"/>
-              </a:rPr>
-              <a:t> por calificación.</a:t>
-            </a:r>
-          </a:p>
-        </p:txBody>
-      </p:sp>
-      <p:sp>
-        <p:nvSpPr>
-          <p:cNvPr id="22" name="Rounded Rectangle 21"/>
-          <p:cNvSpPr/>
-          <p:nvPr/>
-        </p:nvSpPr>
-        <p:spPr>
-          <a:xfrm>
-            <a:off x="457200" y="4178808"/>
-            <a:ext cx="11277295" cy="566928"/>
-          </a:xfrm>
-          <a:prstGeom prst="roundRect">
-            <a:avLst>
-              <a:gd name="adj" fmla="val 12000"/>
-            </a:avLst>
-          </a:prstGeom>
-          <a:solidFill>
-            <a:srgbClr val="F2F2F2"/>
-          </a:solidFill>
-          <a:ln>
-            <a:noFill/>
-          </a:ln>
-        </p:spPr>
-        <p:style>
-          <a:lnRef idx="1">
-            <a:schemeClr val="accent1"/>
-          </a:lnRef>
-          <a:fillRef idx="3">
-            <a:schemeClr val="accent1"/>
-          </a:fillRef>
-          <a:effectRef idx="2">
-            <a:schemeClr val="accent1"/>
-          </a:effectRef>
-          <a:fontRef idx="minor">
-            <a:schemeClr val="lt1"/>
-          </a:fontRef>
-        </p:style>
-        <p:txBody>
-          <a:bodyPr rtlCol="0" anchor="ctr"/>
-          <a:lstStyle/>
-          <a:p>
-            <a:pPr algn="ctr"/>
-          </a:p>
-        </p:txBody>
-      </p:sp>
-      <p:sp>
-        <p:nvSpPr>
-          <p:cNvPr id="23" name="Rectangle 22"/>
-          <p:cNvSpPr/>
-          <p:nvPr/>
-        </p:nvSpPr>
-        <p:spPr>
-          <a:xfrm>
-            <a:off x="640080" y="4325112"/>
-            <a:ext cx="274320" cy="274320"/>
-          </a:xfrm>
-          <a:prstGeom prst="rect">
-            <a:avLst/>
-          </a:prstGeom>
-          <a:solidFill>
-            <a:srgbClr val="FFFFFF"/>
-          </a:solidFill>
-          <a:ln>
-            <a:solidFill>
-              <a:srgbClr val="333333"/>
-            </a:solidFill>
-          </a:ln>
-        </p:spPr>
-        <p:style>
-          <a:lnRef idx="1">
-            <a:schemeClr val="accent1"/>
-          </a:lnRef>
-          <a:fillRef idx="3">
-            <a:schemeClr val="accent1"/>
-          </a:fillRef>
-          <a:effectRef idx="2">
-            <a:schemeClr val="accent1"/>
-          </a:effectRef>
-          <a:fontRef idx="minor">
-            <a:schemeClr val="lt1"/>
-          </a:fontRef>
-        </p:style>
-        <p:txBody>
-          <a:bodyPr rtlCol="0" anchor="ctr"/>
-          <a:lstStyle/>
-          <a:p>
-            <a:pPr algn="ctr"/>
-          </a:p>
-        </p:txBody>
-      </p:sp>
-      <p:sp>
-        <p:nvSpPr>
-          <p:cNvPr id="24" name="Rectangle 23"/>
-          <p:cNvSpPr/>
-          <p:nvPr/>
-        </p:nvSpPr>
-        <p:spPr>
-          <a:xfrm>
-            <a:off x="640080" y="4325112"/>
-            <a:ext cx="73152" cy="274320"/>
-          </a:xfrm>
-          <a:prstGeom prst="rect">
-            <a:avLst/>
-          </a:prstGeom>
-          <a:solidFill>
-            <a:srgbClr val="269CCB"/>
-          </a:solidFill>
-          <a:ln>
-            <a:noFill/>
-          </a:ln>
-        </p:spPr>
-        <p:style>
-          <a:lnRef idx="1">
-            <a:schemeClr val="accent1"/>
-          </a:lnRef>
-          <a:fillRef idx="3">
-            <a:schemeClr val="accent1"/>
-          </a:fillRef>
-          <a:effectRef idx="2">
-            <a:schemeClr val="accent1"/>
-          </a:effectRef>
-          <a:fontRef idx="minor">
-            <a:schemeClr val="lt1"/>
-          </a:fontRef>
-        </p:style>
-        <p:txBody>
-          <a:bodyPr rtlCol="0" anchor="ctr"/>
-          <a:lstStyle/>
-          <a:p>
-            <a:pPr algn="ctr"/>
-          </a:p>
-        </p:txBody>
-      </p:sp>
-      <p:sp>
-        <p:nvSpPr>
-          <p:cNvPr id="25" name="TextBox 24"/>
-          <p:cNvSpPr txBox="1"/>
-          <p:nvPr/>
-        </p:nvSpPr>
-        <p:spPr>
-          <a:xfrm>
-            <a:off x="1097280" y="4270248"/>
-            <a:ext cx="10362895" cy="402336"/>
-          </a:xfrm>
-          <a:prstGeom prst="rect">
-            <a:avLst/>
-          </a:prstGeom>
-          <a:noFill/>
-        </p:spPr>
-        <p:txBody>
-          <a:bodyPr wrap="square" anchor="ctr"/>
-          <a:lstStyle/>
-          <a:p>
-            <a:r>
-              <a:rPr sz="1500" b="1" i="0">
-                <a:solidFill>
-                  <a:srgbClr val="333333"/>
-                </a:solidFill>
-                <a:latin typeface="Calibri"/>
-              </a:rPr>
-              <a:t>LAS MEDIDAS DE MITIGACIÓN</a:t>
-            </a:r>
-            <a:r>
-              <a:rPr sz="1500" b="0" i="0">
-                <a:solidFill>
-                  <a:srgbClr val="333333"/>
-                </a:solidFill>
-                <a:latin typeface="Calibri"/>
-              </a:rPr>
-              <a:t> — Qué van a hacer para reducir cada impacto negativo. Puede ser </a:t>
-            </a:r>
-            <a:r>
-              <a:rPr sz="1500" b="1" i="0">
-                <a:solidFill>
-                  <a:srgbClr val="333333"/>
-                </a:solidFill>
-                <a:latin typeface="Calibri"/>
-              </a:rPr>
-              <a:t>una medida no digital</a:t>
-            </a:r>
-            <a:r>
-              <a:rPr sz="1500" b="0" i="0">
-                <a:solidFill>
-                  <a:srgbClr val="333333"/>
-                </a:solidFill>
-                <a:latin typeface="Calibri"/>
-              </a:rPr>
-              <a:t>, y muchas veces es la mejor.</a:t>
-            </a:r>
-          </a:p>
-        </p:txBody>
-      </p:sp>
-      <p:sp>
-        <p:nvSpPr>
-          <p:cNvPr id="26" name="TextBox 25"/>
           <p:cNvSpPr txBox="1"/>
           <p:nvPr/>
         </p:nvSpPr>
@@ -9680,7 +8991,7 @@
         <p:spPr>
           <a:xfrm>
             <a:off x="0" y="0"/>
-            <a:ext cx="12191695" cy="1170432"/>
+            <a:ext cx="12191695" cy="960120"/>
           </a:xfrm>
           <a:prstGeom prst="rect">
             <a:avLst/>
@@ -9722,7 +9033,7 @@
         </p:nvSpPr>
         <p:spPr>
           <a:xfrm>
-            <a:off x="0" y="1170432"/>
+            <a:off x="0" y="960120"/>
             <a:ext cx="12191695" cy="41148"/>
           </a:xfrm>
           <a:prstGeom prst="rect">
@@ -9766,7 +9077,7 @@
         <p:spPr>
           <a:xfrm>
             <a:off x="457200" y="164592"/>
-            <a:ext cx="11277295" cy="384048"/>
+            <a:ext cx="11277295" cy="502920"/>
           </a:xfrm>
           <a:prstGeom prst="rect">
             <a:avLst/>
@@ -9786,55 +9097,21 @@
                 </a:solidFill>
                 <a:latin typeface="Calibri"/>
               </a:rPr>
-              <a:t>Cómo se expone en 3 minutos</a:t>
-            </a:r>
-          </a:p>
-        </p:txBody>
-      </p:sp>
-      <p:sp>
-        <p:nvSpPr>
-          <p:cNvPr id="5" name="TextBox 4"/>
-          <p:cNvSpPr txBox="1"/>
-          <p:nvPr/>
-        </p:nvSpPr>
-        <p:spPr>
-          <a:xfrm>
-            <a:off x="457200" y="566928"/>
-            <a:ext cx="11277295" cy="411480"/>
-          </a:xfrm>
-          <a:prstGeom prst="rect">
-            <a:avLst/>
-          </a:prstGeom>
-          <a:noFill/>
-        </p:spPr>
-        <p:txBody>
-          <a:bodyPr wrap="square">
-            <a:spAutoFit/>
-          </a:bodyPr>
-          <a:lstStyle/>
-          <a:p>
-            <a:r>
-              <a:rPr sz="1400" b="0" i="0">
-                <a:solidFill>
-                  <a:srgbClr val="B8D8EE"/>
-                </a:solidFill>
-                <a:latin typeface="Calibri"/>
-              </a:rPr>
-              <a:t>Habla el vocero con la pantalla ya compartida · cronómetro en pantalla · se corta al llegar a cero</a:t>
-            </a:r>
-          </a:p>
-        </p:txBody>
-      </p:sp>
-      <p:sp>
-        <p:nvSpPr>
-          <p:cNvPr id="6" name="Rounded Rectangle 5"/>
+              <a:t>Guion de la exposicion, con tiempos</a:t>
+            </a:r>
+          </a:p>
+        </p:txBody>
+      </p:sp>
+      <p:sp>
+        <p:nvSpPr>
+          <p:cNvPr id="5" name="Rounded Rectangle 4"/>
           <p:cNvSpPr/>
           <p:nvPr/>
         </p:nvSpPr>
         <p:spPr>
           <a:xfrm>
-            <a:off x="457200" y="1444752"/>
-            <a:ext cx="11277295" cy="908913"/>
+            <a:off x="457200" y="1261872"/>
+            <a:ext cx="11277295" cy="5093208"/>
           </a:xfrm>
           <a:prstGeom prst="roundRect">
             <a:avLst>
@@ -9842,7 +9119,7 @@
             </a:avLst>
           </a:prstGeom>
           <a:solidFill>
-            <a:srgbClr val="F2F2F2"/>
+            <a:srgbClr val="1E2A38"/>
           </a:solidFill>
           <a:ln>
             <a:noFill/>
@@ -9872,19 +9149,17 @@
       </p:sp>
       <p:sp>
         <p:nvSpPr>
-          <p:cNvPr id="7" name="Rounded Rectangle 6"/>
+          <p:cNvPr id="6" name="Rectangle 5"/>
           <p:cNvSpPr/>
           <p:nvPr/>
         </p:nvSpPr>
         <p:spPr>
           <a:xfrm>
-            <a:off x="594360" y="1679752"/>
-            <a:ext cx="438912" cy="438912"/>
-          </a:xfrm>
-          <a:prstGeom prst="roundRect">
-            <a:avLst>
-              <a:gd name="adj" fmla="val 12000"/>
-            </a:avLst>
+            <a:off x="457200" y="1261872"/>
+            <a:ext cx="11277295" cy="320040"/>
+          </a:xfrm>
+          <a:prstGeom prst="rect">
+            <a:avLst/>
           </a:prstGeom>
           <a:solidFill>
             <a:srgbClr val="095292"/>
@@ -9917,14 +9192,46 @@
       </p:sp>
       <p:sp>
         <p:nvSpPr>
+          <p:cNvPr id="7" name="TextBox 6"/>
+          <p:cNvSpPr txBox="1"/>
+          <p:nvPr/>
+        </p:nvSpPr>
+        <p:spPr>
+          <a:xfrm>
+            <a:off x="685800" y="1307592"/>
+            <a:ext cx="10820095" cy="256032"/>
+          </a:xfrm>
+          <a:prstGeom prst="rect">
+            <a:avLst/>
+          </a:prstGeom>
+          <a:noFill/>
+        </p:spPr>
+        <p:txBody>
+          <a:bodyPr wrap="square" anchor="ctr"/>
+          <a:lstStyle/>
+          <a:p>
+            <a:r>
+              <a:rPr sz="1000" b="1" i="0">
+                <a:solidFill>
+                  <a:srgbClr val="269CCB"/>
+                </a:solidFill>
+                <a:latin typeface="Calibri"/>
+              </a:rPr>
+              <a:t>● ● ●</a:t>
+            </a:r>
+          </a:p>
+        </p:txBody>
+      </p:sp>
+      <p:sp>
+        <p:nvSpPr>
           <p:cNvPr id="8" name="TextBox 7"/>
           <p:cNvSpPr txBox="1"/>
           <p:nvPr/>
         </p:nvSpPr>
         <p:spPr>
           <a:xfrm>
-            <a:off x="594360" y="1679752"/>
-            <a:ext cx="438912" cy="438912"/>
+            <a:off x="777240" y="1719072"/>
+            <a:ext cx="10637215" cy="4453128"/>
           </a:xfrm>
           <a:prstGeom prst="rect">
             <a:avLst/>
@@ -9932,18 +9239,168 @@
           <a:noFill/>
         </p:spPr>
         <p:txBody>
-          <a:bodyPr wrap="square" anchor="ctr"/>
-          <a:lstStyle/>
-          <a:p>
-            <a:pPr algn="ctr"/>
-            <a:r>
-              <a:rPr sz="1600" b="1" i="0">
+          <a:bodyPr wrap="square">
+            <a:spAutoFit/>
+          </a:bodyPr>
+          <a:lstStyle/>
+          <a:p>
+            <a:pPr>
+              <a:spcAft>
+                <a:spcPts val="400"/>
+              </a:spcAft>
+            </a:pPr>
+            <a:r>
+              <a:rPr sz="1400" b="0" i="0">
                 <a:solidFill>
                   <a:srgbClr val="FFFFFF"/>
                 </a:solidFill>
                 <a:latin typeface="Calibri"/>
               </a:rPr>
-              <a:t>1</a:t>
+              <a:t># Exposicion de hoy · lo que se califica es el reparto, no el total</a:t>
+            </a:r>
+          </a:p>
+          <a:p>
+            <a:pPr>
+              <a:spcAft>
+                <a:spcPts val="400"/>
+              </a:spcAft>
+            </a:pPr>
+            <a:r>
+              <a:rPr sz="1400" b="0" i="0">
+                <a:solidFill>
+                  <a:srgbClr val="FFFFFF"/>
+                </a:solidFill>
+                <a:latin typeface="Calibri"/>
+              </a:rPr>
+              <a:t/>
+            </a:r>
+          </a:p>
+          <a:p>
+            <a:pPr>
+              <a:spcAft>
+                <a:spcPts val="400"/>
+              </a:spcAft>
+            </a:pPr>
+            <a:r>
+              <a:rPr sz="1400" b="0" i="0">
+                <a:solidFill>
+                  <a:srgbClr val="FFFFFF"/>
+                </a:solidFill>
+                <a:latin typeface="Calibri"/>
+              </a:rPr>
+              <a:t>30 s · Los afectados que no son us Nómbrelos. Sin «la comunidad».</a:t>
+            </a:r>
+          </a:p>
+          <a:p>
+            <a:pPr>
+              <a:spcAft>
+                <a:spcPts val="400"/>
+              </a:spcAft>
+            </a:pPr>
+            <a:r>
+              <a:rPr sz="1400" b="0" i="0">
+                <a:solidFill>
+                  <a:srgbClr val="FFFFFF"/>
+                </a:solidFill>
+                <a:latin typeface="Calibri"/>
+              </a:rPr>
+              <a:t>40 s · Un impacto positivo con su  El más fuerte, con indicador.</a:t>
+            </a:r>
+          </a:p>
+          <a:p>
+            <a:pPr>
+              <a:spcAft>
+                <a:spcPts val="400"/>
+              </a:spcAft>
+            </a:pPr>
+            <a:r>
+              <a:rPr sz="1400" b="0" i="0">
+                <a:solidFill>
+                  <a:srgbClr val="FFFFFF"/>
+                </a:solidFill>
+                <a:latin typeface="Calibri"/>
+              </a:rPr>
+              <a:t>70 s · El impacto negativo y su mi **El minuto obligatorio.** El más incómodo q</a:t>
+            </a:r>
+          </a:p>
+          <a:p>
+            <a:pPr>
+              <a:spcAft>
+                <a:spcPts val="400"/>
+              </a:spcAft>
+            </a:pPr>
+            <a:r>
+              <a:rPr sz="1400" b="0" i="0">
+                <a:solidFill>
+                  <a:srgbClr val="FFFFFF"/>
+                </a:solidFill>
+                <a:latin typeface="Calibri"/>
+              </a:rPr>
+              <a:t>30 s · La calificación             Cuál es el impacto más grave y por qué lo ca</a:t>
+            </a:r>
+          </a:p>
+          <a:p>
+            <a:pPr>
+              <a:spcAft>
+                <a:spcPts val="400"/>
+              </a:spcAft>
+            </a:pPr>
+            <a:r>
+              <a:rPr sz="1400" b="0" i="0">
+                <a:solidFill>
+                  <a:srgbClr val="FFFFFF"/>
+                </a:solidFill>
+                <a:latin typeface="Calibri"/>
+              </a:rPr>
+              <a:t>10 s · Cierre                      Qué dimensión no aplica en su proyecto, y po</a:t>
+            </a:r>
+          </a:p>
+          <a:p>
+            <a:pPr>
+              <a:spcAft>
+                <a:spcPts val="400"/>
+              </a:spcAft>
+            </a:pPr>
+            <a:r>
+              <a:rPr sz="1400" b="0" i="0">
+                <a:solidFill>
+                  <a:srgbClr val="FFFFFF"/>
+                </a:solidFill>
+                <a:latin typeface="Calibri"/>
+              </a:rPr>
+              <a:t/>
+            </a:r>
+          </a:p>
+          <a:p>
+            <a:pPr>
+              <a:spcAft>
+                <a:spcPts val="400"/>
+              </a:spcAft>
+            </a:pPr>
+            <a:r>
+              <a:rPr sz="1400" b="0" i="0">
+                <a:solidFill>
+                  <a:srgbClr val="FFFFFF"/>
+                </a:solidFill>
+                <a:latin typeface="Calibri"/>
+              </a:rPr>
+              <a:t># El tramo marcado como obligatorio es el que el jurado califica:</a:t>
+            </a:r>
+          </a:p>
+          <a:p>
+            <a:pPr>
+              <a:spcAft>
+                <a:spcPts val="400"/>
+              </a:spcAft>
+            </a:pPr>
+            <a:r>
+              <a:rPr sz="1400" b="0" i="0">
+                <a:solidFill>
+                  <a:srgbClr val="FFFFFF"/>
+                </a:solidFill>
+                <a:latin typeface="Calibri"/>
+              </a:rPr>
+              <a:t># si el guion no esta cronometrado, es el que se queda sin tiempo.</a:t>
             </a:r>
           </a:p>
         </p:txBody>
@@ -9951,747 +9408,6 @@
       <p:sp>
         <p:nvSpPr>
           <p:cNvPr id="9" name="TextBox 8"/>
-          <p:cNvSpPr txBox="1"/>
-          <p:nvPr/>
-        </p:nvSpPr>
-        <p:spPr>
-          <a:xfrm>
-            <a:off x="1188720" y="1536192"/>
-            <a:ext cx="10271455" cy="744321"/>
-          </a:xfrm>
-          <a:prstGeom prst="rect">
-            <a:avLst/>
-          </a:prstGeom>
-          <a:noFill/>
-        </p:spPr>
-        <p:txBody>
-          <a:bodyPr wrap="square" anchor="ctr"/>
-          <a:lstStyle/>
-          <a:p>
-            <a:r>
-              <a:rPr sz="1500" b="1" i="0">
-                <a:solidFill>
-                  <a:srgbClr val="095292"/>
-                </a:solidFill>
-                <a:latin typeface="Calibri"/>
-              </a:rPr>
-              <a:t>30 s · Los afectados que no son usuarios</a:t>
-            </a:r>
-          </a:p>
-          <a:p>
-            <a:pPr>
-              <a:spcBef>
-                <a:spcPts val="200"/>
-              </a:spcBef>
-            </a:pPr>
-            <a:r>
-              <a:rPr sz="1300" b="0" i="0">
-                <a:solidFill>
-                  <a:srgbClr val="333333"/>
-                </a:solidFill>
-                <a:latin typeface="Calibri"/>
-              </a:rPr>
-              <a:t>Nómbrelos. Sin «la comunidad».</a:t>
-            </a:r>
-          </a:p>
-        </p:txBody>
-      </p:sp>
-      <p:sp>
-        <p:nvSpPr>
-          <p:cNvPr id="10" name="Rounded Rectangle 9"/>
-          <p:cNvSpPr/>
-          <p:nvPr/>
-        </p:nvSpPr>
-        <p:spPr>
-          <a:xfrm>
-            <a:off x="457200" y="2445105"/>
-            <a:ext cx="11277295" cy="908913"/>
-          </a:xfrm>
-          <a:prstGeom prst="roundRect">
-            <a:avLst>
-              <a:gd name="adj" fmla="val 12000"/>
-            </a:avLst>
-          </a:prstGeom>
-          <a:solidFill>
-            <a:srgbClr val="E8F4FA"/>
-          </a:solidFill>
-          <a:ln>
-            <a:noFill/>
-          </a:ln>
-        </p:spPr>
-        <p:style>
-          <a:lnRef idx="1">
-            <a:schemeClr val="accent1"/>
-          </a:lnRef>
-          <a:fillRef idx="3">
-            <a:schemeClr val="accent1"/>
-          </a:fillRef>
-          <a:effectRef idx="2">
-            <a:schemeClr val="accent1"/>
-          </a:effectRef>
-          <a:fontRef idx="minor">
-            <a:schemeClr val="lt1"/>
-          </a:fontRef>
-        </p:style>
-        <p:txBody>
-          <a:bodyPr rtlCol="0" anchor="ctr"/>
-          <a:lstStyle/>
-          <a:p>
-            <a:pPr algn="ctr"/>
-          </a:p>
-        </p:txBody>
-      </p:sp>
-      <p:sp>
-        <p:nvSpPr>
-          <p:cNvPr id="11" name="Rounded Rectangle 10"/>
-          <p:cNvSpPr/>
-          <p:nvPr/>
-        </p:nvSpPr>
-        <p:spPr>
-          <a:xfrm>
-            <a:off x="594360" y="2680106"/>
-            <a:ext cx="438912" cy="438912"/>
-          </a:xfrm>
-          <a:prstGeom prst="roundRect">
-            <a:avLst>
-              <a:gd name="adj" fmla="val 12000"/>
-            </a:avLst>
-          </a:prstGeom>
-          <a:solidFill>
-            <a:srgbClr val="095292"/>
-          </a:solidFill>
-          <a:ln>
-            <a:noFill/>
-          </a:ln>
-        </p:spPr>
-        <p:style>
-          <a:lnRef idx="1">
-            <a:schemeClr val="accent1"/>
-          </a:lnRef>
-          <a:fillRef idx="3">
-            <a:schemeClr val="accent1"/>
-          </a:fillRef>
-          <a:effectRef idx="2">
-            <a:schemeClr val="accent1"/>
-          </a:effectRef>
-          <a:fontRef idx="minor">
-            <a:schemeClr val="lt1"/>
-          </a:fontRef>
-        </p:style>
-        <p:txBody>
-          <a:bodyPr rtlCol="0" anchor="ctr"/>
-          <a:lstStyle/>
-          <a:p>
-            <a:pPr algn="ctr"/>
-          </a:p>
-        </p:txBody>
-      </p:sp>
-      <p:sp>
-        <p:nvSpPr>
-          <p:cNvPr id="12" name="TextBox 11"/>
-          <p:cNvSpPr txBox="1"/>
-          <p:nvPr/>
-        </p:nvSpPr>
-        <p:spPr>
-          <a:xfrm>
-            <a:off x="594360" y="2680106"/>
-            <a:ext cx="438912" cy="438912"/>
-          </a:xfrm>
-          <a:prstGeom prst="rect">
-            <a:avLst/>
-          </a:prstGeom>
-          <a:noFill/>
-        </p:spPr>
-        <p:txBody>
-          <a:bodyPr wrap="square" anchor="ctr"/>
-          <a:lstStyle/>
-          <a:p>
-            <a:pPr algn="ctr"/>
-            <a:r>
-              <a:rPr sz="1600" b="1" i="0">
-                <a:solidFill>
-                  <a:srgbClr val="FFFFFF"/>
-                </a:solidFill>
-                <a:latin typeface="Calibri"/>
-              </a:rPr>
-              <a:t>2</a:t>
-            </a:r>
-          </a:p>
-        </p:txBody>
-      </p:sp>
-      <p:sp>
-        <p:nvSpPr>
-          <p:cNvPr id="13" name="TextBox 12"/>
-          <p:cNvSpPr txBox="1"/>
-          <p:nvPr/>
-        </p:nvSpPr>
-        <p:spPr>
-          <a:xfrm>
-            <a:off x="1188720" y="2536545"/>
-            <a:ext cx="10271455" cy="744321"/>
-          </a:xfrm>
-          <a:prstGeom prst="rect">
-            <a:avLst/>
-          </a:prstGeom>
-          <a:noFill/>
-        </p:spPr>
-        <p:txBody>
-          <a:bodyPr wrap="square" anchor="ctr"/>
-          <a:lstStyle/>
-          <a:p>
-            <a:r>
-              <a:rPr sz="1500" b="1" i="0">
-                <a:solidFill>
-                  <a:srgbClr val="095292"/>
-                </a:solidFill>
-                <a:latin typeface="Calibri"/>
-              </a:rPr>
-              <a:t>40 s · Un impacto positivo con su número</a:t>
-            </a:r>
-          </a:p>
-          <a:p>
-            <a:pPr>
-              <a:spcBef>
-                <a:spcPts val="200"/>
-              </a:spcBef>
-            </a:pPr>
-            <a:r>
-              <a:rPr sz="1300" b="0" i="0">
-                <a:solidFill>
-                  <a:srgbClr val="333333"/>
-                </a:solidFill>
-                <a:latin typeface="Calibri"/>
-              </a:rPr>
-              <a:t>El más fuerte, con indicador.</a:t>
-            </a:r>
-          </a:p>
-        </p:txBody>
-      </p:sp>
-      <p:sp>
-        <p:nvSpPr>
-          <p:cNvPr id="14" name="Rounded Rectangle 13"/>
-          <p:cNvSpPr/>
-          <p:nvPr/>
-        </p:nvSpPr>
-        <p:spPr>
-          <a:xfrm>
-            <a:off x="457200" y="3445459"/>
-            <a:ext cx="11277295" cy="908913"/>
-          </a:xfrm>
-          <a:prstGeom prst="roundRect">
-            <a:avLst>
-              <a:gd name="adj" fmla="val 12000"/>
-            </a:avLst>
-          </a:prstGeom>
-          <a:solidFill>
-            <a:srgbClr val="F2F2F2"/>
-          </a:solidFill>
-          <a:ln>
-            <a:noFill/>
-          </a:ln>
-        </p:spPr>
-        <p:style>
-          <a:lnRef idx="1">
-            <a:schemeClr val="accent1"/>
-          </a:lnRef>
-          <a:fillRef idx="3">
-            <a:schemeClr val="accent1"/>
-          </a:fillRef>
-          <a:effectRef idx="2">
-            <a:schemeClr val="accent1"/>
-          </a:effectRef>
-          <a:fontRef idx="minor">
-            <a:schemeClr val="lt1"/>
-          </a:fontRef>
-        </p:style>
-        <p:txBody>
-          <a:bodyPr rtlCol="0" anchor="ctr"/>
-          <a:lstStyle/>
-          <a:p>
-            <a:pPr algn="ctr"/>
-          </a:p>
-        </p:txBody>
-      </p:sp>
-      <p:sp>
-        <p:nvSpPr>
-          <p:cNvPr id="15" name="Rounded Rectangle 14"/>
-          <p:cNvSpPr/>
-          <p:nvPr/>
-        </p:nvSpPr>
-        <p:spPr>
-          <a:xfrm>
-            <a:off x="594360" y="3680460"/>
-            <a:ext cx="438912" cy="438912"/>
-          </a:xfrm>
-          <a:prstGeom prst="roundRect">
-            <a:avLst>
-              <a:gd name="adj" fmla="val 12000"/>
-            </a:avLst>
-          </a:prstGeom>
-          <a:solidFill>
-            <a:srgbClr val="095292"/>
-          </a:solidFill>
-          <a:ln>
-            <a:noFill/>
-          </a:ln>
-        </p:spPr>
-        <p:style>
-          <a:lnRef idx="1">
-            <a:schemeClr val="accent1"/>
-          </a:lnRef>
-          <a:fillRef idx="3">
-            <a:schemeClr val="accent1"/>
-          </a:fillRef>
-          <a:effectRef idx="2">
-            <a:schemeClr val="accent1"/>
-          </a:effectRef>
-          <a:fontRef idx="minor">
-            <a:schemeClr val="lt1"/>
-          </a:fontRef>
-        </p:style>
-        <p:txBody>
-          <a:bodyPr rtlCol="0" anchor="ctr"/>
-          <a:lstStyle/>
-          <a:p>
-            <a:pPr algn="ctr"/>
-          </a:p>
-        </p:txBody>
-      </p:sp>
-      <p:sp>
-        <p:nvSpPr>
-          <p:cNvPr id="16" name="TextBox 15"/>
-          <p:cNvSpPr txBox="1"/>
-          <p:nvPr/>
-        </p:nvSpPr>
-        <p:spPr>
-          <a:xfrm>
-            <a:off x="594360" y="3680460"/>
-            <a:ext cx="438912" cy="438912"/>
-          </a:xfrm>
-          <a:prstGeom prst="rect">
-            <a:avLst/>
-          </a:prstGeom>
-          <a:noFill/>
-        </p:spPr>
-        <p:txBody>
-          <a:bodyPr wrap="square" anchor="ctr"/>
-          <a:lstStyle/>
-          <a:p>
-            <a:pPr algn="ctr"/>
-            <a:r>
-              <a:rPr sz="1600" b="1" i="0">
-                <a:solidFill>
-                  <a:srgbClr val="FFFFFF"/>
-                </a:solidFill>
-                <a:latin typeface="Calibri"/>
-              </a:rPr>
-              <a:t>3</a:t>
-            </a:r>
-          </a:p>
-        </p:txBody>
-      </p:sp>
-      <p:sp>
-        <p:nvSpPr>
-          <p:cNvPr id="17" name="TextBox 16"/>
-          <p:cNvSpPr txBox="1"/>
-          <p:nvPr/>
-        </p:nvSpPr>
-        <p:spPr>
-          <a:xfrm>
-            <a:off x="1188720" y="3536899"/>
-            <a:ext cx="10271455" cy="744321"/>
-          </a:xfrm>
-          <a:prstGeom prst="rect">
-            <a:avLst/>
-          </a:prstGeom>
-          <a:noFill/>
-        </p:spPr>
-        <p:txBody>
-          <a:bodyPr wrap="square" anchor="ctr"/>
-          <a:lstStyle/>
-          <a:p>
-            <a:r>
-              <a:rPr sz="1500" b="1" i="0">
-                <a:solidFill>
-                  <a:srgbClr val="095292"/>
-                </a:solidFill>
-                <a:latin typeface="Calibri"/>
-              </a:rPr>
-              <a:t>70 s · El impacto negativo y su mitigación</a:t>
-            </a:r>
-          </a:p>
-          <a:p>
-            <a:pPr>
-              <a:spcBef>
-                <a:spcPts val="200"/>
-              </a:spcBef>
-            </a:pPr>
-            <a:r>
-              <a:rPr sz="1300" b="1" i="0">
-                <a:solidFill>
-                  <a:srgbClr val="333333"/>
-                </a:solidFill>
-                <a:latin typeface="Calibri"/>
-              </a:rPr>
-              <a:t>El minuto obligatorio.</a:t>
-            </a:r>
-            <a:r>
-              <a:rPr sz="1300" b="0" i="0">
-                <a:solidFill>
-                  <a:srgbClr val="333333"/>
-                </a:solidFill>
-                <a:latin typeface="Calibri"/>
-              </a:rPr>
-              <a:t> El más incómodo que hayan encontrado.</a:t>
-            </a:r>
-          </a:p>
-        </p:txBody>
-      </p:sp>
-      <p:sp>
-        <p:nvSpPr>
-          <p:cNvPr id="18" name="Rounded Rectangle 17"/>
-          <p:cNvSpPr/>
-          <p:nvPr/>
-        </p:nvSpPr>
-        <p:spPr>
-          <a:xfrm>
-            <a:off x="457200" y="4445812"/>
-            <a:ext cx="11277295" cy="908913"/>
-          </a:xfrm>
-          <a:prstGeom prst="roundRect">
-            <a:avLst>
-              <a:gd name="adj" fmla="val 12000"/>
-            </a:avLst>
-          </a:prstGeom>
-          <a:solidFill>
-            <a:srgbClr val="E8F4FA"/>
-          </a:solidFill>
-          <a:ln>
-            <a:noFill/>
-          </a:ln>
-        </p:spPr>
-        <p:style>
-          <a:lnRef idx="1">
-            <a:schemeClr val="accent1"/>
-          </a:lnRef>
-          <a:fillRef idx="3">
-            <a:schemeClr val="accent1"/>
-          </a:fillRef>
-          <a:effectRef idx="2">
-            <a:schemeClr val="accent1"/>
-          </a:effectRef>
-          <a:fontRef idx="minor">
-            <a:schemeClr val="lt1"/>
-          </a:fontRef>
-        </p:style>
-        <p:txBody>
-          <a:bodyPr rtlCol="0" anchor="ctr"/>
-          <a:lstStyle/>
-          <a:p>
-            <a:pPr algn="ctr"/>
-          </a:p>
-        </p:txBody>
-      </p:sp>
-      <p:sp>
-        <p:nvSpPr>
-          <p:cNvPr id="19" name="Rounded Rectangle 18"/>
-          <p:cNvSpPr/>
-          <p:nvPr/>
-        </p:nvSpPr>
-        <p:spPr>
-          <a:xfrm>
-            <a:off x="594360" y="4680813"/>
-            <a:ext cx="438912" cy="438912"/>
-          </a:xfrm>
-          <a:prstGeom prst="roundRect">
-            <a:avLst>
-              <a:gd name="adj" fmla="val 12000"/>
-            </a:avLst>
-          </a:prstGeom>
-          <a:solidFill>
-            <a:srgbClr val="095292"/>
-          </a:solidFill>
-          <a:ln>
-            <a:noFill/>
-          </a:ln>
-        </p:spPr>
-        <p:style>
-          <a:lnRef idx="1">
-            <a:schemeClr val="accent1"/>
-          </a:lnRef>
-          <a:fillRef idx="3">
-            <a:schemeClr val="accent1"/>
-          </a:fillRef>
-          <a:effectRef idx="2">
-            <a:schemeClr val="accent1"/>
-          </a:effectRef>
-          <a:fontRef idx="minor">
-            <a:schemeClr val="lt1"/>
-          </a:fontRef>
-        </p:style>
-        <p:txBody>
-          <a:bodyPr rtlCol="0" anchor="ctr"/>
-          <a:lstStyle/>
-          <a:p>
-            <a:pPr algn="ctr"/>
-          </a:p>
-        </p:txBody>
-      </p:sp>
-      <p:sp>
-        <p:nvSpPr>
-          <p:cNvPr id="20" name="TextBox 19"/>
-          <p:cNvSpPr txBox="1"/>
-          <p:nvPr/>
-        </p:nvSpPr>
-        <p:spPr>
-          <a:xfrm>
-            <a:off x="594360" y="4680813"/>
-            <a:ext cx="438912" cy="438912"/>
-          </a:xfrm>
-          <a:prstGeom prst="rect">
-            <a:avLst/>
-          </a:prstGeom>
-          <a:noFill/>
-        </p:spPr>
-        <p:txBody>
-          <a:bodyPr wrap="square" anchor="ctr"/>
-          <a:lstStyle/>
-          <a:p>
-            <a:pPr algn="ctr"/>
-            <a:r>
-              <a:rPr sz="1600" b="1" i="0">
-                <a:solidFill>
-                  <a:srgbClr val="FFFFFF"/>
-                </a:solidFill>
-                <a:latin typeface="Calibri"/>
-              </a:rPr>
-              <a:t>4</a:t>
-            </a:r>
-          </a:p>
-        </p:txBody>
-      </p:sp>
-      <p:sp>
-        <p:nvSpPr>
-          <p:cNvPr id="21" name="TextBox 20"/>
-          <p:cNvSpPr txBox="1"/>
-          <p:nvPr/>
-        </p:nvSpPr>
-        <p:spPr>
-          <a:xfrm>
-            <a:off x="1188720" y="4537252"/>
-            <a:ext cx="10271455" cy="744321"/>
-          </a:xfrm>
-          <a:prstGeom prst="rect">
-            <a:avLst/>
-          </a:prstGeom>
-          <a:noFill/>
-        </p:spPr>
-        <p:txBody>
-          <a:bodyPr wrap="square" anchor="ctr"/>
-          <a:lstStyle/>
-          <a:p>
-            <a:r>
-              <a:rPr sz="1500" b="1" i="0">
-                <a:solidFill>
-                  <a:srgbClr val="095292"/>
-                </a:solidFill>
-                <a:latin typeface="Calibri"/>
-              </a:rPr>
-              <a:t>30 s · La calificación</a:t>
-            </a:r>
-          </a:p>
-          <a:p>
-            <a:pPr>
-              <a:spcBef>
-                <a:spcPts val="200"/>
-              </a:spcBef>
-            </a:pPr>
-            <a:r>
-              <a:rPr sz="1300" b="0" i="0">
-                <a:solidFill>
-                  <a:srgbClr val="333333"/>
-                </a:solidFill>
-                <a:latin typeface="Calibri"/>
-              </a:rPr>
-              <a:t>Cuál es el impacto más grave y por qué lo calificaron así.</a:t>
-            </a:r>
-          </a:p>
-        </p:txBody>
-      </p:sp>
-      <p:sp>
-        <p:nvSpPr>
-          <p:cNvPr id="22" name="Rounded Rectangle 21"/>
-          <p:cNvSpPr/>
-          <p:nvPr/>
-        </p:nvSpPr>
-        <p:spPr>
-          <a:xfrm>
-            <a:off x="457200" y="5446166"/>
-            <a:ext cx="11277295" cy="908913"/>
-          </a:xfrm>
-          <a:prstGeom prst="roundRect">
-            <a:avLst>
-              <a:gd name="adj" fmla="val 12000"/>
-            </a:avLst>
-          </a:prstGeom>
-          <a:solidFill>
-            <a:srgbClr val="F2F2F2"/>
-          </a:solidFill>
-          <a:ln>
-            <a:noFill/>
-          </a:ln>
-        </p:spPr>
-        <p:style>
-          <a:lnRef idx="1">
-            <a:schemeClr val="accent1"/>
-          </a:lnRef>
-          <a:fillRef idx="3">
-            <a:schemeClr val="accent1"/>
-          </a:fillRef>
-          <a:effectRef idx="2">
-            <a:schemeClr val="accent1"/>
-          </a:effectRef>
-          <a:fontRef idx="minor">
-            <a:schemeClr val="lt1"/>
-          </a:fontRef>
-        </p:style>
-        <p:txBody>
-          <a:bodyPr rtlCol="0" anchor="ctr"/>
-          <a:lstStyle/>
-          <a:p>
-            <a:pPr algn="ctr"/>
-          </a:p>
-        </p:txBody>
-      </p:sp>
-      <p:sp>
-        <p:nvSpPr>
-          <p:cNvPr id="23" name="Rounded Rectangle 22"/>
-          <p:cNvSpPr/>
-          <p:nvPr/>
-        </p:nvSpPr>
-        <p:spPr>
-          <a:xfrm>
-            <a:off x="594360" y="5681167"/>
-            <a:ext cx="438912" cy="438912"/>
-          </a:xfrm>
-          <a:prstGeom prst="roundRect">
-            <a:avLst>
-              <a:gd name="adj" fmla="val 12000"/>
-            </a:avLst>
-          </a:prstGeom>
-          <a:solidFill>
-            <a:srgbClr val="095292"/>
-          </a:solidFill>
-          <a:ln>
-            <a:noFill/>
-          </a:ln>
-        </p:spPr>
-        <p:style>
-          <a:lnRef idx="1">
-            <a:schemeClr val="accent1"/>
-          </a:lnRef>
-          <a:fillRef idx="3">
-            <a:schemeClr val="accent1"/>
-          </a:fillRef>
-          <a:effectRef idx="2">
-            <a:schemeClr val="accent1"/>
-          </a:effectRef>
-          <a:fontRef idx="minor">
-            <a:schemeClr val="lt1"/>
-          </a:fontRef>
-        </p:style>
-        <p:txBody>
-          <a:bodyPr rtlCol="0" anchor="ctr"/>
-          <a:lstStyle/>
-          <a:p>
-            <a:pPr algn="ctr"/>
-          </a:p>
-        </p:txBody>
-      </p:sp>
-      <p:sp>
-        <p:nvSpPr>
-          <p:cNvPr id="24" name="TextBox 23"/>
-          <p:cNvSpPr txBox="1"/>
-          <p:nvPr/>
-        </p:nvSpPr>
-        <p:spPr>
-          <a:xfrm>
-            <a:off x="594360" y="5681167"/>
-            <a:ext cx="438912" cy="438912"/>
-          </a:xfrm>
-          <a:prstGeom prst="rect">
-            <a:avLst/>
-          </a:prstGeom>
-          <a:noFill/>
-        </p:spPr>
-        <p:txBody>
-          <a:bodyPr wrap="square" anchor="ctr"/>
-          <a:lstStyle/>
-          <a:p>
-            <a:pPr algn="ctr"/>
-            <a:r>
-              <a:rPr sz="1600" b="1" i="0">
-                <a:solidFill>
-                  <a:srgbClr val="FFFFFF"/>
-                </a:solidFill>
-                <a:latin typeface="Calibri"/>
-              </a:rPr>
-              <a:t>5</a:t>
-            </a:r>
-          </a:p>
-        </p:txBody>
-      </p:sp>
-      <p:sp>
-        <p:nvSpPr>
-          <p:cNvPr id="25" name="TextBox 24"/>
-          <p:cNvSpPr txBox="1"/>
-          <p:nvPr/>
-        </p:nvSpPr>
-        <p:spPr>
-          <a:xfrm>
-            <a:off x="1188720" y="5537606"/>
-            <a:ext cx="10271455" cy="744321"/>
-          </a:xfrm>
-          <a:prstGeom prst="rect">
-            <a:avLst/>
-          </a:prstGeom>
-          <a:noFill/>
-        </p:spPr>
-        <p:txBody>
-          <a:bodyPr wrap="square" anchor="ctr"/>
-          <a:lstStyle/>
-          <a:p>
-            <a:r>
-              <a:rPr sz="1500" b="1" i="0">
-                <a:solidFill>
-                  <a:srgbClr val="095292"/>
-                </a:solidFill>
-                <a:latin typeface="Calibri"/>
-              </a:rPr>
-              <a:t>10 s · Cierre</a:t>
-            </a:r>
-          </a:p>
-          <a:p>
-            <a:pPr>
-              <a:spcBef>
-                <a:spcPts val="200"/>
-              </a:spcBef>
-            </a:pPr>
-            <a:r>
-              <a:rPr sz="1300" b="0" i="0">
-                <a:solidFill>
-                  <a:srgbClr val="333333"/>
-                </a:solidFill>
-                <a:latin typeface="Calibri"/>
-              </a:rPr>
-              <a:t>Qué dimensión no aplica en su proyecto, y por qué.</a:t>
-            </a:r>
-          </a:p>
-        </p:txBody>
-      </p:sp>
-      <p:sp>
-        <p:nvSpPr>
-          <p:cNvPr id="26" name="TextBox 25"/>
           <p:cNvSpPr txBox="1"/>
           <p:nvPr/>
         </p:nvSpPr>
@@ -10759,7 +9475,7 @@
         <p:spPr>
           <a:xfrm>
             <a:off x="0" y="0"/>
-            <a:ext cx="12191695" cy="960120"/>
+            <a:ext cx="12191695" cy="1170432"/>
           </a:xfrm>
           <a:prstGeom prst="rect">
             <a:avLst/>
@@ -10801,7 +9517,7 @@
         </p:nvSpPr>
         <p:spPr>
           <a:xfrm>
-            <a:off x="0" y="960120"/>
+            <a:off x="0" y="1170432"/>
             <a:ext cx="12191695" cy="41148"/>
           </a:xfrm>
           <a:prstGeom prst="rect">
@@ -10845,7 +9561,7 @@
         <p:spPr>
           <a:xfrm>
             <a:off x="457200" y="164592"/>
-            <a:ext cx="11277295" cy="502920"/>
+            <a:ext cx="11277295" cy="384048"/>
           </a:xfrm>
           <a:prstGeom prst="rect">
             <a:avLst/>
@@ -10865,7 +9581,7 @@
                 </a:solidFill>
                 <a:latin typeface="Calibri"/>
               </a:rPr>
-              <a:t>Para la Clase 14</a:t>
+              <a:t>Taller de hoy: Matriz de impacto social y ambiental</a:t>
             </a:r>
           </a:p>
         </p:txBody>
@@ -10878,8 +9594,8 @@
         </p:nvSpPr>
         <p:spPr>
           <a:xfrm>
-            <a:off x="457200" y="1170432"/>
-            <a:ext cx="11277295" cy="5230368"/>
+            <a:off x="457200" y="566928"/>
+            <a:ext cx="11277295" cy="411480"/>
           </a:xfrm>
           <a:prstGeom prst="rect">
             <a:avLst/>
@@ -10892,270 +9608,981 @@
           </a:bodyPr>
           <a:lstStyle/>
           <a:p>
-            <a:pPr>
-              <a:spcAft>
-                <a:spcPts val="800"/>
-              </a:spcAft>
-            </a:pPr>
-            <a:r>
-              <a:rPr sz="2000" b="0" i="0">
-                <a:solidFill>
-                  <a:srgbClr val="333333"/>
-                </a:solidFill>
-                <a:latin typeface="Calibri"/>
-              </a:rPr>
-              <a:t>–   </a:t>
-            </a:r>
-            <a:r>
-              <a:rPr sz="2000" b="1" i="0">
-                <a:solidFill>
-                  <a:srgbClr val="333333"/>
-                </a:solidFill>
-                <a:latin typeface="Calibri"/>
-              </a:rPr>
-              <a:t>Trabajo dirigido:</a:t>
-            </a:r>
-            <a:r>
-              <a:rPr sz="2000" b="0" i="0">
-                <a:solidFill>
-                  <a:srgbClr val="333333"/>
-                </a:solidFill>
-                <a:latin typeface="Calibri"/>
-              </a:rPr>
-              <a:t> Aplicación de matrices de evaluación — dejar la matriz de impacto completa en el documento del equipo, con indicadores, negativos y mitigaciones.</a:t>
-            </a:r>
-          </a:p>
-          <a:p>
-            <a:pPr>
-              <a:spcAft>
-                <a:spcPts val="800"/>
-              </a:spcAft>
-            </a:pPr>
-            <a:r>
-              <a:rPr sz="2000" b="0" i="0">
-                <a:solidFill>
-                  <a:srgbClr val="333333"/>
-                </a:solidFill>
-                <a:latin typeface="Calibri"/>
-              </a:rPr>
-              <a:t>–   </a:t>
-            </a:r>
-            <a:r>
-              <a:rPr sz="2000" b="1" i="0">
-                <a:solidFill>
-                  <a:srgbClr val="333333"/>
-                </a:solidFill>
-                <a:latin typeface="Calibri"/>
-              </a:rPr>
-              <a:t>Trabajo independiente:</a:t>
-            </a:r>
-            <a:r>
-              <a:rPr sz="2000" b="0" i="0">
-                <a:solidFill>
-                  <a:srgbClr val="333333"/>
-                </a:solidFill>
-                <a:latin typeface="Calibri"/>
-              </a:rPr>
-              <a:t> Informe de evaluación del impacto: media página que resuma </a:t>
-            </a:r>
-            <a:r>
-              <a:rPr sz="2000" b="1" i="0">
-                <a:solidFill>
-                  <a:srgbClr val="333333"/>
-                </a:solidFill>
-                <a:latin typeface="Calibri"/>
-              </a:rPr>
-              <a:t>el impacto positivo más fuerte con su número y el negativo más importante con su mitigación</a:t>
-            </a:r>
-            <a:r>
-              <a:rPr sz="2000" b="0" i="0">
-                <a:solidFill>
-                  <a:srgbClr val="333333"/>
-                </a:solidFill>
-                <a:latin typeface="Calibri"/>
-              </a:rPr>
-              <a:t>. Es el borrador de dos diapositivas de la presentación final.</a:t>
-            </a:r>
-          </a:p>
-          <a:p>
-            <a:pPr>
-              <a:spcAft>
-                <a:spcPts val="800"/>
-              </a:spcAft>
-            </a:pPr>
-            <a:r>
-              <a:rPr sz="2000" b="0" i="0">
-                <a:solidFill>
-                  <a:srgbClr val="333333"/>
-                </a:solidFill>
-                <a:latin typeface="Calibri"/>
-              </a:rPr>
-              <a:t>–   </a:t>
-            </a:r>
-            <a:r>
-              <a:rPr sz="2000" b="1" i="0">
-                <a:solidFill>
-                  <a:srgbClr val="333333"/>
-                </a:solidFill>
-                <a:latin typeface="Calibri"/>
-              </a:rPr>
-              <a:t>Clase 14 · Preparación de la presentación final</a:t>
-            </a:r>
-            <a:r>
-              <a:rPr sz="2000" b="0" i="0">
-                <a:solidFill>
-                  <a:srgbClr val="333333"/>
-                </a:solidFill>
-                <a:latin typeface="Calibri"/>
-              </a:rPr>
-              <a:t> — preparamos la </a:t>
-            </a:r>
-            <a:r>
-              <a:rPr sz="2000" b="1" i="0">
-                <a:solidFill>
-                  <a:srgbClr val="333333"/>
-                </a:solidFill>
-                <a:latin typeface="Calibri"/>
-              </a:rPr>
-              <a:t>presentación final</a:t>
-            </a:r>
-            <a:r>
-              <a:rPr sz="2000" b="0" i="0">
-                <a:solidFill>
-                  <a:srgbClr val="333333"/>
-                </a:solidFill>
-                <a:latin typeface="Calibri"/>
-              </a:rPr>
-              <a:t>: la estructura de 8 minutos, las diapositivas, el reparto entre integrantes y el </a:t>
-            </a:r>
-            <a:r>
-              <a:rPr sz="2000" b="1" i="0">
-                <a:solidFill>
-                  <a:srgbClr val="333333"/>
-                </a:solidFill>
-                <a:latin typeface="Calibri"/>
-              </a:rPr>
-              <a:t>ensayo general cronometrado</a:t>
-            </a:r>
-            <a:r>
-              <a:rPr sz="2000" b="0" i="0">
-                <a:solidFill>
-                  <a:srgbClr val="333333"/>
-                </a:solidFill>
-                <a:latin typeface="Calibri"/>
-              </a:rPr>
-              <a:t>.</a:t>
-            </a:r>
-          </a:p>
-          <a:p>
-            <a:pPr>
-              <a:spcAft>
-                <a:spcPts val="800"/>
-              </a:spcAft>
-            </a:pPr>
-            <a:r>
-              <a:rPr sz="2000" b="0" i="0">
-                <a:solidFill>
-                  <a:srgbClr val="333333"/>
-                </a:solidFill>
-                <a:latin typeface="Calibri"/>
-              </a:rPr>
-              <a:t>–   </a:t>
-            </a:r>
-            <a:r>
-              <a:rPr sz="2000" b="1" i="0">
-                <a:solidFill>
-                  <a:srgbClr val="333333"/>
-                </a:solidFill>
-                <a:latin typeface="Calibri"/>
-              </a:rPr>
-              <a:t>Aviso:</a:t>
-            </a:r>
-            <a:r>
-              <a:rPr sz="2000" b="0" i="0">
-                <a:solidFill>
-                  <a:srgbClr val="333333"/>
-                </a:solidFill>
-                <a:latin typeface="Calibri"/>
-              </a:rPr>
-              <a:t> Para la Clase 14 el </a:t>
-            </a:r>
-            <a:r>
-              <a:rPr sz="2000" b="1" i="0">
-                <a:solidFill>
-                  <a:srgbClr val="333333"/>
-                </a:solidFill>
-                <a:latin typeface="Calibri"/>
-              </a:rPr>
-              <a:t>prototipo tiene que estar ya ajustado</a:t>
-            </a:r>
-            <a:r>
-              <a:rPr sz="2000" b="0" i="0">
-                <a:solidFill>
-                  <a:srgbClr val="333333"/>
-                </a:solidFill>
-                <a:latin typeface="Calibri"/>
-              </a:rPr>
-              <a:t> con lo que salió de la Clase 12: si ensayan con la versión vieja, el ensayo no sirve. Traigan también la cuenta de Canva o Google Slides lista y </a:t>
-            </a:r>
-            <a:r>
-              <a:rPr sz="2000" b="1" i="0">
-                <a:solidFill>
-                  <a:srgbClr val="333333"/>
-                </a:solidFill>
-                <a:latin typeface="Calibri"/>
-              </a:rPr>
-              <a:t>quién va a hablar de qué</a:t>
-            </a:r>
-            <a:r>
-              <a:rPr sz="2000" b="0" i="0">
-                <a:solidFill>
-                  <a:srgbClr val="333333"/>
-                </a:solidFill>
-                <a:latin typeface="Calibri"/>
-              </a:rPr>
-              <a:t>.</a:t>
-            </a:r>
-          </a:p>
-          <a:p>
-            <a:pPr>
-              <a:spcAft>
-                <a:spcPts val="800"/>
-              </a:spcAft>
-            </a:pPr>
-            <a:r>
-              <a:rPr sz="2000" b="0" i="0">
-                <a:solidFill>
-                  <a:srgbClr val="333333"/>
-                </a:solidFill>
-                <a:latin typeface="Calibri"/>
-              </a:rPr>
-              <a:t>–   </a:t>
-            </a:r>
-            <a:r>
-              <a:rPr sz="2000" b="1" i="0">
-                <a:solidFill>
-                  <a:srgbClr val="333333"/>
-                </a:solidFill>
-                <a:latin typeface="Calibri"/>
-              </a:rPr>
-              <a:t>Antes de salir:</a:t>
-            </a:r>
-            <a:r>
-              <a:rPr sz="2000" b="0" i="0">
-                <a:solidFill>
-                  <a:srgbClr val="333333"/>
-                </a:solidFill>
-                <a:latin typeface="Calibri"/>
-              </a:rPr>
-              <a:t> el enlace del documento del equipo en el chat, con permiso de lectura para el docente, y el nombre del vocero de hoy.</a:t>
-            </a:r>
-          </a:p>
-        </p:txBody>
-      </p:sp>
-      <p:sp>
-        <p:nvSpPr>
-          <p:cNvPr id="6" name="TextBox 5"/>
+            <a:r>
+              <a:rPr sz="1400" b="0" i="0">
+                <a:solidFill>
+                  <a:srgbClr val="B8D8EE"/>
+                </a:solidFill>
+                <a:latin typeface="Calibri"/>
+              </a:rPr>
+              <a:t>17 min en equipos · 17 min: afectados, positivos con indicador, negativos, matriz y mitigación · matriz de impacto con indicadores, negativos declarados y mitigaciones</a:t>
+            </a:r>
+          </a:p>
+        </p:txBody>
+      </p:sp>
+      <p:sp>
+        <p:nvSpPr>
+          <p:cNvPr id="6" name="Rounded Rectangle 5"/>
+          <p:cNvSpPr/>
+          <p:nvPr/>
+        </p:nvSpPr>
+        <p:spPr>
+          <a:xfrm>
+            <a:off x="457200" y="1472184"/>
+            <a:ext cx="11277295" cy="566928"/>
+          </a:xfrm>
+          <a:prstGeom prst="roundRect">
+            <a:avLst>
+              <a:gd name="adj" fmla="val 12000"/>
+            </a:avLst>
+          </a:prstGeom>
+          <a:solidFill>
+            <a:srgbClr val="F2F2F2"/>
+          </a:solidFill>
+          <a:ln>
+            <a:noFill/>
+          </a:ln>
+        </p:spPr>
+        <p:style>
+          <a:lnRef idx="1">
+            <a:schemeClr val="accent1"/>
+          </a:lnRef>
+          <a:fillRef idx="3">
+            <a:schemeClr val="accent1"/>
+          </a:fillRef>
+          <a:effectRef idx="2">
+            <a:schemeClr val="accent1"/>
+          </a:effectRef>
+          <a:fontRef idx="minor">
+            <a:schemeClr val="lt1"/>
+          </a:fontRef>
+        </p:style>
+        <p:txBody>
+          <a:bodyPr rtlCol="0" anchor="ctr"/>
+          <a:lstStyle/>
+          <a:p>
+            <a:pPr algn="ctr"/>
+          </a:p>
+        </p:txBody>
+      </p:sp>
+      <p:sp>
+        <p:nvSpPr>
+          <p:cNvPr id="7" name="Rectangle 6"/>
+          <p:cNvSpPr/>
+          <p:nvPr/>
+        </p:nvSpPr>
+        <p:spPr>
+          <a:xfrm>
+            <a:off x="640080" y="1618487"/>
+            <a:ext cx="274320" cy="274320"/>
+          </a:xfrm>
+          <a:prstGeom prst="rect">
+            <a:avLst/>
+          </a:prstGeom>
+          <a:solidFill>
+            <a:srgbClr val="FFFFFF"/>
+          </a:solidFill>
+          <a:ln>
+            <a:solidFill>
+              <a:srgbClr val="333333"/>
+            </a:solidFill>
+          </a:ln>
+        </p:spPr>
+        <p:style>
+          <a:lnRef idx="1">
+            <a:schemeClr val="accent1"/>
+          </a:lnRef>
+          <a:fillRef idx="3">
+            <a:schemeClr val="accent1"/>
+          </a:fillRef>
+          <a:effectRef idx="2">
+            <a:schemeClr val="accent1"/>
+          </a:effectRef>
+          <a:fontRef idx="minor">
+            <a:schemeClr val="lt1"/>
+          </a:fontRef>
+        </p:style>
+        <p:txBody>
+          <a:bodyPr rtlCol="0" anchor="ctr"/>
+          <a:lstStyle/>
+          <a:p>
+            <a:pPr algn="ctr"/>
+          </a:p>
+        </p:txBody>
+      </p:sp>
+      <p:sp>
+        <p:nvSpPr>
+          <p:cNvPr id="8" name="Rectangle 7"/>
+          <p:cNvSpPr/>
+          <p:nvPr/>
+        </p:nvSpPr>
+        <p:spPr>
+          <a:xfrm>
+            <a:off x="640080" y="1618487"/>
+            <a:ext cx="73152" cy="274320"/>
+          </a:xfrm>
+          <a:prstGeom prst="rect">
+            <a:avLst/>
+          </a:prstGeom>
+          <a:solidFill>
+            <a:srgbClr val="269CCB"/>
+          </a:solidFill>
+          <a:ln>
+            <a:noFill/>
+          </a:ln>
+        </p:spPr>
+        <p:style>
+          <a:lnRef idx="1">
+            <a:schemeClr val="accent1"/>
+          </a:lnRef>
+          <a:fillRef idx="3">
+            <a:schemeClr val="accent1"/>
+          </a:fillRef>
+          <a:effectRef idx="2">
+            <a:schemeClr val="accent1"/>
+          </a:effectRef>
+          <a:fontRef idx="minor">
+            <a:schemeClr val="lt1"/>
+          </a:fontRef>
+        </p:style>
+        <p:txBody>
+          <a:bodyPr rtlCol="0" anchor="ctr"/>
+          <a:lstStyle/>
+          <a:p>
+            <a:pPr algn="ctr"/>
+          </a:p>
+        </p:txBody>
+      </p:sp>
+      <p:sp>
+        <p:nvSpPr>
+          <p:cNvPr id="9" name="TextBox 8"/>
+          <p:cNvSpPr txBox="1"/>
+          <p:nvPr/>
+        </p:nvSpPr>
+        <p:spPr>
+          <a:xfrm>
+            <a:off x="1097280" y="1563624"/>
+            <a:ext cx="10362895" cy="402336"/>
+          </a:xfrm>
+          <a:prstGeom prst="rect">
+            <a:avLst/>
+          </a:prstGeom>
+          <a:noFill/>
+        </p:spPr>
+        <p:txBody>
+          <a:bodyPr wrap="square" anchor="ctr"/>
+          <a:lstStyle/>
+          <a:p>
+            <a:r>
+              <a:rPr sz="1500" b="1" i="0">
+                <a:solidFill>
+                  <a:srgbClr val="333333"/>
+                </a:solidFill>
+                <a:latin typeface="Calibri"/>
+              </a:rPr>
+              <a:t>LOS AFECTADOS QUE NO SON USUARIOS</a:t>
+            </a:r>
+            <a:r>
+              <a:rPr sz="1500" b="0" i="0">
+                <a:solidFill>
+                  <a:srgbClr val="333333"/>
+                </a:solidFill>
+                <a:latin typeface="Calibri"/>
+              </a:rPr>
+              <a:t> — La lista de quienes reciben un efecto sin usar la solución: a quién le llega más trabajo, quién </a:t>
+            </a:r>
+            <a:r>
+              <a:rPr sz="1500" b="1" i="0">
+                <a:solidFill>
+                  <a:srgbClr val="333333"/>
+                </a:solidFill>
+                <a:latin typeface="Calibri"/>
+              </a:rPr>
+              <a:t>no puede</a:t>
+            </a:r>
+            <a:r>
+              <a:rPr sz="1500" b="0" i="0">
+                <a:solidFill>
+                  <a:srgbClr val="333333"/>
+                </a:solidFill>
+                <a:latin typeface="Calibri"/>
+              </a:rPr>
+              <a:t> usarla, y a quién desplaza.</a:t>
+            </a:r>
+          </a:p>
+        </p:txBody>
+      </p:sp>
+      <p:sp>
+        <p:nvSpPr>
+          <p:cNvPr id="10" name="Rounded Rectangle 9"/>
+          <p:cNvSpPr/>
+          <p:nvPr/>
+        </p:nvSpPr>
+        <p:spPr>
+          <a:xfrm>
+            <a:off x="457200" y="2148839"/>
+            <a:ext cx="11277295" cy="566928"/>
+          </a:xfrm>
+          <a:prstGeom prst="roundRect">
+            <a:avLst>
+              <a:gd name="adj" fmla="val 12000"/>
+            </a:avLst>
+          </a:prstGeom>
+          <a:solidFill>
+            <a:srgbClr val="F2F2F2"/>
+          </a:solidFill>
+          <a:ln>
+            <a:noFill/>
+          </a:ln>
+        </p:spPr>
+        <p:style>
+          <a:lnRef idx="1">
+            <a:schemeClr val="accent1"/>
+          </a:lnRef>
+          <a:fillRef idx="3">
+            <a:schemeClr val="accent1"/>
+          </a:fillRef>
+          <a:effectRef idx="2">
+            <a:schemeClr val="accent1"/>
+          </a:effectRef>
+          <a:fontRef idx="minor">
+            <a:schemeClr val="lt1"/>
+          </a:fontRef>
+        </p:style>
+        <p:txBody>
+          <a:bodyPr rtlCol="0" anchor="ctr"/>
+          <a:lstStyle/>
+          <a:p>
+            <a:pPr algn="ctr"/>
+          </a:p>
+        </p:txBody>
+      </p:sp>
+      <p:sp>
+        <p:nvSpPr>
+          <p:cNvPr id="11" name="Rectangle 10"/>
+          <p:cNvSpPr/>
+          <p:nvPr/>
+        </p:nvSpPr>
+        <p:spPr>
+          <a:xfrm>
+            <a:off x="640080" y="2295144"/>
+            <a:ext cx="274320" cy="274320"/>
+          </a:xfrm>
+          <a:prstGeom prst="rect">
+            <a:avLst/>
+          </a:prstGeom>
+          <a:solidFill>
+            <a:srgbClr val="FFFFFF"/>
+          </a:solidFill>
+          <a:ln>
+            <a:solidFill>
+              <a:srgbClr val="333333"/>
+            </a:solidFill>
+          </a:ln>
+        </p:spPr>
+        <p:style>
+          <a:lnRef idx="1">
+            <a:schemeClr val="accent1"/>
+          </a:lnRef>
+          <a:fillRef idx="3">
+            <a:schemeClr val="accent1"/>
+          </a:fillRef>
+          <a:effectRef idx="2">
+            <a:schemeClr val="accent1"/>
+          </a:effectRef>
+          <a:fontRef idx="minor">
+            <a:schemeClr val="lt1"/>
+          </a:fontRef>
+        </p:style>
+        <p:txBody>
+          <a:bodyPr rtlCol="0" anchor="ctr"/>
+          <a:lstStyle/>
+          <a:p>
+            <a:pPr algn="ctr"/>
+          </a:p>
+        </p:txBody>
+      </p:sp>
+      <p:sp>
+        <p:nvSpPr>
+          <p:cNvPr id="12" name="Rectangle 11"/>
+          <p:cNvSpPr/>
+          <p:nvPr/>
+        </p:nvSpPr>
+        <p:spPr>
+          <a:xfrm>
+            <a:off x="640080" y="2295144"/>
+            <a:ext cx="73152" cy="274320"/>
+          </a:xfrm>
+          <a:prstGeom prst="rect">
+            <a:avLst/>
+          </a:prstGeom>
+          <a:solidFill>
+            <a:srgbClr val="269CCB"/>
+          </a:solidFill>
+          <a:ln>
+            <a:noFill/>
+          </a:ln>
+        </p:spPr>
+        <p:style>
+          <a:lnRef idx="1">
+            <a:schemeClr val="accent1"/>
+          </a:lnRef>
+          <a:fillRef idx="3">
+            <a:schemeClr val="accent1"/>
+          </a:fillRef>
+          <a:effectRef idx="2">
+            <a:schemeClr val="accent1"/>
+          </a:effectRef>
+          <a:fontRef idx="minor">
+            <a:schemeClr val="lt1"/>
+          </a:fontRef>
+        </p:style>
+        <p:txBody>
+          <a:bodyPr rtlCol="0" anchor="ctr"/>
+          <a:lstStyle/>
+          <a:p>
+            <a:pPr algn="ctr"/>
+          </a:p>
+        </p:txBody>
+      </p:sp>
+      <p:sp>
+        <p:nvSpPr>
+          <p:cNvPr id="13" name="TextBox 12"/>
+          <p:cNvSpPr txBox="1"/>
+          <p:nvPr/>
+        </p:nvSpPr>
+        <p:spPr>
+          <a:xfrm>
+            <a:off x="1097280" y="2240279"/>
+            <a:ext cx="10362895" cy="402336"/>
+          </a:xfrm>
+          <a:prstGeom prst="rect">
+            <a:avLst/>
+          </a:prstGeom>
+          <a:noFill/>
+        </p:spPr>
+        <p:txBody>
+          <a:bodyPr wrap="square" anchor="ctr"/>
+          <a:lstStyle/>
+          <a:p>
+            <a:r>
+              <a:rPr sz="1500" b="1" i="0">
+                <a:solidFill>
+                  <a:srgbClr val="333333"/>
+                </a:solidFill>
+                <a:latin typeface="Calibri"/>
+              </a:rPr>
+              <a:t>TRES IMPACTOS POSITIVOS CON SU INDICADOR</a:t>
+            </a:r>
+            <a:r>
+              <a:rPr sz="1500" b="0" i="0">
+                <a:solidFill>
+                  <a:srgbClr val="333333"/>
+                </a:solidFill>
+                <a:latin typeface="Calibri"/>
+              </a:rPr>
+              <a:t> — Tres efectos buenos, cada uno con </a:t>
+            </a:r>
+            <a:r>
+              <a:rPr sz="1500" b="1" i="0">
+                <a:solidFill>
+                  <a:srgbClr val="333333"/>
+                </a:solidFill>
+                <a:latin typeface="Calibri"/>
+              </a:rPr>
+              <a:t>un número y una unidad</a:t>
+            </a:r>
+            <a:r>
+              <a:rPr sz="1500" b="0" i="0">
+                <a:solidFill>
+                  <a:srgbClr val="333333"/>
+                </a:solidFill>
+                <a:latin typeface="Calibri"/>
+              </a:rPr>
+              <a:t>: cuántas personas, cuántas veces, cuántos minutos, cuántos pesos.</a:t>
+            </a:r>
+          </a:p>
+        </p:txBody>
+      </p:sp>
+      <p:sp>
+        <p:nvSpPr>
+          <p:cNvPr id="14" name="Rounded Rectangle 13"/>
+          <p:cNvSpPr/>
+          <p:nvPr/>
+        </p:nvSpPr>
+        <p:spPr>
+          <a:xfrm>
+            <a:off x="457200" y="2825496"/>
+            <a:ext cx="11277295" cy="566928"/>
+          </a:xfrm>
+          <a:prstGeom prst="roundRect">
+            <a:avLst>
+              <a:gd name="adj" fmla="val 12000"/>
+            </a:avLst>
+          </a:prstGeom>
+          <a:solidFill>
+            <a:srgbClr val="F2F2F2"/>
+          </a:solidFill>
+          <a:ln>
+            <a:noFill/>
+          </a:ln>
+        </p:spPr>
+        <p:style>
+          <a:lnRef idx="1">
+            <a:schemeClr val="accent1"/>
+          </a:lnRef>
+          <a:fillRef idx="3">
+            <a:schemeClr val="accent1"/>
+          </a:fillRef>
+          <a:effectRef idx="2">
+            <a:schemeClr val="accent1"/>
+          </a:effectRef>
+          <a:fontRef idx="minor">
+            <a:schemeClr val="lt1"/>
+          </a:fontRef>
+        </p:style>
+        <p:txBody>
+          <a:bodyPr rtlCol="0" anchor="ctr"/>
+          <a:lstStyle/>
+          <a:p>
+            <a:pPr algn="ctr"/>
+          </a:p>
+        </p:txBody>
+      </p:sp>
+      <p:sp>
+        <p:nvSpPr>
+          <p:cNvPr id="15" name="Rectangle 14"/>
+          <p:cNvSpPr/>
+          <p:nvPr/>
+        </p:nvSpPr>
+        <p:spPr>
+          <a:xfrm>
+            <a:off x="640080" y="2971800"/>
+            <a:ext cx="274320" cy="274320"/>
+          </a:xfrm>
+          <a:prstGeom prst="rect">
+            <a:avLst/>
+          </a:prstGeom>
+          <a:solidFill>
+            <a:srgbClr val="FFFFFF"/>
+          </a:solidFill>
+          <a:ln>
+            <a:solidFill>
+              <a:srgbClr val="333333"/>
+            </a:solidFill>
+          </a:ln>
+        </p:spPr>
+        <p:style>
+          <a:lnRef idx="1">
+            <a:schemeClr val="accent1"/>
+          </a:lnRef>
+          <a:fillRef idx="3">
+            <a:schemeClr val="accent1"/>
+          </a:fillRef>
+          <a:effectRef idx="2">
+            <a:schemeClr val="accent1"/>
+          </a:effectRef>
+          <a:fontRef idx="minor">
+            <a:schemeClr val="lt1"/>
+          </a:fontRef>
+        </p:style>
+        <p:txBody>
+          <a:bodyPr rtlCol="0" anchor="ctr"/>
+          <a:lstStyle/>
+          <a:p>
+            <a:pPr algn="ctr"/>
+          </a:p>
+        </p:txBody>
+      </p:sp>
+      <p:sp>
+        <p:nvSpPr>
+          <p:cNvPr id="16" name="Rectangle 15"/>
+          <p:cNvSpPr/>
+          <p:nvPr/>
+        </p:nvSpPr>
+        <p:spPr>
+          <a:xfrm>
+            <a:off x="640080" y="2971800"/>
+            <a:ext cx="73152" cy="274320"/>
+          </a:xfrm>
+          <a:prstGeom prst="rect">
+            <a:avLst/>
+          </a:prstGeom>
+          <a:solidFill>
+            <a:srgbClr val="269CCB"/>
+          </a:solidFill>
+          <a:ln>
+            <a:noFill/>
+          </a:ln>
+        </p:spPr>
+        <p:style>
+          <a:lnRef idx="1">
+            <a:schemeClr val="accent1"/>
+          </a:lnRef>
+          <a:fillRef idx="3">
+            <a:schemeClr val="accent1"/>
+          </a:fillRef>
+          <a:effectRef idx="2">
+            <a:schemeClr val="accent1"/>
+          </a:effectRef>
+          <a:fontRef idx="minor">
+            <a:schemeClr val="lt1"/>
+          </a:fontRef>
+        </p:style>
+        <p:txBody>
+          <a:bodyPr rtlCol="0" anchor="ctr"/>
+          <a:lstStyle/>
+          <a:p>
+            <a:pPr algn="ctr"/>
+          </a:p>
+        </p:txBody>
+      </p:sp>
+      <p:sp>
+        <p:nvSpPr>
+          <p:cNvPr id="17" name="TextBox 16"/>
+          <p:cNvSpPr txBox="1"/>
+          <p:nvPr/>
+        </p:nvSpPr>
+        <p:spPr>
+          <a:xfrm>
+            <a:off x="1097280" y="2916936"/>
+            <a:ext cx="10362895" cy="402336"/>
+          </a:xfrm>
+          <a:prstGeom prst="rect">
+            <a:avLst/>
+          </a:prstGeom>
+          <a:noFill/>
+        </p:spPr>
+        <p:txBody>
+          <a:bodyPr wrap="square" anchor="ctr"/>
+          <a:lstStyle/>
+          <a:p>
+            <a:r>
+              <a:rPr sz="1500" b="1" i="0">
+                <a:solidFill>
+                  <a:srgbClr val="333333"/>
+                </a:solidFill>
+                <a:latin typeface="Calibri"/>
+              </a:rPr>
+              <a:t>DOS IMPACTOS NEGATIVOS O RIESGOS</a:t>
+            </a:r>
+            <a:r>
+              <a:rPr sz="1500" b="0" i="0">
+                <a:solidFill>
+                  <a:srgbClr val="333333"/>
+                </a:solidFill>
+                <a:latin typeface="Calibri"/>
+              </a:rPr>
+              <a:t> — Dos efectos malos, con </a:t>
+            </a:r>
+            <a:r>
+              <a:rPr sz="1500" b="1" i="0">
+                <a:solidFill>
+                  <a:srgbClr val="333333"/>
+                </a:solidFill>
+                <a:latin typeface="Calibri"/>
+              </a:rPr>
+              <a:t>quién los recibe</a:t>
+            </a:r>
+            <a:r>
+              <a:rPr sz="1500" b="0" i="0">
+                <a:solidFill>
+                  <a:srgbClr val="333333"/>
+                </a:solidFill>
+                <a:latin typeface="Calibri"/>
+              </a:rPr>
+              <a:t> exactamente. Si no encuentran ninguno, pregúntense quién trabaja más por su solución.</a:t>
+            </a:r>
+          </a:p>
+        </p:txBody>
+      </p:sp>
+      <p:sp>
+        <p:nvSpPr>
+          <p:cNvPr id="18" name="Rounded Rectangle 17"/>
+          <p:cNvSpPr/>
+          <p:nvPr/>
+        </p:nvSpPr>
+        <p:spPr>
+          <a:xfrm>
+            <a:off x="457200" y="3502152"/>
+            <a:ext cx="11277295" cy="566928"/>
+          </a:xfrm>
+          <a:prstGeom prst="roundRect">
+            <a:avLst>
+              <a:gd name="adj" fmla="val 12000"/>
+            </a:avLst>
+          </a:prstGeom>
+          <a:solidFill>
+            <a:srgbClr val="F2F2F2"/>
+          </a:solidFill>
+          <a:ln>
+            <a:noFill/>
+          </a:ln>
+        </p:spPr>
+        <p:style>
+          <a:lnRef idx="1">
+            <a:schemeClr val="accent1"/>
+          </a:lnRef>
+          <a:fillRef idx="3">
+            <a:schemeClr val="accent1"/>
+          </a:fillRef>
+          <a:effectRef idx="2">
+            <a:schemeClr val="accent1"/>
+          </a:effectRef>
+          <a:fontRef idx="minor">
+            <a:schemeClr val="lt1"/>
+          </a:fontRef>
+        </p:style>
+        <p:txBody>
+          <a:bodyPr rtlCol="0" anchor="ctr"/>
+          <a:lstStyle/>
+          <a:p>
+            <a:pPr algn="ctr"/>
+          </a:p>
+        </p:txBody>
+      </p:sp>
+      <p:sp>
+        <p:nvSpPr>
+          <p:cNvPr id="19" name="Rectangle 18"/>
+          <p:cNvSpPr/>
+          <p:nvPr/>
+        </p:nvSpPr>
+        <p:spPr>
+          <a:xfrm>
+            <a:off x="640080" y="3648456"/>
+            <a:ext cx="274320" cy="274320"/>
+          </a:xfrm>
+          <a:prstGeom prst="rect">
+            <a:avLst/>
+          </a:prstGeom>
+          <a:solidFill>
+            <a:srgbClr val="FFFFFF"/>
+          </a:solidFill>
+          <a:ln>
+            <a:solidFill>
+              <a:srgbClr val="333333"/>
+            </a:solidFill>
+          </a:ln>
+        </p:spPr>
+        <p:style>
+          <a:lnRef idx="1">
+            <a:schemeClr val="accent1"/>
+          </a:lnRef>
+          <a:fillRef idx="3">
+            <a:schemeClr val="accent1"/>
+          </a:fillRef>
+          <a:effectRef idx="2">
+            <a:schemeClr val="accent1"/>
+          </a:effectRef>
+          <a:fontRef idx="minor">
+            <a:schemeClr val="lt1"/>
+          </a:fontRef>
+        </p:style>
+        <p:txBody>
+          <a:bodyPr rtlCol="0" anchor="ctr"/>
+          <a:lstStyle/>
+          <a:p>
+            <a:pPr algn="ctr"/>
+          </a:p>
+        </p:txBody>
+      </p:sp>
+      <p:sp>
+        <p:nvSpPr>
+          <p:cNvPr id="20" name="Rectangle 19"/>
+          <p:cNvSpPr/>
+          <p:nvPr/>
+        </p:nvSpPr>
+        <p:spPr>
+          <a:xfrm>
+            <a:off x="640080" y="3648456"/>
+            <a:ext cx="73152" cy="274320"/>
+          </a:xfrm>
+          <a:prstGeom prst="rect">
+            <a:avLst/>
+          </a:prstGeom>
+          <a:solidFill>
+            <a:srgbClr val="269CCB"/>
+          </a:solidFill>
+          <a:ln>
+            <a:noFill/>
+          </a:ln>
+        </p:spPr>
+        <p:style>
+          <a:lnRef idx="1">
+            <a:schemeClr val="accent1"/>
+          </a:lnRef>
+          <a:fillRef idx="3">
+            <a:schemeClr val="accent1"/>
+          </a:fillRef>
+          <a:effectRef idx="2">
+            <a:schemeClr val="accent1"/>
+          </a:effectRef>
+          <a:fontRef idx="minor">
+            <a:schemeClr val="lt1"/>
+          </a:fontRef>
+        </p:style>
+        <p:txBody>
+          <a:bodyPr rtlCol="0" anchor="ctr"/>
+          <a:lstStyle/>
+          <a:p>
+            <a:pPr algn="ctr"/>
+          </a:p>
+        </p:txBody>
+      </p:sp>
+      <p:sp>
+        <p:nvSpPr>
+          <p:cNvPr id="21" name="TextBox 20"/>
+          <p:cNvSpPr txBox="1"/>
+          <p:nvPr/>
+        </p:nvSpPr>
+        <p:spPr>
+          <a:xfrm>
+            <a:off x="1097280" y="3593592"/>
+            <a:ext cx="10362895" cy="402336"/>
+          </a:xfrm>
+          <a:prstGeom prst="rect">
+            <a:avLst/>
+          </a:prstGeom>
+          <a:noFill/>
+        </p:spPr>
+        <p:txBody>
+          <a:bodyPr wrap="square" anchor="ctr"/>
+          <a:lstStyle/>
+          <a:p>
+            <a:r>
+              <a:rPr sz="1500" b="1" i="0">
+                <a:solidFill>
+                  <a:srgbClr val="333333"/>
+                </a:solidFill>
+                <a:latin typeface="Calibri"/>
+              </a:rPr>
+              <a:t>LA MATRIZ CALIFICADA</a:t>
+            </a:r>
+            <a:r>
+              <a:rPr sz="1500" b="0" i="0">
+                <a:solidFill>
+                  <a:srgbClr val="333333"/>
+                </a:solidFill>
+                <a:latin typeface="Calibri"/>
+              </a:rPr>
+              <a:t> — Cada impacto con su carácter, magnitud, extensión, duración y reversibilidad — y </a:t>
+            </a:r>
+            <a:r>
+              <a:rPr sz="1500" b="1" i="0">
+                <a:solidFill>
+                  <a:srgbClr val="333333"/>
+                </a:solidFill>
+                <a:latin typeface="Calibri"/>
+              </a:rPr>
+              <a:t>una línea de justificación</a:t>
+            </a:r>
+            <a:r>
+              <a:rPr sz="1500" b="0" i="0">
+                <a:solidFill>
+                  <a:srgbClr val="333333"/>
+                </a:solidFill>
+                <a:latin typeface="Calibri"/>
+              </a:rPr>
+              <a:t> por calificación.</a:t>
+            </a:r>
+          </a:p>
+        </p:txBody>
+      </p:sp>
+      <p:sp>
+        <p:nvSpPr>
+          <p:cNvPr id="22" name="Rounded Rectangle 21"/>
+          <p:cNvSpPr/>
+          <p:nvPr/>
+        </p:nvSpPr>
+        <p:spPr>
+          <a:xfrm>
+            <a:off x="457200" y="4178808"/>
+            <a:ext cx="11277295" cy="566928"/>
+          </a:xfrm>
+          <a:prstGeom prst="roundRect">
+            <a:avLst>
+              <a:gd name="adj" fmla="val 12000"/>
+            </a:avLst>
+          </a:prstGeom>
+          <a:solidFill>
+            <a:srgbClr val="F2F2F2"/>
+          </a:solidFill>
+          <a:ln>
+            <a:noFill/>
+          </a:ln>
+        </p:spPr>
+        <p:style>
+          <a:lnRef idx="1">
+            <a:schemeClr val="accent1"/>
+          </a:lnRef>
+          <a:fillRef idx="3">
+            <a:schemeClr val="accent1"/>
+          </a:fillRef>
+          <a:effectRef idx="2">
+            <a:schemeClr val="accent1"/>
+          </a:effectRef>
+          <a:fontRef idx="minor">
+            <a:schemeClr val="lt1"/>
+          </a:fontRef>
+        </p:style>
+        <p:txBody>
+          <a:bodyPr rtlCol="0" anchor="ctr"/>
+          <a:lstStyle/>
+          <a:p>
+            <a:pPr algn="ctr"/>
+          </a:p>
+        </p:txBody>
+      </p:sp>
+      <p:sp>
+        <p:nvSpPr>
+          <p:cNvPr id="23" name="Rectangle 22"/>
+          <p:cNvSpPr/>
+          <p:nvPr/>
+        </p:nvSpPr>
+        <p:spPr>
+          <a:xfrm>
+            <a:off x="640080" y="4325112"/>
+            <a:ext cx="274320" cy="274320"/>
+          </a:xfrm>
+          <a:prstGeom prst="rect">
+            <a:avLst/>
+          </a:prstGeom>
+          <a:solidFill>
+            <a:srgbClr val="FFFFFF"/>
+          </a:solidFill>
+          <a:ln>
+            <a:solidFill>
+              <a:srgbClr val="333333"/>
+            </a:solidFill>
+          </a:ln>
+        </p:spPr>
+        <p:style>
+          <a:lnRef idx="1">
+            <a:schemeClr val="accent1"/>
+          </a:lnRef>
+          <a:fillRef idx="3">
+            <a:schemeClr val="accent1"/>
+          </a:fillRef>
+          <a:effectRef idx="2">
+            <a:schemeClr val="accent1"/>
+          </a:effectRef>
+          <a:fontRef idx="minor">
+            <a:schemeClr val="lt1"/>
+          </a:fontRef>
+        </p:style>
+        <p:txBody>
+          <a:bodyPr rtlCol="0" anchor="ctr"/>
+          <a:lstStyle/>
+          <a:p>
+            <a:pPr algn="ctr"/>
+          </a:p>
+        </p:txBody>
+      </p:sp>
+      <p:sp>
+        <p:nvSpPr>
+          <p:cNvPr id="24" name="Rectangle 23"/>
+          <p:cNvSpPr/>
+          <p:nvPr/>
+        </p:nvSpPr>
+        <p:spPr>
+          <a:xfrm>
+            <a:off x="640080" y="4325112"/>
+            <a:ext cx="73152" cy="274320"/>
+          </a:xfrm>
+          <a:prstGeom prst="rect">
+            <a:avLst/>
+          </a:prstGeom>
+          <a:solidFill>
+            <a:srgbClr val="269CCB"/>
+          </a:solidFill>
+          <a:ln>
+            <a:noFill/>
+          </a:ln>
+        </p:spPr>
+        <p:style>
+          <a:lnRef idx="1">
+            <a:schemeClr val="accent1"/>
+          </a:lnRef>
+          <a:fillRef idx="3">
+            <a:schemeClr val="accent1"/>
+          </a:fillRef>
+          <a:effectRef idx="2">
+            <a:schemeClr val="accent1"/>
+          </a:effectRef>
+          <a:fontRef idx="minor">
+            <a:schemeClr val="lt1"/>
+          </a:fontRef>
+        </p:style>
+        <p:txBody>
+          <a:bodyPr rtlCol="0" anchor="ctr"/>
+          <a:lstStyle/>
+          <a:p>
+            <a:pPr algn="ctr"/>
+          </a:p>
+        </p:txBody>
+      </p:sp>
+      <p:sp>
+        <p:nvSpPr>
+          <p:cNvPr id="25" name="TextBox 24"/>
+          <p:cNvSpPr txBox="1"/>
+          <p:nvPr/>
+        </p:nvSpPr>
+        <p:spPr>
+          <a:xfrm>
+            <a:off x="1097280" y="4270248"/>
+            <a:ext cx="10362895" cy="402336"/>
+          </a:xfrm>
+          <a:prstGeom prst="rect">
+            <a:avLst/>
+          </a:prstGeom>
+          <a:noFill/>
+        </p:spPr>
+        <p:txBody>
+          <a:bodyPr wrap="square" anchor="ctr"/>
+          <a:lstStyle/>
+          <a:p>
+            <a:r>
+              <a:rPr sz="1500" b="1" i="0">
+                <a:solidFill>
+                  <a:srgbClr val="333333"/>
+                </a:solidFill>
+                <a:latin typeface="Calibri"/>
+              </a:rPr>
+              <a:t>LAS MEDIDAS DE MITIGACIÓN</a:t>
+            </a:r>
+            <a:r>
+              <a:rPr sz="1500" b="0" i="0">
+                <a:solidFill>
+                  <a:srgbClr val="333333"/>
+                </a:solidFill>
+                <a:latin typeface="Calibri"/>
+              </a:rPr>
+              <a:t> — Qué van a hacer para reducir cada impacto negativo. Puede ser </a:t>
+            </a:r>
+            <a:r>
+              <a:rPr sz="1500" b="1" i="0">
+                <a:solidFill>
+                  <a:srgbClr val="333333"/>
+                </a:solidFill>
+                <a:latin typeface="Calibri"/>
+              </a:rPr>
+              <a:t>una medida no digital</a:t>
+            </a:r>
+            <a:r>
+              <a:rPr sz="1500" b="0" i="0">
+                <a:solidFill>
+                  <a:srgbClr val="333333"/>
+                </a:solidFill>
+                <a:latin typeface="Calibri"/>
+              </a:rPr>
+              <a:t>, y muchas veces es la mejor.</a:t>
+            </a:r>
+          </a:p>
+        </p:txBody>
+      </p:sp>
+      <p:sp>
+        <p:nvSpPr>
+          <p:cNvPr id="26" name="TextBox 25"/>
           <p:cNvSpPr txBox="1"/>
           <p:nvPr/>
         </p:nvSpPr>
@@ -11197,6 +10624,1549 @@
 </file>
 
 <file path=ppt/slides/slide25.xml><?xml version="1.0" encoding="utf-8"?>
+<p:sld xmlns:a="http://schemas.openxmlformats.org/drawingml/2006/main" xmlns:p="http://schemas.openxmlformats.org/presentationml/2006/main" xmlns:r="http://schemas.openxmlformats.org/officeDocument/2006/relationships">
+  <p:cSld>
+    <p:bg>
+      <p:bgPr>
+        <a:solidFill>
+          <a:srgbClr val="FFFFFF"/>
+        </a:solidFill>
+        <a:effectLst/>
+      </p:bgPr>
+    </p:bg>
+    <p:spTree>
+      <p:nvGrpSpPr>
+        <p:cNvPr id="1" name=""/>
+        <p:cNvGrpSpPr/>
+        <p:nvPr/>
+      </p:nvGrpSpPr>
+      <p:grpSpPr/>
+      <p:sp>
+        <p:nvSpPr>
+          <p:cNvPr id="2" name="Rectangle 1"/>
+          <p:cNvSpPr/>
+          <p:nvPr/>
+        </p:nvSpPr>
+        <p:spPr>
+          <a:xfrm>
+            <a:off x="0" y="0"/>
+            <a:ext cx="12191695" cy="1170432"/>
+          </a:xfrm>
+          <a:prstGeom prst="rect">
+            <a:avLst/>
+          </a:prstGeom>
+          <a:solidFill>
+            <a:srgbClr val="095292"/>
+          </a:solidFill>
+          <a:ln>
+            <a:noFill/>
+          </a:ln>
+        </p:spPr>
+        <p:style>
+          <a:lnRef idx="1">
+            <a:schemeClr val="accent1"/>
+          </a:lnRef>
+          <a:fillRef idx="3">
+            <a:schemeClr val="accent1"/>
+          </a:fillRef>
+          <a:effectRef idx="2">
+            <a:schemeClr val="accent1"/>
+          </a:effectRef>
+          <a:fontRef idx="minor">
+            <a:schemeClr val="lt1"/>
+          </a:fontRef>
+        </p:style>
+        <p:txBody>
+          <a:bodyPr rtlCol="0" anchor="ctr"/>
+          <a:lstStyle/>
+          <a:p>
+            <a:pPr algn="ctr"/>
+          </a:p>
+        </p:txBody>
+      </p:sp>
+      <p:sp>
+        <p:nvSpPr>
+          <p:cNvPr id="3" name="Rectangle 2"/>
+          <p:cNvSpPr/>
+          <p:nvPr/>
+        </p:nvSpPr>
+        <p:spPr>
+          <a:xfrm>
+            <a:off x="0" y="1170432"/>
+            <a:ext cx="12191695" cy="41148"/>
+          </a:xfrm>
+          <a:prstGeom prst="rect">
+            <a:avLst/>
+          </a:prstGeom>
+          <a:solidFill>
+            <a:srgbClr val="FFD000"/>
+          </a:solidFill>
+          <a:ln>
+            <a:noFill/>
+          </a:ln>
+        </p:spPr>
+        <p:style>
+          <a:lnRef idx="1">
+            <a:schemeClr val="accent1"/>
+          </a:lnRef>
+          <a:fillRef idx="3">
+            <a:schemeClr val="accent1"/>
+          </a:fillRef>
+          <a:effectRef idx="2">
+            <a:schemeClr val="accent1"/>
+          </a:effectRef>
+          <a:fontRef idx="minor">
+            <a:schemeClr val="lt1"/>
+          </a:fontRef>
+        </p:style>
+        <p:txBody>
+          <a:bodyPr rtlCol="0" anchor="ctr"/>
+          <a:lstStyle/>
+          <a:p>
+            <a:pPr algn="ctr"/>
+          </a:p>
+        </p:txBody>
+      </p:sp>
+      <p:sp>
+        <p:nvSpPr>
+          <p:cNvPr id="4" name="TextBox 3"/>
+          <p:cNvSpPr txBox="1"/>
+          <p:nvPr/>
+        </p:nvSpPr>
+        <p:spPr>
+          <a:xfrm>
+            <a:off x="457200" y="164592"/>
+            <a:ext cx="11277295" cy="384048"/>
+          </a:xfrm>
+          <a:prstGeom prst="rect">
+            <a:avLst/>
+          </a:prstGeom>
+          <a:noFill/>
+        </p:spPr>
+        <p:txBody>
+          <a:bodyPr wrap="square">
+            <a:spAutoFit/>
+          </a:bodyPr>
+          <a:lstStyle/>
+          <a:p>
+            <a:r>
+              <a:rPr sz="2600" b="1" i="0">
+                <a:solidFill>
+                  <a:srgbClr val="FFFFFF"/>
+                </a:solidFill>
+                <a:latin typeface="Calibri"/>
+              </a:rPr>
+              <a:t>Cómo se expone en 3 minutos</a:t>
+            </a:r>
+          </a:p>
+        </p:txBody>
+      </p:sp>
+      <p:sp>
+        <p:nvSpPr>
+          <p:cNvPr id="5" name="TextBox 4"/>
+          <p:cNvSpPr txBox="1"/>
+          <p:nvPr/>
+        </p:nvSpPr>
+        <p:spPr>
+          <a:xfrm>
+            <a:off x="457200" y="566928"/>
+            <a:ext cx="11277295" cy="411480"/>
+          </a:xfrm>
+          <a:prstGeom prst="rect">
+            <a:avLst/>
+          </a:prstGeom>
+          <a:noFill/>
+        </p:spPr>
+        <p:txBody>
+          <a:bodyPr wrap="square">
+            <a:spAutoFit/>
+          </a:bodyPr>
+          <a:lstStyle/>
+          <a:p>
+            <a:r>
+              <a:rPr sz="1400" b="0" i="0">
+                <a:solidFill>
+                  <a:srgbClr val="B8D8EE"/>
+                </a:solidFill>
+                <a:latin typeface="Calibri"/>
+              </a:rPr>
+              <a:t>Habla el vocero con la pantalla ya compartida · cronómetro en pantalla · se corta al llegar a cero</a:t>
+            </a:r>
+          </a:p>
+        </p:txBody>
+      </p:sp>
+      <p:sp>
+        <p:nvSpPr>
+          <p:cNvPr id="6" name="Rounded Rectangle 5"/>
+          <p:cNvSpPr/>
+          <p:nvPr/>
+        </p:nvSpPr>
+        <p:spPr>
+          <a:xfrm>
+            <a:off x="457200" y="1444752"/>
+            <a:ext cx="11277295" cy="908913"/>
+          </a:xfrm>
+          <a:prstGeom prst="roundRect">
+            <a:avLst>
+              <a:gd name="adj" fmla="val 12000"/>
+            </a:avLst>
+          </a:prstGeom>
+          <a:solidFill>
+            <a:srgbClr val="F2F2F2"/>
+          </a:solidFill>
+          <a:ln>
+            <a:noFill/>
+          </a:ln>
+        </p:spPr>
+        <p:style>
+          <a:lnRef idx="1">
+            <a:schemeClr val="accent1"/>
+          </a:lnRef>
+          <a:fillRef idx="3">
+            <a:schemeClr val="accent1"/>
+          </a:fillRef>
+          <a:effectRef idx="2">
+            <a:schemeClr val="accent1"/>
+          </a:effectRef>
+          <a:fontRef idx="minor">
+            <a:schemeClr val="lt1"/>
+          </a:fontRef>
+        </p:style>
+        <p:txBody>
+          <a:bodyPr rtlCol="0" anchor="ctr"/>
+          <a:lstStyle/>
+          <a:p>
+            <a:pPr algn="ctr"/>
+          </a:p>
+        </p:txBody>
+      </p:sp>
+      <p:sp>
+        <p:nvSpPr>
+          <p:cNvPr id="7" name="Rounded Rectangle 6"/>
+          <p:cNvSpPr/>
+          <p:nvPr/>
+        </p:nvSpPr>
+        <p:spPr>
+          <a:xfrm>
+            <a:off x="594360" y="1679752"/>
+            <a:ext cx="438912" cy="438912"/>
+          </a:xfrm>
+          <a:prstGeom prst="roundRect">
+            <a:avLst>
+              <a:gd name="adj" fmla="val 12000"/>
+            </a:avLst>
+          </a:prstGeom>
+          <a:solidFill>
+            <a:srgbClr val="095292"/>
+          </a:solidFill>
+          <a:ln>
+            <a:noFill/>
+          </a:ln>
+        </p:spPr>
+        <p:style>
+          <a:lnRef idx="1">
+            <a:schemeClr val="accent1"/>
+          </a:lnRef>
+          <a:fillRef idx="3">
+            <a:schemeClr val="accent1"/>
+          </a:fillRef>
+          <a:effectRef idx="2">
+            <a:schemeClr val="accent1"/>
+          </a:effectRef>
+          <a:fontRef idx="minor">
+            <a:schemeClr val="lt1"/>
+          </a:fontRef>
+        </p:style>
+        <p:txBody>
+          <a:bodyPr rtlCol="0" anchor="ctr"/>
+          <a:lstStyle/>
+          <a:p>
+            <a:pPr algn="ctr"/>
+          </a:p>
+        </p:txBody>
+      </p:sp>
+      <p:sp>
+        <p:nvSpPr>
+          <p:cNvPr id="8" name="TextBox 7"/>
+          <p:cNvSpPr txBox="1"/>
+          <p:nvPr/>
+        </p:nvSpPr>
+        <p:spPr>
+          <a:xfrm>
+            <a:off x="594360" y="1679752"/>
+            <a:ext cx="438912" cy="438912"/>
+          </a:xfrm>
+          <a:prstGeom prst="rect">
+            <a:avLst/>
+          </a:prstGeom>
+          <a:noFill/>
+        </p:spPr>
+        <p:txBody>
+          <a:bodyPr wrap="square" anchor="ctr"/>
+          <a:lstStyle/>
+          <a:p>
+            <a:pPr algn="ctr"/>
+            <a:r>
+              <a:rPr sz="1600" b="1" i="0">
+                <a:solidFill>
+                  <a:srgbClr val="FFFFFF"/>
+                </a:solidFill>
+                <a:latin typeface="Calibri"/>
+              </a:rPr>
+              <a:t>1</a:t>
+            </a:r>
+          </a:p>
+        </p:txBody>
+      </p:sp>
+      <p:sp>
+        <p:nvSpPr>
+          <p:cNvPr id="9" name="TextBox 8"/>
+          <p:cNvSpPr txBox="1"/>
+          <p:nvPr/>
+        </p:nvSpPr>
+        <p:spPr>
+          <a:xfrm>
+            <a:off x="1188720" y="1536192"/>
+            <a:ext cx="10271455" cy="744321"/>
+          </a:xfrm>
+          <a:prstGeom prst="rect">
+            <a:avLst/>
+          </a:prstGeom>
+          <a:noFill/>
+        </p:spPr>
+        <p:txBody>
+          <a:bodyPr wrap="square" anchor="ctr"/>
+          <a:lstStyle/>
+          <a:p>
+            <a:r>
+              <a:rPr sz="1500" b="1" i="0">
+                <a:solidFill>
+                  <a:srgbClr val="095292"/>
+                </a:solidFill>
+                <a:latin typeface="Calibri"/>
+              </a:rPr>
+              <a:t>30 s · Los afectados que no son usuarios</a:t>
+            </a:r>
+          </a:p>
+          <a:p>
+            <a:pPr>
+              <a:spcBef>
+                <a:spcPts val="200"/>
+              </a:spcBef>
+            </a:pPr>
+            <a:r>
+              <a:rPr sz="1300" b="0" i="0">
+                <a:solidFill>
+                  <a:srgbClr val="333333"/>
+                </a:solidFill>
+                <a:latin typeface="Calibri"/>
+              </a:rPr>
+              <a:t>Nómbrelos. Sin «la comunidad».</a:t>
+            </a:r>
+          </a:p>
+        </p:txBody>
+      </p:sp>
+      <p:sp>
+        <p:nvSpPr>
+          <p:cNvPr id="10" name="Rounded Rectangle 9"/>
+          <p:cNvSpPr/>
+          <p:nvPr/>
+        </p:nvSpPr>
+        <p:spPr>
+          <a:xfrm>
+            <a:off x="457200" y="2445105"/>
+            <a:ext cx="11277295" cy="908913"/>
+          </a:xfrm>
+          <a:prstGeom prst="roundRect">
+            <a:avLst>
+              <a:gd name="adj" fmla="val 12000"/>
+            </a:avLst>
+          </a:prstGeom>
+          <a:solidFill>
+            <a:srgbClr val="E8F4FA"/>
+          </a:solidFill>
+          <a:ln>
+            <a:noFill/>
+          </a:ln>
+        </p:spPr>
+        <p:style>
+          <a:lnRef idx="1">
+            <a:schemeClr val="accent1"/>
+          </a:lnRef>
+          <a:fillRef idx="3">
+            <a:schemeClr val="accent1"/>
+          </a:fillRef>
+          <a:effectRef idx="2">
+            <a:schemeClr val="accent1"/>
+          </a:effectRef>
+          <a:fontRef idx="minor">
+            <a:schemeClr val="lt1"/>
+          </a:fontRef>
+        </p:style>
+        <p:txBody>
+          <a:bodyPr rtlCol="0" anchor="ctr"/>
+          <a:lstStyle/>
+          <a:p>
+            <a:pPr algn="ctr"/>
+          </a:p>
+        </p:txBody>
+      </p:sp>
+      <p:sp>
+        <p:nvSpPr>
+          <p:cNvPr id="11" name="Rounded Rectangle 10"/>
+          <p:cNvSpPr/>
+          <p:nvPr/>
+        </p:nvSpPr>
+        <p:spPr>
+          <a:xfrm>
+            <a:off x="594360" y="2680106"/>
+            <a:ext cx="438912" cy="438912"/>
+          </a:xfrm>
+          <a:prstGeom prst="roundRect">
+            <a:avLst>
+              <a:gd name="adj" fmla="val 12000"/>
+            </a:avLst>
+          </a:prstGeom>
+          <a:solidFill>
+            <a:srgbClr val="095292"/>
+          </a:solidFill>
+          <a:ln>
+            <a:noFill/>
+          </a:ln>
+        </p:spPr>
+        <p:style>
+          <a:lnRef idx="1">
+            <a:schemeClr val="accent1"/>
+          </a:lnRef>
+          <a:fillRef idx="3">
+            <a:schemeClr val="accent1"/>
+          </a:fillRef>
+          <a:effectRef idx="2">
+            <a:schemeClr val="accent1"/>
+          </a:effectRef>
+          <a:fontRef idx="minor">
+            <a:schemeClr val="lt1"/>
+          </a:fontRef>
+        </p:style>
+        <p:txBody>
+          <a:bodyPr rtlCol="0" anchor="ctr"/>
+          <a:lstStyle/>
+          <a:p>
+            <a:pPr algn="ctr"/>
+          </a:p>
+        </p:txBody>
+      </p:sp>
+      <p:sp>
+        <p:nvSpPr>
+          <p:cNvPr id="12" name="TextBox 11"/>
+          <p:cNvSpPr txBox="1"/>
+          <p:nvPr/>
+        </p:nvSpPr>
+        <p:spPr>
+          <a:xfrm>
+            <a:off x="594360" y="2680106"/>
+            <a:ext cx="438912" cy="438912"/>
+          </a:xfrm>
+          <a:prstGeom prst="rect">
+            <a:avLst/>
+          </a:prstGeom>
+          <a:noFill/>
+        </p:spPr>
+        <p:txBody>
+          <a:bodyPr wrap="square" anchor="ctr"/>
+          <a:lstStyle/>
+          <a:p>
+            <a:pPr algn="ctr"/>
+            <a:r>
+              <a:rPr sz="1600" b="1" i="0">
+                <a:solidFill>
+                  <a:srgbClr val="FFFFFF"/>
+                </a:solidFill>
+                <a:latin typeface="Calibri"/>
+              </a:rPr>
+              <a:t>2</a:t>
+            </a:r>
+          </a:p>
+        </p:txBody>
+      </p:sp>
+      <p:sp>
+        <p:nvSpPr>
+          <p:cNvPr id="13" name="TextBox 12"/>
+          <p:cNvSpPr txBox="1"/>
+          <p:nvPr/>
+        </p:nvSpPr>
+        <p:spPr>
+          <a:xfrm>
+            <a:off x="1188720" y="2536545"/>
+            <a:ext cx="10271455" cy="744321"/>
+          </a:xfrm>
+          <a:prstGeom prst="rect">
+            <a:avLst/>
+          </a:prstGeom>
+          <a:noFill/>
+        </p:spPr>
+        <p:txBody>
+          <a:bodyPr wrap="square" anchor="ctr"/>
+          <a:lstStyle/>
+          <a:p>
+            <a:r>
+              <a:rPr sz="1500" b="1" i="0">
+                <a:solidFill>
+                  <a:srgbClr val="095292"/>
+                </a:solidFill>
+                <a:latin typeface="Calibri"/>
+              </a:rPr>
+              <a:t>40 s · Un impacto positivo con su número</a:t>
+            </a:r>
+          </a:p>
+          <a:p>
+            <a:pPr>
+              <a:spcBef>
+                <a:spcPts val="200"/>
+              </a:spcBef>
+            </a:pPr>
+            <a:r>
+              <a:rPr sz="1300" b="0" i="0">
+                <a:solidFill>
+                  <a:srgbClr val="333333"/>
+                </a:solidFill>
+                <a:latin typeface="Calibri"/>
+              </a:rPr>
+              <a:t>El más fuerte, con indicador.</a:t>
+            </a:r>
+          </a:p>
+        </p:txBody>
+      </p:sp>
+      <p:sp>
+        <p:nvSpPr>
+          <p:cNvPr id="14" name="Rounded Rectangle 13"/>
+          <p:cNvSpPr/>
+          <p:nvPr/>
+        </p:nvSpPr>
+        <p:spPr>
+          <a:xfrm>
+            <a:off x="457200" y="3445459"/>
+            <a:ext cx="11277295" cy="908913"/>
+          </a:xfrm>
+          <a:prstGeom prst="roundRect">
+            <a:avLst>
+              <a:gd name="adj" fmla="val 12000"/>
+            </a:avLst>
+          </a:prstGeom>
+          <a:solidFill>
+            <a:srgbClr val="F2F2F2"/>
+          </a:solidFill>
+          <a:ln>
+            <a:noFill/>
+          </a:ln>
+        </p:spPr>
+        <p:style>
+          <a:lnRef idx="1">
+            <a:schemeClr val="accent1"/>
+          </a:lnRef>
+          <a:fillRef idx="3">
+            <a:schemeClr val="accent1"/>
+          </a:fillRef>
+          <a:effectRef idx="2">
+            <a:schemeClr val="accent1"/>
+          </a:effectRef>
+          <a:fontRef idx="minor">
+            <a:schemeClr val="lt1"/>
+          </a:fontRef>
+        </p:style>
+        <p:txBody>
+          <a:bodyPr rtlCol="0" anchor="ctr"/>
+          <a:lstStyle/>
+          <a:p>
+            <a:pPr algn="ctr"/>
+          </a:p>
+        </p:txBody>
+      </p:sp>
+      <p:sp>
+        <p:nvSpPr>
+          <p:cNvPr id="15" name="Rounded Rectangle 14"/>
+          <p:cNvSpPr/>
+          <p:nvPr/>
+        </p:nvSpPr>
+        <p:spPr>
+          <a:xfrm>
+            <a:off x="594360" y="3680460"/>
+            <a:ext cx="438912" cy="438912"/>
+          </a:xfrm>
+          <a:prstGeom prst="roundRect">
+            <a:avLst>
+              <a:gd name="adj" fmla="val 12000"/>
+            </a:avLst>
+          </a:prstGeom>
+          <a:solidFill>
+            <a:srgbClr val="095292"/>
+          </a:solidFill>
+          <a:ln>
+            <a:noFill/>
+          </a:ln>
+        </p:spPr>
+        <p:style>
+          <a:lnRef idx="1">
+            <a:schemeClr val="accent1"/>
+          </a:lnRef>
+          <a:fillRef idx="3">
+            <a:schemeClr val="accent1"/>
+          </a:fillRef>
+          <a:effectRef idx="2">
+            <a:schemeClr val="accent1"/>
+          </a:effectRef>
+          <a:fontRef idx="minor">
+            <a:schemeClr val="lt1"/>
+          </a:fontRef>
+        </p:style>
+        <p:txBody>
+          <a:bodyPr rtlCol="0" anchor="ctr"/>
+          <a:lstStyle/>
+          <a:p>
+            <a:pPr algn="ctr"/>
+          </a:p>
+        </p:txBody>
+      </p:sp>
+      <p:sp>
+        <p:nvSpPr>
+          <p:cNvPr id="16" name="TextBox 15"/>
+          <p:cNvSpPr txBox="1"/>
+          <p:nvPr/>
+        </p:nvSpPr>
+        <p:spPr>
+          <a:xfrm>
+            <a:off x="594360" y="3680460"/>
+            <a:ext cx="438912" cy="438912"/>
+          </a:xfrm>
+          <a:prstGeom prst="rect">
+            <a:avLst/>
+          </a:prstGeom>
+          <a:noFill/>
+        </p:spPr>
+        <p:txBody>
+          <a:bodyPr wrap="square" anchor="ctr"/>
+          <a:lstStyle/>
+          <a:p>
+            <a:pPr algn="ctr"/>
+            <a:r>
+              <a:rPr sz="1600" b="1" i="0">
+                <a:solidFill>
+                  <a:srgbClr val="FFFFFF"/>
+                </a:solidFill>
+                <a:latin typeface="Calibri"/>
+              </a:rPr>
+              <a:t>3</a:t>
+            </a:r>
+          </a:p>
+        </p:txBody>
+      </p:sp>
+      <p:sp>
+        <p:nvSpPr>
+          <p:cNvPr id="17" name="TextBox 16"/>
+          <p:cNvSpPr txBox="1"/>
+          <p:nvPr/>
+        </p:nvSpPr>
+        <p:spPr>
+          <a:xfrm>
+            <a:off x="1188720" y="3536899"/>
+            <a:ext cx="10271455" cy="744321"/>
+          </a:xfrm>
+          <a:prstGeom prst="rect">
+            <a:avLst/>
+          </a:prstGeom>
+          <a:noFill/>
+        </p:spPr>
+        <p:txBody>
+          <a:bodyPr wrap="square" anchor="ctr"/>
+          <a:lstStyle/>
+          <a:p>
+            <a:r>
+              <a:rPr sz="1500" b="1" i="0">
+                <a:solidFill>
+                  <a:srgbClr val="095292"/>
+                </a:solidFill>
+                <a:latin typeface="Calibri"/>
+              </a:rPr>
+              <a:t>70 s · El impacto negativo y su mitigación</a:t>
+            </a:r>
+          </a:p>
+          <a:p>
+            <a:pPr>
+              <a:spcBef>
+                <a:spcPts val="200"/>
+              </a:spcBef>
+            </a:pPr>
+            <a:r>
+              <a:rPr sz="1300" b="1" i="0">
+                <a:solidFill>
+                  <a:srgbClr val="333333"/>
+                </a:solidFill>
+                <a:latin typeface="Calibri"/>
+              </a:rPr>
+              <a:t>El minuto obligatorio.</a:t>
+            </a:r>
+            <a:r>
+              <a:rPr sz="1300" b="0" i="0">
+                <a:solidFill>
+                  <a:srgbClr val="333333"/>
+                </a:solidFill>
+                <a:latin typeface="Calibri"/>
+              </a:rPr>
+              <a:t> El más incómodo que hayan encontrado.</a:t>
+            </a:r>
+          </a:p>
+        </p:txBody>
+      </p:sp>
+      <p:sp>
+        <p:nvSpPr>
+          <p:cNvPr id="18" name="Rounded Rectangle 17"/>
+          <p:cNvSpPr/>
+          <p:nvPr/>
+        </p:nvSpPr>
+        <p:spPr>
+          <a:xfrm>
+            <a:off x="457200" y="4445812"/>
+            <a:ext cx="11277295" cy="908913"/>
+          </a:xfrm>
+          <a:prstGeom prst="roundRect">
+            <a:avLst>
+              <a:gd name="adj" fmla="val 12000"/>
+            </a:avLst>
+          </a:prstGeom>
+          <a:solidFill>
+            <a:srgbClr val="E8F4FA"/>
+          </a:solidFill>
+          <a:ln>
+            <a:noFill/>
+          </a:ln>
+        </p:spPr>
+        <p:style>
+          <a:lnRef idx="1">
+            <a:schemeClr val="accent1"/>
+          </a:lnRef>
+          <a:fillRef idx="3">
+            <a:schemeClr val="accent1"/>
+          </a:fillRef>
+          <a:effectRef idx="2">
+            <a:schemeClr val="accent1"/>
+          </a:effectRef>
+          <a:fontRef idx="minor">
+            <a:schemeClr val="lt1"/>
+          </a:fontRef>
+        </p:style>
+        <p:txBody>
+          <a:bodyPr rtlCol="0" anchor="ctr"/>
+          <a:lstStyle/>
+          <a:p>
+            <a:pPr algn="ctr"/>
+          </a:p>
+        </p:txBody>
+      </p:sp>
+      <p:sp>
+        <p:nvSpPr>
+          <p:cNvPr id="19" name="Rounded Rectangle 18"/>
+          <p:cNvSpPr/>
+          <p:nvPr/>
+        </p:nvSpPr>
+        <p:spPr>
+          <a:xfrm>
+            <a:off x="594360" y="4680813"/>
+            <a:ext cx="438912" cy="438912"/>
+          </a:xfrm>
+          <a:prstGeom prst="roundRect">
+            <a:avLst>
+              <a:gd name="adj" fmla="val 12000"/>
+            </a:avLst>
+          </a:prstGeom>
+          <a:solidFill>
+            <a:srgbClr val="095292"/>
+          </a:solidFill>
+          <a:ln>
+            <a:noFill/>
+          </a:ln>
+        </p:spPr>
+        <p:style>
+          <a:lnRef idx="1">
+            <a:schemeClr val="accent1"/>
+          </a:lnRef>
+          <a:fillRef idx="3">
+            <a:schemeClr val="accent1"/>
+          </a:fillRef>
+          <a:effectRef idx="2">
+            <a:schemeClr val="accent1"/>
+          </a:effectRef>
+          <a:fontRef idx="minor">
+            <a:schemeClr val="lt1"/>
+          </a:fontRef>
+        </p:style>
+        <p:txBody>
+          <a:bodyPr rtlCol="0" anchor="ctr"/>
+          <a:lstStyle/>
+          <a:p>
+            <a:pPr algn="ctr"/>
+          </a:p>
+        </p:txBody>
+      </p:sp>
+      <p:sp>
+        <p:nvSpPr>
+          <p:cNvPr id="20" name="TextBox 19"/>
+          <p:cNvSpPr txBox="1"/>
+          <p:nvPr/>
+        </p:nvSpPr>
+        <p:spPr>
+          <a:xfrm>
+            <a:off x="594360" y="4680813"/>
+            <a:ext cx="438912" cy="438912"/>
+          </a:xfrm>
+          <a:prstGeom prst="rect">
+            <a:avLst/>
+          </a:prstGeom>
+          <a:noFill/>
+        </p:spPr>
+        <p:txBody>
+          <a:bodyPr wrap="square" anchor="ctr"/>
+          <a:lstStyle/>
+          <a:p>
+            <a:pPr algn="ctr"/>
+            <a:r>
+              <a:rPr sz="1600" b="1" i="0">
+                <a:solidFill>
+                  <a:srgbClr val="FFFFFF"/>
+                </a:solidFill>
+                <a:latin typeface="Calibri"/>
+              </a:rPr>
+              <a:t>4</a:t>
+            </a:r>
+          </a:p>
+        </p:txBody>
+      </p:sp>
+      <p:sp>
+        <p:nvSpPr>
+          <p:cNvPr id="21" name="TextBox 20"/>
+          <p:cNvSpPr txBox="1"/>
+          <p:nvPr/>
+        </p:nvSpPr>
+        <p:spPr>
+          <a:xfrm>
+            <a:off x="1188720" y="4537252"/>
+            <a:ext cx="10271455" cy="744321"/>
+          </a:xfrm>
+          <a:prstGeom prst="rect">
+            <a:avLst/>
+          </a:prstGeom>
+          <a:noFill/>
+        </p:spPr>
+        <p:txBody>
+          <a:bodyPr wrap="square" anchor="ctr"/>
+          <a:lstStyle/>
+          <a:p>
+            <a:r>
+              <a:rPr sz="1500" b="1" i="0">
+                <a:solidFill>
+                  <a:srgbClr val="095292"/>
+                </a:solidFill>
+                <a:latin typeface="Calibri"/>
+              </a:rPr>
+              <a:t>30 s · La calificación</a:t>
+            </a:r>
+          </a:p>
+          <a:p>
+            <a:pPr>
+              <a:spcBef>
+                <a:spcPts val="200"/>
+              </a:spcBef>
+            </a:pPr>
+            <a:r>
+              <a:rPr sz="1300" b="0" i="0">
+                <a:solidFill>
+                  <a:srgbClr val="333333"/>
+                </a:solidFill>
+                <a:latin typeface="Calibri"/>
+              </a:rPr>
+              <a:t>Cuál es el impacto más grave y por qué lo calificaron así.</a:t>
+            </a:r>
+          </a:p>
+        </p:txBody>
+      </p:sp>
+      <p:sp>
+        <p:nvSpPr>
+          <p:cNvPr id="22" name="Rounded Rectangle 21"/>
+          <p:cNvSpPr/>
+          <p:nvPr/>
+        </p:nvSpPr>
+        <p:spPr>
+          <a:xfrm>
+            <a:off x="457200" y="5446166"/>
+            <a:ext cx="11277295" cy="908913"/>
+          </a:xfrm>
+          <a:prstGeom prst="roundRect">
+            <a:avLst>
+              <a:gd name="adj" fmla="val 12000"/>
+            </a:avLst>
+          </a:prstGeom>
+          <a:solidFill>
+            <a:srgbClr val="F2F2F2"/>
+          </a:solidFill>
+          <a:ln>
+            <a:noFill/>
+          </a:ln>
+        </p:spPr>
+        <p:style>
+          <a:lnRef idx="1">
+            <a:schemeClr val="accent1"/>
+          </a:lnRef>
+          <a:fillRef idx="3">
+            <a:schemeClr val="accent1"/>
+          </a:fillRef>
+          <a:effectRef idx="2">
+            <a:schemeClr val="accent1"/>
+          </a:effectRef>
+          <a:fontRef idx="minor">
+            <a:schemeClr val="lt1"/>
+          </a:fontRef>
+        </p:style>
+        <p:txBody>
+          <a:bodyPr rtlCol="0" anchor="ctr"/>
+          <a:lstStyle/>
+          <a:p>
+            <a:pPr algn="ctr"/>
+          </a:p>
+        </p:txBody>
+      </p:sp>
+      <p:sp>
+        <p:nvSpPr>
+          <p:cNvPr id="23" name="Rounded Rectangle 22"/>
+          <p:cNvSpPr/>
+          <p:nvPr/>
+        </p:nvSpPr>
+        <p:spPr>
+          <a:xfrm>
+            <a:off x="594360" y="5681167"/>
+            <a:ext cx="438912" cy="438912"/>
+          </a:xfrm>
+          <a:prstGeom prst="roundRect">
+            <a:avLst>
+              <a:gd name="adj" fmla="val 12000"/>
+            </a:avLst>
+          </a:prstGeom>
+          <a:solidFill>
+            <a:srgbClr val="095292"/>
+          </a:solidFill>
+          <a:ln>
+            <a:noFill/>
+          </a:ln>
+        </p:spPr>
+        <p:style>
+          <a:lnRef idx="1">
+            <a:schemeClr val="accent1"/>
+          </a:lnRef>
+          <a:fillRef idx="3">
+            <a:schemeClr val="accent1"/>
+          </a:fillRef>
+          <a:effectRef idx="2">
+            <a:schemeClr val="accent1"/>
+          </a:effectRef>
+          <a:fontRef idx="minor">
+            <a:schemeClr val="lt1"/>
+          </a:fontRef>
+        </p:style>
+        <p:txBody>
+          <a:bodyPr rtlCol="0" anchor="ctr"/>
+          <a:lstStyle/>
+          <a:p>
+            <a:pPr algn="ctr"/>
+          </a:p>
+        </p:txBody>
+      </p:sp>
+      <p:sp>
+        <p:nvSpPr>
+          <p:cNvPr id="24" name="TextBox 23"/>
+          <p:cNvSpPr txBox="1"/>
+          <p:nvPr/>
+        </p:nvSpPr>
+        <p:spPr>
+          <a:xfrm>
+            <a:off x="594360" y="5681167"/>
+            <a:ext cx="438912" cy="438912"/>
+          </a:xfrm>
+          <a:prstGeom prst="rect">
+            <a:avLst/>
+          </a:prstGeom>
+          <a:noFill/>
+        </p:spPr>
+        <p:txBody>
+          <a:bodyPr wrap="square" anchor="ctr"/>
+          <a:lstStyle/>
+          <a:p>
+            <a:pPr algn="ctr"/>
+            <a:r>
+              <a:rPr sz="1600" b="1" i="0">
+                <a:solidFill>
+                  <a:srgbClr val="FFFFFF"/>
+                </a:solidFill>
+                <a:latin typeface="Calibri"/>
+              </a:rPr>
+              <a:t>5</a:t>
+            </a:r>
+          </a:p>
+        </p:txBody>
+      </p:sp>
+      <p:sp>
+        <p:nvSpPr>
+          <p:cNvPr id="25" name="TextBox 24"/>
+          <p:cNvSpPr txBox="1"/>
+          <p:nvPr/>
+        </p:nvSpPr>
+        <p:spPr>
+          <a:xfrm>
+            <a:off x="1188720" y="5537606"/>
+            <a:ext cx="10271455" cy="744321"/>
+          </a:xfrm>
+          <a:prstGeom prst="rect">
+            <a:avLst/>
+          </a:prstGeom>
+          <a:noFill/>
+        </p:spPr>
+        <p:txBody>
+          <a:bodyPr wrap="square" anchor="ctr"/>
+          <a:lstStyle/>
+          <a:p>
+            <a:r>
+              <a:rPr sz="1500" b="1" i="0">
+                <a:solidFill>
+                  <a:srgbClr val="095292"/>
+                </a:solidFill>
+                <a:latin typeface="Calibri"/>
+              </a:rPr>
+              <a:t>10 s · Cierre</a:t>
+            </a:r>
+          </a:p>
+          <a:p>
+            <a:pPr>
+              <a:spcBef>
+                <a:spcPts val="200"/>
+              </a:spcBef>
+            </a:pPr>
+            <a:r>
+              <a:rPr sz="1300" b="0" i="0">
+                <a:solidFill>
+                  <a:srgbClr val="333333"/>
+                </a:solidFill>
+                <a:latin typeface="Calibri"/>
+              </a:rPr>
+              <a:t>Qué dimensión no aplica en su proyecto, y por qué.</a:t>
+            </a:r>
+          </a:p>
+        </p:txBody>
+      </p:sp>
+      <p:sp>
+        <p:nvSpPr>
+          <p:cNvPr id="26" name="TextBox 25"/>
+          <p:cNvSpPr txBox="1"/>
+          <p:nvPr/>
+        </p:nvSpPr>
+        <p:spPr>
+          <a:xfrm>
+            <a:off x="11185855" y="6473952"/>
+            <a:ext cx="640080" cy="274320"/>
+          </a:xfrm>
+          <a:prstGeom prst="rect">
+            <a:avLst/>
+          </a:prstGeom>
+          <a:noFill/>
+        </p:spPr>
+        <p:txBody>
+          <a:bodyPr wrap="square">
+            <a:spAutoFit/>
+          </a:bodyPr>
+          <a:lstStyle/>
+          <a:p>
+            <a:pPr algn="r"/>
+            <a:r>
+              <a:rPr sz="1100" b="0" i="0">
+                <a:solidFill>
+                  <a:srgbClr val="666666"/>
+                </a:solidFill>
+                <a:latin typeface="Calibri"/>
+              </a:rPr>
+              <a:t>25</a:t>
+            </a:r>
+          </a:p>
+        </p:txBody>
+      </p:sp>
+    </p:spTree>
+  </p:cSld>
+  <p:clrMapOvr>
+    <a:masterClrMapping/>
+  </p:clrMapOvr>
+</p:sld>
+</file>
+
+<file path=ppt/slides/slide26.xml><?xml version="1.0" encoding="utf-8"?>
+<p:sld xmlns:a="http://schemas.openxmlformats.org/drawingml/2006/main" xmlns:p="http://schemas.openxmlformats.org/presentationml/2006/main" xmlns:r="http://schemas.openxmlformats.org/officeDocument/2006/relationships">
+  <p:cSld>
+    <p:bg>
+      <p:bgPr>
+        <a:solidFill>
+          <a:srgbClr val="FFFFFF"/>
+        </a:solidFill>
+        <a:effectLst/>
+      </p:bgPr>
+    </p:bg>
+    <p:spTree>
+      <p:nvGrpSpPr>
+        <p:cNvPr id="1" name=""/>
+        <p:cNvGrpSpPr/>
+        <p:nvPr/>
+      </p:nvGrpSpPr>
+      <p:grpSpPr/>
+      <p:sp>
+        <p:nvSpPr>
+          <p:cNvPr id="2" name="Rectangle 1"/>
+          <p:cNvSpPr/>
+          <p:nvPr/>
+        </p:nvSpPr>
+        <p:spPr>
+          <a:xfrm>
+            <a:off x="0" y="0"/>
+            <a:ext cx="12191695" cy="960120"/>
+          </a:xfrm>
+          <a:prstGeom prst="rect">
+            <a:avLst/>
+          </a:prstGeom>
+          <a:solidFill>
+            <a:srgbClr val="095292"/>
+          </a:solidFill>
+          <a:ln>
+            <a:noFill/>
+          </a:ln>
+        </p:spPr>
+        <p:style>
+          <a:lnRef idx="1">
+            <a:schemeClr val="accent1"/>
+          </a:lnRef>
+          <a:fillRef idx="3">
+            <a:schemeClr val="accent1"/>
+          </a:fillRef>
+          <a:effectRef idx="2">
+            <a:schemeClr val="accent1"/>
+          </a:effectRef>
+          <a:fontRef idx="minor">
+            <a:schemeClr val="lt1"/>
+          </a:fontRef>
+        </p:style>
+        <p:txBody>
+          <a:bodyPr rtlCol="0" anchor="ctr"/>
+          <a:lstStyle/>
+          <a:p>
+            <a:pPr algn="ctr"/>
+          </a:p>
+        </p:txBody>
+      </p:sp>
+      <p:sp>
+        <p:nvSpPr>
+          <p:cNvPr id="3" name="Rectangle 2"/>
+          <p:cNvSpPr/>
+          <p:nvPr/>
+        </p:nvSpPr>
+        <p:spPr>
+          <a:xfrm>
+            <a:off x="0" y="960120"/>
+            <a:ext cx="12191695" cy="41148"/>
+          </a:xfrm>
+          <a:prstGeom prst="rect">
+            <a:avLst/>
+          </a:prstGeom>
+          <a:solidFill>
+            <a:srgbClr val="FFD000"/>
+          </a:solidFill>
+          <a:ln>
+            <a:noFill/>
+          </a:ln>
+        </p:spPr>
+        <p:style>
+          <a:lnRef idx="1">
+            <a:schemeClr val="accent1"/>
+          </a:lnRef>
+          <a:fillRef idx="3">
+            <a:schemeClr val="accent1"/>
+          </a:fillRef>
+          <a:effectRef idx="2">
+            <a:schemeClr val="accent1"/>
+          </a:effectRef>
+          <a:fontRef idx="minor">
+            <a:schemeClr val="lt1"/>
+          </a:fontRef>
+        </p:style>
+        <p:txBody>
+          <a:bodyPr rtlCol="0" anchor="ctr"/>
+          <a:lstStyle/>
+          <a:p>
+            <a:pPr algn="ctr"/>
+          </a:p>
+        </p:txBody>
+      </p:sp>
+      <p:sp>
+        <p:nvSpPr>
+          <p:cNvPr id="4" name="TextBox 3"/>
+          <p:cNvSpPr txBox="1"/>
+          <p:nvPr/>
+        </p:nvSpPr>
+        <p:spPr>
+          <a:xfrm>
+            <a:off x="457200" y="164592"/>
+            <a:ext cx="11277295" cy="502920"/>
+          </a:xfrm>
+          <a:prstGeom prst="rect">
+            <a:avLst/>
+          </a:prstGeom>
+          <a:noFill/>
+        </p:spPr>
+        <p:txBody>
+          <a:bodyPr wrap="square">
+            <a:spAutoFit/>
+          </a:bodyPr>
+          <a:lstStyle/>
+          <a:p>
+            <a:r>
+              <a:rPr sz="2600" b="1" i="0">
+                <a:solidFill>
+                  <a:srgbClr val="FFFFFF"/>
+                </a:solidFill>
+                <a:latin typeface="Calibri"/>
+              </a:rPr>
+              <a:t>Para la Clase 14</a:t>
+            </a:r>
+          </a:p>
+        </p:txBody>
+      </p:sp>
+      <p:sp>
+        <p:nvSpPr>
+          <p:cNvPr id="5" name="TextBox 4"/>
+          <p:cNvSpPr txBox="1"/>
+          <p:nvPr/>
+        </p:nvSpPr>
+        <p:spPr>
+          <a:xfrm>
+            <a:off x="457200" y="1170432"/>
+            <a:ext cx="11277295" cy="5230368"/>
+          </a:xfrm>
+          <a:prstGeom prst="rect">
+            <a:avLst/>
+          </a:prstGeom>
+          <a:noFill/>
+        </p:spPr>
+        <p:txBody>
+          <a:bodyPr wrap="square">
+            <a:spAutoFit/>
+          </a:bodyPr>
+          <a:lstStyle/>
+          <a:p>
+            <a:pPr>
+              <a:spcAft>
+                <a:spcPts val="800"/>
+              </a:spcAft>
+            </a:pPr>
+            <a:r>
+              <a:rPr sz="2000" b="0" i="0">
+                <a:solidFill>
+                  <a:srgbClr val="333333"/>
+                </a:solidFill>
+                <a:latin typeface="Calibri"/>
+              </a:rPr>
+              <a:t>–   </a:t>
+            </a:r>
+            <a:r>
+              <a:rPr sz="2000" b="1" i="0">
+                <a:solidFill>
+                  <a:srgbClr val="333333"/>
+                </a:solidFill>
+                <a:latin typeface="Calibri"/>
+              </a:rPr>
+              <a:t>Trabajo dirigido:</a:t>
+            </a:r>
+            <a:r>
+              <a:rPr sz="2000" b="0" i="0">
+                <a:solidFill>
+                  <a:srgbClr val="333333"/>
+                </a:solidFill>
+                <a:latin typeface="Calibri"/>
+              </a:rPr>
+              <a:t> Aplicación de matrices de evaluación — dejar la matriz de impacto completa en el documento del equipo, con indicadores, negativos y mitigaciones.</a:t>
+            </a:r>
+          </a:p>
+          <a:p>
+            <a:pPr>
+              <a:spcAft>
+                <a:spcPts val="800"/>
+              </a:spcAft>
+            </a:pPr>
+            <a:r>
+              <a:rPr sz="2000" b="0" i="0">
+                <a:solidFill>
+                  <a:srgbClr val="333333"/>
+                </a:solidFill>
+                <a:latin typeface="Calibri"/>
+              </a:rPr>
+              <a:t>–   </a:t>
+            </a:r>
+            <a:r>
+              <a:rPr sz="2000" b="1" i="0">
+                <a:solidFill>
+                  <a:srgbClr val="333333"/>
+                </a:solidFill>
+                <a:latin typeface="Calibri"/>
+              </a:rPr>
+              <a:t>Trabajo independiente:</a:t>
+            </a:r>
+            <a:r>
+              <a:rPr sz="2000" b="0" i="0">
+                <a:solidFill>
+                  <a:srgbClr val="333333"/>
+                </a:solidFill>
+                <a:latin typeface="Calibri"/>
+              </a:rPr>
+              <a:t> Informe de evaluación del impacto: media página que resuma </a:t>
+            </a:r>
+            <a:r>
+              <a:rPr sz="2000" b="1" i="0">
+                <a:solidFill>
+                  <a:srgbClr val="333333"/>
+                </a:solidFill>
+                <a:latin typeface="Calibri"/>
+              </a:rPr>
+              <a:t>el impacto positivo más fuerte con su número y el negativo más importante con su mitigación</a:t>
+            </a:r>
+            <a:r>
+              <a:rPr sz="2000" b="0" i="0">
+                <a:solidFill>
+                  <a:srgbClr val="333333"/>
+                </a:solidFill>
+                <a:latin typeface="Calibri"/>
+              </a:rPr>
+              <a:t>. Es el borrador de dos diapositivas de la presentación final.</a:t>
+            </a:r>
+          </a:p>
+          <a:p>
+            <a:pPr>
+              <a:spcAft>
+                <a:spcPts val="800"/>
+              </a:spcAft>
+            </a:pPr>
+            <a:r>
+              <a:rPr sz="2000" b="0" i="0">
+                <a:solidFill>
+                  <a:srgbClr val="333333"/>
+                </a:solidFill>
+                <a:latin typeface="Calibri"/>
+              </a:rPr>
+              <a:t>–   </a:t>
+            </a:r>
+            <a:r>
+              <a:rPr sz="2000" b="1" i="0">
+                <a:solidFill>
+                  <a:srgbClr val="333333"/>
+                </a:solidFill>
+                <a:latin typeface="Calibri"/>
+              </a:rPr>
+              <a:t>Clase 14 · Preparación de la presentación final</a:t>
+            </a:r>
+            <a:r>
+              <a:rPr sz="2000" b="0" i="0">
+                <a:solidFill>
+                  <a:srgbClr val="333333"/>
+                </a:solidFill>
+                <a:latin typeface="Calibri"/>
+              </a:rPr>
+              <a:t> — preparamos la </a:t>
+            </a:r>
+            <a:r>
+              <a:rPr sz="2000" b="1" i="0">
+                <a:solidFill>
+                  <a:srgbClr val="333333"/>
+                </a:solidFill>
+                <a:latin typeface="Calibri"/>
+              </a:rPr>
+              <a:t>presentación final</a:t>
+            </a:r>
+            <a:r>
+              <a:rPr sz="2000" b="0" i="0">
+                <a:solidFill>
+                  <a:srgbClr val="333333"/>
+                </a:solidFill>
+                <a:latin typeface="Calibri"/>
+              </a:rPr>
+              <a:t>: la estructura de 8 minutos, las diapositivas, el reparto entre integrantes y el </a:t>
+            </a:r>
+            <a:r>
+              <a:rPr sz="2000" b="1" i="0">
+                <a:solidFill>
+                  <a:srgbClr val="333333"/>
+                </a:solidFill>
+                <a:latin typeface="Calibri"/>
+              </a:rPr>
+              <a:t>ensayo general cronometrado</a:t>
+            </a:r>
+            <a:r>
+              <a:rPr sz="2000" b="0" i="0">
+                <a:solidFill>
+                  <a:srgbClr val="333333"/>
+                </a:solidFill>
+                <a:latin typeface="Calibri"/>
+              </a:rPr>
+              <a:t>.</a:t>
+            </a:r>
+          </a:p>
+          <a:p>
+            <a:pPr>
+              <a:spcAft>
+                <a:spcPts val="800"/>
+              </a:spcAft>
+            </a:pPr>
+            <a:r>
+              <a:rPr sz="2000" b="0" i="0">
+                <a:solidFill>
+                  <a:srgbClr val="333333"/>
+                </a:solidFill>
+                <a:latin typeface="Calibri"/>
+              </a:rPr>
+              <a:t>–   </a:t>
+            </a:r>
+            <a:r>
+              <a:rPr sz="2000" b="1" i="0">
+                <a:solidFill>
+                  <a:srgbClr val="333333"/>
+                </a:solidFill>
+                <a:latin typeface="Calibri"/>
+              </a:rPr>
+              <a:t>Aviso:</a:t>
+            </a:r>
+            <a:r>
+              <a:rPr sz="2000" b="0" i="0">
+                <a:solidFill>
+                  <a:srgbClr val="333333"/>
+                </a:solidFill>
+                <a:latin typeface="Calibri"/>
+              </a:rPr>
+              <a:t> Para la Clase 14 el </a:t>
+            </a:r>
+            <a:r>
+              <a:rPr sz="2000" b="1" i="0">
+                <a:solidFill>
+                  <a:srgbClr val="333333"/>
+                </a:solidFill>
+                <a:latin typeface="Calibri"/>
+              </a:rPr>
+              <a:t>prototipo tiene que estar ya ajustado</a:t>
+            </a:r>
+            <a:r>
+              <a:rPr sz="2000" b="0" i="0">
+                <a:solidFill>
+                  <a:srgbClr val="333333"/>
+                </a:solidFill>
+                <a:latin typeface="Calibri"/>
+              </a:rPr>
+              <a:t> con lo que salió de la Clase 12: si ensayan con la versión vieja, el ensayo no sirve. Traigan también la cuenta de Canva o Google Slides lista y </a:t>
+            </a:r>
+            <a:r>
+              <a:rPr sz="2000" b="1" i="0">
+                <a:solidFill>
+                  <a:srgbClr val="333333"/>
+                </a:solidFill>
+                <a:latin typeface="Calibri"/>
+              </a:rPr>
+              <a:t>quién va a hablar de qué</a:t>
+            </a:r>
+            <a:r>
+              <a:rPr sz="2000" b="0" i="0">
+                <a:solidFill>
+                  <a:srgbClr val="333333"/>
+                </a:solidFill>
+                <a:latin typeface="Calibri"/>
+              </a:rPr>
+              <a:t>.</a:t>
+            </a:r>
+          </a:p>
+          <a:p>
+            <a:pPr>
+              <a:spcAft>
+                <a:spcPts val="800"/>
+              </a:spcAft>
+            </a:pPr>
+            <a:r>
+              <a:rPr sz="2000" b="0" i="0">
+                <a:solidFill>
+                  <a:srgbClr val="333333"/>
+                </a:solidFill>
+                <a:latin typeface="Calibri"/>
+              </a:rPr>
+              <a:t>–   </a:t>
+            </a:r>
+            <a:r>
+              <a:rPr sz="2000" b="1" i="0">
+                <a:solidFill>
+                  <a:srgbClr val="333333"/>
+                </a:solidFill>
+                <a:latin typeface="Calibri"/>
+              </a:rPr>
+              <a:t>Antes de salir:</a:t>
+            </a:r>
+            <a:r>
+              <a:rPr sz="2000" b="0" i="0">
+                <a:solidFill>
+                  <a:srgbClr val="333333"/>
+                </a:solidFill>
+                <a:latin typeface="Calibri"/>
+              </a:rPr>
+              <a:t> el enlace del documento del equipo en el chat, con permiso de lectura para el docente, y el nombre del vocero de hoy.</a:t>
+            </a:r>
+          </a:p>
+        </p:txBody>
+      </p:sp>
+      <p:sp>
+        <p:nvSpPr>
+          <p:cNvPr id="6" name="TextBox 5"/>
+          <p:cNvSpPr txBox="1"/>
+          <p:nvPr/>
+        </p:nvSpPr>
+        <p:spPr>
+          <a:xfrm>
+            <a:off x="11185855" y="6473952"/>
+            <a:ext cx="640080" cy="274320"/>
+          </a:xfrm>
+          <a:prstGeom prst="rect">
+            <a:avLst/>
+          </a:prstGeom>
+          <a:noFill/>
+        </p:spPr>
+        <p:txBody>
+          <a:bodyPr wrap="square">
+            <a:spAutoFit/>
+          </a:bodyPr>
+          <a:lstStyle/>
+          <a:p>
+            <a:pPr algn="r"/>
+            <a:r>
+              <a:rPr sz="1100" b="0" i="0">
+                <a:solidFill>
+                  <a:srgbClr val="666666"/>
+                </a:solidFill>
+                <a:latin typeface="Calibri"/>
+              </a:rPr>
+              <a:t>26</a:t>
+            </a:r>
+          </a:p>
+        </p:txBody>
+      </p:sp>
+    </p:spTree>
+  </p:cSld>
+  <p:clrMapOvr>
+    <a:masterClrMapping/>
+  </p:clrMapOvr>
+</p:sld>
+</file>
+
+<file path=ppt/slides/slide27.xml><?xml version="1.0" encoding="utf-8"?>
 <p:sld xmlns:a="http://schemas.openxmlformats.org/drawingml/2006/main" xmlns:p="http://schemas.openxmlformats.org/presentationml/2006/main" xmlns:r="http://schemas.openxmlformats.org/officeDocument/2006/relationships">
   <p:cSld>
     <p:bg>

--- a/Introduccion a la Ingenieria/Clases/Clase 13 - Evaluacion de impacto social y ambiental/Presentacion.pptx
+++ b/Introduccion a la Ingenieria/Clases/Clase 13 - Evaluacion de impacto social y ambiental/Presentacion.pptx
@@ -18,9 +18,6 @@
     <p:sldId id="266" r:id="rId18"/>
     <p:sldId id="267" r:id="rId19"/>
     <p:sldId id="268" r:id="rId20"/>
-    <p:sldId id="269" r:id="rId21"/>
-    <p:sldId id="270" r:id="rId22"/>
-    <p:sldId id="271" r:id="rId23"/>
   </p:sldIdLst>
   <p:sldSz cx="12191695" cy="6858000" type="screen4x3"/>
   <p:notesSz cx="6858000" cy="9144000"/>
@@ -6646,2724 +6643,6 @@
         <p:spPr>
           <a:xfrm>
             <a:off x="0" y="0"/>
-            <a:ext cx="12191695" cy="1170432"/>
-          </a:xfrm>
-          <a:prstGeom prst="rect">
-            <a:avLst/>
-          </a:prstGeom>
-          <a:solidFill>
-            <a:srgbClr val="095292"/>
-          </a:solidFill>
-          <a:ln>
-            <a:noFill/>
-          </a:ln>
-        </p:spPr>
-        <p:style>
-          <a:lnRef idx="1">
-            <a:schemeClr val="accent1"/>
-          </a:lnRef>
-          <a:fillRef idx="3">
-            <a:schemeClr val="accent1"/>
-          </a:fillRef>
-          <a:effectRef idx="2">
-            <a:schemeClr val="accent1"/>
-          </a:effectRef>
-          <a:fontRef idx="minor">
-            <a:schemeClr val="lt1"/>
-          </a:fontRef>
-        </p:style>
-        <p:txBody>
-          <a:bodyPr rtlCol="0" anchor="ctr"/>
-          <a:lstStyle/>
-          <a:p>
-            <a:pPr algn="ctr"/>
-          </a:p>
-        </p:txBody>
-      </p:sp>
-      <p:sp>
-        <p:nvSpPr>
-          <p:cNvPr id="3" name="Rectangle 2"/>
-          <p:cNvSpPr/>
-          <p:nvPr/>
-        </p:nvSpPr>
-        <p:spPr>
-          <a:xfrm>
-            <a:off x="0" y="1170432"/>
-            <a:ext cx="12191695" cy="41148"/>
-          </a:xfrm>
-          <a:prstGeom prst="rect">
-            <a:avLst/>
-          </a:prstGeom>
-          <a:solidFill>
-            <a:srgbClr val="FFD000"/>
-          </a:solidFill>
-          <a:ln>
-            <a:noFill/>
-          </a:ln>
-        </p:spPr>
-        <p:style>
-          <a:lnRef idx="1">
-            <a:schemeClr val="accent1"/>
-          </a:lnRef>
-          <a:fillRef idx="3">
-            <a:schemeClr val="accent1"/>
-          </a:fillRef>
-          <a:effectRef idx="2">
-            <a:schemeClr val="accent1"/>
-          </a:effectRef>
-          <a:fontRef idx="minor">
-            <a:schemeClr val="lt1"/>
-          </a:fontRef>
-        </p:style>
-        <p:txBody>
-          <a:bodyPr rtlCol="0" anchor="ctr"/>
-          <a:lstStyle/>
-          <a:p>
-            <a:pPr algn="ctr"/>
-          </a:p>
-        </p:txBody>
-      </p:sp>
-      <p:sp>
-        <p:nvSpPr>
-          <p:cNvPr id="4" name="TextBox 3"/>
-          <p:cNvSpPr txBox="1"/>
-          <p:nvPr/>
-        </p:nvSpPr>
-        <p:spPr>
-          <a:xfrm>
-            <a:off x="457200" y="164592"/>
-            <a:ext cx="11277295" cy="384048"/>
-          </a:xfrm>
-          <a:prstGeom prst="rect">
-            <a:avLst/>
-          </a:prstGeom>
-          <a:noFill/>
-        </p:spPr>
-        <p:txBody>
-          <a:bodyPr wrap="square">
-            <a:spAutoFit/>
-          </a:bodyPr>
-          <a:lstStyle/>
-          <a:p>
-            <a:r>
-              <a:rPr sz="2600" b="1" i="0">
-                <a:solidFill>
-                  <a:srgbClr val="FFFFFF"/>
-                </a:solidFill>
-                <a:latin typeface="Calibri"/>
-              </a:rPr>
-              <a:t>Taller de hoy: Matriz de impacto social y ambiental</a:t>
-            </a:r>
-          </a:p>
-        </p:txBody>
-      </p:sp>
-      <p:sp>
-        <p:nvSpPr>
-          <p:cNvPr id="5" name="TextBox 4"/>
-          <p:cNvSpPr txBox="1"/>
-          <p:nvPr/>
-        </p:nvSpPr>
-        <p:spPr>
-          <a:xfrm>
-            <a:off x="457200" y="566928"/>
-            <a:ext cx="11277295" cy="411480"/>
-          </a:xfrm>
-          <a:prstGeom prst="rect">
-            <a:avLst/>
-          </a:prstGeom>
-          <a:noFill/>
-        </p:spPr>
-        <p:txBody>
-          <a:bodyPr wrap="square">
-            <a:spAutoFit/>
-          </a:bodyPr>
-          <a:lstStyle/>
-          <a:p>
-            <a:r>
-              <a:rPr sz="1400" b="0" i="0">
-                <a:solidFill>
-                  <a:srgbClr val="B8D8EE"/>
-                </a:solidFill>
-                <a:latin typeface="Calibri"/>
-              </a:rPr>
-              <a:t>17 min en equipos · 17 min: afectados, positivos con indicador, negativos, matriz y mitigación · matriz de impacto con indicadores, negativos declarados y mitigaciones</a:t>
-            </a:r>
-          </a:p>
-        </p:txBody>
-      </p:sp>
-      <p:sp>
-        <p:nvSpPr>
-          <p:cNvPr id="6" name="Rounded Rectangle 5"/>
-          <p:cNvSpPr/>
-          <p:nvPr/>
-        </p:nvSpPr>
-        <p:spPr>
-          <a:xfrm>
-            <a:off x="457200" y="1472184"/>
-            <a:ext cx="11277295" cy="566928"/>
-          </a:xfrm>
-          <a:prstGeom prst="roundRect">
-            <a:avLst>
-              <a:gd name="adj" fmla="val 12000"/>
-            </a:avLst>
-          </a:prstGeom>
-          <a:solidFill>
-            <a:srgbClr val="F2F2F2"/>
-          </a:solidFill>
-          <a:ln>
-            <a:noFill/>
-          </a:ln>
-        </p:spPr>
-        <p:style>
-          <a:lnRef idx="1">
-            <a:schemeClr val="accent1"/>
-          </a:lnRef>
-          <a:fillRef idx="3">
-            <a:schemeClr val="accent1"/>
-          </a:fillRef>
-          <a:effectRef idx="2">
-            <a:schemeClr val="accent1"/>
-          </a:effectRef>
-          <a:fontRef idx="minor">
-            <a:schemeClr val="lt1"/>
-          </a:fontRef>
-        </p:style>
-        <p:txBody>
-          <a:bodyPr rtlCol="0" anchor="ctr"/>
-          <a:lstStyle/>
-          <a:p>
-            <a:pPr algn="ctr"/>
-          </a:p>
-        </p:txBody>
-      </p:sp>
-      <p:sp>
-        <p:nvSpPr>
-          <p:cNvPr id="7" name="Rectangle 6"/>
-          <p:cNvSpPr/>
-          <p:nvPr/>
-        </p:nvSpPr>
-        <p:spPr>
-          <a:xfrm>
-            <a:off x="640080" y="1618487"/>
-            <a:ext cx="274320" cy="274320"/>
-          </a:xfrm>
-          <a:prstGeom prst="rect">
-            <a:avLst/>
-          </a:prstGeom>
-          <a:solidFill>
-            <a:srgbClr val="FFFFFF"/>
-          </a:solidFill>
-          <a:ln>
-            <a:solidFill>
-              <a:srgbClr val="333333"/>
-            </a:solidFill>
-          </a:ln>
-        </p:spPr>
-        <p:style>
-          <a:lnRef idx="1">
-            <a:schemeClr val="accent1"/>
-          </a:lnRef>
-          <a:fillRef idx="3">
-            <a:schemeClr val="accent1"/>
-          </a:fillRef>
-          <a:effectRef idx="2">
-            <a:schemeClr val="accent1"/>
-          </a:effectRef>
-          <a:fontRef idx="minor">
-            <a:schemeClr val="lt1"/>
-          </a:fontRef>
-        </p:style>
-        <p:txBody>
-          <a:bodyPr rtlCol="0" anchor="ctr"/>
-          <a:lstStyle/>
-          <a:p>
-            <a:pPr algn="ctr"/>
-          </a:p>
-        </p:txBody>
-      </p:sp>
-      <p:sp>
-        <p:nvSpPr>
-          <p:cNvPr id="8" name="Rectangle 7"/>
-          <p:cNvSpPr/>
-          <p:nvPr/>
-        </p:nvSpPr>
-        <p:spPr>
-          <a:xfrm>
-            <a:off x="640080" y="1618487"/>
-            <a:ext cx="73152" cy="274320"/>
-          </a:xfrm>
-          <a:prstGeom prst="rect">
-            <a:avLst/>
-          </a:prstGeom>
-          <a:solidFill>
-            <a:srgbClr val="269CCB"/>
-          </a:solidFill>
-          <a:ln>
-            <a:noFill/>
-          </a:ln>
-        </p:spPr>
-        <p:style>
-          <a:lnRef idx="1">
-            <a:schemeClr val="accent1"/>
-          </a:lnRef>
-          <a:fillRef idx="3">
-            <a:schemeClr val="accent1"/>
-          </a:fillRef>
-          <a:effectRef idx="2">
-            <a:schemeClr val="accent1"/>
-          </a:effectRef>
-          <a:fontRef idx="minor">
-            <a:schemeClr val="lt1"/>
-          </a:fontRef>
-        </p:style>
-        <p:txBody>
-          <a:bodyPr rtlCol="0" anchor="ctr"/>
-          <a:lstStyle/>
-          <a:p>
-            <a:pPr algn="ctr"/>
-          </a:p>
-        </p:txBody>
-      </p:sp>
-      <p:sp>
-        <p:nvSpPr>
-          <p:cNvPr id="9" name="TextBox 8"/>
-          <p:cNvSpPr txBox="1"/>
-          <p:nvPr/>
-        </p:nvSpPr>
-        <p:spPr>
-          <a:xfrm>
-            <a:off x="1097280" y="1563624"/>
-            <a:ext cx="10362895" cy="402336"/>
-          </a:xfrm>
-          <a:prstGeom prst="rect">
-            <a:avLst/>
-          </a:prstGeom>
-          <a:noFill/>
-        </p:spPr>
-        <p:txBody>
-          <a:bodyPr wrap="square" anchor="ctr"/>
-          <a:lstStyle/>
-          <a:p>
-            <a:r>
-              <a:rPr sz="1500" b="1" i="0">
-                <a:solidFill>
-                  <a:srgbClr val="333333"/>
-                </a:solidFill>
-                <a:latin typeface="Calibri"/>
-              </a:rPr>
-              <a:t>LOS AFECTADOS QUE NO SON USUARIOS</a:t>
-            </a:r>
-            <a:r>
-              <a:rPr sz="1500" b="0" i="0">
-                <a:solidFill>
-                  <a:srgbClr val="333333"/>
-                </a:solidFill>
-                <a:latin typeface="Calibri"/>
-              </a:rPr>
-              <a:t> — La lista de quienes reciben un efecto sin usar la solución: a quién le llega más trabajo, quién </a:t>
-            </a:r>
-            <a:r>
-              <a:rPr sz="1500" b="1" i="0">
-                <a:solidFill>
-                  <a:srgbClr val="333333"/>
-                </a:solidFill>
-                <a:latin typeface="Calibri"/>
-              </a:rPr>
-              <a:t>no puede</a:t>
-            </a:r>
-            <a:r>
-              <a:rPr sz="1500" b="0" i="0">
-                <a:solidFill>
-                  <a:srgbClr val="333333"/>
-                </a:solidFill>
-                <a:latin typeface="Calibri"/>
-              </a:rPr>
-              <a:t> usarla, y a quién desplaza.</a:t>
-            </a:r>
-          </a:p>
-        </p:txBody>
-      </p:sp>
-      <p:sp>
-        <p:nvSpPr>
-          <p:cNvPr id="10" name="Rounded Rectangle 9"/>
-          <p:cNvSpPr/>
-          <p:nvPr/>
-        </p:nvSpPr>
-        <p:spPr>
-          <a:xfrm>
-            <a:off x="457200" y="2148839"/>
-            <a:ext cx="11277295" cy="566928"/>
-          </a:xfrm>
-          <a:prstGeom prst="roundRect">
-            <a:avLst>
-              <a:gd name="adj" fmla="val 12000"/>
-            </a:avLst>
-          </a:prstGeom>
-          <a:solidFill>
-            <a:srgbClr val="F2F2F2"/>
-          </a:solidFill>
-          <a:ln>
-            <a:noFill/>
-          </a:ln>
-        </p:spPr>
-        <p:style>
-          <a:lnRef idx="1">
-            <a:schemeClr val="accent1"/>
-          </a:lnRef>
-          <a:fillRef idx="3">
-            <a:schemeClr val="accent1"/>
-          </a:fillRef>
-          <a:effectRef idx="2">
-            <a:schemeClr val="accent1"/>
-          </a:effectRef>
-          <a:fontRef idx="minor">
-            <a:schemeClr val="lt1"/>
-          </a:fontRef>
-        </p:style>
-        <p:txBody>
-          <a:bodyPr rtlCol="0" anchor="ctr"/>
-          <a:lstStyle/>
-          <a:p>
-            <a:pPr algn="ctr"/>
-          </a:p>
-        </p:txBody>
-      </p:sp>
-      <p:sp>
-        <p:nvSpPr>
-          <p:cNvPr id="11" name="Rectangle 10"/>
-          <p:cNvSpPr/>
-          <p:nvPr/>
-        </p:nvSpPr>
-        <p:spPr>
-          <a:xfrm>
-            <a:off x="640080" y="2295144"/>
-            <a:ext cx="274320" cy="274320"/>
-          </a:xfrm>
-          <a:prstGeom prst="rect">
-            <a:avLst/>
-          </a:prstGeom>
-          <a:solidFill>
-            <a:srgbClr val="FFFFFF"/>
-          </a:solidFill>
-          <a:ln>
-            <a:solidFill>
-              <a:srgbClr val="333333"/>
-            </a:solidFill>
-          </a:ln>
-        </p:spPr>
-        <p:style>
-          <a:lnRef idx="1">
-            <a:schemeClr val="accent1"/>
-          </a:lnRef>
-          <a:fillRef idx="3">
-            <a:schemeClr val="accent1"/>
-          </a:fillRef>
-          <a:effectRef idx="2">
-            <a:schemeClr val="accent1"/>
-          </a:effectRef>
-          <a:fontRef idx="minor">
-            <a:schemeClr val="lt1"/>
-          </a:fontRef>
-        </p:style>
-        <p:txBody>
-          <a:bodyPr rtlCol="0" anchor="ctr"/>
-          <a:lstStyle/>
-          <a:p>
-            <a:pPr algn="ctr"/>
-          </a:p>
-        </p:txBody>
-      </p:sp>
-      <p:sp>
-        <p:nvSpPr>
-          <p:cNvPr id="12" name="Rectangle 11"/>
-          <p:cNvSpPr/>
-          <p:nvPr/>
-        </p:nvSpPr>
-        <p:spPr>
-          <a:xfrm>
-            <a:off x="640080" y="2295144"/>
-            <a:ext cx="73152" cy="274320"/>
-          </a:xfrm>
-          <a:prstGeom prst="rect">
-            <a:avLst/>
-          </a:prstGeom>
-          <a:solidFill>
-            <a:srgbClr val="269CCB"/>
-          </a:solidFill>
-          <a:ln>
-            <a:noFill/>
-          </a:ln>
-        </p:spPr>
-        <p:style>
-          <a:lnRef idx="1">
-            <a:schemeClr val="accent1"/>
-          </a:lnRef>
-          <a:fillRef idx="3">
-            <a:schemeClr val="accent1"/>
-          </a:fillRef>
-          <a:effectRef idx="2">
-            <a:schemeClr val="accent1"/>
-          </a:effectRef>
-          <a:fontRef idx="minor">
-            <a:schemeClr val="lt1"/>
-          </a:fontRef>
-        </p:style>
-        <p:txBody>
-          <a:bodyPr rtlCol="0" anchor="ctr"/>
-          <a:lstStyle/>
-          <a:p>
-            <a:pPr algn="ctr"/>
-          </a:p>
-        </p:txBody>
-      </p:sp>
-      <p:sp>
-        <p:nvSpPr>
-          <p:cNvPr id="13" name="TextBox 12"/>
-          <p:cNvSpPr txBox="1"/>
-          <p:nvPr/>
-        </p:nvSpPr>
-        <p:spPr>
-          <a:xfrm>
-            <a:off x="1097280" y="2240279"/>
-            <a:ext cx="10362895" cy="402336"/>
-          </a:xfrm>
-          <a:prstGeom prst="rect">
-            <a:avLst/>
-          </a:prstGeom>
-          <a:noFill/>
-        </p:spPr>
-        <p:txBody>
-          <a:bodyPr wrap="square" anchor="ctr"/>
-          <a:lstStyle/>
-          <a:p>
-            <a:r>
-              <a:rPr sz="1500" b="1" i="0">
-                <a:solidFill>
-                  <a:srgbClr val="333333"/>
-                </a:solidFill>
-                <a:latin typeface="Calibri"/>
-              </a:rPr>
-              <a:t>TRES IMPACTOS POSITIVOS CON SU INDICADOR</a:t>
-            </a:r>
-            <a:r>
-              <a:rPr sz="1500" b="0" i="0">
-                <a:solidFill>
-                  <a:srgbClr val="333333"/>
-                </a:solidFill>
-                <a:latin typeface="Calibri"/>
-              </a:rPr>
-              <a:t> — Tres efectos buenos, cada uno con </a:t>
-            </a:r>
-            <a:r>
-              <a:rPr sz="1500" b="1" i="0">
-                <a:solidFill>
-                  <a:srgbClr val="333333"/>
-                </a:solidFill>
-                <a:latin typeface="Calibri"/>
-              </a:rPr>
-              <a:t>un número y una unidad</a:t>
-            </a:r>
-            <a:r>
-              <a:rPr sz="1500" b="0" i="0">
-                <a:solidFill>
-                  <a:srgbClr val="333333"/>
-                </a:solidFill>
-                <a:latin typeface="Calibri"/>
-              </a:rPr>
-              <a:t>: cuántas personas, cuántas veces, cuántos minutos, cuántos pesos.</a:t>
-            </a:r>
-          </a:p>
-        </p:txBody>
-      </p:sp>
-      <p:sp>
-        <p:nvSpPr>
-          <p:cNvPr id="14" name="Rounded Rectangle 13"/>
-          <p:cNvSpPr/>
-          <p:nvPr/>
-        </p:nvSpPr>
-        <p:spPr>
-          <a:xfrm>
-            <a:off x="457200" y="2825496"/>
-            <a:ext cx="11277295" cy="566928"/>
-          </a:xfrm>
-          <a:prstGeom prst="roundRect">
-            <a:avLst>
-              <a:gd name="adj" fmla="val 12000"/>
-            </a:avLst>
-          </a:prstGeom>
-          <a:solidFill>
-            <a:srgbClr val="F2F2F2"/>
-          </a:solidFill>
-          <a:ln>
-            <a:noFill/>
-          </a:ln>
-        </p:spPr>
-        <p:style>
-          <a:lnRef idx="1">
-            <a:schemeClr val="accent1"/>
-          </a:lnRef>
-          <a:fillRef idx="3">
-            <a:schemeClr val="accent1"/>
-          </a:fillRef>
-          <a:effectRef idx="2">
-            <a:schemeClr val="accent1"/>
-          </a:effectRef>
-          <a:fontRef idx="minor">
-            <a:schemeClr val="lt1"/>
-          </a:fontRef>
-        </p:style>
-        <p:txBody>
-          <a:bodyPr rtlCol="0" anchor="ctr"/>
-          <a:lstStyle/>
-          <a:p>
-            <a:pPr algn="ctr"/>
-          </a:p>
-        </p:txBody>
-      </p:sp>
-      <p:sp>
-        <p:nvSpPr>
-          <p:cNvPr id="15" name="Rectangle 14"/>
-          <p:cNvSpPr/>
-          <p:nvPr/>
-        </p:nvSpPr>
-        <p:spPr>
-          <a:xfrm>
-            <a:off x="640080" y="2971800"/>
-            <a:ext cx="274320" cy="274320"/>
-          </a:xfrm>
-          <a:prstGeom prst="rect">
-            <a:avLst/>
-          </a:prstGeom>
-          <a:solidFill>
-            <a:srgbClr val="FFFFFF"/>
-          </a:solidFill>
-          <a:ln>
-            <a:solidFill>
-              <a:srgbClr val="333333"/>
-            </a:solidFill>
-          </a:ln>
-        </p:spPr>
-        <p:style>
-          <a:lnRef idx="1">
-            <a:schemeClr val="accent1"/>
-          </a:lnRef>
-          <a:fillRef idx="3">
-            <a:schemeClr val="accent1"/>
-          </a:fillRef>
-          <a:effectRef idx="2">
-            <a:schemeClr val="accent1"/>
-          </a:effectRef>
-          <a:fontRef idx="minor">
-            <a:schemeClr val="lt1"/>
-          </a:fontRef>
-        </p:style>
-        <p:txBody>
-          <a:bodyPr rtlCol="0" anchor="ctr"/>
-          <a:lstStyle/>
-          <a:p>
-            <a:pPr algn="ctr"/>
-          </a:p>
-        </p:txBody>
-      </p:sp>
-      <p:sp>
-        <p:nvSpPr>
-          <p:cNvPr id="16" name="Rectangle 15"/>
-          <p:cNvSpPr/>
-          <p:nvPr/>
-        </p:nvSpPr>
-        <p:spPr>
-          <a:xfrm>
-            <a:off x="640080" y="2971800"/>
-            <a:ext cx="73152" cy="274320"/>
-          </a:xfrm>
-          <a:prstGeom prst="rect">
-            <a:avLst/>
-          </a:prstGeom>
-          <a:solidFill>
-            <a:srgbClr val="269CCB"/>
-          </a:solidFill>
-          <a:ln>
-            <a:noFill/>
-          </a:ln>
-        </p:spPr>
-        <p:style>
-          <a:lnRef idx="1">
-            <a:schemeClr val="accent1"/>
-          </a:lnRef>
-          <a:fillRef idx="3">
-            <a:schemeClr val="accent1"/>
-          </a:fillRef>
-          <a:effectRef idx="2">
-            <a:schemeClr val="accent1"/>
-          </a:effectRef>
-          <a:fontRef idx="minor">
-            <a:schemeClr val="lt1"/>
-          </a:fontRef>
-        </p:style>
-        <p:txBody>
-          <a:bodyPr rtlCol="0" anchor="ctr"/>
-          <a:lstStyle/>
-          <a:p>
-            <a:pPr algn="ctr"/>
-          </a:p>
-        </p:txBody>
-      </p:sp>
-      <p:sp>
-        <p:nvSpPr>
-          <p:cNvPr id="17" name="TextBox 16"/>
-          <p:cNvSpPr txBox="1"/>
-          <p:nvPr/>
-        </p:nvSpPr>
-        <p:spPr>
-          <a:xfrm>
-            <a:off x="1097280" y="2916936"/>
-            <a:ext cx="10362895" cy="402336"/>
-          </a:xfrm>
-          <a:prstGeom prst="rect">
-            <a:avLst/>
-          </a:prstGeom>
-          <a:noFill/>
-        </p:spPr>
-        <p:txBody>
-          <a:bodyPr wrap="square" anchor="ctr"/>
-          <a:lstStyle/>
-          <a:p>
-            <a:r>
-              <a:rPr sz="1500" b="1" i="0">
-                <a:solidFill>
-                  <a:srgbClr val="333333"/>
-                </a:solidFill>
-                <a:latin typeface="Calibri"/>
-              </a:rPr>
-              <a:t>DOS IMPACTOS NEGATIVOS O RIESGOS</a:t>
-            </a:r>
-            <a:r>
-              <a:rPr sz="1500" b="0" i="0">
-                <a:solidFill>
-                  <a:srgbClr val="333333"/>
-                </a:solidFill>
-                <a:latin typeface="Calibri"/>
-              </a:rPr>
-              <a:t> — Dos efectos malos, con </a:t>
-            </a:r>
-            <a:r>
-              <a:rPr sz="1500" b="1" i="0">
-                <a:solidFill>
-                  <a:srgbClr val="333333"/>
-                </a:solidFill>
-                <a:latin typeface="Calibri"/>
-              </a:rPr>
-              <a:t>quién los recibe</a:t>
-            </a:r>
-            <a:r>
-              <a:rPr sz="1500" b="0" i="0">
-                <a:solidFill>
-                  <a:srgbClr val="333333"/>
-                </a:solidFill>
-                <a:latin typeface="Calibri"/>
-              </a:rPr>
-              <a:t> exactamente. Si no encuentran ninguno, pregúntense quién trabaja más por su solución.</a:t>
-            </a:r>
-          </a:p>
-        </p:txBody>
-      </p:sp>
-      <p:sp>
-        <p:nvSpPr>
-          <p:cNvPr id="18" name="Rounded Rectangle 17"/>
-          <p:cNvSpPr/>
-          <p:nvPr/>
-        </p:nvSpPr>
-        <p:spPr>
-          <a:xfrm>
-            <a:off x="457200" y="3502152"/>
-            <a:ext cx="11277295" cy="566928"/>
-          </a:xfrm>
-          <a:prstGeom prst="roundRect">
-            <a:avLst>
-              <a:gd name="adj" fmla="val 12000"/>
-            </a:avLst>
-          </a:prstGeom>
-          <a:solidFill>
-            <a:srgbClr val="F2F2F2"/>
-          </a:solidFill>
-          <a:ln>
-            <a:noFill/>
-          </a:ln>
-        </p:spPr>
-        <p:style>
-          <a:lnRef idx="1">
-            <a:schemeClr val="accent1"/>
-          </a:lnRef>
-          <a:fillRef idx="3">
-            <a:schemeClr val="accent1"/>
-          </a:fillRef>
-          <a:effectRef idx="2">
-            <a:schemeClr val="accent1"/>
-          </a:effectRef>
-          <a:fontRef idx="minor">
-            <a:schemeClr val="lt1"/>
-          </a:fontRef>
-        </p:style>
-        <p:txBody>
-          <a:bodyPr rtlCol="0" anchor="ctr"/>
-          <a:lstStyle/>
-          <a:p>
-            <a:pPr algn="ctr"/>
-          </a:p>
-        </p:txBody>
-      </p:sp>
-      <p:sp>
-        <p:nvSpPr>
-          <p:cNvPr id="19" name="Rectangle 18"/>
-          <p:cNvSpPr/>
-          <p:nvPr/>
-        </p:nvSpPr>
-        <p:spPr>
-          <a:xfrm>
-            <a:off x="640080" y="3648456"/>
-            <a:ext cx="274320" cy="274320"/>
-          </a:xfrm>
-          <a:prstGeom prst="rect">
-            <a:avLst/>
-          </a:prstGeom>
-          <a:solidFill>
-            <a:srgbClr val="FFFFFF"/>
-          </a:solidFill>
-          <a:ln>
-            <a:solidFill>
-              <a:srgbClr val="333333"/>
-            </a:solidFill>
-          </a:ln>
-        </p:spPr>
-        <p:style>
-          <a:lnRef idx="1">
-            <a:schemeClr val="accent1"/>
-          </a:lnRef>
-          <a:fillRef idx="3">
-            <a:schemeClr val="accent1"/>
-          </a:fillRef>
-          <a:effectRef idx="2">
-            <a:schemeClr val="accent1"/>
-          </a:effectRef>
-          <a:fontRef idx="minor">
-            <a:schemeClr val="lt1"/>
-          </a:fontRef>
-        </p:style>
-        <p:txBody>
-          <a:bodyPr rtlCol="0" anchor="ctr"/>
-          <a:lstStyle/>
-          <a:p>
-            <a:pPr algn="ctr"/>
-          </a:p>
-        </p:txBody>
-      </p:sp>
-      <p:sp>
-        <p:nvSpPr>
-          <p:cNvPr id="20" name="Rectangle 19"/>
-          <p:cNvSpPr/>
-          <p:nvPr/>
-        </p:nvSpPr>
-        <p:spPr>
-          <a:xfrm>
-            <a:off x="640080" y="3648456"/>
-            <a:ext cx="73152" cy="274320"/>
-          </a:xfrm>
-          <a:prstGeom prst="rect">
-            <a:avLst/>
-          </a:prstGeom>
-          <a:solidFill>
-            <a:srgbClr val="269CCB"/>
-          </a:solidFill>
-          <a:ln>
-            <a:noFill/>
-          </a:ln>
-        </p:spPr>
-        <p:style>
-          <a:lnRef idx="1">
-            <a:schemeClr val="accent1"/>
-          </a:lnRef>
-          <a:fillRef idx="3">
-            <a:schemeClr val="accent1"/>
-          </a:fillRef>
-          <a:effectRef idx="2">
-            <a:schemeClr val="accent1"/>
-          </a:effectRef>
-          <a:fontRef idx="minor">
-            <a:schemeClr val="lt1"/>
-          </a:fontRef>
-        </p:style>
-        <p:txBody>
-          <a:bodyPr rtlCol="0" anchor="ctr"/>
-          <a:lstStyle/>
-          <a:p>
-            <a:pPr algn="ctr"/>
-          </a:p>
-        </p:txBody>
-      </p:sp>
-      <p:sp>
-        <p:nvSpPr>
-          <p:cNvPr id="21" name="TextBox 20"/>
-          <p:cNvSpPr txBox="1"/>
-          <p:nvPr/>
-        </p:nvSpPr>
-        <p:spPr>
-          <a:xfrm>
-            <a:off x="1097280" y="3593592"/>
-            <a:ext cx="10362895" cy="402336"/>
-          </a:xfrm>
-          <a:prstGeom prst="rect">
-            <a:avLst/>
-          </a:prstGeom>
-          <a:noFill/>
-        </p:spPr>
-        <p:txBody>
-          <a:bodyPr wrap="square" anchor="ctr"/>
-          <a:lstStyle/>
-          <a:p>
-            <a:r>
-              <a:rPr sz="1500" b="1" i="0">
-                <a:solidFill>
-                  <a:srgbClr val="333333"/>
-                </a:solidFill>
-                <a:latin typeface="Calibri"/>
-              </a:rPr>
-              <a:t>LA MATRIZ CALIFICADA</a:t>
-            </a:r>
-            <a:r>
-              <a:rPr sz="1500" b="0" i="0">
-                <a:solidFill>
-                  <a:srgbClr val="333333"/>
-                </a:solidFill>
-                <a:latin typeface="Calibri"/>
-              </a:rPr>
-              <a:t> — Cada impacto con su carácter, magnitud, extensión, duración y reversibilidad — y </a:t>
-            </a:r>
-            <a:r>
-              <a:rPr sz="1500" b="1" i="0">
-                <a:solidFill>
-                  <a:srgbClr val="333333"/>
-                </a:solidFill>
-                <a:latin typeface="Calibri"/>
-              </a:rPr>
-              <a:t>una línea de justificación</a:t>
-            </a:r>
-            <a:r>
-              <a:rPr sz="1500" b="0" i="0">
-                <a:solidFill>
-                  <a:srgbClr val="333333"/>
-                </a:solidFill>
-                <a:latin typeface="Calibri"/>
-              </a:rPr>
-              <a:t> por calificación.</a:t>
-            </a:r>
-          </a:p>
-        </p:txBody>
-      </p:sp>
-      <p:sp>
-        <p:nvSpPr>
-          <p:cNvPr id="22" name="Rounded Rectangle 21"/>
-          <p:cNvSpPr/>
-          <p:nvPr/>
-        </p:nvSpPr>
-        <p:spPr>
-          <a:xfrm>
-            <a:off x="457200" y="4178808"/>
-            <a:ext cx="11277295" cy="566928"/>
-          </a:xfrm>
-          <a:prstGeom prst="roundRect">
-            <a:avLst>
-              <a:gd name="adj" fmla="val 12000"/>
-            </a:avLst>
-          </a:prstGeom>
-          <a:solidFill>
-            <a:srgbClr val="F2F2F2"/>
-          </a:solidFill>
-          <a:ln>
-            <a:noFill/>
-          </a:ln>
-        </p:spPr>
-        <p:style>
-          <a:lnRef idx="1">
-            <a:schemeClr val="accent1"/>
-          </a:lnRef>
-          <a:fillRef idx="3">
-            <a:schemeClr val="accent1"/>
-          </a:fillRef>
-          <a:effectRef idx="2">
-            <a:schemeClr val="accent1"/>
-          </a:effectRef>
-          <a:fontRef idx="minor">
-            <a:schemeClr val="lt1"/>
-          </a:fontRef>
-        </p:style>
-        <p:txBody>
-          <a:bodyPr rtlCol="0" anchor="ctr"/>
-          <a:lstStyle/>
-          <a:p>
-            <a:pPr algn="ctr"/>
-          </a:p>
-        </p:txBody>
-      </p:sp>
-      <p:sp>
-        <p:nvSpPr>
-          <p:cNvPr id="23" name="Rectangle 22"/>
-          <p:cNvSpPr/>
-          <p:nvPr/>
-        </p:nvSpPr>
-        <p:spPr>
-          <a:xfrm>
-            <a:off x="640080" y="4325112"/>
-            <a:ext cx="274320" cy="274320"/>
-          </a:xfrm>
-          <a:prstGeom prst="rect">
-            <a:avLst/>
-          </a:prstGeom>
-          <a:solidFill>
-            <a:srgbClr val="FFFFFF"/>
-          </a:solidFill>
-          <a:ln>
-            <a:solidFill>
-              <a:srgbClr val="333333"/>
-            </a:solidFill>
-          </a:ln>
-        </p:spPr>
-        <p:style>
-          <a:lnRef idx="1">
-            <a:schemeClr val="accent1"/>
-          </a:lnRef>
-          <a:fillRef idx="3">
-            <a:schemeClr val="accent1"/>
-          </a:fillRef>
-          <a:effectRef idx="2">
-            <a:schemeClr val="accent1"/>
-          </a:effectRef>
-          <a:fontRef idx="minor">
-            <a:schemeClr val="lt1"/>
-          </a:fontRef>
-        </p:style>
-        <p:txBody>
-          <a:bodyPr rtlCol="0" anchor="ctr"/>
-          <a:lstStyle/>
-          <a:p>
-            <a:pPr algn="ctr"/>
-          </a:p>
-        </p:txBody>
-      </p:sp>
-      <p:sp>
-        <p:nvSpPr>
-          <p:cNvPr id="24" name="Rectangle 23"/>
-          <p:cNvSpPr/>
-          <p:nvPr/>
-        </p:nvSpPr>
-        <p:spPr>
-          <a:xfrm>
-            <a:off x="640080" y="4325112"/>
-            <a:ext cx="73152" cy="274320"/>
-          </a:xfrm>
-          <a:prstGeom prst="rect">
-            <a:avLst/>
-          </a:prstGeom>
-          <a:solidFill>
-            <a:srgbClr val="269CCB"/>
-          </a:solidFill>
-          <a:ln>
-            <a:noFill/>
-          </a:ln>
-        </p:spPr>
-        <p:style>
-          <a:lnRef idx="1">
-            <a:schemeClr val="accent1"/>
-          </a:lnRef>
-          <a:fillRef idx="3">
-            <a:schemeClr val="accent1"/>
-          </a:fillRef>
-          <a:effectRef idx="2">
-            <a:schemeClr val="accent1"/>
-          </a:effectRef>
-          <a:fontRef idx="minor">
-            <a:schemeClr val="lt1"/>
-          </a:fontRef>
-        </p:style>
-        <p:txBody>
-          <a:bodyPr rtlCol="0" anchor="ctr"/>
-          <a:lstStyle/>
-          <a:p>
-            <a:pPr algn="ctr"/>
-          </a:p>
-        </p:txBody>
-      </p:sp>
-      <p:sp>
-        <p:nvSpPr>
-          <p:cNvPr id="25" name="TextBox 24"/>
-          <p:cNvSpPr txBox="1"/>
-          <p:nvPr/>
-        </p:nvSpPr>
-        <p:spPr>
-          <a:xfrm>
-            <a:off x="1097280" y="4270248"/>
-            <a:ext cx="10362895" cy="402336"/>
-          </a:xfrm>
-          <a:prstGeom prst="rect">
-            <a:avLst/>
-          </a:prstGeom>
-          <a:noFill/>
-        </p:spPr>
-        <p:txBody>
-          <a:bodyPr wrap="square" anchor="ctr"/>
-          <a:lstStyle/>
-          <a:p>
-            <a:r>
-              <a:rPr sz="1500" b="1" i="0">
-                <a:solidFill>
-                  <a:srgbClr val="333333"/>
-                </a:solidFill>
-                <a:latin typeface="Calibri"/>
-              </a:rPr>
-              <a:t>LAS MEDIDAS DE MITIGACIÓN</a:t>
-            </a:r>
-            <a:r>
-              <a:rPr sz="1500" b="0" i="0">
-                <a:solidFill>
-                  <a:srgbClr val="333333"/>
-                </a:solidFill>
-                <a:latin typeface="Calibri"/>
-              </a:rPr>
-              <a:t> — Qué van a hacer para reducir cada impacto negativo. Puede ser </a:t>
-            </a:r>
-            <a:r>
-              <a:rPr sz="1500" b="1" i="0">
-                <a:solidFill>
-                  <a:srgbClr val="333333"/>
-                </a:solidFill>
-                <a:latin typeface="Calibri"/>
-              </a:rPr>
-              <a:t>una medida no digital</a:t>
-            </a:r>
-            <a:r>
-              <a:rPr sz="1500" b="0" i="0">
-                <a:solidFill>
-                  <a:srgbClr val="333333"/>
-                </a:solidFill>
-                <a:latin typeface="Calibri"/>
-              </a:rPr>
-              <a:t>, y muchas veces es la mejor.</a:t>
-            </a:r>
-          </a:p>
-        </p:txBody>
-      </p:sp>
-      <p:sp>
-        <p:nvSpPr>
-          <p:cNvPr id="26" name="TextBox 25"/>
-          <p:cNvSpPr txBox="1"/>
-          <p:nvPr/>
-        </p:nvSpPr>
-        <p:spPr>
-          <a:xfrm>
-            <a:off x="11185855" y="6473952"/>
-            <a:ext cx="640080" cy="274320"/>
-          </a:xfrm>
-          <a:prstGeom prst="rect">
-            <a:avLst/>
-          </a:prstGeom>
-          <a:noFill/>
-        </p:spPr>
-        <p:txBody>
-          <a:bodyPr wrap="square">
-            <a:spAutoFit/>
-          </a:bodyPr>
-          <a:lstStyle/>
-          <a:p>
-            <a:pPr algn="r"/>
-            <a:r>
-              <a:rPr sz="1100" b="0" i="0">
-                <a:solidFill>
-                  <a:srgbClr val="666666"/>
-                </a:solidFill>
-                <a:latin typeface="Calibri"/>
-              </a:rPr>
-              <a:t>13</a:t>
-            </a:r>
-          </a:p>
-        </p:txBody>
-      </p:sp>
-    </p:spTree>
-  </p:cSld>
-  <p:clrMapOvr>
-    <a:masterClrMapping/>
-  </p:clrMapOvr>
-</p:sld>
-</file>
-
-<file path=ppt/slides/slide14.xml><?xml version="1.0" encoding="utf-8"?>
-<p:sld xmlns:a="http://schemas.openxmlformats.org/drawingml/2006/main" xmlns:p="http://schemas.openxmlformats.org/presentationml/2006/main" xmlns:r="http://schemas.openxmlformats.org/officeDocument/2006/relationships">
-  <p:cSld>
-    <p:bg>
-      <p:bgPr>
-        <a:solidFill>
-          <a:srgbClr val="FFFFFF"/>
-        </a:solidFill>
-        <a:effectLst/>
-      </p:bgPr>
-    </p:bg>
-    <p:spTree>
-      <p:nvGrpSpPr>
-        <p:cNvPr id="1" name=""/>
-        <p:cNvGrpSpPr/>
-        <p:nvPr/>
-      </p:nvGrpSpPr>
-      <p:grpSpPr/>
-      <p:sp>
-        <p:nvSpPr>
-          <p:cNvPr id="2" name="Rectangle 1"/>
-          <p:cNvSpPr/>
-          <p:nvPr/>
-        </p:nvSpPr>
-        <p:spPr>
-          <a:xfrm>
-            <a:off x="0" y="0"/>
-            <a:ext cx="12191695" cy="1170432"/>
-          </a:xfrm>
-          <a:prstGeom prst="rect">
-            <a:avLst/>
-          </a:prstGeom>
-          <a:solidFill>
-            <a:srgbClr val="095292"/>
-          </a:solidFill>
-          <a:ln>
-            <a:noFill/>
-          </a:ln>
-        </p:spPr>
-        <p:style>
-          <a:lnRef idx="1">
-            <a:schemeClr val="accent1"/>
-          </a:lnRef>
-          <a:fillRef idx="3">
-            <a:schemeClr val="accent1"/>
-          </a:fillRef>
-          <a:effectRef idx="2">
-            <a:schemeClr val="accent1"/>
-          </a:effectRef>
-          <a:fontRef idx="minor">
-            <a:schemeClr val="lt1"/>
-          </a:fontRef>
-        </p:style>
-        <p:txBody>
-          <a:bodyPr rtlCol="0" anchor="ctr"/>
-          <a:lstStyle/>
-          <a:p>
-            <a:pPr algn="ctr"/>
-          </a:p>
-        </p:txBody>
-      </p:sp>
-      <p:sp>
-        <p:nvSpPr>
-          <p:cNvPr id="3" name="Rectangle 2"/>
-          <p:cNvSpPr/>
-          <p:nvPr/>
-        </p:nvSpPr>
-        <p:spPr>
-          <a:xfrm>
-            <a:off x="0" y="1170432"/>
-            <a:ext cx="12191695" cy="41148"/>
-          </a:xfrm>
-          <a:prstGeom prst="rect">
-            <a:avLst/>
-          </a:prstGeom>
-          <a:solidFill>
-            <a:srgbClr val="FFD000"/>
-          </a:solidFill>
-          <a:ln>
-            <a:noFill/>
-          </a:ln>
-        </p:spPr>
-        <p:style>
-          <a:lnRef idx="1">
-            <a:schemeClr val="accent1"/>
-          </a:lnRef>
-          <a:fillRef idx="3">
-            <a:schemeClr val="accent1"/>
-          </a:fillRef>
-          <a:effectRef idx="2">
-            <a:schemeClr val="accent1"/>
-          </a:effectRef>
-          <a:fontRef idx="minor">
-            <a:schemeClr val="lt1"/>
-          </a:fontRef>
-        </p:style>
-        <p:txBody>
-          <a:bodyPr rtlCol="0" anchor="ctr"/>
-          <a:lstStyle/>
-          <a:p>
-            <a:pPr algn="ctr"/>
-          </a:p>
-        </p:txBody>
-      </p:sp>
-      <p:sp>
-        <p:nvSpPr>
-          <p:cNvPr id="4" name="TextBox 3"/>
-          <p:cNvSpPr txBox="1"/>
-          <p:nvPr/>
-        </p:nvSpPr>
-        <p:spPr>
-          <a:xfrm>
-            <a:off x="457200" y="164592"/>
-            <a:ext cx="11277295" cy="384048"/>
-          </a:xfrm>
-          <a:prstGeom prst="rect">
-            <a:avLst/>
-          </a:prstGeom>
-          <a:noFill/>
-        </p:spPr>
-        <p:txBody>
-          <a:bodyPr wrap="square">
-            <a:spAutoFit/>
-          </a:bodyPr>
-          <a:lstStyle/>
-          <a:p>
-            <a:r>
-              <a:rPr sz="2600" b="1" i="0">
-                <a:solidFill>
-                  <a:srgbClr val="FFFFFF"/>
-                </a:solidFill>
-                <a:latin typeface="Calibri"/>
-              </a:rPr>
-              <a:t>Cómo se expone en 3 minutos</a:t>
-            </a:r>
-          </a:p>
-        </p:txBody>
-      </p:sp>
-      <p:sp>
-        <p:nvSpPr>
-          <p:cNvPr id="5" name="TextBox 4"/>
-          <p:cNvSpPr txBox="1"/>
-          <p:nvPr/>
-        </p:nvSpPr>
-        <p:spPr>
-          <a:xfrm>
-            <a:off x="457200" y="566928"/>
-            <a:ext cx="11277295" cy="411480"/>
-          </a:xfrm>
-          <a:prstGeom prst="rect">
-            <a:avLst/>
-          </a:prstGeom>
-          <a:noFill/>
-        </p:spPr>
-        <p:txBody>
-          <a:bodyPr wrap="square">
-            <a:spAutoFit/>
-          </a:bodyPr>
-          <a:lstStyle/>
-          <a:p>
-            <a:r>
-              <a:rPr sz="1400" b="0" i="0">
-                <a:solidFill>
-                  <a:srgbClr val="B8D8EE"/>
-                </a:solidFill>
-                <a:latin typeface="Calibri"/>
-              </a:rPr>
-              <a:t>Habla el vocero con la pantalla ya compartida · cronómetro en pantalla · se corta al llegar a cero</a:t>
-            </a:r>
-          </a:p>
-        </p:txBody>
-      </p:sp>
-      <p:sp>
-        <p:nvSpPr>
-          <p:cNvPr id="6" name="Rounded Rectangle 5"/>
-          <p:cNvSpPr/>
-          <p:nvPr/>
-        </p:nvSpPr>
-        <p:spPr>
-          <a:xfrm>
-            <a:off x="457200" y="1444752"/>
-            <a:ext cx="11277295" cy="908913"/>
-          </a:xfrm>
-          <a:prstGeom prst="roundRect">
-            <a:avLst>
-              <a:gd name="adj" fmla="val 12000"/>
-            </a:avLst>
-          </a:prstGeom>
-          <a:solidFill>
-            <a:srgbClr val="F2F2F2"/>
-          </a:solidFill>
-          <a:ln>
-            <a:noFill/>
-          </a:ln>
-        </p:spPr>
-        <p:style>
-          <a:lnRef idx="1">
-            <a:schemeClr val="accent1"/>
-          </a:lnRef>
-          <a:fillRef idx="3">
-            <a:schemeClr val="accent1"/>
-          </a:fillRef>
-          <a:effectRef idx="2">
-            <a:schemeClr val="accent1"/>
-          </a:effectRef>
-          <a:fontRef idx="minor">
-            <a:schemeClr val="lt1"/>
-          </a:fontRef>
-        </p:style>
-        <p:txBody>
-          <a:bodyPr rtlCol="0" anchor="ctr"/>
-          <a:lstStyle/>
-          <a:p>
-            <a:pPr algn="ctr"/>
-          </a:p>
-        </p:txBody>
-      </p:sp>
-      <p:sp>
-        <p:nvSpPr>
-          <p:cNvPr id="7" name="Rounded Rectangle 6"/>
-          <p:cNvSpPr/>
-          <p:nvPr/>
-        </p:nvSpPr>
-        <p:spPr>
-          <a:xfrm>
-            <a:off x="594360" y="1679752"/>
-            <a:ext cx="438912" cy="438912"/>
-          </a:xfrm>
-          <a:prstGeom prst="roundRect">
-            <a:avLst>
-              <a:gd name="adj" fmla="val 12000"/>
-            </a:avLst>
-          </a:prstGeom>
-          <a:solidFill>
-            <a:srgbClr val="095292"/>
-          </a:solidFill>
-          <a:ln>
-            <a:noFill/>
-          </a:ln>
-        </p:spPr>
-        <p:style>
-          <a:lnRef idx="1">
-            <a:schemeClr val="accent1"/>
-          </a:lnRef>
-          <a:fillRef idx="3">
-            <a:schemeClr val="accent1"/>
-          </a:fillRef>
-          <a:effectRef idx="2">
-            <a:schemeClr val="accent1"/>
-          </a:effectRef>
-          <a:fontRef idx="minor">
-            <a:schemeClr val="lt1"/>
-          </a:fontRef>
-        </p:style>
-        <p:txBody>
-          <a:bodyPr rtlCol="0" anchor="ctr"/>
-          <a:lstStyle/>
-          <a:p>
-            <a:pPr algn="ctr"/>
-          </a:p>
-        </p:txBody>
-      </p:sp>
-      <p:sp>
-        <p:nvSpPr>
-          <p:cNvPr id="8" name="TextBox 7"/>
-          <p:cNvSpPr txBox="1"/>
-          <p:nvPr/>
-        </p:nvSpPr>
-        <p:spPr>
-          <a:xfrm>
-            <a:off x="594360" y="1679752"/>
-            <a:ext cx="438912" cy="438912"/>
-          </a:xfrm>
-          <a:prstGeom prst="rect">
-            <a:avLst/>
-          </a:prstGeom>
-          <a:noFill/>
-        </p:spPr>
-        <p:txBody>
-          <a:bodyPr wrap="square" anchor="ctr"/>
-          <a:lstStyle/>
-          <a:p>
-            <a:pPr algn="ctr"/>
-            <a:r>
-              <a:rPr sz="1600" b="1" i="0">
-                <a:solidFill>
-                  <a:srgbClr val="FFFFFF"/>
-                </a:solidFill>
-                <a:latin typeface="Calibri"/>
-              </a:rPr>
-              <a:t>1</a:t>
-            </a:r>
-          </a:p>
-        </p:txBody>
-      </p:sp>
-      <p:sp>
-        <p:nvSpPr>
-          <p:cNvPr id="9" name="TextBox 8"/>
-          <p:cNvSpPr txBox="1"/>
-          <p:nvPr/>
-        </p:nvSpPr>
-        <p:spPr>
-          <a:xfrm>
-            <a:off x="1188720" y="1536192"/>
-            <a:ext cx="10271455" cy="744321"/>
-          </a:xfrm>
-          <a:prstGeom prst="rect">
-            <a:avLst/>
-          </a:prstGeom>
-          <a:noFill/>
-        </p:spPr>
-        <p:txBody>
-          <a:bodyPr wrap="square" anchor="ctr"/>
-          <a:lstStyle/>
-          <a:p>
-            <a:r>
-              <a:rPr sz="1500" b="1" i="0">
-                <a:solidFill>
-                  <a:srgbClr val="095292"/>
-                </a:solidFill>
-                <a:latin typeface="Calibri"/>
-              </a:rPr>
-              <a:t>30 s · Los afectados que no son usuarios</a:t>
-            </a:r>
-          </a:p>
-          <a:p>
-            <a:pPr>
-              <a:spcBef>
-                <a:spcPts val="200"/>
-              </a:spcBef>
-            </a:pPr>
-            <a:r>
-              <a:rPr sz="1300" b="0" i="0">
-                <a:solidFill>
-                  <a:srgbClr val="333333"/>
-                </a:solidFill>
-                <a:latin typeface="Calibri"/>
-              </a:rPr>
-              <a:t>Nómbrelos. Sin «la comunidad».</a:t>
-            </a:r>
-          </a:p>
-        </p:txBody>
-      </p:sp>
-      <p:sp>
-        <p:nvSpPr>
-          <p:cNvPr id="10" name="Rounded Rectangle 9"/>
-          <p:cNvSpPr/>
-          <p:nvPr/>
-        </p:nvSpPr>
-        <p:spPr>
-          <a:xfrm>
-            <a:off x="457200" y="2445105"/>
-            <a:ext cx="11277295" cy="908913"/>
-          </a:xfrm>
-          <a:prstGeom prst="roundRect">
-            <a:avLst>
-              <a:gd name="adj" fmla="val 12000"/>
-            </a:avLst>
-          </a:prstGeom>
-          <a:solidFill>
-            <a:srgbClr val="E8F4FA"/>
-          </a:solidFill>
-          <a:ln>
-            <a:noFill/>
-          </a:ln>
-        </p:spPr>
-        <p:style>
-          <a:lnRef idx="1">
-            <a:schemeClr val="accent1"/>
-          </a:lnRef>
-          <a:fillRef idx="3">
-            <a:schemeClr val="accent1"/>
-          </a:fillRef>
-          <a:effectRef idx="2">
-            <a:schemeClr val="accent1"/>
-          </a:effectRef>
-          <a:fontRef idx="minor">
-            <a:schemeClr val="lt1"/>
-          </a:fontRef>
-        </p:style>
-        <p:txBody>
-          <a:bodyPr rtlCol="0" anchor="ctr"/>
-          <a:lstStyle/>
-          <a:p>
-            <a:pPr algn="ctr"/>
-          </a:p>
-        </p:txBody>
-      </p:sp>
-      <p:sp>
-        <p:nvSpPr>
-          <p:cNvPr id="11" name="Rounded Rectangle 10"/>
-          <p:cNvSpPr/>
-          <p:nvPr/>
-        </p:nvSpPr>
-        <p:spPr>
-          <a:xfrm>
-            <a:off x="594360" y="2680106"/>
-            <a:ext cx="438912" cy="438912"/>
-          </a:xfrm>
-          <a:prstGeom prst="roundRect">
-            <a:avLst>
-              <a:gd name="adj" fmla="val 12000"/>
-            </a:avLst>
-          </a:prstGeom>
-          <a:solidFill>
-            <a:srgbClr val="095292"/>
-          </a:solidFill>
-          <a:ln>
-            <a:noFill/>
-          </a:ln>
-        </p:spPr>
-        <p:style>
-          <a:lnRef idx="1">
-            <a:schemeClr val="accent1"/>
-          </a:lnRef>
-          <a:fillRef idx="3">
-            <a:schemeClr val="accent1"/>
-          </a:fillRef>
-          <a:effectRef idx="2">
-            <a:schemeClr val="accent1"/>
-          </a:effectRef>
-          <a:fontRef idx="minor">
-            <a:schemeClr val="lt1"/>
-          </a:fontRef>
-        </p:style>
-        <p:txBody>
-          <a:bodyPr rtlCol="0" anchor="ctr"/>
-          <a:lstStyle/>
-          <a:p>
-            <a:pPr algn="ctr"/>
-          </a:p>
-        </p:txBody>
-      </p:sp>
-      <p:sp>
-        <p:nvSpPr>
-          <p:cNvPr id="12" name="TextBox 11"/>
-          <p:cNvSpPr txBox="1"/>
-          <p:nvPr/>
-        </p:nvSpPr>
-        <p:spPr>
-          <a:xfrm>
-            <a:off x="594360" y="2680106"/>
-            <a:ext cx="438912" cy="438912"/>
-          </a:xfrm>
-          <a:prstGeom prst="rect">
-            <a:avLst/>
-          </a:prstGeom>
-          <a:noFill/>
-        </p:spPr>
-        <p:txBody>
-          <a:bodyPr wrap="square" anchor="ctr"/>
-          <a:lstStyle/>
-          <a:p>
-            <a:pPr algn="ctr"/>
-            <a:r>
-              <a:rPr sz="1600" b="1" i="0">
-                <a:solidFill>
-                  <a:srgbClr val="FFFFFF"/>
-                </a:solidFill>
-                <a:latin typeface="Calibri"/>
-              </a:rPr>
-              <a:t>2</a:t>
-            </a:r>
-          </a:p>
-        </p:txBody>
-      </p:sp>
-      <p:sp>
-        <p:nvSpPr>
-          <p:cNvPr id="13" name="TextBox 12"/>
-          <p:cNvSpPr txBox="1"/>
-          <p:nvPr/>
-        </p:nvSpPr>
-        <p:spPr>
-          <a:xfrm>
-            <a:off x="1188720" y="2536545"/>
-            <a:ext cx="10271455" cy="744321"/>
-          </a:xfrm>
-          <a:prstGeom prst="rect">
-            <a:avLst/>
-          </a:prstGeom>
-          <a:noFill/>
-        </p:spPr>
-        <p:txBody>
-          <a:bodyPr wrap="square" anchor="ctr"/>
-          <a:lstStyle/>
-          <a:p>
-            <a:r>
-              <a:rPr sz="1500" b="1" i="0">
-                <a:solidFill>
-                  <a:srgbClr val="095292"/>
-                </a:solidFill>
-                <a:latin typeface="Calibri"/>
-              </a:rPr>
-              <a:t>40 s · Un impacto positivo con su número</a:t>
-            </a:r>
-          </a:p>
-          <a:p>
-            <a:pPr>
-              <a:spcBef>
-                <a:spcPts val="200"/>
-              </a:spcBef>
-            </a:pPr>
-            <a:r>
-              <a:rPr sz="1300" b="0" i="0">
-                <a:solidFill>
-                  <a:srgbClr val="333333"/>
-                </a:solidFill>
-                <a:latin typeface="Calibri"/>
-              </a:rPr>
-              <a:t>El más fuerte, con indicador.</a:t>
-            </a:r>
-          </a:p>
-        </p:txBody>
-      </p:sp>
-      <p:sp>
-        <p:nvSpPr>
-          <p:cNvPr id="14" name="Rounded Rectangle 13"/>
-          <p:cNvSpPr/>
-          <p:nvPr/>
-        </p:nvSpPr>
-        <p:spPr>
-          <a:xfrm>
-            <a:off x="457200" y="3445459"/>
-            <a:ext cx="11277295" cy="908913"/>
-          </a:xfrm>
-          <a:prstGeom prst="roundRect">
-            <a:avLst>
-              <a:gd name="adj" fmla="val 12000"/>
-            </a:avLst>
-          </a:prstGeom>
-          <a:solidFill>
-            <a:srgbClr val="F2F2F2"/>
-          </a:solidFill>
-          <a:ln>
-            <a:noFill/>
-          </a:ln>
-        </p:spPr>
-        <p:style>
-          <a:lnRef idx="1">
-            <a:schemeClr val="accent1"/>
-          </a:lnRef>
-          <a:fillRef idx="3">
-            <a:schemeClr val="accent1"/>
-          </a:fillRef>
-          <a:effectRef idx="2">
-            <a:schemeClr val="accent1"/>
-          </a:effectRef>
-          <a:fontRef idx="minor">
-            <a:schemeClr val="lt1"/>
-          </a:fontRef>
-        </p:style>
-        <p:txBody>
-          <a:bodyPr rtlCol="0" anchor="ctr"/>
-          <a:lstStyle/>
-          <a:p>
-            <a:pPr algn="ctr"/>
-          </a:p>
-        </p:txBody>
-      </p:sp>
-      <p:sp>
-        <p:nvSpPr>
-          <p:cNvPr id="15" name="Rounded Rectangle 14"/>
-          <p:cNvSpPr/>
-          <p:nvPr/>
-        </p:nvSpPr>
-        <p:spPr>
-          <a:xfrm>
-            <a:off x="594360" y="3680460"/>
-            <a:ext cx="438912" cy="438912"/>
-          </a:xfrm>
-          <a:prstGeom prst="roundRect">
-            <a:avLst>
-              <a:gd name="adj" fmla="val 12000"/>
-            </a:avLst>
-          </a:prstGeom>
-          <a:solidFill>
-            <a:srgbClr val="095292"/>
-          </a:solidFill>
-          <a:ln>
-            <a:noFill/>
-          </a:ln>
-        </p:spPr>
-        <p:style>
-          <a:lnRef idx="1">
-            <a:schemeClr val="accent1"/>
-          </a:lnRef>
-          <a:fillRef idx="3">
-            <a:schemeClr val="accent1"/>
-          </a:fillRef>
-          <a:effectRef idx="2">
-            <a:schemeClr val="accent1"/>
-          </a:effectRef>
-          <a:fontRef idx="minor">
-            <a:schemeClr val="lt1"/>
-          </a:fontRef>
-        </p:style>
-        <p:txBody>
-          <a:bodyPr rtlCol="0" anchor="ctr"/>
-          <a:lstStyle/>
-          <a:p>
-            <a:pPr algn="ctr"/>
-          </a:p>
-        </p:txBody>
-      </p:sp>
-      <p:sp>
-        <p:nvSpPr>
-          <p:cNvPr id="16" name="TextBox 15"/>
-          <p:cNvSpPr txBox="1"/>
-          <p:nvPr/>
-        </p:nvSpPr>
-        <p:spPr>
-          <a:xfrm>
-            <a:off x="594360" y="3680460"/>
-            <a:ext cx="438912" cy="438912"/>
-          </a:xfrm>
-          <a:prstGeom prst="rect">
-            <a:avLst/>
-          </a:prstGeom>
-          <a:noFill/>
-        </p:spPr>
-        <p:txBody>
-          <a:bodyPr wrap="square" anchor="ctr"/>
-          <a:lstStyle/>
-          <a:p>
-            <a:pPr algn="ctr"/>
-            <a:r>
-              <a:rPr sz="1600" b="1" i="0">
-                <a:solidFill>
-                  <a:srgbClr val="FFFFFF"/>
-                </a:solidFill>
-                <a:latin typeface="Calibri"/>
-              </a:rPr>
-              <a:t>3</a:t>
-            </a:r>
-          </a:p>
-        </p:txBody>
-      </p:sp>
-      <p:sp>
-        <p:nvSpPr>
-          <p:cNvPr id="17" name="TextBox 16"/>
-          <p:cNvSpPr txBox="1"/>
-          <p:nvPr/>
-        </p:nvSpPr>
-        <p:spPr>
-          <a:xfrm>
-            <a:off x="1188720" y="3536899"/>
-            <a:ext cx="10271455" cy="744321"/>
-          </a:xfrm>
-          <a:prstGeom prst="rect">
-            <a:avLst/>
-          </a:prstGeom>
-          <a:noFill/>
-        </p:spPr>
-        <p:txBody>
-          <a:bodyPr wrap="square" anchor="ctr"/>
-          <a:lstStyle/>
-          <a:p>
-            <a:r>
-              <a:rPr sz="1500" b="1" i="0">
-                <a:solidFill>
-                  <a:srgbClr val="095292"/>
-                </a:solidFill>
-                <a:latin typeface="Calibri"/>
-              </a:rPr>
-              <a:t>70 s · El impacto negativo y su mitigación</a:t>
-            </a:r>
-          </a:p>
-          <a:p>
-            <a:pPr>
-              <a:spcBef>
-                <a:spcPts val="200"/>
-              </a:spcBef>
-            </a:pPr>
-            <a:r>
-              <a:rPr sz="1300" b="1" i="0">
-                <a:solidFill>
-                  <a:srgbClr val="333333"/>
-                </a:solidFill>
-                <a:latin typeface="Calibri"/>
-              </a:rPr>
-              <a:t>El minuto obligatorio.</a:t>
-            </a:r>
-            <a:r>
-              <a:rPr sz="1300" b="0" i="0">
-                <a:solidFill>
-                  <a:srgbClr val="333333"/>
-                </a:solidFill>
-                <a:latin typeface="Calibri"/>
-              </a:rPr>
-              <a:t> El más incómodo que hayan encontrado.</a:t>
-            </a:r>
-          </a:p>
-        </p:txBody>
-      </p:sp>
-      <p:sp>
-        <p:nvSpPr>
-          <p:cNvPr id="18" name="Rounded Rectangle 17"/>
-          <p:cNvSpPr/>
-          <p:nvPr/>
-        </p:nvSpPr>
-        <p:spPr>
-          <a:xfrm>
-            <a:off x="457200" y="4445812"/>
-            <a:ext cx="11277295" cy="908913"/>
-          </a:xfrm>
-          <a:prstGeom prst="roundRect">
-            <a:avLst>
-              <a:gd name="adj" fmla="val 12000"/>
-            </a:avLst>
-          </a:prstGeom>
-          <a:solidFill>
-            <a:srgbClr val="E8F4FA"/>
-          </a:solidFill>
-          <a:ln>
-            <a:noFill/>
-          </a:ln>
-        </p:spPr>
-        <p:style>
-          <a:lnRef idx="1">
-            <a:schemeClr val="accent1"/>
-          </a:lnRef>
-          <a:fillRef idx="3">
-            <a:schemeClr val="accent1"/>
-          </a:fillRef>
-          <a:effectRef idx="2">
-            <a:schemeClr val="accent1"/>
-          </a:effectRef>
-          <a:fontRef idx="minor">
-            <a:schemeClr val="lt1"/>
-          </a:fontRef>
-        </p:style>
-        <p:txBody>
-          <a:bodyPr rtlCol="0" anchor="ctr"/>
-          <a:lstStyle/>
-          <a:p>
-            <a:pPr algn="ctr"/>
-          </a:p>
-        </p:txBody>
-      </p:sp>
-      <p:sp>
-        <p:nvSpPr>
-          <p:cNvPr id="19" name="Rounded Rectangle 18"/>
-          <p:cNvSpPr/>
-          <p:nvPr/>
-        </p:nvSpPr>
-        <p:spPr>
-          <a:xfrm>
-            <a:off x="594360" y="4680813"/>
-            <a:ext cx="438912" cy="438912"/>
-          </a:xfrm>
-          <a:prstGeom prst="roundRect">
-            <a:avLst>
-              <a:gd name="adj" fmla="val 12000"/>
-            </a:avLst>
-          </a:prstGeom>
-          <a:solidFill>
-            <a:srgbClr val="095292"/>
-          </a:solidFill>
-          <a:ln>
-            <a:noFill/>
-          </a:ln>
-        </p:spPr>
-        <p:style>
-          <a:lnRef idx="1">
-            <a:schemeClr val="accent1"/>
-          </a:lnRef>
-          <a:fillRef idx="3">
-            <a:schemeClr val="accent1"/>
-          </a:fillRef>
-          <a:effectRef idx="2">
-            <a:schemeClr val="accent1"/>
-          </a:effectRef>
-          <a:fontRef idx="minor">
-            <a:schemeClr val="lt1"/>
-          </a:fontRef>
-        </p:style>
-        <p:txBody>
-          <a:bodyPr rtlCol="0" anchor="ctr"/>
-          <a:lstStyle/>
-          <a:p>
-            <a:pPr algn="ctr"/>
-          </a:p>
-        </p:txBody>
-      </p:sp>
-      <p:sp>
-        <p:nvSpPr>
-          <p:cNvPr id="20" name="TextBox 19"/>
-          <p:cNvSpPr txBox="1"/>
-          <p:nvPr/>
-        </p:nvSpPr>
-        <p:spPr>
-          <a:xfrm>
-            <a:off x="594360" y="4680813"/>
-            <a:ext cx="438912" cy="438912"/>
-          </a:xfrm>
-          <a:prstGeom prst="rect">
-            <a:avLst/>
-          </a:prstGeom>
-          <a:noFill/>
-        </p:spPr>
-        <p:txBody>
-          <a:bodyPr wrap="square" anchor="ctr"/>
-          <a:lstStyle/>
-          <a:p>
-            <a:pPr algn="ctr"/>
-            <a:r>
-              <a:rPr sz="1600" b="1" i="0">
-                <a:solidFill>
-                  <a:srgbClr val="FFFFFF"/>
-                </a:solidFill>
-                <a:latin typeface="Calibri"/>
-              </a:rPr>
-              <a:t>4</a:t>
-            </a:r>
-          </a:p>
-        </p:txBody>
-      </p:sp>
-      <p:sp>
-        <p:nvSpPr>
-          <p:cNvPr id="21" name="TextBox 20"/>
-          <p:cNvSpPr txBox="1"/>
-          <p:nvPr/>
-        </p:nvSpPr>
-        <p:spPr>
-          <a:xfrm>
-            <a:off x="1188720" y="4537252"/>
-            <a:ext cx="10271455" cy="744321"/>
-          </a:xfrm>
-          <a:prstGeom prst="rect">
-            <a:avLst/>
-          </a:prstGeom>
-          <a:noFill/>
-        </p:spPr>
-        <p:txBody>
-          <a:bodyPr wrap="square" anchor="ctr"/>
-          <a:lstStyle/>
-          <a:p>
-            <a:r>
-              <a:rPr sz="1500" b="1" i="0">
-                <a:solidFill>
-                  <a:srgbClr val="095292"/>
-                </a:solidFill>
-                <a:latin typeface="Calibri"/>
-              </a:rPr>
-              <a:t>30 s · La calificación</a:t>
-            </a:r>
-          </a:p>
-          <a:p>
-            <a:pPr>
-              <a:spcBef>
-                <a:spcPts val="200"/>
-              </a:spcBef>
-            </a:pPr>
-            <a:r>
-              <a:rPr sz="1300" b="0" i="0">
-                <a:solidFill>
-                  <a:srgbClr val="333333"/>
-                </a:solidFill>
-                <a:latin typeface="Calibri"/>
-              </a:rPr>
-              <a:t>Cuál es el impacto más grave y por qué lo calificaron así.</a:t>
-            </a:r>
-          </a:p>
-        </p:txBody>
-      </p:sp>
-      <p:sp>
-        <p:nvSpPr>
-          <p:cNvPr id="22" name="Rounded Rectangle 21"/>
-          <p:cNvSpPr/>
-          <p:nvPr/>
-        </p:nvSpPr>
-        <p:spPr>
-          <a:xfrm>
-            <a:off x="457200" y="5446166"/>
-            <a:ext cx="11277295" cy="908913"/>
-          </a:xfrm>
-          <a:prstGeom prst="roundRect">
-            <a:avLst>
-              <a:gd name="adj" fmla="val 12000"/>
-            </a:avLst>
-          </a:prstGeom>
-          <a:solidFill>
-            <a:srgbClr val="F2F2F2"/>
-          </a:solidFill>
-          <a:ln>
-            <a:noFill/>
-          </a:ln>
-        </p:spPr>
-        <p:style>
-          <a:lnRef idx="1">
-            <a:schemeClr val="accent1"/>
-          </a:lnRef>
-          <a:fillRef idx="3">
-            <a:schemeClr val="accent1"/>
-          </a:fillRef>
-          <a:effectRef idx="2">
-            <a:schemeClr val="accent1"/>
-          </a:effectRef>
-          <a:fontRef idx="minor">
-            <a:schemeClr val="lt1"/>
-          </a:fontRef>
-        </p:style>
-        <p:txBody>
-          <a:bodyPr rtlCol="0" anchor="ctr"/>
-          <a:lstStyle/>
-          <a:p>
-            <a:pPr algn="ctr"/>
-          </a:p>
-        </p:txBody>
-      </p:sp>
-      <p:sp>
-        <p:nvSpPr>
-          <p:cNvPr id="23" name="Rounded Rectangle 22"/>
-          <p:cNvSpPr/>
-          <p:nvPr/>
-        </p:nvSpPr>
-        <p:spPr>
-          <a:xfrm>
-            <a:off x="594360" y="5681167"/>
-            <a:ext cx="438912" cy="438912"/>
-          </a:xfrm>
-          <a:prstGeom prst="roundRect">
-            <a:avLst>
-              <a:gd name="adj" fmla="val 12000"/>
-            </a:avLst>
-          </a:prstGeom>
-          <a:solidFill>
-            <a:srgbClr val="095292"/>
-          </a:solidFill>
-          <a:ln>
-            <a:noFill/>
-          </a:ln>
-        </p:spPr>
-        <p:style>
-          <a:lnRef idx="1">
-            <a:schemeClr val="accent1"/>
-          </a:lnRef>
-          <a:fillRef idx="3">
-            <a:schemeClr val="accent1"/>
-          </a:fillRef>
-          <a:effectRef idx="2">
-            <a:schemeClr val="accent1"/>
-          </a:effectRef>
-          <a:fontRef idx="minor">
-            <a:schemeClr val="lt1"/>
-          </a:fontRef>
-        </p:style>
-        <p:txBody>
-          <a:bodyPr rtlCol="0" anchor="ctr"/>
-          <a:lstStyle/>
-          <a:p>
-            <a:pPr algn="ctr"/>
-          </a:p>
-        </p:txBody>
-      </p:sp>
-      <p:sp>
-        <p:nvSpPr>
-          <p:cNvPr id="24" name="TextBox 23"/>
-          <p:cNvSpPr txBox="1"/>
-          <p:nvPr/>
-        </p:nvSpPr>
-        <p:spPr>
-          <a:xfrm>
-            <a:off x="594360" y="5681167"/>
-            <a:ext cx="438912" cy="438912"/>
-          </a:xfrm>
-          <a:prstGeom prst="rect">
-            <a:avLst/>
-          </a:prstGeom>
-          <a:noFill/>
-        </p:spPr>
-        <p:txBody>
-          <a:bodyPr wrap="square" anchor="ctr"/>
-          <a:lstStyle/>
-          <a:p>
-            <a:pPr algn="ctr"/>
-            <a:r>
-              <a:rPr sz="1600" b="1" i="0">
-                <a:solidFill>
-                  <a:srgbClr val="FFFFFF"/>
-                </a:solidFill>
-                <a:latin typeface="Calibri"/>
-              </a:rPr>
-              <a:t>5</a:t>
-            </a:r>
-          </a:p>
-        </p:txBody>
-      </p:sp>
-      <p:sp>
-        <p:nvSpPr>
-          <p:cNvPr id="25" name="TextBox 24"/>
-          <p:cNvSpPr txBox="1"/>
-          <p:nvPr/>
-        </p:nvSpPr>
-        <p:spPr>
-          <a:xfrm>
-            <a:off x="1188720" y="5537606"/>
-            <a:ext cx="10271455" cy="744321"/>
-          </a:xfrm>
-          <a:prstGeom prst="rect">
-            <a:avLst/>
-          </a:prstGeom>
-          <a:noFill/>
-        </p:spPr>
-        <p:txBody>
-          <a:bodyPr wrap="square" anchor="ctr"/>
-          <a:lstStyle/>
-          <a:p>
-            <a:r>
-              <a:rPr sz="1500" b="1" i="0">
-                <a:solidFill>
-                  <a:srgbClr val="095292"/>
-                </a:solidFill>
-                <a:latin typeface="Calibri"/>
-              </a:rPr>
-              <a:t>10 s · Cierre</a:t>
-            </a:r>
-          </a:p>
-          <a:p>
-            <a:pPr>
-              <a:spcBef>
-                <a:spcPts val="200"/>
-              </a:spcBef>
-            </a:pPr>
-            <a:r>
-              <a:rPr sz="1300" b="0" i="0">
-                <a:solidFill>
-                  <a:srgbClr val="333333"/>
-                </a:solidFill>
-                <a:latin typeface="Calibri"/>
-              </a:rPr>
-              <a:t>Qué dimensión no aplica en su proyecto, y por qué.</a:t>
-            </a:r>
-          </a:p>
-        </p:txBody>
-      </p:sp>
-      <p:sp>
-        <p:nvSpPr>
-          <p:cNvPr id="26" name="TextBox 25"/>
-          <p:cNvSpPr txBox="1"/>
-          <p:nvPr/>
-        </p:nvSpPr>
-        <p:spPr>
-          <a:xfrm>
-            <a:off x="11185855" y="6473952"/>
-            <a:ext cx="640080" cy="274320"/>
-          </a:xfrm>
-          <a:prstGeom prst="rect">
-            <a:avLst/>
-          </a:prstGeom>
-          <a:noFill/>
-        </p:spPr>
-        <p:txBody>
-          <a:bodyPr wrap="square">
-            <a:spAutoFit/>
-          </a:bodyPr>
-          <a:lstStyle/>
-          <a:p>
-            <a:pPr algn="r"/>
-            <a:r>
-              <a:rPr sz="1100" b="0" i="0">
-                <a:solidFill>
-                  <a:srgbClr val="666666"/>
-                </a:solidFill>
-                <a:latin typeface="Calibri"/>
-              </a:rPr>
-              <a:t>14</a:t>
-            </a:r>
-          </a:p>
-        </p:txBody>
-      </p:sp>
-    </p:spTree>
-  </p:cSld>
-  <p:clrMapOvr>
-    <a:masterClrMapping/>
-  </p:clrMapOvr>
-</p:sld>
-</file>
-
-<file path=ppt/slides/slide15.xml><?xml version="1.0" encoding="utf-8"?>
-<p:sld xmlns:a="http://schemas.openxmlformats.org/drawingml/2006/main" xmlns:p="http://schemas.openxmlformats.org/presentationml/2006/main" xmlns:r="http://schemas.openxmlformats.org/officeDocument/2006/relationships">
-  <p:cSld>
-    <p:bg>
-      <p:bgPr>
-        <a:solidFill>
-          <a:srgbClr val="FFFFFF"/>
-        </a:solidFill>
-        <a:effectLst/>
-      </p:bgPr>
-    </p:bg>
-    <p:spTree>
-      <p:nvGrpSpPr>
-        <p:cNvPr id="1" name=""/>
-        <p:cNvGrpSpPr/>
-        <p:nvPr/>
-      </p:nvGrpSpPr>
-      <p:grpSpPr/>
-      <p:sp>
-        <p:nvSpPr>
-          <p:cNvPr id="2" name="Rectangle 1"/>
-          <p:cNvSpPr/>
-          <p:nvPr/>
-        </p:nvSpPr>
-        <p:spPr>
-          <a:xfrm>
-            <a:off x="0" y="0"/>
-            <a:ext cx="12191695" cy="960120"/>
-          </a:xfrm>
-          <a:prstGeom prst="rect">
-            <a:avLst/>
-          </a:prstGeom>
-          <a:solidFill>
-            <a:srgbClr val="095292"/>
-          </a:solidFill>
-          <a:ln>
-            <a:noFill/>
-          </a:ln>
-        </p:spPr>
-        <p:style>
-          <a:lnRef idx="1">
-            <a:schemeClr val="accent1"/>
-          </a:lnRef>
-          <a:fillRef idx="3">
-            <a:schemeClr val="accent1"/>
-          </a:fillRef>
-          <a:effectRef idx="2">
-            <a:schemeClr val="accent1"/>
-          </a:effectRef>
-          <a:fontRef idx="minor">
-            <a:schemeClr val="lt1"/>
-          </a:fontRef>
-        </p:style>
-        <p:txBody>
-          <a:bodyPr rtlCol="0" anchor="ctr"/>
-          <a:lstStyle/>
-          <a:p>
-            <a:pPr algn="ctr"/>
-          </a:p>
-        </p:txBody>
-      </p:sp>
-      <p:sp>
-        <p:nvSpPr>
-          <p:cNvPr id="3" name="Rectangle 2"/>
-          <p:cNvSpPr/>
-          <p:nvPr/>
-        </p:nvSpPr>
-        <p:spPr>
-          <a:xfrm>
-            <a:off x="0" y="960120"/>
-            <a:ext cx="12191695" cy="41148"/>
-          </a:xfrm>
-          <a:prstGeom prst="rect">
-            <a:avLst/>
-          </a:prstGeom>
-          <a:solidFill>
-            <a:srgbClr val="FFD000"/>
-          </a:solidFill>
-          <a:ln>
-            <a:noFill/>
-          </a:ln>
-        </p:spPr>
-        <p:style>
-          <a:lnRef idx="1">
-            <a:schemeClr val="accent1"/>
-          </a:lnRef>
-          <a:fillRef idx="3">
-            <a:schemeClr val="accent1"/>
-          </a:fillRef>
-          <a:effectRef idx="2">
-            <a:schemeClr val="accent1"/>
-          </a:effectRef>
-          <a:fontRef idx="minor">
-            <a:schemeClr val="lt1"/>
-          </a:fontRef>
-        </p:style>
-        <p:txBody>
-          <a:bodyPr rtlCol="0" anchor="ctr"/>
-          <a:lstStyle/>
-          <a:p>
-            <a:pPr algn="ctr"/>
-          </a:p>
-        </p:txBody>
-      </p:sp>
-      <p:sp>
-        <p:nvSpPr>
-          <p:cNvPr id="4" name="TextBox 3"/>
-          <p:cNvSpPr txBox="1"/>
-          <p:nvPr/>
-        </p:nvSpPr>
-        <p:spPr>
-          <a:xfrm>
-            <a:off x="457200" y="164592"/>
-            <a:ext cx="11277295" cy="502920"/>
-          </a:xfrm>
-          <a:prstGeom prst="rect">
-            <a:avLst/>
-          </a:prstGeom>
-          <a:noFill/>
-        </p:spPr>
-        <p:txBody>
-          <a:bodyPr wrap="square">
-            <a:spAutoFit/>
-          </a:bodyPr>
-          <a:lstStyle/>
-          <a:p>
-            <a:r>
-              <a:rPr sz="2600" b="1" i="0">
-                <a:solidFill>
-                  <a:srgbClr val="FFFFFF"/>
-                </a:solidFill>
-                <a:latin typeface="Calibri"/>
-              </a:rPr>
-              <a:t>Para la Clase 14</a:t>
-            </a:r>
-          </a:p>
-        </p:txBody>
-      </p:sp>
-      <p:sp>
-        <p:nvSpPr>
-          <p:cNvPr id="5" name="TextBox 4"/>
-          <p:cNvSpPr txBox="1"/>
-          <p:nvPr/>
-        </p:nvSpPr>
-        <p:spPr>
-          <a:xfrm>
-            <a:off x="457200" y="1170432"/>
-            <a:ext cx="11277295" cy="5230368"/>
-          </a:xfrm>
-          <a:prstGeom prst="rect">
-            <a:avLst/>
-          </a:prstGeom>
-          <a:noFill/>
-        </p:spPr>
-        <p:txBody>
-          <a:bodyPr wrap="square">
-            <a:spAutoFit/>
-          </a:bodyPr>
-          <a:lstStyle/>
-          <a:p>
-            <a:pPr>
-              <a:spcAft>
-                <a:spcPts val="800"/>
-              </a:spcAft>
-            </a:pPr>
-            <a:r>
-              <a:rPr sz="2000" b="0" i="0">
-                <a:solidFill>
-                  <a:srgbClr val="333333"/>
-                </a:solidFill>
-                <a:latin typeface="Calibri"/>
-              </a:rPr>
-              <a:t>–   </a:t>
-            </a:r>
-            <a:r>
-              <a:rPr sz="2000" b="1" i="0">
-                <a:solidFill>
-                  <a:srgbClr val="333333"/>
-                </a:solidFill>
-                <a:latin typeface="Calibri"/>
-              </a:rPr>
-              <a:t>Trabajo dirigido:</a:t>
-            </a:r>
-            <a:r>
-              <a:rPr sz="2000" b="0" i="0">
-                <a:solidFill>
-                  <a:srgbClr val="333333"/>
-                </a:solidFill>
-                <a:latin typeface="Calibri"/>
-              </a:rPr>
-              <a:t> Aplicación de matrices de evaluación — dejar la matriz de impacto completa en el documento del equipo, con indicadores, negativos y mitigaciones.</a:t>
-            </a:r>
-          </a:p>
-          <a:p>
-            <a:pPr>
-              <a:spcAft>
-                <a:spcPts val="800"/>
-              </a:spcAft>
-            </a:pPr>
-            <a:r>
-              <a:rPr sz="2000" b="0" i="0">
-                <a:solidFill>
-                  <a:srgbClr val="333333"/>
-                </a:solidFill>
-                <a:latin typeface="Calibri"/>
-              </a:rPr>
-              <a:t>–   </a:t>
-            </a:r>
-            <a:r>
-              <a:rPr sz="2000" b="1" i="0">
-                <a:solidFill>
-                  <a:srgbClr val="333333"/>
-                </a:solidFill>
-                <a:latin typeface="Calibri"/>
-              </a:rPr>
-              <a:t>Trabajo independiente:</a:t>
-            </a:r>
-            <a:r>
-              <a:rPr sz="2000" b="0" i="0">
-                <a:solidFill>
-                  <a:srgbClr val="333333"/>
-                </a:solidFill>
-                <a:latin typeface="Calibri"/>
-              </a:rPr>
-              <a:t> Informe de evaluación del impacto: media página que resuma </a:t>
-            </a:r>
-            <a:r>
-              <a:rPr sz="2000" b="1" i="0">
-                <a:solidFill>
-                  <a:srgbClr val="333333"/>
-                </a:solidFill>
-                <a:latin typeface="Calibri"/>
-              </a:rPr>
-              <a:t>el impacto positivo más fuerte con su número y el negativo más importante con su mitigación</a:t>
-            </a:r>
-            <a:r>
-              <a:rPr sz="2000" b="0" i="0">
-                <a:solidFill>
-                  <a:srgbClr val="333333"/>
-                </a:solidFill>
-                <a:latin typeface="Calibri"/>
-              </a:rPr>
-              <a:t>. Es el borrador de dos diapositivas de la presentación final.</a:t>
-            </a:r>
-          </a:p>
-          <a:p>
-            <a:pPr>
-              <a:spcAft>
-                <a:spcPts val="800"/>
-              </a:spcAft>
-            </a:pPr>
-            <a:r>
-              <a:rPr sz="2000" b="0" i="0">
-                <a:solidFill>
-                  <a:srgbClr val="333333"/>
-                </a:solidFill>
-                <a:latin typeface="Calibri"/>
-              </a:rPr>
-              <a:t>–   </a:t>
-            </a:r>
-            <a:r>
-              <a:rPr sz="2000" b="1" i="0">
-                <a:solidFill>
-                  <a:srgbClr val="333333"/>
-                </a:solidFill>
-                <a:latin typeface="Calibri"/>
-              </a:rPr>
-              <a:t>Clase 14 · Preparación de la presentación final</a:t>
-            </a:r>
-            <a:r>
-              <a:rPr sz="2000" b="0" i="0">
-                <a:solidFill>
-                  <a:srgbClr val="333333"/>
-                </a:solidFill>
-                <a:latin typeface="Calibri"/>
-              </a:rPr>
-              <a:t> — preparamos la </a:t>
-            </a:r>
-            <a:r>
-              <a:rPr sz="2000" b="1" i="0">
-                <a:solidFill>
-                  <a:srgbClr val="333333"/>
-                </a:solidFill>
-                <a:latin typeface="Calibri"/>
-              </a:rPr>
-              <a:t>presentación final</a:t>
-            </a:r>
-            <a:r>
-              <a:rPr sz="2000" b="0" i="0">
-                <a:solidFill>
-                  <a:srgbClr val="333333"/>
-                </a:solidFill>
-                <a:latin typeface="Calibri"/>
-              </a:rPr>
-              <a:t>: la estructura de 8 minutos, las diapositivas, el reparto entre integrantes y el </a:t>
-            </a:r>
-            <a:r>
-              <a:rPr sz="2000" b="1" i="0">
-                <a:solidFill>
-                  <a:srgbClr val="333333"/>
-                </a:solidFill>
-                <a:latin typeface="Calibri"/>
-              </a:rPr>
-              <a:t>ensayo general cronometrado</a:t>
-            </a:r>
-            <a:r>
-              <a:rPr sz="2000" b="0" i="0">
-                <a:solidFill>
-                  <a:srgbClr val="333333"/>
-                </a:solidFill>
-                <a:latin typeface="Calibri"/>
-              </a:rPr>
-              <a:t>.</a:t>
-            </a:r>
-          </a:p>
-          <a:p>
-            <a:pPr>
-              <a:spcAft>
-                <a:spcPts val="800"/>
-              </a:spcAft>
-            </a:pPr>
-            <a:r>
-              <a:rPr sz="2000" b="0" i="0">
-                <a:solidFill>
-                  <a:srgbClr val="333333"/>
-                </a:solidFill>
-                <a:latin typeface="Calibri"/>
-              </a:rPr>
-              <a:t>–   </a:t>
-            </a:r>
-            <a:r>
-              <a:rPr sz="2000" b="1" i="0">
-                <a:solidFill>
-                  <a:srgbClr val="333333"/>
-                </a:solidFill>
-                <a:latin typeface="Calibri"/>
-              </a:rPr>
-              <a:t>Aviso:</a:t>
-            </a:r>
-            <a:r>
-              <a:rPr sz="2000" b="0" i="0">
-                <a:solidFill>
-                  <a:srgbClr val="333333"/>
-                </a:solidFill>
-                <a:latin typeface="Calibri"/>
-              </a:rPr>
-              <a:t> Para la Clase 14 el </a:t>
-            </a:r>
-            <a:r>
-              <a:rPr sz="2000" b="1" i="0">
-                <a:solidFill>
-                  <a:srgbClr val="333333"/>
-                </a:solidFill>
-                <a:latin typeface="Calibri"/>
-              </a:rPr>
-              <a:t>prototipo tiene que estar ya ajustado</a:t>
-            </a:r>
-            <a:r>
-              <a:rPr sz="2000" b="0" i="0">
-                <a:solidFill>
-                  <a:srgbClr val="333333"/>
-                </a:solidFill>
-                <a:latin typeface="Calibri"/>
-              </a:rPr>
-              <a:t> con lo que salió de la Clase 12: si ensayan con la versión vieja, el ensayo no sirve. Traigan también la cuenta de Canva o Google Slides lista y </a:t>
-            </a:r>
-            <a:r>
-              <a:rPr sz="2000" b="1" i="0">
-                <a:solidFill>
-                  <a:srgbClr val="333333"/>
-                </a:solidFill>
-                <a:latin typeface="Calibri"/>
-              </a:rPr>
-              <a:t>quién va a hablar de qué</a:t>
-            </a:r>
-            <a:r>
-              <a:rPr sz="2000" b="0" i="0">
-                <a:solidFill>
-                  <a:srgbClr val="333333"/>
-                </a:solidFill>
-                <a:latin typeface="Calibri"/>
-              </a:rPr>
-              <a:t>.</a:t>
-            </a:r>
-          </a:p>
-          <a:p>
-            <a:pPr>
-              <a:spcAft>
-                <a:spcPts val="800"/>
-              </a:spcAft>
-            </a:pPr>
-            <a:r>
-              <a:rPr sz="2000" b="0" i="0">
-                <a:solidFill>
-                  <a:srgbClr val="333333"/>
-                </a:solidFill>
-                <a:latin typeface="Calibri"/>
-              </a:rPr>
-              <a:t>–   </a:t>
-            </a:r>
-            <a:r>
-              <a:rPr sz="2000" b="1" i="0">
-                <a:solidFill>
-                  <a:srgbClr val="333333"/>
-                </a:solidFill>
-                <a:latin typeface="Calibri"/>
-              </a:rPr>
-              <a:t>Antes de salir:</a:t>
-            </a:r>
-            <a:r>
-              <a:rPr sz="2000" b="0" i="0">
-                <a:solidFill>
-                  <a:srgbClr val="333333"/>
-                </a:solidFill>
-                <a:latin typeface="Calibri"/>
-              </a:rPr>
-              <a:t> el enlace del documento del equipo en el chat, con permiso de lectura para el docente, y el nombre del vocero de hoy.</a:t>
-            </a:r>
-          </a:p>
-        </p:txBody>
-      </p:sp>
-      <p:sp>
-        <p:nvSpPr>
-          <p:cNvPr id="6" name="TextBox 5"/>
-          <p:cNvSpPr txBox="1"/>
-          <p:nvPr/>
-        </p:nvSpPr>
-        <p:spPr>
-          <a:xfrm>
-            <a:off x="11185855" y="6473952"/>
-            <a:ext cx="640080" cy="274320"/>
-          </a:xfrm>
-          <a:prstGeom prst="rect">
-            <a:avLst/>
-          </a:prstGeom>
-          <a:noFill/>
-        </p:spPr>
-        <p:txBody>
-          <a:bodyPr wrap="square">
-            <a:spAutoFit/>
-          </a:bodyPr>
-          <a:lstStyle/>
-          <a:p>
-            <a:pPr algn="r"/>
-            <a:r>
-              <a:rPr sz="1100" b="0" i="0">
-                <a:solidFill>
-                  <a:srgbClr val="666666"/>
-                </a:solidFill>
-                <a:latin typeface="Calibri"/>
-              </a:rPr>
-              <a:t>15</a:t>
-            </a:r>
-          </a:p>
-        </p:txBody>
-      </p:sp>
-    </p:spTree>
-  </p:cSld>
-  <p:clrMapOvr>
-    <a:masterClrMapping/>
-  </p:clrMapOvr>
-</p:sld>
-</file>
-
-<file path=ppt/slides/slide16.xml><?xml version="1.0" encoding="utf-8"?>
-<p:sld xmlns:a="http://schemas.openxmlformats.org/drawingml/2006/main" xmlns:p="http://schemas.openxmlformats.org/presentationml/2006/main" xmlns:r="http://schemas.openxmlformats.org/officeDocument/2006/relationships">
-  <p:cSld>
-    <p:bg>
-      <p:bgPr>
-        <a:solidFill>
-          <a:srgbClr val="FFFFFF"/>
-        </a:solidFill>
-        <a:effectLst/>
-      </p:bgPr>
-    </p:bg>
-    <p:spTree>
-      <p:nvGrpSpPr>
-        <p:cNvPr id="1" name=""/>
-        <p:cNvGrpSpPr/>
-        <p:nvPr/>
-      </p:nvGrpSpPr>
-      <p:grpSpPr/>
-      <p:sp>
-        <p:nvSpPr>
-          <p:cNvPr id="2" name="Rectangle 1"/>
-          <p:cNvSpPr/>
-          <p:nvPr/>
-        </p:nvSpPr>
-        <p:spPr>
-          <a:xfrm>
-            <a:off x="0" y="0"/>
             <a:ext cx="12191695" cy="164592"/>
           </a:xfrm>
           <a:prstGeom prst="rect">
@@ -10108,7 +7387,7 @@
                 </a:solidFill>
                 <a:latin typeface="Calibri"/>
               </a:rPr>
-              <a:t>Matriz de impacto del proyecto, en salas de grupo</a:t>
+              <a:t>Práctica en equipos (opcional · la guía está en la carpeta de la clase)</a:t>
             </a:r>
           </a:p>
         </p:txBody>
@@ -10223,7 +7502,7 @@
                 </a:solidFill>
                 <a:latin typeface="Calibri"/>
               </a:rPr>
-              <a:t>5 equipos × 3 min — el impacto negativo y su mitigación</a:t>
+              <a:t>Socialización de la práctica, si se hizo</a:t>
             </a:r>
           </a:p>
         </p:txBody>

--- a/Introduccion a la Ingenieria/Clases/Clase 13 - Evaluacion de impacto social y ambiental/Presentacion.pptx
+++ b/Introduccion a la Ingenieria/Clases/Clase 13 - Evaluacion de impacto social y ambiental/Presentacion.pptx
@@ -7272,7 +7272,7 @@
                 </a:solidFill>
                 <a:latin typeface="Calibri"/>
               </a:rPr>
-              <a:t>Impacto, afectados, la matriz y cómo se califica</a:t>
+              <a:t>Impacto, afectados, la matriz y cómo se califica un impacto</a:t>
             </a:r>
           </a:p>
         </p:txBody>
@@ -11954,7 +11954,7 @@
                 </a:solidFill>
                 <a:latin typeface="Calibri"/>
               </a:rPr>
-              <a:t> — dejarla en blanco parece un olvido y se califica como tal.</a:t>
+              <a:t> — dejarla en blanco parece un olvido, y se lee como tal.</a:t>
             </a:r>
           </a:p>
         </p:txBody>

--- a/Introduccion a la Ingenieria/Clases/Clase 13 - Evaluacion de impacto social y ambiental/Presentacion.pptx
+++ b/Introduccion a la Ingenieria/Clases/Clase 13 - Evaluacion de impacto social y ambiental/Presentacion.pptx
@@ -5924,9 +5924,57 @@
           </a:p>
         </p:txBody>
       </p:sp>
-      <p:sp>
-        <p:nvSpPr>
-          <p:cNvPr id="14" name="TextBox 13"/>
+      <p:pic>
+        <p:nvPicPr>
+          <p:cNvPr id="14" name="Picture 13" descr="sello_mal.png"/>
+          <p:cNvPicPr>
+            <a:picLocks noChangeAspect="1"/>
+          </p:cNvPicPr>
+          <p:nvPr/>
+        </p:nvPicPr>
+        <p:blipFill>
+          <a:blip r:embed="rId2"/>
+          <a:stretch>
+            <a:fillRect/>
+          </a:stretch>
+        </p:blipFill>
+        <p:spPr>
+          <a:xfrm>
+            <a:off x="566928" y="1527048"/>
+            <a:ext cx="393192" cy="393192"/>
+          </a:xfrm>
+          <a:prstGeom prst="rect">
+            <a:avLst/>
+          </a:prstGeom>
+        </p:spPr>
+      </p:pic>
+      <p:pic>
+        <p:nvPicPr>
+          <p:cNvPr id="15" name="Picture 14" descr="sello_bien.png"/>
+          <p:cNvPicPr>
+            <a:picLocks noChangeAspect="1"/>
+          </p:cNvPicPr>
+          <p:nvPr/>
+        </p:nvPicPr>
+        <p:blipFill>
+          <a:blip r:embed="rId3"/>
+          <a:stretch>
+            <a:fillRect/>
+          </a:stretch>
+        </p:blipFill>
+        <p:spPr>
+          <a:xfrm>
+            <a:off x="6365595" y="1527048"/>
+            <a:ext cx="393192" cy="393192"/>
+          </a:xfrm>
+          <a:prstGeom prst="rect">
+            <a:avLst/>
+          </a:prstGeom>
+        </p:spPr>
+      </p:pic>
+      <p:sp>
+        <p:nvSpPr>
+          <p:cNvPr id="16" name="TextBox 15"/>
           <p:cNvSpPr txBox="1"/>
           <p:nvPr/>
         </p:nvSpPr>
@@ -7858,14 +7906,118 @@
       </p:sp>
       <p:sp>
         <p:nvSpPr>
-          <p:cNvPr id="5" name="TextBox 4"/>
+          <p:cNvPr id="5" name="Rounded Rectangle 4"/>
+          <p:cNvSpPr/>
+          <p:nvPr/>
+        </p:nvSpPr>
+        <p:spPr>
+          <a:xfrm>
+            <a:off x="5797149" y="1573813"/>
+            <a:ext cx="6010497" cy="4057845"/>
+          </a:xfrm>
+          <a:prstGeom prst="roundRect">
+            <a:avLst>
+              <a:gd name="adj" fmla="val 4000"/>
+            </a:avLst>
+          </a:prstGeom>
+          <a:solidFill>
+            <a:srgbClr val="E8EEF4"/>
+          </a:solidFill>
+          <a:ln>
+            <a:noFill/>
+          </a:ln>
+        </p:spPr>
+        <p:style>
+          <a:lnRef idx="1">
+            <a:schemeClr val="accent1"/>
+          </a:lnRef>
+          <a:fillRef idx="3">
+            <a:schemeClr val="accent1"/>
+          </a:fillRef>
+          <a:effectRef idx="2">
+            <a:schemeClr val="accent1"/>
+          </a:effectRef>
+          <a:fontRef idx="minor">
+            <a:schemeClr val="lt1"/>
+          </a:fontRef>
+        </p:style>
+        <p:txBody>
+          <a:bodyPr rtlCol="0" anchor="ctr"/>
+          <a:lstStyle/>
+          <a:p>
+            <a:pPr algn="ctr"/>
+          </a:p>
+        </p:txBody>
+      </p:sp>
+      <p:pic>
+        <p:nvPicPr>
+          <p:cNvPr id="6" name="Picture 5" descr="students-learning-laptops-classroom.jpg"/>
+          <p:cNvPicPr>
+            <a:picLocks noChangeAspect="1"/>
+          </p:cNvPicPr>
+          <p:nvPr/>
+        </p:nvPicPr>
+        <p:blipFill>
+          <a:blip r:embed="rId2"/>
+          <a:stretch>
+            <a:fillRect/>
+          </a:stretch>
+        </p:blipFill>
+        <p:spPr>
+          <a:xfrm>
+            <a:off x="5870301" y="1646965"/>
+            <a:ext cx="5864193" cy="3911541"/>
+          </a:xfrm>
+          <a:prstGeom prst="rect">
+            <a:avLst/>
+          </a:prstGeom>
+        </p:spPr>
+      </p:pic>
+      <p:sp>
+        <p:nvSpPr>
+          <p:cNvPr id="7" name="TextBox 6"/>
           <p:cNvSpPr txBox="1"/>
           <p:nvPr/>
         </p:nvSpPr>
         <p:spPr>
           <a:xfrm>
-            <a:off x="457200" y="1170432"/>
-            <a:ext cx="11277295" cy="5230368"/>
+            <a:off x="5870301" y="5961888"/>
+            <a:ext cx="5864193" cy="320040"/>
+          </a:xfrm>
+          <a:prstGeom prst="rect">
+            <a:avLst/>
+          </a:prstGeom>
+          <a:noFill/>
+        </p:spPr>
+        <p:txBody>
+          <a:bodyPr wrap="square">
+            <a:spAutoFit/>
+          </a:bodyPr>
+          <a:lstStyle/>
+          <a:p>
+            <a:pPr algn="ctr"/>
+            <a:r>
+              <a:rPr sz="1100" b="0" i="1">
+                <a:solidFill>
+                  <a:srgbClr val="666666"/>
+                </a:solidFill>
+                <a:latin typeface="Calibri"/>
+              </a:rPr>
+              <a:t>Foto: Mikhail Nilov · Pexels</a:t>
+            </a:r>
+          </a:p>
+        </p:txBody>
+      </p:sp>
+      <p:sp>
+        <p:nvSpPr>
+          <p:cNvPr id="8" name="TextBox 7"/>
+          <p:cNvSpPr txBox="1"/>
+          <p:nvPr/>
+        </p:nvSpPr>
+        <p:spPr>
+          <a:xfrm>
+            <a:off x="457200" y="1353312"/>
+            <a:ext cx="5093061" cy="5047488"/>
           </a:xfrm>
           <a:prstGeom prst="rect">
             <a:avLst/>
@@ -8053,7 +8205,7 @@
       </p:sp>
       <p:sp>
         <p:nvSpPr>
-          <p:cNvPr id="6" name="TextBox 5"/>
+          <p:cNvPr id="9" name="TextBox 8"/>
           <p:cNvSpPr txBox="1"/>
           <p:nvPr/>
         </p:nvSpPr>
@@ -10517,16 +10669,16 @@
         </p:nvSpPr>
         <p:spPr>
           <a:xfrm>
-            <a:off x="457200" y="1261872"/>
-            <a:ext cx="3637178" cy="2464308"/>
+            <a:off x="5803166" y="1188719"/>
+            <a:ext cx="5998464" cy="4828032"/>
           </a:xfrm>
           <a:prstGeom prst="roundRect">
             <a:avLst>
-              <a:gd name="adj" fmla="val 12000"/>
+              <a:gd name="adj" fmla="val 4000"/>
             </a:avLst>
           </a:prstGeom>
           <a:solidFill>
-            <a:srgbClr val="F2F2F2"/>
+            <a:srgbClr val="E8EEF4"/>
           </a:solidFill>
           <a:ln>
             <a:noFill/>
@@ -10554,59 +10706,112 @@
           </a:p>
         </p:txBody>
       </p:sp>
-      <p:sp>
-        <p:nvSpPr>
-          <p:cNvPr id="6" name="Rectangle 5"/>
-          <p:cNvSpPr/>
-          <p:nvPr/>
-        </p:nvSpPr>
-        <p:spPr>
-          <a:xfrm>
-            <a:off x="457200" y="1261872"/>
-            <a:ext cx="3637178" cy="91440"/>
+      <p:pic>
+        <p:nvPicPr>
+          <p:cNvPr id="6" name="Picture 5" descr="afectados-paso1.png"/>
+          <p:cNvPicPr>
+            <a:picLocks noChangeAspect="1"/>
+          </p:cNvPicPr>
+          <p:nvPr/>
+        </p:nvPicPr>
+        <p:blipFill>
+          <a:blip r:embed="rId2"/>
+          <a:stretch>
+            <a:fillRect/>
+          </a:stretch>
+        </p:blipFill>
+        <p:spPr>
+          <a:xfrm>
+            <a:off x="5876318" y="1261872"/>
+            <a:ext cx="5852160" cy="4681728"/>
           </a:xfrm>
           <a:prstGeom prst="rect">
             <a:avLst/>
           </a:prstGeom>
-          <a:solidFill>
-            <a:srgbClr val="095292"/>
-          </a:solidFill>
-          <a:ln>
-            <a:noFill/>
-          </a:ln>
-        </p:spPr>
-        <p:style>
-          <a:lnRef idx="1">
-            <a:schemeClr val="accent1"/>
-          </a:lnRef>
-          <a:fillRef idx="3">
-            <a:schemeClr val="accent1"/>
-          </a:fillRef>
-          <a:effectRef idx="2">
-            <a:schemeClr val="accent1"/>
-          </a:effectRef>
-          <a:fontRef idx="minor">
-            <a:schemeClr val="lt1"/>
-          </a:fontRef>
-        </p:style>
-        <p:txBody>
-          <a:bodyPr rtlCol="0" anchor="ctr"/>
-          <a:lstStyle/>
-          <a:p>
-            <a:pPr algn="ctr"/>
-          </a:p>
-        </p:txBody>
-      </p:sp>
-      <p:sp>
-        <p:nvSpPr>
-          <p:cNvPr id="7" name="TextBox 6"/>
+        </p:spPr>
+      </p:pic>
+      <p:pic>
+        <p:nvPicPr>
+          <p:cNvPr id="7" name="Picture 6" descr="afectados-paso2.png"/>
+          <p:cNvPicPr>
+            <a:picLocks noChangeAspect="1"/>
+          </p:cNvPicPr>
+          <p:nvPr/>
+        </p:nvPicPr>
+        <p:blipFill>
+          <a:blip r:embed="rId3"/>
+          <a:stretch>
+            <a:fillRect/>
+          </a:stretch>
+        </p:blipFill>
+        <p:spPr>
+          <a:xfrm>
+            <a:off x="5876318" y="1261872"/>
+            <a:ext cx="5852160" cy="4681728"/>
+          </a:xfrm>
+          <a:prstGeom prst="rect">
+            <a:avLst/>
+          </a:prstGeom>
+        </p:spPr>
+      </p:pic>
+      <p:pic>
+        <p:nvPicPr>
+          <p:cNvPr id="8" name="Picture 7" descr="afectados-paso3.png"/>
+          <p:cNvPicPr>
+            <a:picLocks noChangeAspect="1"/>
+          </p:cNvPicPr>
+          <p:nvPr/>
+        </p:nvPicPr>
+        <p:blipFill>
+          <a:blip r:embed="rId4"/>
+          <a:stretch>
+            <a:fillRect/>
+          </a:stretch>
+        </p:blipFill>
+        <p:spPr>
+          <a:xfrm>
+            <a:off x="5876318" y="1261872"/>
+            <a:ext cx="5852160" cy="4681728"/>
+          </a:xfrm>
+          <a:prstGeom prst="rect">
+            <a:avLst/>
+          </a:prstGeom>
+        </p:spPr>
+      </p:pic>
+      <p:pic>
+        <p:nvPicPr>
+          <p:cNvPr id="9" name="Picture 8" descr="afectados-paso4.png"/>
+          <p:cNvPicPr>
+            <a:picLocks noChangeAspect="1"/>
+          </p:cNvPicPr>
+          <p:nvPr/>
+        </p:nvPicPr>
+        <p:blipFill>
+          <a:blip r:embed="rId5"/>
+          <a:stretch>
+            <a:fillRect/>
+          </a:stretch>
+        </p:blipFill>
+        <p:spPr>
+          <a:xfrm>
+            <a:off x="5876318" y="1261872"/>
+            <a:ext cx="5852160" cy="4681728"/>
+          </a:xfrm>
+          <a:prstGeom prst="rect">
+            <a:avLst/>
+          </a:prstGeom>
+        </p:spPr>
+      </p:pic>
+      <p:sp>
+        <p:nvSpPr>
+          <p:cNvPr id="18" name="TextBox 17"/>
           <p:cNvSpPr txBox="1"/>
           <p:nvPr/>
         </p:nvSpPr>
         <p:spPr>
           <a:xfrm>
-            <a:off x="621792" y="1490472"/>
-            <a:ext cx="3307994" cy="411480"/>
+            <a:off x="5870301" y="5961888"/>
+            <a:ext cx="5864193" cy="320040"/>
           </a:xfrm>
           <a:prstGeom prst="rect">
             <a:avLst/>
@@ -10619,28 +10824,29 @@
           </a:bodyPr>
           <a:lstStyle/>
           <a:p>
-            <a:r>
-              <a:rPr sz="1500" b="1" i="0">
-                <a:solidFill>
-                  <a:srgbClr val="095292"/>
-                </a:solidFill>
-                <a:latin typeface="Calibri"/>
-              </a:rPr>
-              <a:t>El cajero</a:t>
-            </a:r>
-          </a:p>
-        </p:txBody>
-      </p:sp>
-      <p:sp>
-        <p:nvSpPr>
-          <p:cNvPr id="8" name="TextBox 7"/>
+            <a:pPr algn="ctr"/>
+            <a:r>
+              <a:rPr sz="1100" b="0" i="1">
+                <a:solidFill>
+                  <a:srgbClr val="666666"/>
+                </a:solidFill>
+                <a:latin typeface="Calibri"/>
+              </a:rPr>
+              <a:t>Clic para avanzar la animación</a:t>
+            </a:r>
+          </a:p>
+        </p:txBody>
+      </p:sp>
+      <p:sp>
+        <p:nvSpPr>
+          <p:cNvPr id="19" name="TextBox 18"/>
           <p:cNvSpPr txBox="1"/>
           <p:nvPr/>
         </p:nvSpPr>
         <p:spPr>
           <a:xfrm>
-            <a:off x="621792" y="1947672"/>
-            <a:ext cx="3307994" cy="1595628"/>
+            <a:off x="457200" y="1353312"/>
+            <a:ext cx="5093061" cy="5047488"/>
           </a:xfrm>
           <a:prstGeom prst="rect">
             <a:avLst/>
@@ -10653,26 +10859,49 @@
           </a:bodyPr>
           <a:lstStyle/>
           <a:p>
-            <a:r>
-              <a:rPr sz="1300" b="0" i="0">
+            <a:pPr>
+              <a:spcAft>
+                <a:spcPts val="800"/>
+              </a:spcAft>
+            </a:pPr>
+            <a:r>
+              <a:rPr sz="2000" b="0" i="0">
                 <a:solidFill>
                   <a:srgbClr val="333333"/>
                 </a:solidFill>
                 <a:latin typeface="Calibri"/>
               </a:rPr>
-              <a:t>Ahora además debe actualizar el turno en el celular: </a:t>
-            </a:r>
-            <a:r>
-              <a:rPr sz="1300" b="1" i="0">
+              <a:t>–   </a:t>
+            </a:r>
+            <a:r>
+              <a:rPr sz="2000" b="1" i="0">
                 <a:solidFill>
                   <a:srgbClr val="333333"/>
                 </a:solidFill>
                 <a:latin typeface="Calibri"/>
               </a:rPr>
+              <a:t>El cajero:</a:t>
+            </a:r>
+            <a:r>
+              <a:rPr sz="2000" b="0" i="0">
+                <a:solidFill>
+                  <a:srgbClr val="333333"/>
+                </a:solidFill>
+                <a:latin typeface="Calibri"/>
+              </a:rPr>
+              <a:t> Ahora además debe actualizar el turno en el celular: </a:t>
+            </a:r>
+            <a:r>
+              <a:rPr sz="2000" b="1" i="0">
+                <a:solidFill>
+                  <a:srgbClr val="333333"/>
+                </a:solidFill>
+                <a:latin typeface="Calibri"/>
+              </a:rPr>
               <a:t>más trabajo</a:t>
             </a:r>
             <a:r>
-              <a:rPr sz="1300" b="0" i="0">
+              <a:rPr sz="2000" b="0" i="0">
                 <a:solidFill>
                   <a:srgbClr val="333333"/>
                 </a:solidFill>
@@ -10681,172 +10910,50 @@
               <a:t> (paso 2).</a:t>
             </a:r>
           </a:p>
-        </p:txBody>
-      </p:sp>
-      <p:sp>
-        <p:nvSpPr>
-          <p:cNvPr id="9" name="Rounded Rectangle 8"/>
-          <p:cNvSpPr/>
-          <p:nvPr/>
-        </p:nvSpPr>
-        <p:spPr>
-          <a:xfrm>
-            <a:off x="4277258" y="1261872"/>
-            <a:ext cx="3637178" cy="2464308"/>
-          </a:xfrm>
-          <a:prstGeom prst="roundRect">
-            <a:avLst>
-              <a:gd name="adj" fmla="val 12000"/>
-            </a:avLst>
-          </a:prstGeom>
-          <a:solidFill>
-            <a:srgbClr val="F2F2F2"/>
-          </a:solidFill>
-          <a:ln>
-            <a:noFill/>
-          </a:ln>
-        </p:spPr>
-        <p:style>
-          <a:lnRef idx="1">
-            <a:schemeClr val="accent1"/>
-          </a:lnRef>
-          <a:fillRef idx="3">
-            <a:schemeClr val="accent1"/>
-          </a:fillRef>
-          <a:effectRef idx="2">
-            <a:schemeClr val="accent1"/>
-          </a:effectRef>
-          <a:fontRef idx="minor">
-            <a:schemeClr val="lt1"/>
-          </a:fontRef>
-        </p:style>
-        <p:txBody>
-          <a:bodyPr rtlCol="0" anchor="ctr"/>
-          <a:lstStyle/>
-          <a:p>
-            <a:pPr algn="ctr"/>
-          </a:p>
-        </p:txBody>
-      </p:sp>
-      <p:sp>
-        <p:nvSpPr>
-          <p:cNvPr id="10" name="Rectangle 9"/>
-          <p:cNvSpPr/>
-          <p:nvPr/>
-        </p:nvSpPr>
-        <p:spPr>
-          <a:xfrm>
-            <a:off x="4277258" y="1261872"/>
-            <a:ext cx="3637178" cy="91440"/>
-          </a:xfrm>
-          <a:prstGeom prst="rect">
-            <a:avLst/>
-          </a:prstGeom>
-          <a:solidFill>
-            <a:srgbClr val="269CCB"/>
-          </a:solidFill>
-          <a:ln>
-            <a:noFill/>
-          </a:ln>
-        </p:spPr>
-        <p:style>
-          <a:lnRef idx="1">
-            <a:schemeClr val="accent1"/>
-          </a:lnRef>
-          <a:fillRef idx="3">
-            <a:schemeClr val="accent1"/>
-          </a:fillRef>
-          <a:effectRef idx="2">
-            <a:schemeClr val="accent1"/>
-          </a:effectRef>
-          <a:fontRef idx="minor">
-            <a:schemeClr val="lt1"/>
-          </a:fontRef>
-        </p:style>
-        <p:txBody>
-          <a:bodyPr rtlCol="0" anchor="ctr"/>
-          <a:lstStyle/>
-          <a:p>
-            <a:pPr algn="ctr"/>
-          </a:p>
-        </p:txBody>
-      </p:sp>
-      <p:sp>
-        <p:nvSpPr>
-          <p:cNvPr id="11" name="TextBox 10"/>
-          <p:cNvSpPr txBox="1"/>
-          <p:nvPr/>
-        </p:nvSpPr>
-        <p:spPr>
-          <a:xfrm>
-            <a:off x="4441850" y="1490472"/>
-            <a:ext cx="3307994" cy="411480"/>
-          </a:xfrm>
-          <a:prstGeom prst="rect">
-            <a:avLst/>
-          </a:prstGeom>
-          <a:noFill/>
-        </p:spPr>
-        <p:txBody>
-          <a:bodyPr wrap="square">
-            <a:spAutoFit/>
-          </a:bodyPr>
-          <a:lstStyle/>
-          <a:p>
-            <a:r>
-              <a:rPr sz="1500" b="1" i="0">
-                <a:solidFill>
-                  <a:srgbClr val="095292"/>
-                </a:solidFill>
-                <a:latin typeface="Calibri"/>
-              </a:rPr>
-              <a:t>Doña Rosa, 74 años</a:t>
-            </a:r>
-          </a:p>
-        </p:txBody>
-      </p:sp>
-      <p:sp>
-        <p:nvSpPr>
-          <p:cNvPr id="12" name="TextBox 11"/>
-          <p:cNvSpPr txBox="1"/>
-          <p:nvPr/>
-        </p:nvSpPr>
-        <p:spPr>
-          <a:xfrm>
-            <a:off x="4441850" y="1947672"/>
-            <a:ext cx="3307994" cy="1595628"/>
-          </a:xfrm>
-          <a:prstGeom prst="rect">
-            <a:avLst/>
-          </a:prstGeom>
-          <a:noFill/>
-        </p:spPr>
-        <p:txBody>
-          <a:bodyPr wrap="square">
-            <a:spAutoFit/>
-          </a:bodyPr>
-          <a:lstStyle/>
-          <a:p>
-            <a:r>
-              <a:rPr sz="1300" b="0" i="0">
+          <a:p>
+            <a:pPr>
+              <a:spcAft>
+                <a:spcPts val="800"/>
+              </a:spcAft>
+            </a:pPr>
+            <a:r>
+              <a:rPr sz="2000" b="0" i="0">
                 <a:solidFill>
                   <a:srgbClr val="333333"/>
                 </a:solidFill>
                 <a:latin typeface="Calibri"/>
               </a:rPr>
-              <a:t>No tiene datos móviles: </a:t>
-            </a:r>
-            <a:r>
-              <a:rPr sz="1300" b="1" i="0">
+              <a:t>–   </a:t>
+            </a:r>
+            <a:r>
+              <a:rPr sz="2000" b="1" i="0">
                 <a:solidFill>
                   <a:srgbClr val="333333"/>
                 </a:solidFill>
                 <a:latin typeface="Calibri"/>
               </a:rPr>
+              <a:t>Doña Rosa, 74 años:</a:t>
+            </a:r>
+            <a:r>
+              <a:rPr sz="2000" b="0" i="0">
+                <a:solidFill>
+                  <a:srgbClr val="333333"/>
+                </a:solidFill>
+                <a:latin typeface="Calibri"/>
+              </a:rPr>
+              <a:t> No tiene datos móviles: </a:t>
+            </a:r>
+            <a:r>
+              <a:rPr sz="2000" b="1" i="0">
+                <a:solidFill>
+                  <a:srgbClr val="333333"/>
+                </a:solidFill>
+                <a:latin typeface="Calibri"/>
+              </a:rPr>
               <a:t>queda fuera</a:t>
             </a:r>
             <a:r>
-              <a:rPr sz="1300" b="0" i="0">
+              <a:rPr sz="2000" b="0" i="0">
                 <a:solidFill>
                   <a:srgbClr val="333333"/>
                 </a:solidFill>
@@ -10855,172 +10962,50 @@
               <a:t> si la fila desaparece (paso 3).</a:t>
             </a:r>
           </a:p>
-        </p:txBody>
-      </p:sp>
-      <p:sp>
-        <p:nvSpPr>
-          <p:cNvPr id="13" name="Rounded Rectangle 12"/>
-          <p:cNvSpPr/>
-          <p:nvPr/>
-        </p:nvSpPr>
-        <p:spPr>
-          <a:xfrm>
-            <a:off x="8097316" y="1261872"/>
-            <a:ext cx="3637178" cy="2464308"/>
-          </a:xfrm>
-          <a:prstGeom prst="roundRect">
-            <a:avLst>
-              <a:gd name="adj" fmla="val 12000"/>
-            </a:avLst>
-          </a:prstGeom>
-          <a:solidFill>
-            <a:srgbClr val="F2F2F2"/>
-          </a:solidFill>
-          <a:ln>
-            <a:noFill/>
-          </a:ln>
-        </p:spPr>
-        <p:style>
-          <a:lnRef idx="1">
-            <a:schemeClr val="accent1"/>
-          </a:lnRef>
-          <a:fillRef idx="3">
-            <a:schemeClr val="accent1"/>
-          </a:fillRef>
-          <a:effectRef idx="2">
-            <a:schemeClr val="accent1"/>
-          </a:effectRef>
-          <a:fontRef idx="minor">
-            <a:schemeClr val="lt1"/>
-          </a:fontRef>
-        </p:style>
-        <p:txBody>
-          <a:bodyPr rtlCol="0" anchor="ctr"/>
-          <a:lstStyle/>
-          <a:p>
-            <a:pPr algn="ctr"/>
-          </a:p>
-        </p:txBody>
-      </p:sp>
-      <p:sp>
-        <p:nvSpPr>
-          <p:cNvPr id="14" name="Rectangle 13"/>
-          <p:cNvSpPr/>
-          <p:nvPr/>
-        </p:nvSpPr>
-        <p:spPr>
-          <a:xfrm>
-            <a:off x="8097316" y="1261872"/>
-            <a:ext cx="3637178" cy="91440"/>
-          </a:xfrm>
-          <a:prstGeom prst="rect">
-            <a:avLst/>
-          </a:prstGeom>
-          <a:solidFill>
-            <a:srgbClr val="FFD000"/>
-          </a:solidFill>
-          <a:ln>
-            <a:noFill/>
-          </a:ln>
-        </p:spPr>
-        <p:style>
-          <a:lnRef idx="1">
-            <a:schemeClr val="accent1"/>
-          </a:lnRef>
-          <a:fillRef idx="3">
-            <a:schemeClr val="accent1"/>
-          </a:fillRef>
-          <a:effectRef idx="2">
-            <a:schemeClr val="accent1"/>
-          </a:effectRef>
-          <a:fontRef idx="minor">
-            <a:schemeClr val="lt1"/>
-          </a:fontRef>
-        </p:style>
-        <p:txBody>
-          <a:bodyPr rtlCol="0" anchor="ctr"/>
-          <a:lstStyle/>
-          <a:p>
-            <a:pPr algn="ctr"/>
-          </a:p>
-        </p:txBody>
-      </p:sp>
-      <p:sp>
-        <p:nvSpPr>
-          <p:cNvPr id="15" name="TextBox 14"/>
-          <p:cNvSpPr txBox="1"/>
-          <p:nvPr/>
-        </p:nvSpPr>
-        <p:spPr>
-          <a:xfrm>
-            <a:off x="8261908" y="1490472"/>
-            <a:ext cx="3307994" cy="411480"/>
-          </a:xfrm>
-          <a:prstGeom prst="rect">
-            <a:avLst/>
-          </a:prstGeom>
-          <a:noFill/>
-        </p:spPr>
-        <p:txBody>
-          <a:bodyPr wrap="square">
-            <a:spAutoFit/>
-          </a:bodyPr>
-          <a:lstStyle/>
-          <a:p>
-            <a:r>
-              <a:rPr sz="1500" b="1" i="0">
-                <a:solidFill>
-                  <a:srgbClr val="095292"/>
-                </a:solidFill>
-                <a:latin typeface="Calibri"/>
-              </a:rPr>
-              <a:t>El vendedor de fichas</a:t>
-            </a:r>
-          </a:p>
-        </p:txBody>
-      </p:sp>
-      <p:sp>
-        <p:nvSpPr>
-          <p:cNvPr id="16" name="TextBox 15"/>
-          <p:cNvSpPr txBox="1"/>
-          <p:nvPr/>
-        </p:nvSpPr>
-        <p:spPr>
-          <a:xfrm>
-            <a:off x="8261908" y="1947672"/>
-            <a:ext cx="3307994" cy="1595628"/>
-          </a:xfrm>
-          <a:prstGeom prst="rect">
-            <a:avLst/>
-          </a:prstGeom>
-          <a:noFill/>
-        </p:spPr>
-        <p:txBody>
-          <a:bodyPr wrap="square">
-            <a:spAutoFit/>
-          </a:bodyPr>
-          <a:lstStyle/>
-          <a:p>
-            <a:r>
-              <a:rPr sz="1300" b="0" i="0">
+          <a:p>
+            <a:pPr>
+              <a:spcAft>
+                <a:spcPts val="800"/>
+              </a:spcAft>
+            </a:pPr>
+            <a:r>
+              <a:rPr sz="2000" b="0" i="0">
                 <a:solidFill>
                   <a:srgbClr val="333333"/>
                 </a:solidFill>
                 <a:latin typeface="Calibri"/>
               </a:rPr>
-              <a:t>La tienda le compraba los talonarios de papel: </a:t>
-            </a:r>
-            <a:r>
-              <a:rPr sz="1300" b="1" i="0">
+              <a:t>–   </a:t>
+            </a:r>
+            <a:r>
+              <a:rPr sz="2000" b="1" i="0">
                 <a:solidFill>
                   <a:srgbClr val="333333"/>
                 </a:solidFill>
                 <a:latin typeface="Calibri"/>
               </a:rPr>
+              <a:t>El vendedor de fichas:</a:t>
+            </a:r>
+            <a:r>
+              <a:rPr sz="2000" b="0" i="0">
+                <a:solidFill>
+                  <a:srgbClr val="333333"/>
+                </a:solidFill>
+                <a:latin typeface="Calibri"/>
+              </a:rPr>
+              <a:t> La tienda le compraba los talonarios de papel: </a:t>
+            </a:r>
+            <a:r>
+              <a:rPr sz="2000" b="1" i="0">
+                <a:solidFill>
+                  <a:srgbClr val="333333"/>
+                </a:solidFill>
+                <a:latin typeface="Calibri"/>
+              </a:rPr>
               <a:t>lo desplaza</a:t>
             </a:r>
             <a:r>
-              <a:rPr sz="1300" b="0" i="0">
+              <a:rPr sz="2000" b="0" i="0">
                 <a:solidFill>
                   <a:srgbClr val="333333"/>
                 </a:solidFill>
@@ -11029,126 +11014,56 @@
               <a:t> (paso 5).</a:t>
             </a:r>
           </a:p>
-        </p:txBody>
-      </p:sp>
-      <p:sp>
-        <p:nvSpPr>
-          <p:cNvPr id="17" name="Rounded Rectangle 16"/>
-          <p:cNvSpPr/>
-          <p:nvPr/>
-        </p:nvSpPr>
-        <p:spPr>
-          <a:xfrm>
-            <a:off x="457200" y="3890772"/>
-            <a:ext cx="3637178" cy="2464308"/>
-          </a:xfrm>
-          <a:prstGeom prst="roundRect">
-            <a:avLst>
-              <a:gd name="adj" fmla="val 12000"/>
-            </a:avLst>
-          </a:prstGeom>
-          <a:solidFill>
-            <a:srgbClr val="F2F2F2"/>
-          </a:solidFill>
-          <a:ln>
-            <a:noFill/>
-          </a:ln>
-        </p:spPr>
-        <p:style>
-          <a:lnRef idx="1">
-            <a:schemeClr val="accent1"/>
-          </a:lnRef>
-          <a:fillRef idx="3">
-            <a:schemeClr val="accent1"/>
-          </a:fillRef>
-          <a:effectRef idx="2">
-            <a:schemeClr val="accent1"/>
-          </a:effectRef>
-          <a:fontRef idx="minor">
-            <a:schemeClr val="lt1"/>
-          </a:fontRef>
-        </p:style>
-        <p:txBody>
-          <a:bodyPr rtlCol="0" anchor="ctr"/>
-          <a:lstStyle/>
-          <a:p>
-            <a:pPr algn="ctr"/>
-          </a:p>
-        </p:txBody>
-      </p:sp>
-      <p:sp>
-        <p:nvSpPr>
-          <p:cNvPr id="18" name="Rectangle 17"/>
-          <p:cNvSpPr/>
-          <p:nvPr/>
-        </p:nvSpPr>
-        <p:spPr>
-          <a:xfrm>
-            <a:off x="457200" y="3890772"/>
-            <a:ext cx="3637178" cy="91440"/>
-          </a:xfrm>
-          <a:prstGeom prst="rect">
-            <a:avLst/>
-          </a:prstGeom>
-          <a:solidFill>
-            <a:srgbClr val="095292"/>
-          </a:solidFill>
-          <a:ln>
-            <a:noFill/>
-          </a:ln>
-        </p:spPr>
-        <p:style>
-          <a:lnRef idx="1">
-            <a:schemeClr val="accent1"/>
-          </a:lnRef>
-          <a:fillRef idx="3">
-            <a:schemeClr val="accent1"/>
-          </a:fillRef>
-          <a:effectRef idx="2">
-            <a:schemeClr val="accent1"/>
-          </a:effectRef>
-          <a:fontRef idx="minor">
-            <a:schemeClr val="lt1"/>
-          </a:fontRef>
-        </p:style>
-        <p:txBody>
-          <a:bodyPr rtlCol="0" anchor="ctr"/>
-          <a:lstStyle/>
-          <a:p>
-            <a:pPr algn="ctr"/>
-          </a:p>
-        </p:txBody>
-      </p:sp>
-      <p:sp>
-        <p:nvSpPr>
-          <p:cNvPr id="19" name="TextBox 18"/>
-          <p:cNvSpPr txBox="1"/>
-          <p:nvPr/>
-        </p:nvSpPr>
-        <p:spPr>
-          <a:xfrm>
-            <a:off x="621792" y="4119372"/>
-            <a:ext cx="3307994" cy="411480"/>
-          </a:xfrm>
-          <a:prstGeom prst="rect">
-            <a:avLst/>
-          </a:prstGeom>
-          <a:noFill/>
-        </p:spPr>
-        <p:txBody>
-          <a:bodyPr wrap="square">
-            <a:spAutoFit/>
-          </a:bodyPr>
-          <a:lstStyle/>
-          <a:p>
-            <a:r>
-              <a:rPr sz="1500" b="1" i="0">
-                <a:solidFill>
-                  <a:srgbClr val="095292"/>
-                </a:solidFill>
-                <a:latin typeface="Calibri"/>
-              </a:rPr>
-              <a:t>El plan de datos</a:t>
+          <a:p>
+            <a:pPr>
+              <a:spcAft>
+                <a:spcPts val="800"/>
+              </a:spcAft>
+            </a:pPr>
+            <a:r>
+              <a:rPr sz="2000" b="0" i="0">
+                <a:solidFill>
+                  <a:srgbClr val="333333"/>
+                </a:solidFill>
+                <a:latin typeface="Calibri"/>
+              </a:rPr>
+              <a:t>–   </a:t>
+            </a:r>
+            <a:r>
+              <a:rPr sz="2000" b="1" i="0">
+                <a:solidFill>
+                  <a:srgbClr val="333333"/>
+                </a:solidFill>
+                <a:latin typeface="Calibri"/>
+              </a:rPr>
+              <a:t>El plan de datos:</a:t>
+            </a:r>
+            <a:r>
+              <a:rPr sz="2000" b="0" i="0">
+                <a:solidFill>
+                  <a:srgbClr val="333333"/>
+                </a:solidFill>
+                <a:latin typeface="Calibri"/>
+              </a:rPr>
+              <a:t> Cada consulta gasta datos que paga el cliente: </a:t>
+            </a:r>
+            <a:r>
+              <a:rPr sz="2000" b="1" i="0">
+                <a:solidFill>
+                  <a:srgbClr val="333333"/>
+                </a:solidFill>
+                <a:latin typeface="Calibri"/>
+              </a:rPr>
+              <a:t>consumo</a:t>
+            </a:r>
+            <a:r>
+              <a:rPr sz="2000" b="0" i="0">
+                <a:solidFill>
+                  <a:srgbClr val="333333"/>
+                </a:solidFill>
+                <a:latin typeface="Calibri"/>
+              </a:rPr>
+              <a:t> (paso 4).</a:t>
             </a:r>
           </a:p>
         </p:txBody>
@@ -11156,58 +11071,6 @@
       <p:sp>
         <p:nvSpPr>
           <p:cNvPr id="20" name="TextBox 19"/>
-          <p:cNvSpPr txBox="1"/>
-          <p:nvPr/>
-        </p:nvSpPr>
-        <p:spPr>
-          <a:xfrm>
-            <a:off x="621792" y="4576572"/>
-            <a:ext cx="3307994" cy="1595628"/>
-          </a:xfrm>
-          <a:prstGeom prst="rect">
-            <a:avLst/>
-          </a:prstGeom>
-          <a:noFill/>
-        </p:spPr>
-        <p:txBody>
-          <a:bodyPr wrap="square">
-            <a:spAutoFit/>
-          </a:bodyPr>
-          <a:lstStyle/>
-          <a:p>
-            <a:r>
-              <a:rPr sz="1300" b="0" i="0">
-                <a:solidFill>
-                  <a:srgbClr val="333333"/>
-                </a:solidFill>
-                <a:latin typeface="Calibri"/>
-              </a:rPr>
-              <a:t>Cada consulta gasta datos que paga el cliente: </a:t>
-            </a:r>
-            <a:r>
-              <a:rPr sz="1300" b="1" i="0">
-                <a:solidFill>
-                  <a:srgbClr val="333333"/>
-                </a:solidFill>
-                <a:latin typeface="Calibri"/>
-              </a:rPr>
-              <a:t>consumo</a:t>
-            </a:r>
-            <a:r>
-              <a:rPr sz="1300" b="0" i="0">
-                <a:solidFill>
-                  <a:srgbClr val="333333"/>
-                </a:solidFill>
-                <a:latin typeface="Calibri"/>
-              </a:rPr>
-              <a:t> (paso 4).</a:t>
-            </a:r>
-          </a:p>
-        </p:txBody>
-      </p:sp>
-      <p:sp>
-        <p:nvSpPr>
-          <p:cNvPr id="21" name="TextBox 20"/>
           <p:cNvSpPr txBox="1"/>
           <p:nvPr/>
         </p:nvSpPr>
@@ -11245,6 +11108,195 @@
   <p:clrMapOvr>
     <a:masterClrMapping/>
   </p:clrMapOvr>
+  <p:timing>
+    <p:tnLst>
+      <p:par>
+        <p:cTn id="1" dur="indefinite" restart="never" nodeType="tmRoot">
+          <p:childTnLst>
+            <p:seq concurrent="1" nextAc="seek">
+              <p:cTn id="2" dur="indefinite" nodeType="mainSeq">
+                <p:childTnLst>
+                  <p:par>
+                    <p:cTn id="3" fill="hold">
+                      <p:stCondLst>
+                        <p:cond delay="indefinite"/>
+                      </p:stCondLst>
+                      <p:childTnLst>
+                        <p:par>
+                          <p:cTn id="4" fill="hold">
+                            <p:stCondLst>
+                              <p:cond delay="0"/>
+                            </p:stCondLst>
+                            <p:childTnLst>
+                              <p:par>
+                                <p:cTn id="5" presetID="10" presetClass="entr" presetSubtype="0" fill="hold" nodeType="clickEffect">
+                                  <p:stCondLst>
+                                    <p:cond delay="0"/>
+                                  </p:stCondLst>
+                                  <p:childTnLst>
+                                    <p:set>
+                                      <p:cBhvr>
+                                        <p:cTn id="6" dur="1" fill="hold">
+                                          <p:stCondLst>
+                                            <p:cond delay="0"/>
+                                          </p:stCondLst>
+                                        </p:cTn>
+                                        <p:tgtEl>
+                                          <p:spTgt spid="7"/>
+                                        </p:tgtEl>
+                                        <p:attrNameLst>
+                                          <p:attrName>style.visibility</p:attrName>
+                                        </p:attrNameLst>
+                                      </p:cBhvr>
+                                      <p:to>
+                                        <p:strVal val="visible"/>
+                                      </p:to>
+                                    </p:set>
+                                    <p:animEffect transition="in" filter="fade">
+                                      <p:cBhvr>
+                                        <p:cTn id="7" dur="450"/>
+                                        <p:tgtEl>
+                                          <p:spTgt spid="7"/>
+                                        </p:tgtEl>
+                                      </p:cBhvr>
+                                    </p:animEffect>
+                                  </p:childTnLst>
+                                </p:cTn>
+                              </p:par>
+                            </p:childTnLst>
+                          </p:cTn>
+                        </p:par>
+                      </p:childTnLst>
+                    </p:cTn>
+                  </p:par>
+                  <p:par>
+                    <p:cTn id="8" fill="hold">
+                      <p:stCondLst>
+                        <p:cond delay="indefinite"/>
+                      </p:stCondLst>
+                      <p:childTnLst>
+                        <p:par>
+                          <p:cTn id="9" fill="hold">
+                            <p:stCondLst>
+                              <p:cond delay="0"/>
+                            </p:stCondLst>
+                            <p:childTnLst>
+                              <p:par>
+                                <p:cTn id="10" presetID="10" presetClass="entr" presetSubtype="0" fill="hold" nodeType="clickEffect">
+                                  <p:stCondLst>
+                                    <p:cond delay="0"/>
+                                  </p:stCondLst>
+                                  <p:childTnLst>
+                                    <p:set>
+                                      <p:cBhvr>
+                                        <p:cTn id="11" dur="1" fill="hold">
+                                          <p:stCondLst>
+                                            <p:cond delay="0"/>
+                                          </p:stCondLst>
+                                        </p:cTn>
+                                        <p:tgtEl>
+                                          <p:spTgt spid="8"/>
+                                        </p:tgtEl>
+                                        <p:attrNameLst>
+                                          <p:attrName>style.visibility</p:attrName>
+                                        </p:attrNameLst>
+                                      </p:cBhvr>
+                                      <p:to>
+                                        <p:strVal val="visible"/>
+                                      </p:to>
+                                    </p:set>
+                                    <p:animEffect transition="in" filter="fade">
+                                      <p:cBhvr>
+                                        <p:cTn id="12" dur="450"/>
+                                        <p:tgtEl>
+                                          <p:spTgt spid="8"/>
+                                        </p:tgtEl>
+                                      </p:cBhvr>
+                                    </p:animEffect>
+                                  </p:childTnLst>
+                                </p:cTn>
+                              </p:par>
+                            </p:childTnLst>
+                          </p:cTn>
+                        </p:par>
+                      </p:childTnLst>
+                    </p:cTn>
+                  </p:par>
+                  <p:par>
+                    <p:cTn id="13" fill="hold">
+                      <p:stCondLst>
+                        <p:cond delay="indefinite"/>
+                      </p:stCondLst>
+                      <p:childTnLst>
+                        <p:par>
+                          <p:cTn id="14" fill="hold">
+                            <p:stCondLst>
+                              <p:cond delay="0"/>
+                            </p:stCondLst>
+                            <p:childTnLst>
+                              <p:par>
+                                <p:cTn id="15" presetID="10" presetClass="entr" presetSubtype="0" fill="hold" nodeType="clickEffect">
+                                  <p:stCondLst>
+                                    <p:cond delay="0"/>
+                                  </p:stCondLst>
+                                  <p:childTnLst>
+                                    <p:set>
+                                      <p:cBhvr>
+                                        <p:cTn id="16" dur="1" fill="hold">
+                                          <p:stCondLst>
+                                            <p:cond delay="0"/>
+                                          </p:stCondLst>
+                                        </p:cTn>
+                                        <p:tgtEl>
+                                          <p:spTgt spid="9"/>
+                                        </p:tgtEl>
+                                        <p:attrNameLst>
+                                          <p:attrName>style.visibility</p:attrName>
+                                        </p:attrNameLst>
+                                      </p:cBhvr>
+                                      <p:to>
+                                        <p:strVal val="visible"/>
+                                      </p:to>
+                                    </p:set>
+                                    <p:animEffect transition="in" filter="fade">
+                                      <p:cBhvr>
+                                        <p:cTn id="17" dur="450"/>
+                                        <p:tgtEl>
+                                          <p:spTgt spid="9"/>
+                                        </p:tgtEl>
+                                      </p:cBhvr>
+                                    </p:animEffect>
+                                  </p:childTnLst>
+                                </p:cTn>
+                              </p:par>
+                            </p:childTnLst>
+                          </p:cTn>
+                        </p:par>
+                      </p:childTnLst>
+                    </p:cTn>
+                  </p:par>
+                </p:childTnLst>
+              </p:cTn>
+              <p:prevCondLst>
+                <p:cond evt="onPrev" delay="0">
+                  <p:tgtEl>
+                    <p:sldTgt/>
+                  </p:tgtEl>
+                </p:cond>
+              </p:prevCondLst>
+              <p:nextCondLst>
+                <p:cond evt="onNext" delay="0">
+                  <p:tgtEl>
+                    <p:sldTgt/>
+                  </p:tgtEl>
+                </p:cond>
+              </p:nextCondLst>
+            </p:seq>
+          </p:childTnLst>
+        </p:cTn>
+      </p:par>
+    </p:tnLst>
+  </p:timing>
 </p:sld>
 </file>
 

--- a/Introduccion a la Ingenieria/Clases/Clase 13 - Evaluacion de impacto social y ambiental/Presentacion.pptx
+++ b/Introduccion a la Ingenieria/Clases/Clase 13 - Evaluacion de impacto social y ambiental/Presentacion.pptx
@@ -7906,118 +7906,14 @@
       </p:sp>
       <p:sp>
         <p:nvSpPr>
-          <p:cNvPr id="5" name="Rounded Rectangle 4"/>
-          <p:cNvSpPr/>
-          <p:nvPr/>
-        </p:nvSpPr>
-        <p:spPr>
-          <a:xfrm>
-            <a:off x="5797149" y="1573813"/>
-            <a:ext cx="6010497" cy="4057845"/>
-          </a:xfrm>
-          <a:prstGeom prst="roundRect">
-            <a:avLst>
-              <a:gd name="adj" fmla="val 4000"/>
-            </a:avLst>
-          </a:prstGeom>
-          <a:solidFill>
-            <a:srgbClr val="E8EEF4"/>
-          </a:solidFill>
-          <a:ln>
-            <a:noFill/>
-          </a:ln>
-        </p:spPr>
-        <p:style>
-          <a:lnRef idx="1">
-            <a:schemeClr val="accent1"/>
-          </a:lnRef>
-          <a:fillRef idx="3">
-            <a:schemeClr val="accent1"/>
-          </a:fillRef>
-          <a:effectRef idx="2">
-            <a:schemeClr val="accent1"/>
-          </a:effectRef>
-          <a:fontRef idx="minor">
-            <a:schemeClr val="lt1"/>
-          </a:fontRef>
-        </p:style>
-        <p:txBody>
-          <a:bodyPr rtlCol="0" anchor="ctr"/>
-          <a:lstStyle/>
-          <a:p>
-            <a:pPr algn="ctr"/>
-          </a:p>
-        </p:txBody>
-      </p:sp>
-      <p:pic>
-        <p:nvPicPr>
-          <p:cNvPr id="6" name="Picture 5" descr="students-learning-laptops-classroom.jpg"/>
-          <p:cNvPicPr>
-            <a:picLocks noChangeAspect="1"/>
-          </p:cNvPicPr>
-          <p:nvPr/>
-        </p:nvPicPr>
-        <p:blipFill>
-          <a:blip r:embed="rId2"/>
-          <a:stretch>
-            <a:fillRect/>
-          </a:stretch>
-        </p:blipFill>
-        <p:spPr>
-          <a:xfrm>
-            <a:off x="5870301" y="1646965"/>
-            <a:ext cx="5864193" cy="3911541"/>
-          </a:xfrm>
-          <a:prstGeom prst="rect">
-            <a:avLst/>
-          </a:prstGeom>
-        </p:spPr>
-      </p:pic>
-      <p:sp>
-        <p:nvSpPr>
-          <p:cNvPr id="7" name="TextBox 6"/>
+          <p:cNvPr id="5" name="TextBox 4"/>
           <p:cNvSpPr txBox="1"/>
           <p:nvPr/>
         </p:nvSpPr>
         <p:spPr>
           <a:xfrm>
-            <a:off x="5870301" y="5961888"/>
-            <a:ext cx="5864193" cy="320040"/>
-          </a:xfrm>
-          <a:prstGeom prst="rect">
-            <a:avLst/>
-          </a:prstGeom>
-          <a:noFill/>
-        </p:spPr>
-        <p:txBody>
-          <a:bodyPr wrap="square">
-            <a:spAutoFit/>
-          </a:bodyPr>
-          <a:lstStyle/>
-          <a:p>
-            <a:pPr algn="ctr"/>
-            <a:r>
-              <a:rPr sz="1100" b="0" i="1">
-                <a:solidFill>
-                  <a:srgbClr val="666666"/>
-                </a:solidFill>
-                <a:latin typeface="Calibri"/>
-              </a:rPr>
-              <a:t>Foto: Mikhail Nilov · Pexels</a:t>
-            </a:r>
-          </a:p>
-        </p:txBody>
-      </p:sp>
-      <p:sp>
-        <p:nvSpPr>
-          <p:cNvPr id="8" name="TextBox 7"/>
-          <p:cNvSpPr txBox="1"/>
-          <p:nvPr/>
-        </p:nvSpPr>
-        <p:spPr>
-          <a:xfrm>
-            <a:off x="457200" y="1353312"/>
-            <a:ext cx="5093061" cy="5047488"/>
+            <a:off x="457200" y="1170432"/>
+            <a:ext cx="11277295" cy="5230368"/>
           </a:xfrm>
           <a:prstGeom prst="rect">
             <a:avLst/>
@@ -8205,7 +8101,7 @@
       </p:sp>
       <p:sp>
         <p:nvSpPr>
-          <p:cNvPr id="9" name="TextBox 8"/>
+          <p:cNvPr id="6" name="TextBox 5"/>
           <p:cNvSpPr txBox="1"/>
           <p:nvPr/>
         </p:nvSpPr>

--- a/Introduccion a la Ingenieria/Clases/Clase 13 - Evaluacion de impacto social y ambiental/Presentacion.pptx
+++ b/Introduccion a la Ingenieria/Clases/Clase 13 - Evaluacion de impacto social y ambiental/Presentacion.pptx
@@ -10698,9 +10698,33 @@
           </a:prstGeom>
         </p:spPr>
       </p:pic>
-      <p:sp>
-        <p:nvSpPr>
-          <p:cNvPr id="18" name="TextBox 17"/>
+      <p:pic>
+        <p:nvPicPr>
+          <p:cNvPr id="10" name="Picture 9" descr="afectados-paso5.png"/>
+          <p:cNvPicPr>
+            <a:picLocks noChangeAspect="1"/>
+          </p:cNvPicPr>
+          <p:nvPr/>
+        </p:nvPicPr>
+        <p:blipFill>
+          <a:blip r:embed="rId6"/>
+          <a:stretch>
+            <a:fillRect/>
+          </a:stretch>
+        </p:blipFill>
+        <p:spPr>
+          <a:xfrm>
+            <a:off x="5876318" y="1261872"/>
+            <a:ext cx="5852160" cy="4681728"/>
+          </a:xfrm>
+          <a:prstGeom prst="rect">
+            <a:avLst/>
+          </a:prstGeom>
+        </p:spPr>
+      </p:pic>
+      <p:sp>
+        <p:nvSpPr>
+          <p:cNvPr id="23" name="TextBox 22"/>
           <p:cNvSpPr txBox="1"/>
           <p:nvPr/>
         </p:nvSpPr>
@@ -10735,7 +10759,7 @@
       </p:sp>
       <p:sp>
         <p:nvSpPr>
-          <p:cNvPr id="19" name="TextBox 18"/>
+          <p:cNvPr id="24" name="TextBox 23"/>
           <p:cNvSpPr txBox="1"/>
           <p:nvPr/>
         </p:nvSpPr>
@@ -10966,7 +10990,7 @@
       </p:sp>
       <p:sp>
         <p:nvSpPr>
-          <p:cNvPr id="20" name="TextBox 19"/>
+          <p:cNvPr id="25" name="TextBox 24"/>
           <p:cNvSpPr txBox="1"/>
           <p:nvPr/>
         </p:nvSpPr>
@@ -11159,6 +11183,59 @@
                                         <p:cTn id="17" dur="450"/>
                                         <p:tgtEl>
                                           <p:spTgt spid="9"/>
+                                        </p:tgtEl>
+                                      </p:cBhvr>
+                                    </p:animEffect>
+                                  </p:childTnLst>
+                                </p:cTn>
+                              </p:par>
+                            </p:childTnLst>
+                          </p:cTn>
+                        </p:par>
+                      </p:childTnLst>
+                    </p:cTn>
+                  </p:par>
+                  <p:par>
+                    <p:cTn id="18" fill="hold">
+                      <p:stCondLst>
+                        <p:cond delay="indefinite"/>
+                      </p:stCondLst>
+                      <p:childTnLst>
+                        <p:par>
+                          <p:cTn id="19" fill="hold">
+                            <p:stCondLst>
+                              <p:cond delay="0"/>
+                            </p:stCondLst>
+                            <p:childTnLst>
+                              <p:par>
+                                <p:cTn id="20" presetID="10" presetClass="entr" presetSubtype="0" fill="hold" nodeType="clickEffect">
+                                  <p:stCondLst>
+                                    <p:cond delay="0"/>
+                                  </p:stCondLst>
+                                  <p:childTnLst>
+                                    <p:set>
+                                      <p:cBhvr>
+                                        <p:cTn id="21" dur="1" fill="hold">
+                                          <p:stCondLst>
+                                            <p:cond delay="0"/>
+                                          </p:stCondLst>
+                                        </p:cTn>
+                                        <p:tgtEl>
+                                          <p:spTgt spid="10"/>
+                                        </p:tgtEl>
+                                        <p:attrNameLst>
+                                          <p:attrName>style.visibility</p:attrName>
+                                        </p:attrNameLst>
+                                      </p:cBhvr>
+                                      <p:to>
+                                        <p:strVal val="visible"/>
+                                      </p:to>
+                                    </p:set>
+                                    <p:animEffect transition="in" filter="fade">
+                                      <p:cBhvr>
+                                        <p:cTn id="22" dur="450"/>
+                                        <p:tgtEl>
+                                          <p:spTgt spid="10"/>
                                         </p:tgtEl>
                                       </p:cBhvr>
                                     </p:animEffect>

--- a/Introduccion a la Ingenieria/Clases/Clase 13 - Evaluacion de impacto social y ambiental/Presentacion.pptx
+++ b/Introduccion a la Ingenieria/Clases/Clase 13 - Evaluacion de impacto social y ambiental/Presentacion.pptx
@@ -678,7 +678,7 @@
           <a:p/>
           <a:p>
             <a:r>
-              <a:t>Operativamente, use la apertura para verificar el insumo: pida que cada equipo escriba en el muro un afectado que no sea usuario. Los equipos que traigan el listado de la sesión 3 lo van a hacer en treinta segundos; los que no, van a escribir «los usuarios». Ahí ya sabe con quién tiene que sentarse en las salas de grupo.</a:t>
+              <a:t>En la práctica, use la apertura para verificar el insumo: pida que cada equipo escriba en el muro un afectado que no sea usuario. Los equipos que traigan el listado de la sesión 3 lo van a hacer en treinta segundos; los que no, van a escribir «los usuarios». Ahí ya sabe con quién tiene que sentarse en las salas de grupo.</a:t>
             </a:r>
           </a:p>
         </p:txBody>
@@ -878,7 +878,7 @@
           <a:p/>
           <a:p>
             <a:r>
-              <a:t>Paso 5: preguntar a quién desplaza. Si la solución reemplaza algo, alguien hacía ese algo. Aquí conviene ser equilibrado y no moralizar: no siempre es malo ni siempre es evitable —la ingeniería lleva dos siglos automatizando trabajo—, pero omitirlo del análisis sí es un error técnico.</a:t>
+              <a:t>Paso 5: preguntar a quién desplaza. Si la solución reemplaza algo, alguien hacía ese algo. Aquí conviene ser equilibrado y no sermonear: no siempre es malo ni siempre es evitable —la ingeniería lleva dos siglos automatizando trabajo—, pero omitirlo del análisis sí es un error técnico.</a:t>
             </a:r>
           </a:p>
         </p:txBody>
@@ -1136,7 +1136,7 @@
           <a:lstStyle/>
           <a:p>
             <a:r>
-              <a:t>DEL ADJETIVO AL INDICADOR, Y LAS TRES HONESTIDADES</a:t>
+              <a:t>DEL ADJETIVO AL INDICADOR, Y LAS TRES VERDADES</a:t>
             </a:r>
           </a:p>
           <a:p/>
@@ -1154,7 +1154,7 @@
           <a:p/>
           <a:p>
             <a:r>
-              <a:t>De las tres honestidades, la primera es la que hay que repetir hasta que se instale: «no genera ningún impacto negativo» es la frase que más credibilidad quita en un informe de ingeniería. Toda solución tiene costos. Un equipo que no encuentra ninguno no buscó.</a:t>
+              <a:t>De las tres verdades, la primera es la que hay que repetir hasta que se instale: «no genera ningún impacto negativo» es la frase que más credibilidad quita en un informe de ingeniería. Toda solución tiene costos. Un equipo que no encuentra ninguno no buscó.</a:t>
             </a:r>
           </a:p>
           <a:p/>
@@ -1236,7 +1236,7 @@
           <a:lstStyle/>
           <a:p>
             <a:r>
-              <a:t>DEL ADJETIVO AL INDICADOR, Y LAS TRES HONESTIDADES</a:t>
+              <a:t>DEL ADJETIVO AL INDICADOR, Y LAS TRES VERDADES</a:t>
             </a:r>
           </a:p>
           <a:p/>
@@ -1254,7 +1254,7 @@
           <a:p/>
           <a:p>
             <a:r>
-              <a:t>De las tres honestidades, la primera es la que hay que repetir hasta que se instale: «no genera ningún impacto negativo» es la frase que más credibilidad quita en un informe de ingeniería. Toda solución tiene costos. Un equipo que no encuentra ninguno no buscó.</a:t>
+              <a:t>De las tres verdades, la primera es la que hay que repetir hasta que se instale: «no genera ningún impacto negativo» es la frase que más credibilidad quita en un informe de ingeniería. Toda solución tiene costos. Un equipo que no encuentra ninguno no buscó.</a:t>
             </a:r>
           </a:p>
           <a:p/>
@@ -6148,7 +6148,7 @@
                 </a:solidFill>
                 <a:latin typeface="Calibri"/>
               </a:rPr>
-              <a:t>Tres honestidades sobre el impacto</a:t>
+              <a:t>Tres verdades sobre el impacto</a:t>
             </a:r>
           </a:p>
         </p:txBody>
